--- a/docs/test/stress/e2e-outputs/development_basic_pr04.pptx
+++ b/docs/test/stress/e2e-outputs/development_basic_pr04.pptx
@@ -1658,7 +1658,7 @@
     <p:bg>
       <p:bgPr>
         <a:solidFill>
-          <a:srgbClr val="0F172A"/>
+          <a:srgbClr val="10161F"/>
         </a:solidFill>
       </p:bgPr>
     </p:bg>
@@ -1753,7 +1753,7 @@
           <a:noFill/>
           <a:ln w="10160">
             <a:solidFill>
-              <a:srgbClr val="6B8E00"/>
+              <a:srgbClr val="B98A2E"/>
             </a:solidFill>
             <a:prstDash val="solid"/>
           </a:ln>
@@ -1767,14 +1767,14 @@
         </p:nvSpPr>
         <p:spPr>
           <a:xfrm>
-            <a:off x="7772400" y="0"/>
-            <a:ext cx="4419295" cy="6858000"/>
+            <a:off x="8275320" y="0"/>
+            <a:ext cx="1417320" cy="4041648"/>
           </a:xfrm>
           <a:prstGeom prst="rect">
             <a:avLst/>
           </a:prstGeom>
           <a:solidFill>
-            <a:srgbClr val="6B8E00"/>
+            <a:srgbClr val="1A2030"/>
           </a:solidFill>
           <a:ln/>
         </p:spPr>
@@ -1786,24 +1786,42 @@
           <p:nvPr/>
         </p:nvSpPr>
         <p:spPr>
-          <a:xfrm rot="120000">
-            <a:off x="8412480" y="548640"/>
-            <a:ext cx="3291840" cy="5760720"/>
+          <a:xfrm>
+            <a:off x="9784080" y="868680"/>
+            <a:ext cx="1143000" cy="3172968"/>
           </a:xfrm>
           <a:prstGeom prst="rect">
             <a:avLst/>
           </a:prstGeom>
           <a:solidFill>
-            <a:srgbClr val="0F172A">
-              <a:alpha val="12000"/>
-            </a:srgbClr>
+            <a:srgbClr val="161D2B"/>
           </a:solidFill>
           <a:ln/>
         </p:spPr>
       </p:sp>
       <p:sp>
         <p:nvSpPr>
-          <p:cNvPr id="8" name="Text 6"/>
+          <p:cNvPr id="8" name="Shape 6"/>
+          <p:cNvSpPr/>
+          <p:nvPr/>
+        </p:nvSpPr>
+        <p:spPr>
+          <a:xfrm>
+            <a:off x="11018520" y="1691640"/>
+            <a:ext cx="1170432" cy="2350008"/>
+          </a:xfrm>
+          <a:prstGeom prst="rect">
+            <a:avLst/>
+          </a:prstGeom>
+          <a:solidFill>
+            <a:srgbClr val="2E2718"/>
+          </a:solidFill>
+          <a:ln/>
+        </p:spPr>
+      </p:sp>
+      <p:sp>
+        <p:nvSpPr>
+          <p:cNvPr id="9" name="Text 7"/>
           <p:cNvSpPr/>
           <p:nvPr/>
         </p:nvSpPr>
@@ -1842,7 +1860,7 @@
             <a:r>
               <a:rPr lang="en-US" sz="1500" b="1" dirty="0">
                 <a:solidFill>
-                  <a:srgbClr val="6B8E00"/>
+                  <a:srgbClr val="B98A2E"/>
                 </a:solidFill>
                 <a:latin typeface="Arial" pitchFamily="34" charset="0"/>
                 <a:ea typeface="Arial" pitchFamily="34" charset="-122"/>
@@ -1856,115 +1874,76 @@
       </p:sp>
       <p:sp>
         <p:nvSpPr>
-          <p:cNvPr id="9" name="Text 7"/>
-          <p:cNvSpPr/>
-          <p:nvPr/>
-        </p:nvSpPr>
-        <p:spPr>
-          <a:xfrm>
-            <a:off x="8229600" y="5303520"/>
-            <a:ext cx="3474720" cy="365760"/>
-          </a:xfrm>
-          <a:prstGeom prst="rect">
-            <a:avLst/>
-          </a:prstGeom>
-          <a:noFill/>
-          <a:ln/>
-        </p:spPr>
-        <p:txBody>
-          <a:bodyPr wrap="square" lIns="0" tIns="0" rIns="0" bIns="0" rtlCol="0" anchor="ctr"/>
-          <a:lstStyle/>
-          <a:p>
-            <a:pPr algn="ctr" indent="0" marL="0">
-              <a:buNone/>
-            </a:pPr>
-            <a:r>
-              <a:rPr lang="en-US" sz="1000" dirty="0">
-                <a:solidFill>
-                  <a:srgbClr val="0F172A"/>
+          <p:cNvPr id="10" name="Text 8"/>
+          <p:cNvSpPr/>
+          <p:nvPr/>
+        </p:nvSpPr>
+        <p:spPr>
+          <a:xfrm>
+            <a:off x="566928" y="2029968"/>
+            <a:ext cx="7315200" cy="274320"/>
+          </a:xfrm>
+          <a:prstGeom prst="rect">
+            <a:avLst/>
+          </a:prstGeom>
+          <a:noFill/>
+          <a:ln/>
+        </p:spPr>
+        <p:txBody>
+          <a:bodyPr wrap="square" lIns="0" tIns="0" rIns="0" bIns="0" rtlCol="0" anchor="ctr"/>
+          <a:lstStyle/>
+          <a:p>
+            <a:pPr algn="l" indent="0" marL="0">
+              <a:buNone/>
+            </a:pPr>
+            <a:r>
+              <a:rPr lang="en-US" sz="1000" b="1" spc="250" kern="0" dirty="0">
+                <a:solidFill>
+                  <a:srgbClr val="B98A2E"/>
+                </a:solidFill>
+                <a:latin typeface="Arial" pitchFamily="34" charset="0"/>
+                <a:ea typeface="Arial" pitchFamily="34" charset="-122"/>
+                <a:cs typeface="Arial" pitchFamily="34" charset="-120"/>
+              </a:rPr>
+              <a:t>BASIC IM</a:t>
+            </a:r>
+            <a:endParaRPr lang="en-US" sz="1000" dirty="0"/>
+          </a:p>
+        </p:txBody>
+      </p:sp>
+      <p:sp>
+        <p:nvSpPr>
+          <p:cNvPr id="11" name="Text 9"/>
+          <p:cNvSpPr/>
+          <p:nvPr/>
+        </p:nvSpPr>
+        <p:spPr>
+          <a:xfrm>
+            <a:off x="566928" y="2304288"/>
+            <a:ext cx="7315200" cy="731520"/>
+          </a:xfrm>
+          <a:prstGeom prst="rect">
+            <a:avLst/>
+          </a:prstGeom>
+          <a:noFill/>
+          <a:ln/>
+        </p:spPr>
+        <p:txBody>
+          <a:bodyPr wrap="square" lIns="0" tIns="0" rIns="0" bIns="0" rtlCol="0" anchor="ctr"/>
+          <a:lstStyle/>
+          <a:p>
+            <a:pPr algn="l" indent="0" marL="0">
+              <a:buNone/>
+            </a:pPr>
+            <a:r>
+              <a:rPr lang="en-US" sz="4000" b="1" dirty="0">
+                <a:solidFill>
+                  <a:srgbClr val="FFFFFF"/>
                 </a:solidFill>
                 <a:latin typeface="Pretendard" pitchFamily="34" charset="0"/>
                 <a:ea typeface="Pretendard" pitchFamily="34" charset="-122"/>
                 <a:cs typeface="Pretendard" pitchFamily="34" charset="-120"/>
               </a:rPr>
-              <a:t>상업용 부동산 투자 플랫폼</a:t>
-            </a:r>
-            <a:endParaRPr lang="en-US" sz="1000" dirty="0"/>
-          </a:p>
-        </p:txBody>
-      </p:sp>
-      <p:sp>
-        <p:nvSpPr>
-          <p:cNvPr id="10" name="Text 8"/>
-          <p:cNvSpPr/>
-          <p:nvPr/>
-        </p:nvSpPr>
-        <p:spPr>
-          <a:xfrm>
-            <a:off x="566928" y="2029968"/>
-            <a:ext cx="7315200" cy="274320"/>
-          </a:xfrm>
-          <a:prstGeom prst="rect">
-            <a:avLst/>
-          </a:prstGeom>
-          <a:noFill/>
-          <a:ln/>
-        </p:spPr>
-        <p:txBody>
-          <a:bodyPr wrap="square" lIns="0" tIns="0" rIns="0" bIns="0" rtlCol="0" anchor="ctr"/>
-          <a:lstStyle/>
-          <a:p>
-            <a:pPr algn="l" indent="0" marL="0">
-              <a:buNone/>
-            </a:pPr>
-            <a:r>
-              <a:rPr lang="en-US" sz="1000" b="1" spc="250" kern="0" dirty="0">
-                <a:solidFill>
-                  <a:srgbClr val="6B8E00"/>
-                </a:solidFill>
-                <a:latin typeface="Arial" pitchFamily="34" charset="0"/>
-                <a:ea typeface="Arial" pitchFamily="34" charset="-122"/>
-                <a:cs typeface="Arial" pitchFamily="34" charset="-120"/>
-              </a:rPr>
-              <a:t>BASIC IM</a:t>
-            </a:r>
-            <a:endParaRPr lang="en-US" sz="1000" dirty="0"/>
-          </a:p>
-        </p:txBody>
-      </p:sp>
-      <p:sp>
-        <p:nvSpPr>
-          <p:cNvPr id="11" name="Text 9"/>
-          <p:cNvSpPr/>
-          <p:nvPr/>
-        </p:nvSpPr>
-        <p:spPr>
-          <a:xfrm>
-            <a:off x="566928" y="2304288"/>
-            <a:ext cx="7315200" cy="731520"/>
-          </a:xfrm>
-          <a:prstGeom prst="rect">
-            <a:avLst/>
-          </a:prstGeom>
-          <a:noFill/>
-          <a:ln/>
-        </p:spPr>
-        <p:txBody>
-          <a:bodyPr wrap="square" lIns="0" tIns="0" rIns="0" bIns="0" rtlCol="0" anchor="ctr"/>
-          <a:lstStyle/>
-          <a:p>
-            <a:pPr algn="l" indent="0" marL="0">
-              <a:buNone/>
-            </a:pPr>
-            <a:r>
-              <a:rPr lang="en-US" sz="4000" b="1" dirty="0">
-                <a:solidFill>
-                  <a:srgbClr val="FFFFFF"/>
-                </a:solidFill>
-                <a:latin typeface="Pretendard" pitchFamily="34" charset="0"/>
-                <a:ea typeface="Pretendard" pitchFamily="34" charset="-122"/>
-                <a:cs typeface="Pretendard" pitchFamily="34" charset="-120"/>
-              </a:rPr>
               <a:t>development 포스처 테스트 문서</a:t>
             </a:r>
             <a:endParaRPr lang="en-US" sz="4000" dirty="0"/>
@@ -1998,7 +1977,7 @@
             <a:r>
               <a:rPr lang="en-US" sz="1400" dirty="0">
                 <a:solidFill>
-                  <a:srgbClr val="F1F5F9"/>
+                  <a:srgbClr val="E2E8F0"/>
                 </a:solidFill>
                 <a:latin typeface="Pretendard" pitchFamily="34" charset="0"/>
                 <a:ea typeface="Pretendard" pitchFamily="34" charset="-122"/>
@@ -2027,7 +2006,7 @@
             </a:avLst>
           </a:prstGeom>
           <a:solidFill>
-            <a:srgbClr val="334155"/>
+            <a:srgbClr val="2D3748"/>
           </a:solidFill>
           <a:ln/>
         </p:spPr>
@@ -2088,7 +2067,7 @@
             </a:avLst>
           </a:prstGeom>
           <a:solidFill>
-            <a:srgbClr val="334155"/>
+            <a:srgbClr val="2D3748"/>
           </a:solidFill>
           <a:ln/>
         </p:spPr>
@@ -2149,11 +2128,11 @@
             </a:avLst>
           </a:prstGeom>
           <a:solidFill>
-            <a:srgbClr val="4F6A00"/>
+            <a:srgbClr val="977024"/>
           </a:solidFill>
           <a:ln w="12700">
             <a:solidFill>
-              <a:srgbClr val="6B8E00"/>
+              <a:srgbClr val="B98A2E"/>
             </a:solidFill>
             <a:prstDash val="solid"/>
           </a:ln>
@@ -2186,7 +2165,7 @@
             <a:r>
               <a:rPr lang="en-US" sz="2200" b="1" dirty="0">
                 <a:solidFill>
-                  <a:srgbClr val="E8F5CC"/>
+                  <a:srgbClr val="F3EBDA"/>
                 </a:solidFill>
                 <a:latin typeface="Pretendard" pitchFamily="34" charset="0"/>
                 <a:ea typeface="Pretendard" pitchFamily="34" charset="-122"/>
@@ -2225,7 +2204,7 @@
             <a:r>
               <a:rPr lang="en-US" sz="950" dirty="0">
                 <a:solidFill>
-                  <a:srgbClr val="64748B"/>
+                  <a:srgbClr val="718096"/>
                 </a:solidFill>
                 <a:latin typeface="Pretendard" pitchFamily="34" charset="0"/>
                 <a:ea typeface="Pretendard" pitchFamily="34" charset="-122"/>
@@ -2264,7 +2243,7 @@
             <a:r>
               <a:rPr lang="en-US" sz="850" dirty="0">
                 <a:solidFill>
-                  <a:srgbClr val="64748B"/>
+                  <a:srgbClr val="718096"/>
                 </a:solidFill>
                 <a:latin typeface="Pretendard" pitchFamily="34" charset="0"/>
                 <a:ea typeface="Pretendard" pitchFamily="34" charset="-122"/>
@@ -2284,59 +2263,75 @@
         </p:nvSpPr>
         <p:spPr>
           <a:xfrm>
-            <a:off x="566928" y="6419088"/>
-            <a:ext cx="11057839" cy="201168"/>
-          </a:xfrm>
-          <a:prstGeom prst="rect">
-            <a:avLst/>
-          </a:prstGeom>
-          <a:noFill/>
-          <a:ln/>
-        </p:spPr>
-        <p:txBody>
-          <a:bodyPr wrap="square" lIns="0" tIns="0" rIns="0" bIns="0" rtlCol="0" anchor="ctr"/>
-          <a:lstStyle/>
-          <a:p>
-            <a:pPr algn="ctr" indent="0" marL="0">
-              <a:buNone/>
-            </a:pPr>
-            <a:r>
-              <a:rPr lang="en-US" sz="750" dirty="0">
-                <a:solidFill>
-                  <a:srgbClr val="64748B"/>
+            <a:off x="566928" y="6382512"/>
+            <a:ext cx="7315200" cy="219456"/>
+          </a:xfrm>
+          <a:prstGeom prst="rect">
+            <a:avLst/>
+          </a:prstGeom>
+          <a:noFill/>
+          <a:ln/>
+        </p:spPr>
+        <p:txBody>
+          <a:bodyPr wrap="square" lIns="0" tIns="0" rIns="0" bIns="0" rtlCol="0" anchor="ctr"/>
+          <a:lstStyle/>
+          <a:p>
+            <a:pPr indent="0" marL="0">
+              <a:buNone/>
+            </a:pPr>
+            <a:r>
+              <a:rPr lang="en-US" sz="800" dirty="0">
+                <a:solidFill>
+                  <a:srgbClr val="718096"/>
                 </a:solidFill>
                 <a:latin typeface="Pretendard" pitchFamily="34" charset="0"/>
                 <a:ea typeface="Pretendard" pitchFamily="34" charset="-122"/>
                 <a:cs typeface="Pretendard" pitchFamily="34" charset="-120"/>
               </a:rPr>
-              <a:t>크리딜  ·    ·  1</a:t>
-            </a:r>
-            <a:endParaRPr lang="en-US" sz="750" dirty="0"/>
-          </a:p>
-        </p:txBody>
-      </p:sp>
-      <p:sp>
-        <p:nvSpPr>
-          <p:cNvPr id="22" name="Shape 20"/>
-          <p:cNvSpPr/>
-          <p:nvPr/>
-        </p:nvSpPr>
-        <p:spPr>
-          <a:xfrm>
-            <a:off x="4437172" y="6382512"/>
-            <a:ext cx="3317352" cy="0"/>
-          </a:xfrm>
-          <a:prstGeom prst="line">
-            <a:avLst/>
-          </a:prstGeom>
-          <a:noFill/>
-          <a:ln w="6350">
-            <a:solidFill>
-              <a:srgbClr val="6B8E00"/>
-            </a:solidFill>
-            <a:prstDash val="solid"/>
-          </a:ln>
-        </p:spPr>
+              <a:t>크리딜   |   </a:t>
+            </a:r>
+            <a:endParaRPr lang="en-US" sz="800" dirty="0"/>
+          </a:p>
+        </p:txBody>
+      </p:sp>
+      <p:sp>
+        <p:nvSpPr>
+          <p:cNvPr id="22" name="Text 20"/>
+          <p:cNvSpPr/>
+          <p:nvPr/>
+        </p:nvSpPr>
+        <p:spPr>
+          <a:xfrm>
+            <a:off x="10710367" y="6382512"/>
+            <a:ext cx="914400" cy="219456"/>
+          </a:xfrm>
+          <a:prstGeom prst="rect">
+            <a:avLst/>
+          </a:prstGeom>
+          <a:noFill/>
+          <a:ln/>
+        </p:spPr>
+        <p:txBody>
+          <a:bodyPr wrap="square" lIns="0" tIns="0" rIns="0" bIns="0" rtlCol="0" anchor="ctr"/>
+          <a:lstStyle/>
+          <a:p>
+            <a:pPr algn="r" indent="0" marL="0">
+              <a:buNone/>
+            </a:pPr>
+            <a:r>
+              <a:rPr lang="en-US" sz="900" b="1" dirty="0">
+                <a:solidFill>
+                  <a:srgbClr val="B98A2E"/>
+                </a:solidFill>
+                <a:latin typeface="Arial" pitchFamily="34" charset="0"/>
+                <a:ea typeface="Arial" pitchFamily="34" charset="-122"/>
+                <a:cs typeface="Arial" pitchFamily="34" charset="-120"/>
+              </a:rPr>
+              <a:t>1</a:t>
+            </a:r>
+            <a:endParaRPr lang="en-US" sz="900" dirty="0"/>
+          </a:p>
+        </p:txBody>
       </p:sp>
     </p:spTree>
   </p:cSld>
@@ -2352,7 +2347,7 @@
     <p:bg>
       <p:bgPr>
         <a:solidFill>
-          <a:srgbClr val="0F172A"/>
+          <a:srgbClr val="10161F"/>
         </a:solidFill>
       </p:bgPr>
     </p:bg>
@@ -2378,14 +2373,14 @@
         </p:nvSpPr>
         <p:spPr>
           <a:xfrm>
-            <a:off x="566928" y="384048"/>
-            <a:ext cx="45720" cy="566928"/>
-          </a:xfrm>
-          <a:prstGeom prst="rect">
+            <a:off x="566928" y="457200"/>
+            <a:ext cx="384048" cy="384048"/>
+          </a:xfrm>
+          <a:prstGeom prst="ellipse">
             <a:avLst/>
           </a:prstGeom>
           <a:solidFill>
-            <a:srgbClr val="6B8E00"/>
+            <a:srgbClr val="B98A2E"/>
           </a:solidFill>
           <a:ln/>
         </p:spPr>
@@ -2398,32 +2393,71 @@
         </p:nvSpPr>
         <p:spPr>
           <a:xfrm>
-            <a:off x="749808" y="384048"/>
-            <a:ext cx="10874959" cy="182880"/>
-          </a:xfrm>
-          <a:prstGeom prst="rect">
-            <a:avLst/>
-          </a:prstGeom>
-          <a:noFill/>
-          <a:ln/>
-        </p:spPr>
-        <p:txBody>
-          <a:bodyPr wrap="square" lIns="0" tIns="0" rIns="0" bIns="0" rtlCol="0" anchor="ctr"/>
-          <a:lstStyle/>
-          <a:p>
-            <a:pPr indent="0" marL="0">
-              <a:buNone/>
-            </a:pPr>
-            <a:r>
-              <a:rPr lang="en-US" sz="950" b="1" spc="200" kern="0" dirty="0">
-                <a:solidFill>
-                  <a:srgbClr val="6B8E00"/>
+            <a:off x="566928" y="457200"/>
+            <a:ext cx="384048" cy="384048"/>
+          </a:xfrm>
+          <a:prstGeom prst="rect">
+            <a:avLst/>
+          </a:prstGeom>
+          <a:noFill/>
+          <a:ln/>
+        </p:spPr>
+        <p:txBody>
+          <a:bodyPr wrap="square" lIns="0" tIns="0" rIns="0" bIns="0" rtlCol="0" anchor="ctr"/>
+          <a:lstStyle/>
+          <a:p>
+            <a:pPr algn="ctr" indent="0" marL="0">
+              <a:buNone/>
+            </a:pPr>
+            <a:r>
+              <a:rPr lang="en-US" sz="1300" b="1" dirty="0">
+                <a:solidFill>
+                  <a:srgbClr val="FFFFFF"/>
                 </a:solidFill>
                 <a:latin typeface="Arial" pitchFamily="34" charset="0"/>
                 <a:ea typeface="Arial" pitchFamily="34" charset="-122"/>
                 <a:cs typeface="Arial" pitchFamily="34" charset="-120"/>
               </a:rPr>
-              <a:t>10  Disclaimer</a:t>
+              <a:t>10</a:t>
+            </a:r>
+            <a:endParaRPr lang="en-US" sz="1300" dirty="0"/>
+          </a:p>
+        </p:txBody>
+      </p:sp>
+      <p:sp>
+        <p:nvSpPr>
+          <p:cNvPr id="4" name="Text 2"/>
+          <p:cNvSpPr/>
+          <p:nvPr/>
+        </p:nvSpPr>
+        <p:spPr>
+          <a:xfrm>
+            <a:off x="1133856" y="457200"/>
+            <a:ext cx="10490911" cy="182880"/>
+          </a:xfrm>
+          <a:prstGeom prst="rect">
+            <a:avLst/>
+          </a:prstGeom>
+          <a:noFill/>
+          <a:ln/>
+        </p:spPr>
+        <p:txBody>
+          <a:bodyPr wrap="square" lIns="0" tIns="0" rIns="0" bIns="0" rtlCol="0" anchor="ctr"/>
+          <a:lstStyle/>
+          <a:p>
+            <a:pPr indent="0" marL="0">
+              <a:buNone/>
+            </a:pPr>
+            <a:r>
+              <a:rPr lang="en-US" sz="950" b="1" spc="200" kern="0" dirty="0">
+                <a:solidFill>
+                  <a:srgbClr val="B98A2E"/>
+                </a:solidFill>
+                <a:latin typeface="Arial" pitchFamily="34" charset="0"/>
+                <a:ea typeface="Arial" pitchFamily="34" charset="-122"/>
+                <a:cs typeface="Arial" pitchFamily="34" charset="-120"/>
+              </a:rPr>
+              <a:t>Disclaimer</a:t>
             </a:r>
             <a:endParaRPr lang="en-US" sz="950" dirty="0"/>
           </a:p>
@@ -2431,14 +2465,14 @@
       </p:sp>
       <p:sp>
         <p:nvSpPr>
-          <p:cNvPr id="4" name="Text 2"/>
-          <p:cNvSpPr/>
-          <p:nvPr/>
-        </p:nvSpPr>
-        <p:spPr>
-          <a:xfrm>
-            <a:off x="749808" y="566928"/>
-            <a:ext cx="10874959" cy="384048"/>
+          <p:cNvPr id="5" name="Text 3"/>
+          <p:cNvSpPr/>
+          <p:nvPr/>
+        </p:nvSpPr>
+        <p:spPr>
+          <a:xfrm>
+            <a:off x="1133856" y="658368"/>
+            <a:ext cx="10490911" cy="420624"/>
           </a:xfrm>
           <a:prstGeom prst="rect">
             <a:avLst/>
@@ -2454,7 +2488,7 @@
               <a:buNone/>
             </a:pPr>
             <a:r>
-              <a:rPr lang="en-US" sz="2200" b="1" dirty="0">
+              <a:rPr lang="en-US" sz="2400" b="1" dirty="0">
                 <a:solidFill>
                   <a:srgbClr val="FFFFFF"/>
                 </a:solidFill>
@@ -2464,20 +2498,101 @@
               </a:rPr>
               <a:t>표기 기준 및 면책</a:t>
             </a:r>
-            <a:endParaRPr lang="en-US" sz="2200" dirty="0"/>
-          </a:p>
-        </p:txBody>
-      </p:sp>
-      <p:sp>
-        <p:nvSpPr>
-          <p:cNvPr id="5" name="Text 3"/>
-          <p:cNvSpPr/>
-          <p:nvPr/>
-        </p:nvSpPr>
-        <p:spPr>
-          <a:xfrm>
-            <a:off x="566928" y="1517904"/>
-            <a:ext cx="5486400" cy="237744"/>
+            <a:endParaRPr lang="en-US" sz="2400" dirty="0"/>
+          </a:p>
+        </p:txBody>
+      </p:sp>
+      <p:sp>
+        <p:nvSpPr>
+          <p:cNvPr id="6" name="Shape 4"/>
+          <p:cNvSpPr/>
+          <p:nvPr/>
+        </p:nvSpPr>
+        <p:spPr>
+          <a:xfrm>
+            <a:off x="566928" y="1463040"/>
+            <a:ext cx="3588410" cy="658368"/>
+          </a:xfrm>
+          <a:prstGeom prst="roundRect">
+            <a:avLst>
+              <a:gd name="adj" fmla="val 5556"/>
+            </a:avLst>
+          </a:prstGeom>
+          <a:solidFill>
+            <a:srgbClr val="2D3748"/>
+          </a:solidFill>
+          <a:ln/>
+        </p:spPr>
+      </p:sp>
+      <p:sp>
+        <p:nvSpPr>
+          <p:cNvPr id="7" name="Shape 5"/>
+          <p:cNvSpPr/>
+          <p:nvPr/>
+        </p:nvSpPr>
+        <p:spPr>
+          <a:xfrm>
+            <a:off x="676656" y="1572768"/>
+            <a:ext cx="438912" cy="438912"/>
+          </a:xfrm>
+          <a:prstGeom prst="ellipse">
+            <a:avLst/>
+          </a:prstGeom>
+          <a:solidFill>
+            <a:srgbClr val="B98A2E"/>
+          </a:solidFill>
+          <a:ln/>
+        </p:spPr>
+      </p:sp>
+      <p:sp>
+        <p:nvSpPr>
+          <p:cNvPr id="8" name="Text 6"/>
+          <p:cNvSpPr/>
+          <p:nvPr/>
+        </p:nvSpPr>
+        <p:spPr>
+          <a:xfrm>
+            <a:off x="676656" y="1572768"/>
+            <a:ext cx="438912" cy="438912"/>
+          </a:xfrm>
+          <a:prstGeom prst="rect">
+            <a:avLst/>
+          </a:prstGeom>
+          <a:noFill/>
+          <a:ln/>
+        </p:spPr>
+        <p:txBody>
+          <a:bodyPr wrap="square" lIns="0" tIns="0" rIns="0" bIns="0" rtlCol="0" anchor="ctr"/>
+          <a:lstStyle/>
+          <a:p>
+            <a:pPr algn="ctr" indent="0" marL="0">
+              <a:buNone/>
+            </a:pPr>
+            <a:r>
+              <a:rPr lang="en-US" sz="1400" b="1" dirty="0">
+                <a:solidFill>
+                  <a:srgbClr val="FFFFFF"/>
+                </a:solidFill>
+                <a:latin typeface="Arial" pitchFamily="34" charset="0"/>
+                <a:ea typeface="Arial" pitchFamily="34" charset="-122"/>
+                <a:cs typeface="Arial" pitchFamily="34" charset="-120"/>
+              </a:rPr>
+              <a:t>01</a:t>
+            </a:r>
+            <a:endParaRPr lang="en-US" sz="1400" dirty="0"/>
+          </a:p>
+        </p:txBody>
+      </p:sp>
+      <p:sp>
+        <p:nvSpPr>
+          <p:cNvPr id="9" name="Text 7"/>
+          <p:cNvSpPr/>
+          <p:nvPr/>
+        </p:nvSpPr>
+        <p:spPr>
+          <a:xfrm>
+            <a:off x="1225296" y="1554480"/>
+            <a:ext cx="2820314" cy="237744"/>
           </a:xfrm>
           <a:prstGeom prst="rect">
             <a:avLst/>
@@ -2501,7 +2616,7 @@
                 <a:ea typeface="Pretendard" pitchFamily="34" charset="-122"/>
                 <a:cs typeface="Pretendard" pitchFamily="34" charset="-120"/>
               </a:rPr>
-              <a:t>데이터 출처 표기</a:t>
+              <a:t>관심 표명</a:t>
             </a:r>
             <a:endParaRPr lang="en-US" sz="1100" dirty="0"/>
           </a:p>
@@ -2509,130 +2624,150 @@
       </p:sp>
       <p:sp>
         <p:nvSpPr>
-          <p:cNvPr id="6" name="Shape 4"/>
-          <p:cNvSpPr/>
-          <p:nvPr/>
-        </p:nvSpPr>
-        <p:spPr>
-          <a:xfrm>
-            <a:off x="566928" y="1847088"/>
-            <a:ext cx="1417320" cy="347472"/>
-          </a:xfrm>
-          <a:prstGeom prst="roundRect">
-            <a:avLst>
-              <a:gd name="adj" fmla="val 10526"/>
-            </a:avLst>
-          </a:prstGeom>
-          <a:solidFill>
-            <a:srgbClr val="334155"/>
-          </a:solidFill>
-          <a:ln/>
-        </p:spPr>
-      </p:sp>
-      <p:sp>
-        <p:nvSpPr>
-          <p:cNvPr id="7" name="Text 5"/>
-          <p:cNvSpPr/>
-          <p:nvPr/>
-        </p:nvSpPr>
-        <p:spPr>
-          <a:xfrm>
-            <a:off x="566928" y="1847088"/>
-            <a:ext cx="1417320" cy="347472"/>
-          </a:xfrm>
-          <a:prstGeom prst="rect">
-            <a:avLst/>
-          </a:prstGeom>
-          <a:noFill/>
-          <a:ln/>
-        </p:spPr>
-        <p:txBody>
-          <a:bodyPr wrap="square" lIns="0" tIns="0" rIns="0" bIns="0" rtlCol="0" anchor="ctr"/>
-          <a:lstStyle/>
-          <a:p>
-            <a:pPr algn="ctr" indent="0" marL="0">
-              <a:buNone/>
-            </a:pPr>
-            <a:r>
-              <a:rPr lang="en-US" sz="950" b="1" dirty="0">
-                <a:solidFill>
-                  <a:srgbClr val="FFFFFF"/>
+          <p:cNvPr id="10" name="Text 8"/>
+          <p:cNvSpPr/>
+          <p:nvPr/>
+        </p:nvSpPr>
+        <p:spPr>
+          <a:xfrm>
+            <a:off x="1225296" y="1792224"/>
+            <a:ext cx="2820314" cy="256032"/>
+          </a:xfrm>
+          <a:prstGeom prst="rect">
+            <a:avLst/>
+          </a:prstGeom>
+          <a:noFill/>
+          <a:ln/>
+        </p:spPr>
+        <p:txBody>
+          <a:bodyPr wrap="square" lIns="0" tIns="0" rIns="0" bIns="0" rtlCol="0" anchor="t"/>
+          <a:lstStyle/>
+          <a:p>
+            <a:pPr indent="0" marL="0">
+              <a:buNone/>
+            </a:pPr>
+            <a:r>
+              <a:rPr lang="en-US" sz="850" dirty="0">
+                <a:solidFill>
+                  <a:srgbClr val="A0AEC0"/>
                 </a:solidFill>
                 <a:latin typeface="Pretendard" pitchFamily="34" charset="0"/>
                 <a:ea typeface="Pretendard" pitchFamily="34" charset="-122"/>
                 <a:cs typeface="Pretendard" pitchFamily="34" charset="-120"/>
               </a:rPr>
-              <a:t>✓ 공부확인</a:t>
-            </a:r>
-            <a:endParaRPr lang="en-US" sz="950" dirty="0"/>
-          </a:p>
-        </p:txBody>
-      </p:sp>
-      <p:sp>
-        <p:nvSpPr>
-          <p:cNvPr id="8" name="Text 6"/>
-          <p:cNvSpPr/>
-          <p:nvPr/>
-        </p:nvSpPr>
-        <p:spPr>
-          <a:xfrm>
-            <a:off x="2139696" y="1828800"/>
-            <a:ext cx="3566160" cy="420624"/>
-          </a:xfrm>
-          <a:prstGeom prst="rect">
-            <a:avLst/>
-          </a:prstGeom>
-          <a:noFill/>
-          <a:ln/>
-        </p:spPr>
-        <p:txBody>
-          <a:bodyPr wrap="square" lIns="0" tIns="0" rIns="0" bIns="0" rtlCol="0" anchor="ctr"/>
-          <a:lstStyle/>
-          <a:p>
-            <a:pPr indent="0" marL="0">
-              <a:buNone/>
-            </a:pPr>
-            <a:r>
-              <a:rPr lang="en-US" sz="1000" dirty="0">
-                <a:solidFill>
-                  <a:srgbClr val="F1F5F9"/>
+              <a:t>담당 중개사에게 초기 관심 표명 및 상담 요청</a:t>
+            </a:r>
+            <a:endParaRPr lang="en-US" sz="850" dirty="0"/>
+          </a:p>
+        </p:txBody>
+      </p:sp>
+      <p:sp>
+        <p:nvSpPr>
+          <p:cNvPr id="11" name="Text 9"/>
+          <p:cNvSpPr/>
+          <p:nvPr/>
+        </p:nvSpPr>
+        <p:spPr>
+          <a:xfrm>
+            <a:off x="4155338" y="1600200"/>
+            <a:ext cx="146304" cy="384048"/>
+          </a:xfrm>
+          <a:prstGeom prst="rect">
+            <a:avLst/>
+          </a:prstGeom>
+          <a:noFill/>
+          <a:ln/>
+        </p:spPr>
+        <p:txBody>
+          <a:bodyPr wrap="square" lIns="0" tIns="0" rIns="0" bIns="0" rtlCol="0" anchor="ctr"/>
+          <a:lstStyle/>
+          <a:p>
+            <a:pPr algn="ctr" indent="0" marL="0">
+              <a:buNone/>
+            </a:pPr>
+            <a:r>
+              <a:rPr lang="en-US" sz="1600" dirty="0">
+                <a:solidFill>
+                  <a:srgbClr val="B98A2E"/>
                 </a:solidFill>
                 <a:latin typeface="Pretendard" pitchFamily="34" charset="0"/>
                 <a:ea typeface="Pretendard" pitchFamily="34" charset="-122"/>
                 <a:cs typeface="Pretendard" pitchFamily="34" charset="-120"/>
               </a:rPr>
-              <a:t>등기부·대장 등 공적 장부 직접 확인</a:t>
-            </a:r>
-            <a:endParaRPr lang="en-US" sz="1000" dirty="0"/>
-          </a:p>
-        </p:txBody>
-      </p:sp>
-      <p:sp>
-        <p:nvSpPr>
-          <p:cNvPr id="9" name="Text 7"/>
-          <p:cNvSpPr/>
-          <p:nvPr/>
-        </p:nvSpPr>
-        <p:spPr>
-          <a:xfrm>
-            <a:off x="5504688" y="1847088"/>
-            <a:ext cx="731520" cy="292608"/>
-          </a:xfrm>
-          <a:prstGeom prst="rect">
-            <a:avLst/>
-          </a:prstGeom>
-          <a:noFill/>
-          <a:ln/>
-        </p:spPr>
-        <p:txBody>
-          <a:bodyPr wrap="square" lIns="0" tIns="0" rIns="0" bIns="0" rtlCol="0" anchor="ctr"/>
-          <a:lstStyle/>
-          <a:p>
-            <a:pPr algn="r" indent="0" marL="0">
-              <a:buNone/>
-            </a:pPr>
-            <a:r>
-              <a:rPr lang="en-US" sz="1200" b="1" dirty="0">
+              <a:t>→</a:t>
+            </a:r>
+            <a:endParaRPr lang="en-US" sz="1600" dirty="0"/>
+          </a:p>
+        </p:txBody>
+      </p:sp>
+      <p:sp>
+        <p:nvSpPr>
+          <p:cNvPr id="12" name="Shape 10"/>
+          <p:cNvSpPr/>
+          <p:nvPr/>
+        </p:nvSpPr>
+        <p:spPr>
+          <a:xfrm>
+            <a:off x="4301642" y="1463040"/>
+            <a:ext cx="3588410" cy="658368"/>
+          </a:xfrm>
+          <a:prstGeom prst="roundRect">
+            <a:avLst>
+              <a:gd name="adj" fmla="val 5556"/>
+            </a:avLst>
+          </a:prstGeom>
+          <a:solidFill>
+            <a:srgbClr val="2D3748"/>
+          </a:solidFill>
+          <a:ln/>
+        </p:spPr>
+      </p:sp>
+      <p:sp>
+        <p:nvSpPr>
+          <p:cNvPr id="13" name="Shape 11"/>
+          <p:cNvSpPr/>
+          <p:nvPr/>
+        </p:nvSpPr>
+        <p:spPr>
+          <a:xfrm>
+            <a:off x="4411370" y="1572768"/>
+            <a:ext cx="438912" cy="438912"/>
+          </a:xfrm>
+          <a:prstGeom prst="ellipse">
+            <a:avLst/>
+          </a:prstGeom>
+          <a:solidFill>
+            <a:srgbClr val="B98A2E"/>
+          </a:solidFill>
+          <a:ln/>
+        </p:spPr>
+      </p:sp>
+      <p:sp>
+        <p:nvSpPr>
+          <p:cNvPr id="14" name="Text 12"/>
+          <p:cNvSpPr/>
+          <p:nvPr/>
+        </p:nvSpPr>
+        <p:spPr>
+          <a:xfrm>
+            <a:off x="4411370" y="1572768"/>
+            <a:ext cx="438912" cy="438912"/>
+          </a:xfrm>
+          <a:prstGeom prst="rect">
+            <a:avLst/>
+          </a:prstGeom>
+          <a:noFill/>
+          <a:ln/>
+        </p:spPr>
+        <p:txBody>
+          <a:bodyPr wrap="square" lIns="0" tIns="0" rIns="0" bIns="0" rtlCol="0" anchor="ctr"/>
+          <a:lstStyle/>
+          <a:p>
+            <a:pPr algn="ctr" indent="0" marL="0">
+              <a:buNone/>
+            </a:pPr>
+            <a:r>
+              <a:rPr lang="en-US" sz="1400" b="1" dirty="0">
                 <a:solidFill>
                   <a:srgbClr val="FFFFFF"/>
                 </a:solidFill>
@@ -2640,60 +2775,38 @@
                 <a:ea typeface="Arial" pitchFamily="34" charset="-122"/>
                 <a:cs typeface="Arial" pitchFamily="34" charset="-120"/>
               </a:rPr>
-              <a:t>1.00</a:t>
-            </a:r>
-            <a:endParaRPr lang="en-US" sz="1200" dirty="0"/>
-          </a:p>
-        </p:txBody>
-      </p:sp>
-      <p:sp>
-        <p:nvSpPr>
-          <p:cNvPr id="10" name="Shape 8"/>
-          <p:cNvSpPr/>
-          <p:nvPr/>
-        </p:nvSpPr>
-        <p:spPr>
-          <a:xfrm>
-            <a:off x="566928" y="2505456"/>
-            <a:ext cx="1417320" cy="347472"/>
-          </a:xfrm>
-          <a:prstGeom prst="roundRect">
-            <a:avLst>
-              <a:gd name="adj" fmla="val 10526"/>
-            </a:avLst>
-          </a:prstGeom>
-          <a:solidFill>
-            <a:srgbClr val="334155"/>
-          </a:solidFill>
-          <a:ln/>
-        </p:spPr>
-      </p:sp>
-      <p:sp>
-        <p:nvSpPr>
-          <p:cNvPr id="11" name="Text 9"/>
-          <p:cNvSpPr/>
-          <p:nvPr/>
-        </p:nvSpPr>
-        <p:spPr>
-          <a:xfrm>
-            <a:off x="566928" y="2505456"/>
-            <a:ext cx="1417320" cy="347472"/>
-          </a:xfrm>
-          <a:prstGeom prst="rect">
-            <a:avLst/>
-          </a:prstGeom>
-          <a:noFill/>
-          <a:ln/>
-        </p:spPr>
-        <p:txBody>
-          <a:bodyPr wrap="square" lIns="0" tIns="0" rIns="0" bIns="0" rtlCol="0" anchor="ctr"/>
-          <a:lstStyle/>
-          <a:p>
-            <a:pPr algn="ctr" indent="0" marL="0">
-              <a:buNone/>
-            </a:pPr>
-            <a:r>
-              <a:rPr lang="en-US" sz="950" b="1" dirty="0">
+              <a:t>02</a:t>
+            </a:r>
+            <a:endParaRPr lang="en-US" sz="1400" dirty="0"/>
+          </a:p>
+        </p:txBody>
+      </p:sp>
+      <p:sp>
+        <p:nvSpPr>
+          <p:cNvPr id="15" name="Text 13"/>
+          <p:cNvSpPr/>
+          <p:nvPr/>
+        </p:nvSpPr>
+        <p:spPr>
+          <a:xfrm>
+            <a:off x="4960010" y="1554480"/>
+            <a:ext cx="2820314" cy="237744"/>
+          </a:xfrm>
+          <a:prstGeom prst="rect">
+            <a:avLst/>
+          </a:prstGeom>
+          <a:noFill/>
+          <a:ln/>
+        </p:spPr>
+        <p:txBody>
+          <a:bodyPr wrap="square" lIns="0" tIns="0" rIns="0" bIns="0" rtlCol="0" anchor="ctr"/>
+          <a:lstStyle/>
+          <a:p>
+            <a:pPr indent="0" marL="0">
+              <a:buNone/>
+            </a:pPr>
+            <a:r>
+              <a:rPr lang="en-US" sz="1100" b="1" dirty="0">
                 <a:solidFill>
                   <a:srgbClr val="FFFFFF"/>
                 </a:solidFill>
@@ -2701,77 +2814,158 @@
                 <a:ea typeface="Pretendard" pitchFamily="34" charset="-122"/>
                 <a:cs typeface="Pretendard" pitchFamily="34" charset="-120"/>
               </a:rPr>
-              <a:t>★ 전문가검증</a:t>
-            </a:r>
-            <a:endParaRPr lang="en-US" sz="950" dirty="0"/>
-          </a:p>
-        </p:txBody>
-      </p:sp>
-      <p:sp>
-        <p:nvSpPr>
-          <p:cNvPr id="12" name="Text 10"/>
-          <p:cNvSpPr/>
-          <p:nvPr/>
-        </p:nvSpPr>
-        <p:spPr>
-          <a:xfrm>
-            <a:off x="2139696" y="2487168"/>
-            <a:ext cx="3566160" cy="420624"/>
-          </a:xfrm>
-          <a:prstGeom prst="rect">
-            <a:avLst/>
-          </a:prstGeom>
-          <a:noFill/>
-          <a:ln/>
-        </p:spPr>
-        <p:txBody>
-          <a:bodyPr wrap="square" lIns="0" tIns="0" rIns="0" bIns="0" rtlCol="0" anchor="ctr"/>
+              <a:t>NDA 체결</a:t>
+            </a:r>
+            <a:endParaRPr lang="en-US" sz="1100" dirty="0"/>
+          </a:p>
+        </p:txBody>
+      </p:sp>
+      <p:sp>
+        <p:nvSpPr>
+          <p:cNvPr id="16" name="Text 14"/>
+          <p:cNvSpPr/>
+          <p:nvPr/>
+        </p:nvSpPr>
+        <p:spPr>
+          <a:xfrm>
+            <a:off x="4960010" y="1792224"/>
+            <a:ext cx="2820314" cy="256032"/>
+          </a:xfrm>
+          <a:prstGeom prst="rect">
+            <a:avLst/>
+          </a:prstGeom>
+          <a:noFill/>
+          <a:ln/>
+        </p:spPr>
+        <p:txBody>
+          <a:bodyPr wrap="square" lIns="0" tIns="0" rIns="0" bIns="0" rtlCol="0" anchor="t"/>
           <a:lstStyle/>
           <a:p>
             <a:pPr indent="0" marL="0">
               <a:buNone/>
             </a:pPr>
             <a:r>
-              <a:rPr lang="en-US" sz="1000" dirty="0">
-                <a:solidFill>
-                  <a:srgbClr val="F1F5F9"/>
+              <a:rPr lang="en-US" sz="850" dirty="0">
+                <a:solidFill>
+                  <a:srgbClr val="A0AEC0"/>
                 </a:solidFill>
                 <a:latin typeface="Pretendard" pitchFamily="34" charset="0"/>
                 <a:ea typeface="Pretendard" pitchFamily="34" charset="-122"/>
                 <a:cs typeface="Pretendard" pitchFamily="34" charset="-120"/>
               </a:rPr>
-              <a:t>세무사·감정평가사 등 전문가 확인</a:t>
-            </a:r>
-            <a:endParaRPr lang="en-US" sz="1000" dirty="0"/>
-          </a:p>
-        </p:txBody>
-      </p:sp>
-      <p:sp>
-        <p:nvSpPr>
-          <p:cNvPr id="13" name="Text 11"/>
-          <p:cNvSpPr/>
-          <p:nvPr/>
-        </p:nvSpPr>
-        <p:spPr>
-          <a:xfrm>
-            <a:off x="5504688" y="2505456"/>
-            <a:ext cx="731520" cy="292608"/>
-          </a:xfrm>
-          <a:prstGeom prst="rect">
-            <a:avLst/>
-          </a:prstGeom>
-          <a:noFill/>
-          <a:ln/>
-        </p:spPr>
-        <p:txBody>
-          <a:bodyPr wrap="square" lIns="0" tIns="0" rIns="0" bIns="0" rtlCol="0" anchor="ctr"/>
-          <a:lstStyle/>
-          <a:p>
-            <a:pPr algn="r" indent="0" marL="0">
-              <a:buNone/>
-            </a:pPr>
-            <a:r>
-              <a:rPr lang="en-US" sz="1200" b="1" dirty="0">
+              <a:t>비밀유지계약 후 상세 임대차·재무 자료 제공</a:t>
+            </a:r>
+            <a:endParaRPr lang="en-US" sz="850" dirty="0"/>
+          </a:p>
+        </p:txBody>
+      </p:sp>
+      <p:sp>
+        <p:nvSpPr>
+          <p:cNvPr id="17" name="Text 15"/>
+          <p:cNvSpPr/>
+          <p:nvPr/>
+        </p:nvSpPr>
+        <p:spPr>
+          <a:xfrm>
+            <a:off x="7890053" y="1600200"/>
+            <a:ext cx="146304" cy="384048"/>
+          </a:xfrm>
+          <a:prstGeom prst="rect">
+            <a:avLst/>
+          </a:prstGeom>
+          <a:noFill/>
+          <a:ln/>
+        </p:spPr>
+        <p:txBody>
+          <a:bodyPr wrap="square" lIns="0" tIns="0" rIns="0" bIns="0" rtlCol="0" anchor="ctr"/>
+          <a:lstStyle/>
+          <a:p>
+            <a:pPr algn="ctr" indent="0" marL="0">
+              <a:buNone/>
+            </a:pPr>
+            <a:r>
+              <a:rPr lang="en-US" sz="1600" dirty="0">
+                <a:solidFill>
+                  <a:srgbClr val="B98A2E"/>
+                </a:solidFill>
+                <a:latin typeface="Pretendard" pitchFamily="34" charset="0"/>
+                <a:ea typeface="Pretendard" pitchFamily="34" charset="-122"/>
+                <a:cs typeface="Pretendard" pitchFamily="34" charset="-120"/>
+              </a:rPr>
+              <a:t>→</a:t>
+            </a:r>
+            <a:endParaRPr lang="en-US" sz="1600" dirty="0"/>
+          </a:p>
+        </p:txBody>
+      </p:sp>
+      <p:sp>
+        <p:nvSpPr>
+          <p:cNvPr id="18" name="Shape 16"/>
+          <p:cNvSpPr/>
+          <p:nvPr/>
+        </p:nvSpPr>
+        <p:spPr>
+          <a:xfrm>
+            <a:off x="8036357" y="1463040"/>
+            <a:ext cx="3588410" cy="658368"/>
+          </a:xfrm>
+          <a:prstGeom prst="roundRect">
+            <a:avLst>
+              <a:gd name="adj" fmla="val 5556"/>
+            </a:avLst>
+          </a:prstGeom>
+          <a:solidFill>
+            <a:srgbClr val="2D3748"/>
+          </a:solidFill>
+          <a:ln/>
+        </p:spPr>
+      </p:sp>
+      <p:sp>
+        <p:nvSpPr>
+          <p:cNvPr id="19" name="Shape 17"/>
+          <p:cNvSpPr/>
+          <p:nvPr/>
+        </p:nvSpPr>
+        <p:spPr>
+          <a:xfrm>
+            <a:off x="8146085" y="1572768"/>
+            <a:ext cx="438912" cy="438912"/>
+          </a:xfrm>
+          <a:prstGeom prst="ellipse">
+            <a:avLst/>
+          </a:prstGeom>
+          <a:solidFill>
+            <a:srgbClr val="B98A2E"/>
+          </a:solidFill>
+          <a:ln/>
+        </p:spPr>
+      </p:sp>
+      <p:sp>
+        <p:nvSpPr>
+          <p:cNvPr id="20" name="Text 18"/>
+          <p:cNvSpPr/>
+          <p:nvPr/>
+        </p:nvSpPr>
+        <p:spPr>
+          <a:xfrm>
+            <a:off x="8146085" y="1572768"/>
+            <a:ext cx="438912" cy="438912"/>
+          </a:xfrm>
+          <a:prstGeom prst="rect">
+            <a:avLst/>
+          </a:prstGeom>
+          <a:noFill/>
+          <a:ln/>
+        </p:spPr>
+        <p:txBody>
+          <a:bodyPr wrap="square" lIns="0" tIns="0" rIns="0" bIns="0" rtlCol="0" anchor="ctr"/>
+          <a:lstStyle/>
+          <a:p>
+            <a:pPr algn="ctr" indent="0" marL="0">
+              <a:buNone/>
+            </a:pPr>
+            <a:r>
+              <a:rPr lang="en-US" sz="1400" b="1" dirty="0">
                 <a:solidFill>
                   <a:srgbClr val="FFFFFF"/>
                 </a:solidFill>
@@ -2779,60 +2973,38 @@
                 <a:ea typeface="Arial" pitchFamily="34" charset="-122"/>
                 <a:cs typeface="Arial" pitchFamily="34" charset="-120"/>
               </a:rPr>
-              <a:t>0.95</a:t>
-            </a:r>
-            <a:endParaRPr lang="en-US" sz="1200" dirty="0"/>
-          </a:p>
-        </p:txBody>
-      </p:sp>
-      <p:sp>
-        <p:nvSpPr>
-          <p:cNvPr id="14" name="Shape 12"/>
-          <p:cNvSpPr/>
-          <p:nvPr/>
-        </p:nvSpPr>
-        <p:spPr>
-          <a:xfrm>
-            <a:off x="566928" y="3163824"/>
-            <a:ext cx="1417320" cy="347472"/>
-          </a:xfrm>
-          <a:prstGeom prst="roundRect">
-            <a:avLst>
-              <a:gd name="adj" fmla="val 10526"/>
-            </a:avLst>
-          </a:prstGeom>
-          <a:solidFill>
-            <a:srgbClr val="334155"/>
-          </a:solidFill>
-          <a:ln/>
-        </p:spPr>
-      </p:sp>
-      <p:sp>
-        <p:nvSpPr>
-          <p:cNvPr id="15" name="Text 13"/>
-          <p:cNvSpPr/>
-          <p:nvPr/>
-        </p:nvSpPr>
-        <p:spPr>
-          <a:xfrm>
-            <a:off x="566928" y="3163824"/>
-            <a:ext cx="1417320" cy="347472"/>
-          </a:xfrm>
-          <a:prstGeom prst="rect">
-            <a:avLst/>
-          </a:prstGeom>
-          <a:noFill/>
-          <a:ln/>
-        </p:spPr>
-        <p:txBody>
-          <a:bodyPr wrap="square" lIns="0" tIns="0" rIns="0" bIns="0" rtlCol="0" anchor="ctr"/>
-          <a:lstStyle/>
-          <a:p>
-            <a:pPr algn="ctr" indent="0" marL="0">
-              <a:buNone/>
-            </a:pPr>
-            <a:r>
-              <a:rPr lang="en-US" sz="950" b="1" dirty="0">
+              <a:t>03</a:t>
+            </a:r>
+            <a:endParaRPr lang="en-US" sz="1400" dirty="0"/>
+          </a:p>
+        </p:txBody>
+      </p:sp>
+      <p:sp>
+        <p:nvSpPr>
+          <p:cNvPr id="21" name="Text 19"/>
+          <p:cNvSpPr/>
+          <p:nvPr/>
+        </p:nvSpPr>
+        <p:spPr>
+          <a:xfrm>
+            <a:off x="8694725" y="1554480"/>
+            <a:ext cx="2820314" cy="237744"/>
+          </a:xfrm>
+          <a:prstGeom prst="rect">
+            <a:avLst/>
+          </a:prstGeom>
+          <a:noFill/>
+          <a:ln/>
+        </p:spPr>
+        <p:txBody>
+          <a:bodyPr wrap="square" lIns="0" tIns="0" rIns="0" bIns="0" rtlCol="0" anchor="ctr"/>
+          <a:lstStyle/>
+          <a:p>
+            <a:pPr indent="0" marL="0">
+              <a:buNone/>
+            </a:pPr>
+            <a:r>
+              <a:rPr lang="en-US" sz="1100" b="1" dirty="0">
                 <a:solidFill>
                   <a:srgbClr val="FFFFFF"/>
                 </a:solidFill>
@@ -2840,138 +3012,77 @@
                 <a:ea typeface="Pretendard" pitchFamily="34" charset="-122"/>
                 <a:cs typeface="Pretendard" pitchFamily="34" charset="-120"/>
               </a:rPr>
-              <a:t>▲ 매도인고지</a:t>
-            </a:r>
-            <a:endParaRPr lang="en-US" sz="950" dirty="0"/>
-          </a:p>
-        </p:txBody>
-      </p:sp>
-      <p:sp>
-        <p:nvSpPr>
-          <p:cNvPr id="16" name="Text 14"/>
-          <p:cNvSpPr/>
-          <p:nvPr/>
-        </p:nvSpPr>
-        <p:spPr>
-          <a:xfrm>
-            <a:off x="2139696" y="3145536"/>
-            <a:ext cx="3566160" cy="420624"/>
-          </a:xfrm>
-          <a:prstGeom prst="rect">
-            <a:avLst/>
-          </a:prstGeom>
-          <a:noFill/>
-          <a:ln/>
-        </p:spPr>
-        <p:txBody>
-          <a:bodyPr wrap="square" lIns="0" tIns="0" rIns="0" bIns="0" rtlCol="0" anchor="ctr"/>
+              <a:t>현장 실사</a:t>
+            </a:r>
+            <a:endParaRPr lang="en-US" sz="1100" dirty="0"/>
+          </a:p>
+        </p:txBody>
+      </p:sp>
+      <p:sp>
+        <p:nvSpPr>
+          <p:cNvPr id="22" name="Text 20"/>
+          <p:cNvSpPr/>
+          <p:nvPr/>
+        </p:nvSpPr>
+        <p:spPr>
+          <a:xfrm>
+            <a:off x="8694725" y="1792224"/>
+            <a:ext cx="2820314" cy="256032"/>
+          </a:xfrm>
+          <a:prstGeom prst="rect">
+            <a:avLst/>
+          </a:prstGeom>
+          <a:noFill/>
+          <a:ln/>
+        </p:spPr>
+        <p:txBody>
+          <a:bodyPr wrap="square" lIns="0" tIns="0" rIns="0" bIns="0" rtlCol="0" anchor="t"/>
           <a:lstStyle/>
           <a:p>
             <a:pPr indent="0" marL="0">
               <a:buNone/>
             </a:pPr>
             <a:r>
-              <a:rPr lang="en-US" sz="1000" dirty="0">
-                <a:solidFill>
-                  <a:srgbClr val="F1F5F9"/>
+              <a:rPr lang="en-US" sz="850" dirty="0">
+                <a:solidFill>
+                  <a:srgbClr val="A0AEC0"/>
                 </a:solidFill>
                 <a:latin typeface="Pretendard" pitchFamily="34" charset="0"/>
                 <a:ea typeface="Pretendard" pitchFamily="34" charset="-122"/>
                 <a:cs typeface="Pretendard" pitchFamily="34" charset="-120"/>
               </a:rPr>
-              <a:t>매도인이 구두 또는 서면으로 고지</a:t>
-            </a:r>
-            <a:endParaRPr lang="en-US" sz="1000" dirty="0"/>
-          </a:p>
-        </p:txBody>
-      </p:sp>
-      <p:sp>
-        <p:nvSpPr>
-          <p:cNvPr id="17" name="Text 15"/>
-          <p:cNvSpPr/>
-          <p:nvPr/>
-        </p:nvSpPr>
-        <p:spPr>
-          <a:xfrm>
-            <a:off x="5504688" y="3163824"/>
-            <a:ext cx="731520" cy="292608"/>
-          </a:xfrm>
-          <a:prstGeom prst="rect">
-            <a:avLst/>
-          </a:prstGeom>
-          <a:noFill/>
-          <a:ln/>
-        </p:spPr>
-        <p:txBody>
-          <a:bodyPr wrap="square" lIns="0" tIns="0" rIns="0" bIns="0" rtlCol="0" anchor="ctr"/>
-          <a:lstStyle/>
-          <a:p>
-            <a:pPr algn="r" indent="0" marL="0">
-              <a:buNone/>
-            </a:pPr>
-            <a:r>
-              <a:rPr lang="en-US" sz="1200" b="1" dirty="0">
-                <a:solidFill>
-                  <a:srgbClr val="FFFFFF"/>
-                </a:solidFill>
-                <a:latin typeface="Arial" pitchFamily="34" charset="0"/>
-                <a:ea typeface="Arial" pitchFamily="34" charset="-122"/>
-                <a:cs typeface="Arial" pitchFamily="34" charset="-120"/>
-              </a:rPr>
-              <a:t>0.65</a:t>
-            </a:r>
-            <a:endParaRPr lang="en-US" sz="1200" dirty="0"/>
-          </a:p>
-        </p:txBody>
-      </p:sp>
-      <p:sp>
-        <p:nvSpPr>
-          <p:cNvPr id="18" name="Shape 16"/>
-          <p:cNvSpPr/>
-          <p:nvPr/>
-        </p:nvSpPr>
-        <p:spPr>
-          <a:xfrm>
-            <a:off x="566928" y="3822192"/>
-            <a:ext cx="1417320" cy="347472"/>
-          </a:xfrm>
-          <a:prstGeom prst="roundRect">
-            <a:avLst>
-              <a:gd name="adj" fmla="val 10526"/>
-            </a:avLst>
-          </a:prstGeom>
-          <a:solidFill>
-            <a:srgbClr val="334155"/>
-          </a:solidFill>
-          <a:ln/>
-        </p:spPr>
-      </p:sp>
-      <p:sp>
-        <p:nvSpPr>
-          <p:cNvPr id="19" name="Text 17"/>
-          <p:cNvSpPr/>
-          <p:nvPr/>
-        </p:nvSpPr>
-        <p:spPr>
-          <a:xfrm>
-            <a:off x="566928" y="3822192"/>
-            <a:ext cx="1417320" cy="347472"/>
-          </a:xfrm>
-          <a:prstGeom prst="rect">
-            <a:avLst/>
-          </a:prstGeom>
-          <a:noFill/>
-          <a:ln/>
-        </p:spPr>
-        <p:txBody>
-          <a:bodyPr wrap="square" lIns="0" tIns="0" rIns="0" bIns="0" rtlCol="0" anchor="ctr"/>
-          <a:lstStyle/>
-          <a:p>
-            <a:pPr algn="ctr" indent="0" marL="0">
-              <a:buNone/>
-            </a:pPr>
-            <a:r>
-              <a:rPr lang="en-US" sz="950" b="1" dirty="0">
+              <a:t>건물 컨디션 및 설비 직접 확인 후 의향서(LOI) 제출</a:t>
+            </a:r>
+            <a:endParaRPr lang="en-US" sz="850" dirty="0"/>
+          </a:p>
+        </p:txBody>
+      </p:sp>
+      <p:sp>
+        <p:nvSpPr>
+          <p:cNvPr id="23" name="Text 21"/>
+          <p:cNvSpPr/>
+          <p:nvPr/>
+        </p:nvSpPr>
+        <p:spPr>
+          <a:xfrm>
+            <a:off x="566928" y="2395728"/>
+            <a:ext cx="5486400" cy="237744"/>
+          </a:xfrm>
+          <a:prstGeom prst="rect">
+            <a:avLst/>
+          </a:prstGeom>
+          <a:noFill/>
+          <a:ln/>
+        </p:spPr>
+        <p:txBody>
+          <a:bodyPr wrap="square" lIns="0" tIns="0" rIns="0" bIns="0" rtlCol="0" anchor="ctr"/>
+          <a:lstStyle/>
+          <a:p>
+            <a:pPr indent="0" marL="0">
+              <a:buNone/>
+            </a:pPr>
+            <a:r>
+              <a:rPr lang="en-US" sz="1100" b="1" dirty="0">
                 <a:solidFill>
                   <a:srgbClr val="FFFFFF"/>
                 </a:solidFill>
@@ -2979,239 +3090,183 @@
                 <a:ea typeface="Pretendard" pitchFamily="34" charset="-122"/>
                 <a:cs typeface="Pretendard" pitchFamily="34" charset="-120"/>
               </a:rPr>
-              <a:t>● 중개인입력</a:t>
-            </a:r>
-            <a:endParaRPr lang="en-US" sz="950" dirty="0"/>
-          </a:p>
-        </p:txBody>
-      </p:sp>
-      <p:sp>
-        <p:nvSpPr>
-          <p:cNvPr id="20" name="Text 18"/>
-          <p:cNvSpPr/>
-          <p:nvPr/>
-        </p:nvSpPr>
-        <p:spPr>
-          <a:xfrm>
-            <a:off x="2139696" y="3803904"/>
-            <a:ext cx="3566160" cy="420624"/>
-          </a:xfrm>
-          <a:prstGeom prst="rect">
-            <a:avLst/>
-          </a:prstGeom>
-          <a:noFill/>
-          <a:ln/>
-        </p:spPr>
-        <p:txBody>
-          <a:bodyPr wrap="square" lIns="0" tIns="0" rIns="0" bIns="0" rtlCol="0" anchor="ctr"/>
-          <a:lstStyle/>
-          <a:p>
-            <a:pPr indent="0" marL="0">
-              <a:buNone/>
-            </a:pPr>
-            <a:r>
-              <a:rPr lang="en-US" sz="1000" dirty="0">
-                <a:solidFill>
-                  <a:srgbClr val="F1F5F9"/>
+              <a:t>데이터 출처 표기</a:t>
+            </a:r>
+            <a:endParaRPr lang="en-US" sz="1100" dirty="0"/>
+          </a:p>
+        </p:txBody>
+      </p:sp>
+      <p:sp>
+        <p:nvSpPr>
+          <p:cNvPr id="24" name="Shape 22"/>
+          <p:cNvSpPr/>
+          <p:nvPr/>
+        </p:nvSpPr>
+        <p:spPr>
+          <a:xfrm>
+            <a:off x="566928" y="2724912"/>
+            <a:ext cx="1280160" cy="292608"/>
+          </a:xfrm>
+          <a:prstGeom prst="roundRect">
+            <a:avLst>
+              <a:gd name="adj" fmla="val 12500"/>
+            </a:avLst>
+          </a:prstGeom>
+          <a:solidFill>
+            <a:srgbClr val="2D3748"/>
+          </a:solidFill>
+          <a:ln/>
+        </p:spPr>
+      </p:sp>
+      <p:sp>
+        <p:nvSpPr>
+          <p:cNvPr id="25" name="Text 23"/>
+          <p:cNvSpPr/>
+          <p:nvPr/>
+        </p:nvSpPr>
+        <p:spPr>
+          <a:xfrm>
+            <a:off x="566928" y="2724912"/>
+            <a:ext cx="1280160" cy="292608"/>
+          </a:xfrm>
+          <a:prstGeom prst="rect">
+            <a:avLst/>
+          </a:prstGeom>
+          <a:noFill/>
+          <a:ln/>
+        </p:spPr>
+        <p:txBody>
+          <a:bodyPr wrap="square" lIns="0" tIns="0" rIns="0" bIns="0" rtlCol="0" anchor="ctr"/>
+          <a:lstStyle/>
+          <a:p>
+            <a:pPr algn="ctr" indent="0" marL="0">
+              <a:buNone/>
+            </a:pPr>
+            <a:r>
+              <a:rPr lang="en-US" sz="850" b="1" dirty="0">
+                <a:solidFill>
+                  <a:srgbClr val="FFFFFF"/>
                 </a:solidFill>
                 <a:latin typeface="Pretendard" pitchFamily="34" charset="0"/>
                 <a:ea typeface="Pretendard" pitchFamily="34" charset="-122"/>
                 <a:cs typeface="Pretendard" pitchFamily="34" charset="-120"/>
               </a:rPr>
-              <a:t>중개인 현장 조사 및 경험 기반 입력</a:t>
-            </a:r>
-            <a:endParaRPr lang="en-US" sz="1000" dirty="0"/>
-          </a:p>
-        </p:txBody>
-      </p:sp>
-      <p:sp>
-        <p:nvSpPr>
-          <p:cNvPr id="21" name="Text 19"/>
-          <p:cNvSpPr/>
-          <p:nvPr/>
-        </p:nvSpPr>
-        <p:spPr>
-          <a:xfrm>
-            <a:off x="5504688" y="3822192"/>
-            <a:ext cx="731520" cy="292608"/>
-          </a:xfrm>
-          <a:prstGeom prst="rect">
-            <a:avLst/>
-          </a:prstGeom>
-          <a:noFill/>
-          <a:ln/>
-        </p:spPr>
-        <p:txBody>
-          <a:bodyPr wrap="square" lIns="0" tIns="0" rIns="0" bIns="0" rtlCol="0" anchor="ctr"/>
-          <a:lstStyle/>
-          <a:p>
-            <a:pPr algn="r" indent="0" marL="0">
-              <a:buNone/>
-            </a:pPr>
-            <a:r>
-              <a:rPr lang="en-US" sz="1200" b="1" dirty="0">
-                <a:solidFill>
-                  <a:srgbClr val="FFFFFF"/>
-                </a:solidFill>
-                <a:latin typeface="Arial" pitchFamily="34" charset="0"/>
-                <a:ea typeface="Arial" pitchFamily="34" charset="-122"/>
-                <a:cs typeface="Arial" pitchFamily="34" charset="-120"/>
-              </a:rPr>
-              <a:t>0.60</a:t>
-            </a:r>
-            <a:endParaRPr lang="en-US" sz="1200" dirty="0"/>
-          </a:p>
-        </p:txBody>
-      </p:sp>
-      <p:sp>
-        <p:nvSpPr>
-          <p:cNvPr id="22" name="Shape 20"/>
-          <p:cNvSpPr/>
-          <p:nvPr/>
-        </p:nvSpPr>
-        <p:spPr>
-          <a:xfrm>
-            <a:off x="566928" y="4480560"/>
-            <a:ext cx="1417320" cy="347472"/>
-          </a:xfrm>
-          <a:prstGeom prst="roundRect">
-            <a:avLst>
-              <a:gd name="adj" fmla="val 10526"/>
-            </a:avLst>
-          </a:prstGeom>
-          <a:solidFill>
-            <a:srgbClr val="334155"/>
-          </a:solidFill>
-          <a:ln/>
-        </p:spPr>
-      </p:sp>
-      <p:sp>
-        <p:nvSpPr>
-          <p:cNvPr id="23" name="Text 21"/>
-          <p:cNvSpPr/>
-          <p:nvPr/>
-        </p:nvSpPr>
-        <p:spPr>
-          <a:xfrm>
-            <a:off x="566928" y="4480560"/>
-            <a:ext cx="1417320" cy="347472"/>
-          </a:xfrm>
-          <a:prstGeom prst="rect">
-            <a:avLst/>
-          </a:prstGeom>
-          <a:noFill/>
-          <a:ln/>
-        </p:spPr>
-        <p:txBody>
-          <a:bodyPr wrap="square" lIns="0" tIns="0" rIns="0" bIns="0" rtlCol="0" anchor="ctr"/>
-          <a:lstStyle/>
-          <a:p>
-            <a:pPr algn="ctr" indent="0" marL="0">
-              <a:buNone/>
-            </a:pPr>
-            <a:r>
-              <a:rPr lang="en-US" sz="950" b="1" dirty="0">
-                <a:solidFill>
-                  <a:srgbClr val="FFFFFF"/>
+              <a:t>✓ 공부확인</a:t>
+            </a:r>
+            <a:endParaRPr lang="en-US" sz="850" dirty="0"/>
+          </a:p>
+        </p:txBody>
+      </p:sp>
+      <p:sp>
+        <p:nvSpPr>
+          <p:cNvPr id="26" name="Text 24"/>
+          <p:cNvSpPr/>
+          <p:nvPr/>
+        </p:nvSpPr>
+        <p:spPr>
+          <a:xfrm>
+            <a:off x="1993392" y="2706624"/>
+            <a:ext cx="3840480" cy="329184"/>
+          </a:xfrm>
+          <a:prstGeom prst="rect">
+            <a:avLst/>
+          </a:prstGeom>
+          <a:noFill/>
+          <a:ln/>
+        </p:spPr>
+        <p:txBody>
+          <a:bodyPr wrap="square" lIns="0" tIns="0" rIns="0" bIns="0" rtlCol="0" anchor="ctr"/>
+          <a:lstStyle/>
+          <a:p>
+            <a:pPr indent="0" marL="0">
+              <a:buNone/>
+            </a:pPr>
+            <a:r>
+              <a:rPr lang="en-US" sz="900" dirty="0">
+                <a:solidFill>
+                  <a:srgbClr val="E2E8F0"/>
                 </a:solidFill>
                 <a:latin typeface="Pretendard" pitchFamily="34" charset="0"/>
                 <a:ea typeface="Pretendard" pitchFamily="34" charset="-122"/>
                 <a:cs typeface="Pretendard" pitchFamily="34" charset="-120"/>
               </a:rPr>
-              <a:t>◇ AI추정·가정</a:t>
-            </a:r>
-            <a:endParaRPr lang="en-US" sz="950" dirty="0"/>
-          </a:p>
-        </p:txBody>
-      </p:sp>
-      <p:sp>
-        <p:nvSpPr>
-          <p:cNvPr id="24" name="Text 22"/>
-          <p:cNvSpPr/>
-          <p:nvPr/>
-        </p:nvSpPr>
-        <p:spPr>
-          <a:xfrm>
-            <a:off x="2139696" y="4462272"/>
-            <a:ext cx="3566160" cy="420624"/>
-          </a:xfrm>
-          <a:prstGeom prst="rect">
-            <a:avLst/>
-          </a:prstGeom>
-          <a:noFill/>
-          <a:ln/>
-        </p:spPr>
-        <p:txBody>
-          <a:bodyPr wrap="square" lIns="0" tIns="0" rIns="0" bIns="0" rtlCol="0" anchor="ctr"/>
-          <a:lstStyle/>
-          <a:p>
-            <a:pPr indent="0" marL="0">
-              <a:buNone/>
-            </a:pPr>
-            <a:r>
-              <a:rPr lang="en-US" sz="1000" dirty="0">
-                <a:solidFill>
-                  <a:srgbClr val="F1F5F9"/>
+              <a:t>등기부·대장 등 공적 장부 직접 확인</a:t>
+            </a:r>
+            <a:endParaRPr lang="en-US" sz="900" dirty="0"/>
+          </a:p>
+        </p:txBody>
+      </p:sp>
+      <p:sp>
+        <p:nvSpPr>
+          <p:cNvPr id="27" name="Shape 25"/>
+          <p:cNvSpPr/>
+          <p:nvPr/>
+        </p:nvSpPr>
+        <p:spPr>
+          <a:xfrm>
+            <a:off x="566928" y="3200400"/>
+            <a:ext cx="1280160" cy="292608"/>
+          </a:xfrm>
+          <a:prstGeom prst="roundRect">
+            <a:avLst>
+              <a:gd name="adj" fmla="val 12500"/>
+            </a:avLst>
+          </a:prstGeom>
+          <a:solidFill>
+            <a:srgbClr val="2D3748"/>
+          </a:solidFill>
+          <a:ln/>
+        </p:spPr>
+      </p:sp>
+      <p:sp>
+        <p:nvSpPr>
+          <p:cNvPr id="28" name="Text 26"/>
+          <p:cNvSpPr/>
+          <p:nvPr/>
+        </p:nvSpPr>
+        <p:spPr>
+          <a:xfrm>
+            <a:off x="566928" y="3200400"/>
+            <a:ext cx="1280160" cy="292608"/>
+          </a:xfrm>
+          <a:prstGeom prst="rect">
+            <a:avLst/>
+          </a:prstGeom>
+          <a:noFill/>
+          <a:ln/>
+        </p:spPr>
+        <p:txBody>
+          <a:bodyPr wrap="square" lIns="0" tIns="0" rIns="0" bIns="0" rtlCol="0" anchor="ctr"/>
+          <a:lstStyle/>
+          <a:p>
+            <a:pPr algn="ctr" indent="0" marL="0">
+              <a:buNone/>
+            </a:pPr>
+            <a:r>
+              <a:rPr lang="en-US" sz="850" b="1" dirty="0">
+                <a:solidFill>
+                  <a:srgbClr val="FFFFFF"/>
                 </a:solidFill>
                 <a:latin typeface="Pretendard" pitchFamily="34" charset="0"/>
                 <a:ea typeface="Pretendard" pitchFamily="34" charset="-122"/>
                 <a:cs typeface="Pretendard" pitchFamily="34" charset="-120"/>
               </a:rPr>
-              <a:t>시나리오 분석 및 AI 모델 추정</a:t>
-            </a:r>
-            <a:endParaRPr lang="en-US" sz="1000" dirty="0"/>
-          </a:p>
-        </p:txBody>
-      </p:sp>
-      <p:sp>
-        <p:nvSpPr>
-          <p:cNvPr id="25" name="Text 23"/>
-          <p:cNvSpPr/>
-          <p:nvPr/>
-        </p:nvSpPr>
-        <p:spPr>
-          <a:xfrm>
-            <a:off x="5504688" y="4480560"/>
-            <a:ext cx="731520" cy="292608"/>
-          </a:xfrm>
-          <a:prstGeom prst="rect">
-            <a:avLst/>
-          </a:prstGeom>
-          <a:noFill/>
-          <a:ln/>
-        </p:spPr>
-        <p:txBody>
-          <a:bodyPr wrap="square" lIns="0" tIns="0" rIns="0" bIns="0" rtlCol="0" anchor="ctr"/>
-          <a:lstStyle/>
-          <a:p>
-            <a:pPr algn="r" indent="0" marL="0">
-              <a:buNone/>
-            </a:pPr>
-            <a:r>
-              <a:rPr lang="en-US" sz="1200" b="1" dirty="0">
-                <a:solidFill>
-                  <a:srgbClr val="FFFFFF"/>
-                </a:solidFill>
-                <a:latin typeface="Arial" pitchFamily="34" charset="0"/>
-                <a:ea typeface="Arial" pitchFamily="34" charset="-122"/>
-                <a:cs typeface="Arial" pitchFamily="34" charset="-120"/>
-              </a:rPr>
-              <a:t>0.30</a:t>
-            </a:r>
-            <a:endParaRPr lang="en-US" sz="1200" dirty="0"/>
-          </a:p>
-        </p:txBody>
-      </p:sp>
-      <p:sp>
-        <p:nvSpPr>
-          <p:cNvPr id="26" name="Text 24"/>
-          <p:cNvSpPr/>
-          <p:nvPr/>
-        </p:nvSpPr>
-        <p:spPr>
-          <a:xfrm>
-            <a:off x="6492240" y="1517904"/>
-            <a:ext cx="5129784" cy="237744"/>
+              <a:t>★ 전문가검증</a:t>
+            </a:r>
+            <a:endParaRPr lang="en-US" sz="850" dirty="0"/>
+          </a:p>
+        </p:txBody>
+      </p:sp>
+      <p:sp>
+        <p:nvSpPr>
+          <p:cNvPr id="29" name="Text 27"/>
+          <p:cNvSpPr/>
+          <p:nvPr/>
+        </p:nvSpPr>
+        <p:spPr>
+          <a:xfrm>
+            <a:off x="1993392" y="3182112"/>
+            <a:ext cx="3840480" cy="329184"/>
           </a:xfrm>
           <a:prstGeom prst="rect">
             <a:avLst/>
@@ -3227,52 +3282,391 @@
               <a:buNone/>
             </a:pPr>
             <a:r>
-              <a:rPr lang="en-US" sz="1100" b="1" dirty="0">
-                <a:solidFill>
-                  <a:srgbClr val="FFFFFF"/>
+              <a:rPr lang="en-US" sz="900" dirty="0">
+                <a:solidFill>
+                  <a:srgbClr val="E2E8F0"/>
                 </a:solidFill>
                 <a:latin typeface="Pretendard" pitchFamily="34" charset="0"/>
                 <a:ea typeface="Pretendard" pitchFamily="34" charset="-122"/>
                 <a:cs typeface="Pretendard" pitchFamily="34" charset="-120"/>
               </a:rPr>
-              <a:t>면책 조항</a:t>
-            </a:r>
-            <a:endParaRPr lang="en-US" sz="1100" dirty="0"/>
-          </a:p>
-        </p:txBody>
-      </p:sp>
-      <p:sp>
-        <p:nvSpPr>
-          <p:cNvPr id="27" name="Shape 25"/>
-          <p:cNvSpPr/>
-          <p:nvPr/>
-        </p:nvSpPr>
-        <p:spPr>
-          <a:xfrm>
-            <a:off x="6492240" y="1847088"/>
-            <a:ext cx="5129784" cy="2615184"/>
+              <a:t>세무사·감정평가사 등 전문가 확인</a:t>
+            </a:r>
+            <a:endParaRPr lang="en-US" sz="900" dirty="0"/>
+          </a:p>
+        </p:txBody>
+      </p:sp>
+      <p:sp>
+        <p:nvSpPr>
+          <p:cNvPr id="30" name="Shape 28"/>
+          <p:cNvSpPr/>
+          <p:nvPr/>
+        </p:nvSpPr>
+        <p:spPr>
+          <a:xfrm>
+            <a:off x="566928" y="3675888"/>
+            <a:ext cx="1280160" cy="292608"/>
           </a:xfrm>
           <a:prstGeom prst="roundRect">
             <a:avLst>
-              <a:gd name="adj" fmla="val 1399"/>
+              <a:gd name="adj" fmla="val 12500"/>
             </a:avLst>
           </a:prstGeom>
           <a:solidFill>
-            <a:srgbClr val="1E293B"/>
+            <a:srgbClr val="2D3748"/>
           </a:solidFill>
           <a:ln/>
         </p:spPr>
       </p:sp>
       <p:sp>
         <p:nvSpPr>
-          <p:cNvPr id="28" name="Text 26"/>
-          <p:cNvSpPr/>
-          <p:nvPr/>
-        </p:nvSpPr>
-        <p:spPr>
-          <a:xfrm>
-            <a:off x="6711696" y="2011680"/>
-            <a:ext cx="4690872" cy="2286000"/>
+          <p:cNvPr id="31" name="Text 29"/>
+          <p:cNvSpPr/>
+          <p:nvPr/>
+        </p:nvSpPr>
+        <p:spPr>
+          <a:xfrm>
+            <a:off x="566928" y="3675888"/>
+            <a:ext cx="1280160" cy="292608"/>
+          </a:xfrm>
+          <a:prstGeom prst="rect">
+            <a:avLst/>
+          </a:prstGeom>
+          <a:noFill/>
+          <a:ln/>
+        </p:spPr>
+        <p:txBody>
+          <a:bodyPr wrap="square" lIns="0" tIns="0" rIns="0" bIns="0" rtlCol="0" anchor="ctr"/>
+          <a:lstStyle/>
+          <a:p>
+            <a:pPr algn="ctr" indent="0" marL="0">
+              <a:buNone/>
+            </a:pPr>
+            <a:r>
+              <a:rPr lang="en-US" sz="850" b="1" dirty="0">
+                <a:solidFill>
+                  <a:srgbClr val="FFFFFF"/>
+                </a:solidFill>
+                <a:latin typeface="Pretendard" pitchFamily="34" charset="0"/>
+                <a:ea typeface="Pretendard" pitchFamily="34" charset="-122"/>
+                <a:cs typeface="Pretendard" pitchFamily="34" charset="-120"/>
+              </a:rPr>
+              <a:t>▲ 매도인고지</a:t>
+            </a:r>
+            <a:endParaRPr lang="en-US" sz="850" dirty="0"/>
+          </a:p>
+        </p:txBody>
+      </p:sp>
+      <p:sp>
+        <p:nvSpPr>
+          <p:cNvPr id="32" name="Text 30"/>
+          <p:cNvSpPr/>
+          <p:nvPr/>
+        </p:nvSpPr>
+        <p:spPr>
+          <a:xfrm>
+            <a:off x="1993392" y="3657600"/>
+            <a:ext cx="3840480" cy="329184"/>
+          </a:xfrm>
+          <a:prstGeom prst="rect">
+            <a:avLst/>
+          </a:prstGeom>
+          <a:noFill/>
+          <a:ln/>
+        </p:spPr>
+        <p:txBody>
+          <a:bodyPr wrap="square" lIns="0" tIns="0" rIns="0" bIns="0" rtlCol="0" anchor="ctr"/>
+          <a:lstStyle/>
+          <a:p>
+            <a:pPr indent="0" marL="0">
+              <a:buNone/>
+            </a:pPr>
+            <a:r>
+              <a:rPr lang="en-US" sz="900" dirty="0">
+                <a:solidFill>
+                  <a:srgbClr val="E2E8F0"/>
+                </a:solidFill>
+                <a:latin typeface="Pretendard" pitchFamily="34" charset="0"/>
+                <a:ea typeface="Pretendard" pitchFamily="34" charset="-122"/>
+                <a:cs typeface="Pretendard" pitchFamily="34" charset="-120"/>
+              </a:rPr>
+              <a:t>매도인이 구두 또는 서면으로 고지</a:t>
+            </a:r>
+            <a:endParaRPr lang="en-US" sz="900" dirty="0"/>
+          </a:p>
+        </p:txBody>
+      </p:sp>
+      <p:sp>
+        <p:nvSpPr>
+          <p:cNvPr id="33" name="Shape 31"/>
+          <p:cNvSpPr/>
+          <p:nvPr/>
+        </p:nvSpPr>
+        <p:spPr>
+          <a:xfrm>
+            <a:off x="566928" y="4151376"/>
+            <a:ext cx="1280160" cy="292608"/>
+          </a:xfrm>
+          <a:prstGeom prst="roundRect">
+            <a:avLst>
+              <a:gd name="adj" fmla="val 12500"/>
+            </a:avLst>
+          </a:prstGeom>
+          <a:solidFill>
+            <a:srgbClr val="2D3748"/>
+          </a:solidFill>
+          <a:ln/>
+        </p:spPr>
+      </p:sp>
+      <p:sp>
+        <p:nvSpPr>
+          <p:cNvPr id="34" name="Text 32"/>
+          <p:cNvSpPr/>
+          <p:nvPr/>
+        </p:nvSpPr>
+        <p:spPr>
+          <a:xfrm>
+            <a:off x="566928" y="4151376"/>
+            <a:ext cx="1280160" cy="292608"/>
+          </a:xfrm>
+          <a:prstGeom prst="rect">
+            <a:avLst/>
+          </a:prstGeom>
+          <a:noFill/>
+          <a:ln/>
+        </p:spPr>
+        <p:txBody>
+          <a:bodyPr wrap="square" lIns="0" tIns="0" rIns="0" bIns="0" rtlCol="0" anchor="ctr"/>
+          <a:lstStyle/>
+          <a:p>
+            <a:pPr algn="ctr" indent="0" marL="0">
+              <a:buNone/>
+            </a:pPr>
+            <a:r>
+              <a:rPr lang="en-US" sz="850" b="1" dirty="0">
+                <a:solidFill>
+                  <a:srgbClr val="FFFFFF"/>
+                </a:solidFill>
+                <a:latin typeface="Pretendard" pitchFamily="34" charset="0"/>
+                <a:ea typeface="Pretendard" pitchFamily="34" charset="-122"/>
+                <a:cs typeface="Pretendard" pitchFamily="34" charset="-120"/>
+              </a:rPr>
+              <a:t>● 중개인입력</a:t>
+            </a:r>
+            <a:endParaRPr lang="en-US" sz="850" dirty="0"/>
+          </a:p>
+        </p:txBody>
+      </p:sp>
+      <p:sp>
+        <p:nvSpPr>
+          <p:cNvPr id="35" name="Text 33"/>
+          <p:cNvSpPr/>
+          <p:nvPr/>
+        </p:nvSpPr>
+        <p:spPr>
+          <a:xfrm>
+            <a:off x="1993392" y="4133088"/>
+            <a:ext cx="3840480" cy="329184"/>
+          </a:xfrm>
+          <a:prstGeom prst="rect">
+            <a:avLst/>
+          </a:prstGeom>
+          <a:noFill/>
+          <a:ln/>
+        </p:spPr>
+        <p:txBody>
+          <a:bodyPr wrap="square" lIns="0" tIns="0" rIns="0" bIns="0" rtlCol="0" anchor="ctr"/>
+          <a:lstStyle/>
+          <a:p>
+            <a:pPr indent="0" marL="0">
+              <a:buNone/>
+            </a:pPr>
+            <a:r>
+              <a:rPr lang="en-US" sz="900" dirty="0">
+                <a:solidFill>
+                  <a:srgbClr val="E2E8F0"/>
+                </a:solidFill>
+                <a:latin typeface="Pretendard" pitchFamily="34" charset="0"/>
+                <a:ea typeface="Pretendard" pitchFamily="34" charset="-122"/>
+                <a:cs typeface="Pretendard" pitchFamily="34" charset="-120"/>
+              </a:rPr>
+              <a:t>중개인 현장 조사 및 경험 기반 입력</a:t>
+            </a:r>
+            <a:endParaRPr lang="en-US" sz="900" dirty="0"/>
+          </a:p>
+        </p:txBody>
+      </p:sp>
+      <p:sp>
+        <p:nvSpPr>
+          <p:cNvPr id="36" name="Shape 34"/>
+          <p:cNvSpPr/>
+          <p:nvPr/>
+        </p:nvSpPr>
+        <p:spPr>
+          <a:xfrm>
+            <a:off x="566928" y="4626864"/>
+            <a:ext cx="1280160" cy="292608"/>
+          </a:xfrm>
+          <a:prstGeom prst="roundRect">
+            <a:avLst>
+              <a:gd name="adj" fmla="val 12500"/>
+            </a:avLst>
+          </a:prstGeom>
+          <a:solidFill>
+            <a:srgbClr val="2D3748"/>
+          </a:solidFill>
+          <a:ln/>
+        </p:spPr>
+      </p:sp>
+      <p:sp>
+        <p:nvSpPr>
+          <p:cNvPr id="37" name="Text 35"/>
+          <p:cNvSpPr/>
+          <p:nvPr/>
+        </p:nvSpPr>
+        <p:spPr>
+          <a:xfrm>
+            <a:off x="566928" y="4626864"/>
+            <a:ext cx="1280160" cy="292608"/>
+          </a:xfrm>
+          <a:prstGeom prst="rect">
+            <a:avLst/>
+          </a:prstGeom>
+          <a:noFill/>
+          <a:ln/>
+        </p:spPr>
+        <p:txBody>
+          <a:bodyPr wrap="square" lIns="0" tIns="0" rIns="0" bIns="0" rtlCol="0" anchor="ctr"/>
+          <a:lstStyle/>
+          <a:p>
+            <a:pPr algn="ctr" indent="0" marL="0">
+              <a:buNone/>
+            </a:pPr>
+            <a:r>
+              <a:rPr lang="en-US" sz="850" b="1" dirty="0">
+                <a:solidFill>
+                  <a:srgbClr val="FFFFFF"/>
+                </a:solidFill>
+                <a:latin typeface="Pretendard" pitchFamily="34" charset="0"/>
+                <a:ea typeface="Pretendard" pitchFamily="34" charset="-122"/>
+                <a:cs typeface="Pretendard" pitchFamily="34" charset="-120"/>
+              </a:rPr>
+              <a:t>◇ AI추정·가정</a:t>
+            </a:r>
+            <a:endParaRPr lang="en-US" sz="850" dirty="0"/>
+          </a:p>
+        </p:txBody>
+      </p:sp>
+      <p:sp>
+        <p:nvSpPr>
+          <p:cNvPr id="38" name="Text 36"/>
+          <p:cNvSpPr/>
+          <p:nvPr/>
+        </p:nvSpPr>
+        <p:spPr>
+          <a:xfrm>
+            <a:off x="1993392" y="4608576"/>
+            <a:ext cx="3840480" cy="329184"/>
+          </a:xfrm>
+          <a:prstGeom prst="rect">
+            <a:avLst/>
+          </a:prstGeom>
+          <a:noFill/>
+          <a:ln/>
+        </p:spPr>
+        <p:txBody>
+          <a:bodyPr wrap="square" lIns="0" tIns="0" rIns="0" bIns="0" rtlCol="0" anchor="ctr"/>
+          <a:lstStyle/>
+          <a:p>
+            <a:pPr indent="0" marL="0">
+              <a:buNone/>
+            </a:pPr>
+            <a:r>
+              <a:rPr lang="en-US" sz="900" dirty="0">
+                <a:solidFill>
+                  <a:srgbClr val="E2E8F0"/>
+                </a:solidFill>
+                <a:latin typeface="Pretendard" pitchFamily="34" charset="0"/>
+                <a:ea typeface="Pretendard" pitchFamily="34" charset="-122"/>
+                <a:cs typeface="Pretendard" pitchFamily="34" charset="-120"/>
+              </a:rPr>
+              <a:t>시나리오 분석 및 AI 모델 추정</a:t>
+            </a:r>
+            <a:endParaRPr lang="en-US" sz="900" dirty="0"/>
+          </a:p>
+        </p:txBody>
+      </p:sp>
+      <p:sp>
+        <p:nvSpPr>
+          <p:cNvPr id="39" name="Text 37"/>
+          <p:cNvSpPr/>
+          <p:nvPr/>
+        </p:nvSpPr>
+        <p:spPr>
+          <a:xfrm>
+            <a:off x="6492240" y="2395728"/>
+            <a:ext cx="5129784" cy="237744"/>
+          </a:xfrm>
+          <a:prstGeom prst="rect">
+            <a:avLst/>
+          </a:prstGeom>
+          <a:noFill/>
+          <a:ln/>
+        </p:spPr>
+        <p:txBody>
+          <a:bodyPr wrap="square" lIns="0" tIns="0" rIns="0" bIns="0" rtlCol="0" anchor="ctr"/>
+          <a:lstStyle/>
+          <a:p>
+            <a:pPr indent="0" marL="0">
+              <a:buNone/>
+            </a:pPr>
+            <a:r>
+              <a:rPr lang="en-US" sz="1100" b="1" dirty="0">
+                <a:solidFill>
+                  <a:srgbClr val="FFFFFF"/>
+                </a:solidFill>
+                <a:latin typeface="Pretendard" pitchFamily="34" charset="0"/>
+                <a:ea typeface="Pretendard" pitchFamily="34" charset="-122"/>
+                <a:cs typeface="Pretendard" pitchFamily="34" charset="-120"/>
+              </a:rPr>
+              <a:t>면책 조항</a:t>
+            </a:r>
+            <a:endParaRPr lang="en-US" sz="1100" dirty="0"/>
+          </a:p>
+        </p:txBody>
+      </p:sp>
+      <p:sp>
+        <p:nvSpPr>
+          <p:cNvPr id="40" name="Shape 38"/>
+          <p:cNvSpPr/>
+          <p:nvPr/>
+        </p:nvSpPr>
+        <p:spPr>
+          <a:xfrm>
+            <a:off x="6492240" y="2724912"/>
+            <a:ext cx="5129784" cy="1645920"/>
+          </a:xfrm>
+          <a:prstGeom prst="roundRect">
+            <a:avLst>
+              <a:gd name="adj" fmla="val 2222"/>
+            </a:avLst>
+          </a:prstGeom>
+          <a:solidFill>
+            <a:srgbClr val="1C2433"/>
+          </a:solidFill>
+          <a:ln/>
+        </p:spPr>
+      </p:sp>
+      <p:sp>
+        <p:nvSpPr>
+          <p:cNvPr id="41" name="Text 39"/>
+          <p:cNvSpPr/>
+          <p:nvPr/>
+        </p:nvSpPr>
+        <p:spPr>
+          <a:xfrm>
+            <a:off x="6675120" y="2834640"/>
+            <a:ext cx="4764024" cy="1426464"/>
           </a:xfrm>
           <a:prstGeom prst="rect">
             <a:avLst/>
@@ -3291,9 +3685,9 @@
               <a:buNone/>
             </a:pPr>
             <a:r>
-              <a:rPr lang="en-US" sz="930" dirty="0">
-                <a:solidFill>
-                  <a:srgbClr val="94A3B8"/>
+              <a:rPr lang="en-US" sz="850" dirty="0">
+                <a:solidFill>
+                  <a:srgbClr val="A0AEC0"/>
                 </a:solidFill>
                 <a:latin typeface="Pretendard" pitchFamily="34" charset="0"/>
                 <a:ea typeface="Pretendard" pitchFamily="34" charset="-122"/>
@@ -3301,40 +3695,40 @@
               </a:rPr>
               <a:t>본 자료는 투자 권유가 아니며, 기재된 정보의 정확성을 보증하지 않습니다.</a:t>
             </a:r>
-            <a:endParaRPr lang="en-US" sz="930" dirty="0"/>
-          </a:p>
-        </p:txBody>
-      </p:sp>
-      <p:sp>
-        <p:nvSpPr>
-          <p:cNvPr id="29" name="Shape 27"/>
-          <p:cNvSpPr/>
-          <p:nvPr/>
-        </p:nvSpPr>
-        <p:spPr>
-          <a:xfrm>
-            <a:off x="566928" y="5230368"/>
-            <a:ext cx="11057839" cy="640080"/>
+            <a:endParaRPr lang="en-US" sz="850" dirty="0"/>
+          </a:p>
+        </p:txBody>
+      </p:sp>
+      <p:sp>
+        <p:nvSpPr>
+          <p:cNvPr id="42" name="Shape 40"/>
+          <p:cNvSpPr/>
+          <p:nvPr/>
+        </p:nvSpPr>
+        <p:spPr>
+          <a:xfrm>
+            <a:off x="566928" y="5760720"/>
+            <a:ext cx="11057839" cy="457200"/>
           </a:xfrm>
           <a:prstGeom prst="rect">
             <a:avLst/>
           </a:prstGeom>
           <a:solidFill>
-            <a:srgbClr val="4F6A00"/>
+            <a:srgbClr val="977024"/>
           </a:solidFill>
           <a:ln/>
         </p:spPr>
       </p:sp>
       <p:sp>
         <p:nvSpPr>
-          <p:cNvPr id="30" name="Text 28"/>
-          <p:cNvSpPr/>
-          <p:nvPr/>
-        </p:nvSpPr>
-        <p:spPr>
-          <a:xfrm>
-            <a:off x="786384" y="5321808"/>
-            <a:ext cx="10618927" cy="457200"/>
+          <p:cNvPr id="43" name="Text 41"/>
+          <p:cNvSpPr/>
+          <p:nvPr/>
+        </p:nvSpPr>
+        <p:spPr>
+          <a:xfrm>
+            <a:off x="749808" y="5806440"/>
+            <a:ext cx="10692079" cy="365760"/>
           </a:xfrm>
           <a:prstGeom prst="rect">
             <a:avLst/>
@@ -3350,9 +3744,9 @@
               <a:buNone/>
             </a:pPr>
             <a:r>
-              <a:rPr lang="en-US" sz="1000" dirty="0">
-                <a:solidFill>
-                  <a:srgbClr val="E8F5CC"/>
+              <a:rPr lang="en-US" sz="900" dirty="0">
+                <a:solidFill>
+                  <a:srgbClr val="F3EBDA"/>
                 </a:solidFill>
                 <a:latin typeface="Pretendard" pitchFamily="34" charset="0"/>
                 <a:ea typeface="Pretendard" pitchFamily="34" charset="-122"/>
@@ -3360,71 +3754,87 @@
               </a:rPr>
               <a:t>NAI코리아 · </a:t>
             </a:r>
-            <a:endParaRPr lang="en-US" sz="1000" dirty="0"/>
-          </a:p>
-        </p:txBody>
-      </p:sp>
-      <p:sp>
-        <p:nvSpPr>
-          <p:cNvPr id="31" name="Text 29"/>
-          <p:cNvSpPr/>
-          <p:nvPr/>
-        </p:nvSpPr>
-        <p:spPr>
-          <a:xfrm>
-            <a:off x="566928" y="6419088"/>
-            <a:ext cx="11057839" cy="201168"/>
-          </a:xfrm>
-          <a:prstGeom prst="rect">
-            <a:avLst/>
-          </a:prstGeom>
-          <a:noFill/>
-          <a:ln/>
-        </p:spPr>
-        <p:txBody>
-          <a:bodyPr wrap="square" lIns="0" tIns="0" rIns="0" bIns="0" rtlCol="0" anchor="ctr"/>
-          <a:lstStyle/>
-          <a:p>
-            <a:pPr algn="ctr" indent="0" marL="0">
-              <a:buNone/>
-            </a:pPr>
-            <a:r>
-              <a:rPr lang="en-US" sz="750" dirty="0">
-                <a:solidFill>
-                  <a:srgbClr val="64748B"/>
+            <a:endParaRPr lang="en-US" sz="900" dirty="0"/>
+          </a:p>
+        </p:txBody>
+      </p:sp>
+      <p:sp>
+        <p:nvSpPr>
+          <p:cNvPr id="44" name="Text 42"/>
+          <p:cNvSpPr/>
+          <p:nvPr/>
+        </p:nvSpPr>
+        <p:spPr>
+          <a:xfrm>
+            <a:off x="566928" y="6382512"/>
+            <a:ext cx="7315200" cy="219456"/>
+          </a:xfrm>
+          <a:prstGeom prst="rect">
+            <a:avLst/>
+          </a:prstGeom>
+          <a:noFill/>
+          <a:ln/>
+        </p:spPr>
+        <p:txBody>
+          <a:bodyPr wrap="square" lIns="0" tIns="0" rIns="0" bIns="0" rtlCol="0" anchor="ctr"/>
+          <a:lstStyle/>
+          <a:p>
+            <a:pPr indent="0" marL="0">
+              <a:buNone/>
+            </a:pPr>
+            <a:r>
+              <a:rPr lang="en-US" sz="800" dirty="0">
+                <a:solidFill>
+                  <a:srgbClr val="718096"/>
                 </a:solidFill>
                 <a:latin typeface="Pretendard" pitchFamily="34" charset="0"/>
                 <a:ea typeface="Pretendard" pitchFamily="34" charset="-122"/>
                 <a:cs typeface="Pretendard" pitchFamily="34" charset="-120"/>
               </a:rPr>
-              <a:t>크리딜  ·    ·  10</a:t>
-            </a:r>
-            <a:endParaRPr lang="en-US" sz="750" dirty="0"/>
-          </a:p>
-        </p:txBody>
-      </p:sp>
-      <p:sp>
-        <p:nvSpPr>
-          <p:cNvPr id="32" name="Shape 30"/>
-          <p:cNvSpPr/>
-          <p:nvPr/>
-        </p:nvSpPr>
-        <p:spPr>
-          <a:xfrm>
-            <a:off x="4437172" y="6382512"/>
-            <a:ext cx="3317352" cy="0"/>
-          </a:xfrm>
-          <a:prstGeom prst="line">
-            <a:avLst/>
-          </a:prstGeom>
-          <a:noFill/>
-          <a:ln w="6350">
-            <a:solidFill>
-              <a:srgbClr val="6B8E00"/>
-            </a:solidFill>
-            <a:prstDash val="solid"/>
-          </a:ln>
-        </p:spPr>
+              <a:t>크리딜   |   </a:t>
+            </a:r>
+            <a:endParaRPr lang="en-US" sz="800" dirty="0"/>
+          </a:p>
+        </p:txBody>
+      </p:sp>
+      <p:sp>
+        <p:nvSpPr>
+          <p:cNvPr id="45" name="Text 43"/>
+          <p:cNvSpPr/>
+          <p:nvPr/>
+        </p:nvSpPr>
+        <p:spPr>
+          <a:xfrm>
+            <a:off x="10710367" y="6382512"/>
+            <a:ext cx="914400" cy="219456"/>
+          </a:xfrm>
+          <a:prstGeom prst="rect">
+            <a:avLst/>
+          </a:prstGeom>
+          <a:noFill/>
+          <a:ln/>
+        </p:spPr>
+        <p:txBody>
+          <a:bodyPr wrap="square" lIns="0" tIns="0" rIns="0" bIns="0" rtlCol="0" anchor="ctr"/>
+          <a:lstStyle/>
+          <a:p>
+            <a:pPr algn="r" indent="0" marL="0">
+              <a:buNone/>
+            </a:pPr>
+            <a:r>
+              <a:rPr lang="en-US" sz="900" b="1" dirty="0">
+                <a:solidFill>
+                  <a:srgbClr val="B98A2E"/>
+                </a:solidFill>
+                <a:latin typeface="Arial" pitchFamily="34" charset="0"/>
+                <a:ea typeface="Arial" pitchFamily="34" charset="-122"/>
+                <a:cs typeface="Arial" pitchFamily="34" charset="-120"/>
+              </a:rPr>
+              <a:t>10</a:t>
+            </a:r>
+            <a:endParaRPr lang="en-US" sz="900" dirty="0"/>
+          </a:p>
+        </p:txBody>
       </p:sp>
     </p:spTree>
   </p:cSld>
@@ -3466,14 +3876,14 @@
         </p:nvSpPr>
         <p:spPr>
           <a:xfrm>
-            <a:off x="566928" y="384048"/>
-            <a:ext cx="45720" cy="566928"/>
-          </a:xfrm>
-          <a:prstGeom prst="rect">
+            <a:off x="566928" y="457200"/>
+            <a:ext cx="384048" cy="384048"/>
+          </a:xfrm>
+          <a:prstGeom prst="ellipse">
             <a:avLst/>
           </a:prstGeom>
           <a:solidFill>
-            <a:srgbClr val="6B8E00"/>
+            <a:srgbClr val="B98A2E"/>
           </a:solidFill>
           <a:ln/>
         </p:spPr>
@@ -3486,32 +3896,71 @@
         </p:nvSpPr>
         <p:spPr>
           <a:xfrm>
-            <a:off x="749808" y="384048"/>
-            <a:ext cx="10874959" cy="182880"/>
-          </a:xfrm>
-          <a:prstGeom prst="rect">
-            <a:avLst/>
-          </a:prstGeom>
-          <a:noFill/>
-          <a:ln/>
-        </p:spPr>
-        <p:txBody>
-          <a:bodyPr wrap="square" lIns="0" tIns="0" rIns="0" bIns="0" rtlCol="0" anchor="ctr"/>
-          <a:lstStyle/>
-          <a:p>
-            <a:pPr indent="0" marL="0">
-              <a:buNone/>
-            </a:pPr>
-            <a:r>
-              <a:rPr lang="en-US" sz="950" b="1" spc="200" kern="0" dirty="0">
-                <a:solidFill>
-                  <a:srgbClr val="6B8E00"/>
+            <a:off x="566928" y="457200"/>
+            <a:ext cx="384048" cy="384048"/>
+          </a:xfrm>
+          <a:prstGeom prst="rect">
+            <a:avLst/>
+          </a:prstGeom>
+          <a:noFill/>
+          <a:ln/>
+        </p:spPr>
+        <p:txBody>
+          <a:bodyPr wrap="square" lIns="0" tIns="0" rIns="0" bIns="0" rtlCol="0" anchor="ctr"/>
+          <a:lstStyle/>
+          <a:p>
+            <a:pPr algn="ctr" indent="0" marL="0">
+              <a:buNone/>
+            </a:pPr>
+            <a:r>
+              <a:rPr lang="en-US" sz="1300" b="1" dirty="0">
+                <a:solidFill>
+                  <a:srgbClr val="FFFFFF"/>
                 </a:solidFill>
                 <a:latin typeface="Arial" pitchFamily="34" charset="0"/>
                 <a:ea typeface="Arial" pitchFamily="34" charset="-122"/>
                 <a:cs typeface="Arial" pitchFamily="34" charset="-120"/>
               </a:rPr>
-              <a:t>02  Summary</a:t>
+              <a:t>02</a:t>
+            </a:r>
+            <a:endParaRPr lang="en-US" sz="1300" dirty="0"/>
+          </a:p>
+        </p:txBody>
+      </p:sp>
+      <p:sp>
+        <p:nvSpPr>
+          <p:cNvPr id="4" name="Text 2"/>
+          <p:cNvSpPr/>
+          <p:nvPr/>
+        </p:nvSpPr>
+        <p:spPr>
+          <a:xfrm>
+            <a:off x="1133856" y="457200"/>
+            <a:ext cx="10490911" cy="182880"/>
+          </a:xfrm>
+          <a:prstGeom prst="rect">
+            <a:avLst/>
+          </a:prstGeom>
+          <a:noFill/>
+          <a:ln/>
+        </p:spPr>
+        <p:txBody>
+          <a:bodyPr wrap="square" lIns="0" tIns="0" rIns="0" bIns="0" rtlCol="0" anchor="ctr"/>
+          <a:lstStyle/>
+          <a:p>
+            <a:pPr indent="0" marL="0">
+              <a:buNone/>
+            </a:pPr>
+            <a:r>
+              <a:rPr lang="en-US" sz="950" b="1" spc="200" kern="0" dirty="0">
+                <a:solidFill>
+                  <a:srgbClr val="B98A2E"/>
+                </a:solidFill>
+                <a:latin typeface="Arial" pitchFamily="34" charset="0"/>
+                <a:ea typeface="Arial" pitchFamily="34" charset="-122"/>
+                <a:cs typeface="Arial" pitchFamily="34" charset="-120"/>
+              </a:rPr>
+              <a:t>Summary</a:t>
             </a:r>
             <a:endParaRPr lang="en-US" sz="950" dirty="0"/>
           </a:p>
@@ -3519,14 +3968,14 @@
       </p:sp>
       <p:sp>
         <p:nvSpPr>
-          <p:cNvPr id="4" name="Text 2"/>
-          <p:cNvSpPr/>
-          <p:nvPr/>
-        </p:nvSpPr>
-        <p:spPr>
-          <a:xfrm>
-            <a:off x="749808" y="566928"/>
-            <a:ext cx="10874959" cy="384048"/>
+          <p:cNvPr id="5" name="Text 3"/>
+          <p:cNvSpPr/>
+          <p:nvPr/>
+        </p:nvSpPr>
+        <p:spPr>
+          <a:xfrm>
+            <a:off x="1133856" y="640080"/>
+            <a:ext cx="10490911" cy="365760"/>
           </a:xfrm>
           <a:prstGeom prst="rect">
             <a:avLst/>
@@ -3542,9 +3991,9 @@
               <a:buNone/>
             </a:pPr>
             <a:r>
-              <a:rPr lang="en-US" sz="2200" b="1" dirty="0">
-                <a:solidFill>
-                  <a:srgbClr val="0F172A"/>
+              <a:rPr lang="en-US" sz="2300" b="1" dirty="0">
+                <a:solidFill>
+                  <a:srgbClr val="10161F"/>
                 </a:solidFill>
                 <a:latin typeface="Pretendard" pitchFamily="34" charset="0"/>
                 <a:ea typeface="Pretendard" pitchFamily="34" charset="-122"/>
@@ -3552,13 +4001,13 @@
               </a:rPr>
               <a:t>핵심요약</a:t>
             </a:r>
-            <a:endParaRPr lang="en-US" sz="2200" dirty="0"/>
-          </a:p>
-        </p:txBody>
-      </p:sp>
-      <p:sp>
-        <p:nvSpPr>
-          <p:cNvPr id="5" name="Text 3"/>
+            <a:endParaRPr lang="en-US" sz="2300" dirty="0"/>
+          </a:p>
+        </p:txBody>
+      </p:sp>
+      <p:sp>
+        <p:nvSpPr>
+          <p:cNvPr id="6" name="Text 4"/>
           <p:cNvSpPr/>
           <p:nvPr/>
         </p:nvSpPr>
@@ -3583,7 +4032,7 @@
             <a:r>
               <a:rPr lang="en-US" sz="1500" b="1" dirty="0">
                 <a:solidFill>
-                  <a:srgbClr val="0F172A"/>
+                  <a:srgbClr val="10161F"/>
                 </a:solidFill>
                 <a:latin typeface="Pretendard" pitchFamily="34" charset="0"/>
                 <a:ea typeface="Pretendard" pitchFamily="34" charset="-122"/>
@@ -3597,7 +4046,7 @@
       </p:sp>
       <p:sp>
         <p:nvSpPr>
-          <p:cNvPr id="6" name="Shape 4"/>
+          <p:cNvPr id="7" name="Shape 5"/>
           <p:cNvSpPr/>
           <p:nvPr/>
         </p:nvSpPr>
@@ -3612,7 +4061,7 @@
           <a:noFill/>
           <a:ln w="19050">
             <a:solidFill>
-              <a:srgbClr val="6B8E00"/>
+              <a:srgbClr val="B98A2E"/>
             </a:solidFill>
             <a:prstDash val="solid"/>
           </a:ln>
@@ -3620,7 +4069,7 @@
       </p:sp>
       <p:sp>
         <p:nvSpPr>
-          <p:cNvPr id="7" name="Shape 5"/>
+          <p:cNvPr id="8" name="Shape 6"/>
           <p:cNvSpPr/>
           <p:nvPr/>
         </p:nvSpPr>
@@ -3635,11 +4084,11 @@
             </a:avLst>
           </a:prstGeom>
           <a:solidFill>
-            <a:srgbClr val="F8FAFC"/>
+            <a:srgbClr val="F7FAFC"/>
           </a:solidFill>
           <a:ln w="6350">
             <a:solidFill>
-              <a:srgbClr val="CBD5E1"/>
+              <a:srgbClr val="CBD5E0"/>
             </a:solidFill>
             <a:prstDash val="solid"/>
           </a:ln>
@@ -3647,7 +4096,7 @@
       </p:sp>
       <p:sp>
         <p:nvSpPr>
-          <p:cNvPr id="8" name="Text 6"/>
+          <p:cNvPr id="9" name="Text 7"/>
           <p:cNvSpPr/>
           <p:nvPr/>
         </p:nvSpPr>
@@ -3672,7 +4121,7 @@
             <a:r>
               <a:rPr lang="en-US" sz="950" dirty="0">
                 <a:solidFill>
-                  <a:srgbClr val="64748B"/>
+                  <a:srgbClr val="718096"/>
                 </a:solidFill>
                 <a:latin typeface="Pretendard" pitchFamily="34" charset="0"/>
                 <a:ea typeface="Pretendard" pitchFamily="34" charset="-122"/>
@@ -3686,7 +4135,7 @@
       </p:sp>
       <p:sp>
         <p:nvSpPr>
-          <p:cNvPr id="9" name="Text 7"/>
+          <p:cNvPr id="10" name="Text 8"/>
           <p:cNvSpPr/>
           <p:nvPr/>
         </p:nvSpPr>
@@ -3713,7 +4162,7 @@
             <a:r>
               <a:rPr lang="en-US" sz="2000" b="1" dirty="0">
                 <a:solidFill>
-                  <a:srgbClr val="0F172A"/>
+                  <a:srgbClr val="10161F"/>
                 </a:solidFill>
                 <a:latin typeface="Pretendard" pitchFamily="34" charset="0"/>
                 <a:ea typeface="Pretendard" pitchFamily="34" charset="-122"/>
@@ -3727,7 +4176,7 @@
       </p:sp>
       <p:sp>
         <p:nvSpPr>
-          <p:cNvPr id="10" name="Shape 8"/>
+          <p:cNvPr id="11" name="Shape 9"/>
           <p:cNvSpPr/>
           <p:nvPr/>
         </p:nvSpPr>
@@ -3742,11 +4191,11 @@
             </a:avLst>
           </a:prstGeom>
           <a:solidFill>
-            <a:srgbClr val="F8FAFC"/>
+            <a:srgbClr val="F7FAFC"/>
           </a:solidFill>
           <a:ln w="6350">
             <a:solidFill>
-              <a:srgbClr val="CBD5E1"/>
+              <a:srgbClr val="CBD5E0"/>
             </a:solidFill>
             <a:prstDash val="solid"/>
           </a:ln>
@@ -3754,7 +4203,7 @@
       </p:sp>
       <p:sp>
         <p:nvSpPr>
-          <p:cNvPr id="11" name="Text 9"/>
+          <p:cNvPr id="12" name="Text 10"/>
           <p:cNvSpPr/>
           <p:nvPr/>
         </p:nvSpPr>
@@ -3779,7 +4228,7 @@
             <a:r>
               <a:rPr lang="en-US" sz="950" dirty="0">
                 <a:solidFill>
-                  <a:srgbClr val="64748B"/>
+                  <a:srgbClr val="718096"/>
                 </a:solidFill>
                 <a:latin typeface="Pretendard" pitchFamily="34" charset="0"/>
                 <a:ea typeface="Pretendard" pitchFamily="34" charset="-122"/>
@@ -3793,7 +4242,7 @@
       </p:sp>
       <p:sp>
         <p:nvSpPr>
-          <p:cNvPr id="12" name="Text 10"/>
+          <p:cNvPr id="13" name="Text 11"/>
           <p:cNvSpPr/>
           <p:nvPr/>
         </p:nvSpPr>
@@ -3820,7 +4269,7 @@
             <a:r>
               <a:rPr lang="en-US" sz="2000" b="1" dirty="0">
                 <a:solidFill>
-                  <a:srgbClr val="0F172A"/>
+                  <a:srgbClr val="10161F"/>
                 </a:solidFill>
                 <a:latin typeface="Pretendard" pitchFamily="34" charset="0"/>
                 <a:ea typeface="Pretendard" pitchFamily="34" charset="-122"/>
@@ -3834,65 +4283,516 @@
       </p:sp>
       <p:sp>
         <p:nvSpPr>
-          <p:cNvPr id="13" name="Text 11"/>
-          <p:cNvSpPr/>
-          <p:nvPr/>
-        </p:nvSpPr>
-        <p:spPr>
-          <a:xfrm>
-            <a:off x="566928" y="6419088"/>
-            <a:ext cx="11057839" cy="201168"/>
-          </a:xfrm>
-          <a:prstGeom prst="rect">
-            <a:avLst/>
-          </a:prstGeom>
-          <a:noFill/>
-          <a:ln/>
-        </p:spPr>
-        <p:txBody>
-          <a:bodyPr wrap="square" lIns="0" tIns="0" rIns="0" bIns="0" rtlCol="0" anchor="ctr"/>
-          <a:lstStyle/>
-          <a:p>
-            <a:pPr algn="ctr" indent="0" marL="0">
-              <a:buNone/>
-            </a:pPr>
-            <a:r>
-              <a:rPr lang="en-US" sz="750" dirty="0">
-                <a:solidFill>
-                  <a:srgbClr val="64748B"/>
+          <p:cNvPr id="14" name="Text 12"/>
+          <p:cNvSpPr/>
+          <p:nvPr/>
+        </p:nvSpPr>
+        <p:spPr>
+          <a:xfrm>
+            <a:off x="566928" y="3502152"/>
+            <a:ext cx="11057839" cy="274320"/>
+          </a:xfrm>
+          <a:prstGeom prst="rect">
+            <a:avLst/>
+          </a:prstGeom>
+          <a:noFill/>
+          <a:ln/>
+        </p:spPr>
+        <p:txBody>
+          <a:bodyPr wrap="square" lIns="0" tIns="0" rIns="0" bIns="0" rtlCol="0" anchor="ctr"/>
+          <a:lstStyle/>
+          <a:p>
+            <a:pPr indent="0" marL="0">
+              <a:buNone/>
+            </a:pPr>
+            <a:r>
+              <a:rPr lang="en-US" sz="1250" b="1" dirty="0">
+                <a:solidFill>
+                  <a:srgbClr val="977024"/>
                 </a:solidFill>
                 <a:latin typeface="Pretendard" pitchFamily="34" charset="0"/>
                 <a:ea typeface="Pretendard" pitchFamily="34" charset="-122"/>
                 <a:cs typeface="Pretendard" pitchFamily="34" charset="-120"/>
               </a:rPr>
-              <a:t>크리딜  ·    ·  2</a:t>
-            </a:r>
-            <a:endParaRPr lang="en-US" sz="750" dirty="0"/>
-          </a:p>
-        </p:txBody>
-      </p:sp>
-      <p:sp>
-        <p:nvSpPr>
-          <p:cNvPr id="14" name="Shape 12"/>
-          <p:cNvSpPr/>
-          <p:nvPr/>
-        </p:nvSpPr>
-        <p:spPr>
-          <a:xfrm>
-            <a:off x="4437172" y="6382512"/>
-            <a:ext cx="3317352" cy="0"/>
-          </a:xfrm>
-          <a:prstGeom prst="line">
-            <a:avLst/>
-          </a:prstGeom>
-          <a:noFill/>
-          <a:ln w="6350">
+              <a:t>3대 핵심 투자 포인트 (Investment Highlights)</a:t>
+            </a:r>
+            <a:endParaRPr lang="en-US" sz="1250" dirty="0"/>
+          </a:p>
+        </p:txBody>
+      </p:sp>
+      <p:sp>
+        <p:nvSpPr>
+          <p:cNvPr id="15" name="Shape 13"/>
+          <p:cNvSpPr/>
+          <p:nvPr/>
+        </p:nvSpPr>
+        <p:spPr>
+          <a:xfrm>
+            <a:off x="566928" y="3831336"/>
+            <a:ext cx="11057839" cy="585216"/>
+          </a:xfrm>
+          <a:prstGeom prst="roundRect">
+            <a:avLst>
+              <a:gd name="adj" fmla="val 7813"/>
+            </a:avLst>
+          </a:prstGeom>
+          <a:solidFill>
+            <a:srgbClr val="F8F9FA"/>
+          </a:solidFill>
+          <a:ln w="7620">
             <a:solidFill>
-              <a:srgbClr val="6B8E00"/>
+              <a:srgbClr val="E2E8F0"/>
             </a:solidFill>
             <a:prstDash val="solid"/>
           </a:ln>
         </p:spPr>
+      </p:sp>
+      <p:sp>
+        <p:nvSpPr>
+          <p:cNvPr id="16" name="Shape 14"/>
+          <p:cNvSpPr/>
+          <p:nvPr/>
+        </p:nvSpPr>
+        <p:spPr>
+          <a:xfrm>
+            <a:off x="676656" y="3941064"/>
+            <a:ext cx="411480" cy="365760"/>
+          </a:xfrm>
+          <a:prstGeom prst="roundRect">
+            <a:avLst>
+              <a:gd name="adj" fmla="val 10000"/>
+            </a:avLst>
+          </a:prstGeom>
+          <a:solidFill>
+            <a:srgbClr val="F3EBDA"/>
+          </a:solidFill>
+          <a:ln w="6350">
+            <a:solidFill>
+              <a:srgbClr val="D9B668"/>
+            </a:solidFill>
+            <a:prstDash val="solid"/>
+          </a:ln>
+        </p:spPr>
+      </p:sp>
+      <p:sp>
+        <p:nvSpPr>
+          <p:cNvPr id="17" name="Text 15"/>
+          <p:cNvSpPr/>
+          <p:nvPr/>
+        </p:nvSpPr>
+        <p:spPr>
+          <a:xfrm>
+            <a:off x="676656" y="3941064"/>
+            <a:ext cx="411480" cy="365760"/>
+          </a:xfrm>
+          <a:prstGeom prst="rect">
+            <a:avLst/>
+          </a:prstGeom>
+          <a:noFill/>
+          <a:ln/>
+        </p:spPr>
+        <p:txBody>
+          <a:bodyPr wrap="square" lIns="0" tIns="0" rIns="0" bIns="0" rtlCol="0" anchor="ctr"/>
+          <a:lstStyle/>
+          <a:p>
+            <a:pPr algn="ctr" indent="0" marL="0">
+              <a:buNone/>
+            </a:pPr>
+            <a:r>
+              <a:rPr lang="en-US" sz="1000" b="1" dirty="0">
+                <a:solidFill>
+                  <a:srgbClr val="977024"/>
+                </a:solidFill>
+                <a:latin typeface="Arial" pitchFamily="34" charset="0"/>
+                <a:ea typeface="Arial" pitchFamily="34" charset="-122"/>
+                <a:cs typeface="Arial" pitchFamily="34" charset="-120"/>
+              </a:rPr>
+              <a:t>01</a:t>
+            </a:r>
+            <a:endParaRPr lang="en-US" sz="1000" dirty="0"/>
+          </a:p>
+        </p:txBody>
+      </p:sp>
+      <p:sp>
+        <p:nvSpPr>
+          <p:cNvPr id="18" name="Text 16"/>
+          <p:cNvSpPr/>
+          <p:nvPr/>
+        </p:nvSpPr>
+        <p:spPr>
+          <a:xfrm>
+            <a:off x="1207008" y="3904488"/>
+            <a:ext cx="10280599" cy="438912"/>
+          </a:xfrm>
+          <a:prstGeom prst="rect">
+            <a:avLst/>
+          </a:prstGeom>
+          <a:noFill/>
+          <a:ln/>
+        </p:spPr>
+        <p:txBody>
+          <a:bodyPr wrap="square" lIns="0" tIns="0" rIns="0" bIns="0" rtlCol="0" anchor="ctr"/>
+          <a:lstStyle/>
+          <a:p>
+            <a:pPr indent="0" marL="0">
+              <a:buNone/>
+            </a:pPr>
+            <a:r>
+              <a:rPr lang="en-US" sz="1150" dirty="0">
+                <a:solidFill>
+                  <a:srgbClr val="10161F"/>
+                </a:solidFill>
+                <a:latin typeface="Pretendard" pitchFamily="34" charset="0"/>
+                <a:ea typeface="Pretendard" pitchFamily="34" charset="-122"/>
+                <a:cs typeface="Pretendard" pitchFamily="34" charset="-120"/>
+              </a:rPr>
+              <a:t>원금 안전판: 핵심권역 핵심 입지 및 우량 대지 지분 가치로 하방 경직성 확보</a:t>
+            </a:r>
+            <a:endParaRPr lang="en-US" sz="1150" dirty="0"/>
+          </a:p>
+        </p:txBody>
+      </p:sp>
+      <p:sp>
+        <p:nvSpPr>
+          <p:cNvPr id="19" name="Shape 17"/>
+          <p:cNvSpPr/>
+          <p:nvPr/>
+        </p:nvSpPr>
+        <p:spPr>
+          <a:xfrm>
+            <a:off x="566928" y="4526280"/>
+            <a:ext cx="11057839" cy="585216"/>
+          </a:xfrm>
+          <a:prstGeom prst="roundRect">
+            <a:avLst>
+              <a:gd name="adj" fmla="val 7813"/>
+            </a:avLst>
+          </a:prstGeom>
+          <a:solidFill>
+            <a:srgbClr val="F8F9FA"/>
+          </a:solidFill>
+          <a:ln w="7620">
+            <a:solidFill>
+              <a:srgbClr val="E2E8F0"/>
+            </a:solidFill>
+            <a:prstDash val="solid"/>
+          </a:ln>
+        </p:spPr>
+      </p:sp>
+      <p:sp>
+        <p:nvSpPr>
+          <p:cNvPr id="20" name="Shape 18"/>
+          <p:cNvSpPr/>
+          <p:nvPr/>
+        </p:nvSpPr>
+        <p:spPr>
+          <a:xfrm>
+            <a:off x="676656" y="4636008"/>
+            <a:ext cx="411480" cy="365760"/>
+          </a:xfrm>
+          <a:prstGeom prst="roundRect">
+            <a:avLst>
+              <a:gd name="adj" fmla="val 10000"/>
+            </a:avLst>
+          </a:prstGeom>
+          <a:solidFill>
+            <a:srgbClr val="F3EBDA"/>
+          </a:solidFill>
+          <a:ln w="6350">
+            <a:solidFill>
+              <a:srgbClr val="D9B668"/>
+            </a:solidFill>
+            <a:prstDash val="solid"/>
+          </a:ln>
+        </p:spPr>
+      </p:sp>
+      <p:sp>
+        <p:nvSpPr>
+          <p:cNvPr id="21" name="Text 19"/>
+          <p:cNvSpPr/>
+          <p:nvPr/>
+        </p:nvSpPr>
+        <p:spPr>
+          <a:xfrm>
+            <a:off x="676656" y="4636008"/>
+            <a:ext cx="411480" cy="365760"/>
+          </a:xfrm>
+          <a:prstGeom prst="rect">
+            <a:avLst/>
+          </a:prstGeom>
+          <a:noFill/>
+          <a:ln/>
+        </p:spPr>
+        <p:txBody>
+          <a:bodyPr wrap="square" lIns="0" tIns="0" rIns="0" bIns="0" rtlCol="0" anchor="ctr"/>
+          <a:lstStyle/>
+          <a:p>
+            <a:pPr algn="ctr" indent="0" marL="0">
+              <a:buNone/>
+            </a:pPr>
+            <a:r>
+              <a:rPr lang="en-US" sz="1000" b="1" dirty="0">
+                <a:solidFill>
+                  <a:srgbClr val="977024"/>
+                </a:solidFill>
+                <a:latin typeface="Arial" pitchFamily="34" charset="0"/>
+                <a:ea typeface="Arial" pitchFamily="34" charset="-122"/>
+                <a:cs typeface="Arial" pitchFamily="34" charset="-120"/>
+              </a:rPr>
+              <a:t>02</a:t>
+            </a:r>
+            <a:endParaRPr lang="en-US" sz="1000" dirty="0"/>
+          </a:p>
+        </p:txBody>
+      </p:sp>
+      <p:sp>
+        <p:nvSpPr>
+          <p:cNvPr id="22" name="Text 20"/>
+          <p:cNvSpPr/>
+          <p:nvPr/>
+        </p:nvSpPr>
+        <p:spPr>
+          <a:xfrm>
+            <a:off x="1207008" y="4599432"/>
+            <a:ext cx="10280599" cy="438912"/>
+          </a:xfrm>
+          <a:prstGeom prst="rect">
+            <a:avLst/>
+          </a:prstGeom>
+          <a:noFill/>
+          <a:ln/>
+        </p:spPr>
+        <p:txBody>
+          <a:bodyPr wrap="square" lIns="0" tIns="0" rIns="0" bIns="0" rtlCol="0" anchor="ctr"/>
+          <a:lstStyle/>
+          <a:p>
+            <a:pPr indent="0" marL="0">
+              <a:buNone/>
+            </a:pPr>
+            <a:r>
+              <a:rPr lang="en-US" sz="1150" dirty="0">
+                <a:solidFill>
+                  <a:srgbClr val="10161F"/>
+                </a:solidFill>
+                <a:latin typeface="Pretendard" pitchFamily="34" charset="0"/>
+                <a:ea typeface="Pretendard" pitchFamily="34" charset="-122"/>
+                <a:cs typeface="Pretendard" pitchFamily="34" charset="-120"/>
+              </a:rPr>
+              <a:t>수익 안정성: 매매 시장 적정가 수준 대비 안정적 월 임대수익 창출 기반</a:t>
+            </a:r>
+            <a:endParaRPr lang="en-US" sz="1150" dirty="0"/>
+          </a:p>
+        </p:txBody>
+      </p:sp>
+      <p:sp>
+        <p:nvSpPr>
+          <p:cNvPr id="23" name="Shape 21"/>
+          <p:cNvSpPr/>
+          <p:nvPr/>
+        </p:nvSpPr>
+        <p:spPr>
+          <a:xfrm>
+            <a:off x="566928" y="5221224"/>
+            <a:ext cx="11057839" cy="585216"/>
+          </a:xfrm>
+          <a:prstGeom prst="roundRect">
+            <a:avLst>
+              <a:gd name="adj" fmla="val 7813"/>
+            </a:avLst>
+          </a:prstGeom>
+          <a:solidFill>
+            <a:srgbClr val="F8F9FA"/>
+          </a:solidFill>
+          <a:ln w="7620">
+            <a:solidFill>
+              <a:srgbClr val="E2E8F0"/>
+            </a:solidFill>
+            <a:prstDash val="solid"/>
+          </a:ln>
+        </p:spPr>
+      </p:sp>
+      <p:sp>
+        <p:nvSpPr>
+          <p:cNvPr id="24" name="Shape 22"/>
+          <p:cNvSpPr/>
+          <p:nvPr/>
+        </p:nvSpPr>
+        <p:spPr>
+          <a:xfrm>
+            <a:off x="676656" y="5330952"/>
+            <a:ext cx="411480" cy="365760"/>
+          </a:xfrm>
+          <a:prstGeom prst="roundRect">
+            <a:avLst>
+              <a:gd name="adj" fmla="val 10000"/>
+            </a:avLst>
+          </a:prstGeom>
+          <a:solidFill>
+            <a:srgbClr val="F3EBDA"/>
+          </a:solidFill>
+          <a:ln w="6350">
+            <a:solidFill>
+              <a:srgbClr val="D9B668"/>
+            </a:solidFill>
+            <a:prstDash val="solid"/>
+          </a:ln>
+        </p:spPr>
+      </p:sp>
+      <p:sp>
+        <p:nvSpPr>
+          <p:cNvPr id="25" name="Text 23"/>
+          <p:cNvSpPr/>
+          <p:nvPr/>
+        </p:nvSpPr>
+        <p:spPr>
+          <a:xfrm>
+            <a:off x="676656" y="5330952"/>
+            <a:ext cx="411480" cy="365760"/>
+          </a:xfrm>
+          <a:prstGeom prst="rect">
+            <a:avLst/>
+          </a:prstGeom>
+          <a:noFill/>
+          <a:ln/>
+        </p:spPr>
+        <p:txBody>
+          <a:bodyPr wrap="square" lIns="0" tIns="0" rIns="0" bIns="0" rtlCol="0" anchor="ctr"/>
+          <a:lstStyle/>
+          <a:p>
+            <a:pPr algn="ctr" indent="0" marL="0">
+              <a:buNone/>
+            </a:pPr>
+            <a:r>
+              <a:rPr lang="en-US" sz="1000" b="1" dirty="0">
+                <a:solidFill>
+                  <a:srgbClr val="977024"/>
+                </a:solidFill>
+                <a:latin typeface="Arial" pitchFamily="34" charset="0"/>
+                <a:ea typeface="Arial" pitchFamily="34" charset="-122"/>
+                <a:cs typeface="Arial" pitchFamily="34" charset="-120"/>
+              </a:rPr>
+              <a:t>03</a:t>
+            </a:r>
+            <a:endParaRPr lang="en-US" sz="1000" dirty="0"/>
+          </a:p>
+        </p:txBody>
+      </p:sp>
+      <p:sp>
+        <p:nvSpPr>
+          <p:cNvPr id="26" name="Text 24"/>
+          <p:cNvSpPr/>
+          <p:nvPr/>
+        </p:nvSpPr>
+        <p:spPr>
+          <a:xfrm>
+            <a:off x="1207008" y="5294376"/>
+            <a:ext cx="10280599" cy="438912"/>
+          </a:xfrm>
+          <a:prstGeom prst="rect">
+            <a:avLst/>
+          </a:prstGeom>
+          <a:noFill/>
+          <a:ln/>
+        </p:spPr>
+        <p:txBody>
+          <a:bodyPr wrap="square" lIns="0" tIns="0" rIns="0" bIns="0" rtlCol="0" anchor="ctr"/>
+          <a:lstStyle/>
+          <a:p>
+            <a:pPr indent="0" marL="0">
+              <a:buNone/>
+            </a:pPr>
+            <a:r>
+              <a:rPr lang="en-US" sz="1150" dirty="0">
+                <a:solidFill>
+                  <a:srgbClr val="10161F"/>
+                </a:solidFill>
+                <a:latin typeface="Pretendard" pitchFamily="34" charset="0"/>
+                <a:ea typeface="Pretendard" pitchFamily="34" charset="-122"/>
+                <a:cs typeface="Pretendard" pitchFamily="34" charset="-120"/>
+              </a:rPr>
+              <a:t>미래 가치: 향후 권역 지가 상승 및 공법상 밸류업을 통한 자본이득 실현 가능</a:t>
+            </a:r>
+            <a:endParaRPr lang="en-US" sz="1150" dirty="0"/>
+          </a:p>
+        </p:txBody>
+      </p:sp>
+      <p:sp>
+        <p:nvSpPr>
+          <p:cNvPr id="27" name="Text 25"/>
+          <p:cNvSpPr/>
+          <p:nvPr/>
+        </p:nvSpPr>
+        <p:spPr>
+          <a:xfrm>
+            <a:off x="566928" y="6382512"/>
+            <a:ext cx="7315200" cy="219456"/>
+          </a:xfrm>
+          <a:prstGeom prst="rect">
+            <a:avLst/>
+          </a:prstGeom>
+          <a:noFill/>
+          <a:ln/>
+        </p:spPr>
+        <p:txBody>
+          <a:bodyPr wrap="square" lIns="0" tIns="0" rIns="0" bIns="0" rtlCol="0" anchor="ctr"/>
+          <a:lstStyle/>
+          <a:p>
+            <a:pPr indent="0" marL="0">
+              <a:buNone/>
+            </a:pPr>
+            <a:r>
+              <a:rPr lang="en-US" sz="800" dirty="0">
+                <a:solidFill>
+                  <a:srgbClr val="718096"/>
+                </a:solidFill>
+                <a:latin typeface="Pretendard" pitchFamily="34" charset="0"/>
+                <a:ea typeface="Pretendard" pitchFamily="34" charset="-122"/>
+                <a:cs typeface="Pretendard" pitchFamily="34" charset="-120"/>
+              </a:rPr>
+              <a:t>크리딜   |   </a:t>
+            </a:r>
+            <a:endParaRPr lang="en-US" sz="800" dirty="0"/>
+          </a:p>
+        </p:txBody>
+      </p:sp>
+      <p:sp>
+        <p:nvSpPr>
+          <p:cNvPr id="28" name="Text 26"/>
+          <p:cNvSpPr/>
+          <p:nvPr/>
+        </p:nvSpPr>
+        <p:spPr>
+          <a:xfrm>
+            <a:off x="10710367" y="6382512"/>
+            <a:ext cx="914400" cy="219456"/>
+          </a:xfrm>
+          <a:prstGeom prst="rect">
+            <a:avLst/>
+          </a:prstGeom>
+          <a:noFill/>
+          <a:ln/>
+        </p:spPr>
+        <p:txBody>
+          <a:bodyPr wrap="square" lIns="0" tIns="0" rIns="0" bIns="0" rtlCol="0" anchor="ctr"/>
+          <a:lstStyle/>
+          <a:p>
+            <a:pPr algn="r" indent="0" marL="0">
+              <a:buNone/>
+            </a:pPr>
+            <a:r>
+              <a:rPr lang="en-US" sz="900" b="1" dirty="0">
+                <a:solidFill>
+                  <a:srgbClr val="B98A2E"/>
+                </a:solidFill>
+                <a:latin typeface="Arial" pitchFamily="34" charset="0"/>
+                <a:ea typeface="Arial" pitchFamily="34" charset="-122"/>
+                <a:cs typeface="Arial" pitchFamily="34" charset="-120"/>
+              </a:rPr>
+              <a:t>2</a:t>
+            </a:r>
+            <a:endParaRPr lang="en-US" sz="900" dirty="0"/>
+          </a:p>
+        </p:txBody>
       </p:sp>
     </p:spTree>
   </p:cSld>
@@ -3934,14 +4834,14 @@
         </p:nvSpPr>
         <p:spPr>
           <a:xfrm>
-            <a:off x="566928" y="384048"/>
-            <a:ext cx="45720" cy="566928"/>
-          </a:xfrm>
-          <a:prstGeom prst="rect">
+            <a:off x="566928" y="457200"/>
+            <a:ext cx="384048" cy="384048"/>
+          </a:xfrm>
+          <a:prstGeom prst="ellipse">
             <a:avLst/>
           </a:prstGeom>
           <a:solidFill>
-            <a:srgbClr val="6B8E00"/>
+            <a:srgbClr val="B98A2E"/>
           </a:solidFill>
           <a:ln/>
         </p:spPr>
@@ -3954,32 +4854,71 @@
         </p:nvSpPr>
         <p:spPr>
           <a:xfrm>
-            <a:off x="749808" y="384048"/>
-            <a:ext cx="10874959" cy="182880"/>
-          </a:xfrm>
-          <a:prstGeom prst="rect">
-            <a:avLst/>
-          </a:prstGeom>
-          <a:noFill/>
-          <a:ln/>
-        </p:spPr>
-        <p:txBody>
-          <a:bodyPr wrap="square" lIns="0" tIns="0" rIns="0" bIns="0" rtlCol="0" anchor="ctr"/>
-          <a:lstStyle/>
-          <a:p>
-            <a:pPr indent="0" marL="0">
-              <a:buNone/>
-            </a:pPr>
-            <a:r>
-              <a:rPr lang="en-US" sz="950" b="1" spc="200" kern="0" dirty="0">
-                <a:solidFill>
-                  <a:srgbClr val="6B8E00"/>
+            <a:off x="566928" y="457200"/>
+            <a:ext cx="384048" cy="384048"/>
+          </a:xfrm>
+          <a:prstGeom prst="rect">
+            <a:avLst/>
+          </a:prstGeom>
+          <a:noFill/>
+          <a:ln/>
+        </p:spPr>
+        <p:txBody>
+          <a:bodyPr wrap="square" lIns="0" tIns="0" rIns="0" bIns="0" rtlCol="0" anchor="ctr"/>
+          <a:lstStyle/>
+          <a:p>
+            <a:pPr algn="ctr" indent="0" marL="0">
+              <a:buNone/>
+            </a:pPr>
+            <a:r>
+              <a:rPr lang="en-US" sz="1300" b="1" dirty="0">
+                <a:solidFill>
+                  <a:srgbClr val="FFFFFF"/>
                 </a:solidFill>
                 <a:latin typeface="Arial" pitchFamily="34" charset="0"/>
                 <a:ea typeface="Arial" pitchFamily="34" charset="-122"/>
                 <a:cs typeface="Arial" pitchFamily="34" charset="-120"/>
               </a:rPr>
-              <a:t>03  Location</a:t>
+              <a:t>03</a:t>
+            </a:r>
+            <a:endParaRPr lang="en-US" sz="1300" dirty="0"/>
+          </a:p>
+        </p:txBody>
+      </p:sp>
+      <p:sp>
+        <p:nvSpPr>
+          <p:cNvPr id="4" name="Text 2"/>
+          <p:cNvSpPr/>
+          <p:nvPr/>
+        </p:nvSpPr>
+        <p:spPr>
+          <a:xfrm>
+            <a:off x="1133856" y="457200"/>
+            <a:ext cx="10490911" cy="182880"/>
+          </a:xfrm>
+          <a:prstGeom prst="rect">
+            <a:avLst/>
+          </a:prstGeom>
+          <a:noFill/>
+          <a:ln/>
+        </p:spPr>
+        <p:txBody>
+          <a:bodyPr wrap="square" lIns="0" tIns="0" rIns="0" bIns="0" rtlCol="0" anchor="ctr"/>
+          <a:lstStyle/>
+          <a:p>
+            <a:pPr indent="0" marL="0">
+              <a:buNone/>
+            </a:pPr>
+            <a:r>
+              <a:rPr lang="en-US" sz="950" b="1" spc="200" kern="0" dirty="0">
+                <a:solidFill>
+                  <a:srgbClr val="B98A2E"/>
+                </a:solidFill>
+                <a:latin typeface="Arial" pitchFamily="34" charset="0"/>
+                <a:ea typeface="Arial" pitchFamily="34" charset="-122"/>
+                <a:cs typeface="Arial" pitchFamily="34" charset="-120"/>
+              </a:rPr>
+              <a:t>Location</a:t>
             </a:r>
             <a:endParaRPr lang="en-US" sz="950" dirty="0"/>
           </a:p>
@@ -3987,14 +4926,14 @@
       </p:sp>
       <p:sp>
         <p:nvSpPr>
-          <p:cNvPr id="4" name="Text 2"/>
-          <p:cNvSpPr/>
-          <p:nvPr/>
-        </p:nvSpPr>
-        <p:spPr>
-          <a:xfrm>
-            <a:off x="749808" y="566928"/>
-            <a:ext cx="10874959" cy="384048"/>
+          <p:cNvPr id="5" name="Text 3"/>
+          <p:cNvSpPr/>
+          <p:nvPr/>
+        </p:nvSpPr>
+        <p:spPr>
+          <a:xfrm>
+            <a:off x="1133856" y="640080"/>
+            <a:ext cx="10490911" cy="365760"/>
           </a:xfrm>
           <a:prstGeom prst="rect">
             <a:avLst/>
@@ -4010,9 +4949,9 @@
               <a:buNone/>
             </a:pPr>
             <a:r>
-              <a:rPr lang="en-US" sz="2200" b="1" dirty="0">
-                <a:solidFill>
-                  <a:srgbClr val="0F172A"/>
+              <a:rPr lang="en-US" sz="2300" b="1" dirty="0">
+                <a:solidFill>
+                  <a:srgbClr val="10161F"/>
                 </a:solidFill>
                 <a:latin typeface="Pretendard" pitchFamily="34" charset="0"/>
                 <a:ea typeface="Pretendard" pitchFamily="34" charset="-122"/>
@@ -4020,13 +4959,13 @@
               </a:rPr>
               <a:t>입지 및 교통</a:t>
             </a:r>
-            <a:endParaRPr lang="en-US" sz="2200" dirty="0"/>
+            <a:endParaRPr lang="en-US" sz="2300" dirty="0"/>
           </a:p>
         </p:txBody>
       </p:sp>
       <p:pic>
         <p:nvPicPr>
-          <p:cNvPr id="5" name="Image 0" descr="preencoded.png">    </p:cNvPr>
+          <p:cNvPr id="6" name="Image 0" descr="preencoded.png">    </p:cNvPr>
           <p:cNvPicPr>
             <a:picLocks noChangeAspect="1"/>
           </p:cNvPicPr>
@@ -4050,14 +4989,14 @@
       </p:pic>
       <p:sp>
         <p:nvSpPr>
-          <p:cNvPr id="6" name="Text 3"/>
+          <p:cNvPr id="7" name="Text 4"/>
           <p:cNvSpPr/>
           <p:nvPr/>
         </p:nvSpPr>
         <p:spPr>
           <a:xfrm>
             <a:off x="6053328" y="1481328"/>
-            <a:ext cx="2117147" cy="438912"/>
+            <a:ext cx="2117147" cy="493776"/>
           </a:xfrm>
           <a:prstGeom prst="rect">
             <a:avLst/>
@@ -4076,9 +5015,9 @@
               <a:buNone/>
             </a:pPr>
             <a:r>
-              <a:rPr lang="en-US" sz="1400" dirty="0">
-                <a:solidFill>
-                  <a:srgbClr val="64748B"/>
+              <a:rPr lang="en-US" sz="1300" dirty="0">
+                <a:solidFill>
+                  <a:srgbClr val="718096"/>
                 </a:solidFill>
                 <a:latin typeface="Pretendard" pitchFamily="34" charset="0"/>
                 <a:ea typeface="Pretendard" pitchFamily="34" charset="-122"/>
@@ -4086,20 +5025,20 @@
               </a:rPr>
               <a:t>교통 접근성</a:t>
             </a:r>
-            <a:endParaRPr lang="en-US" sz="1400" dirty="0"/>
-          </a:p>
-        </p:txBody>
-      </p:sp>
-      <p:sp>
-        <p:nvSpPr>
-          <p:cNvPr id="7" name="Text 4"/>
+            <a:endParaRPr lang="en-US" sz="1300" dirty="0"/>
+          </a:p>
+        </p:txBody>
+      </p:sp>
+      <p:sp>
+        <p:nvSpPr>
+          <p:cNvPr id="8" name="Text 5"/>
           <p:cNvSpPr/>
           <p:nvPr/>
         </p:nvSpPr>
         <p:spPr>
           <a:xfrm>
             <a:off x="8170475" y="1481328"/>
-            <a:ext cx="3454292" cy="438912"/>
+            <a:ext cx="3454292" cy="493776"/>
           </a:xfrm>
           <a:prstGeom prst="rect">
             <a:avLst/>
@@ -4118,9 +5057,9 @@
               <a:buNone/>
             </a:pPr>
             <a:r>
-              <a:rPr lang="en-US" sz="1400" b="1" dirty="0">
-                <a:solidFill>
-                  <a:srgbClr val="0F172A"/>
+              <a:rPr lang="en-US" sz="1300" b="1" dirty="0">
+                <a:solidFill>
+                  <a:srgbClr val="10161F"/>
                 </a:solidFill>
                 <a:latin typeface="Pretendard" pitchFamily="34" charset="0"/>
                 <a:ea typeface="Pretendard" pitchFamily="34" charset="-122"/>
@@ -4128,75 +5067,91 @@
               </a:rPr>
               <a:t>역삼역 도보 4분, 테헤란로 메인 이면입니다.</a:t>
             </a:r>
-            <a:endParaRPr lang="en-US" sz="1400" dirty="0"/>
-          </a:p>
-        </p:txBody>
-      </p:sp>
-      <p:sp>
-        <p:nvSpPr>
-          <p:cNvPr id="8" name="Text 5"/>
-          <p:cNvSpPr/>
-          <p:nvPr/>
-        </p:nvSpPr>
-        <p:spPr>
-          <a:xfrm>
-            <a:off x="566928" y="6419088"/>
-            <a:ext cx="11057839" cy="201168"/>
-          </a:xfrm>
-          <a:prstGeom prst="rect">
-            <a:avLst/>
-          </a:prstGeom>
-          <a:noFill/>
-          <a:ln/>
-        </p:spPr>
-        <p:txBody>
-          <a:bodyPr wrap="square" lIns="0" tIns="0" rIns="0" bIns="0" rtlCol="0" anchor="ctr"/>
-          <a:lstStyle/>
-          <a:p>
-            <a:pPr algn="ctr" indent="0" marL="0">
-              <a:buNone/>
-            </a:pPr>
-            <a:r>
-              <a:rPr lang="en-US" sz="750" dirty="0">
-                <a:solidFill>
-                  <a:srgbClr val="64748B"/>
+            <a:endParaRPr lang="en-US" sz="1300" dirty="0"/>
+          </a:p>
+        </p:txBody>
+      </p:sp>
+      <p:sp>
+        <p:nvSpPr>
+          <p:cNvPr id="9" name="Text 6"/>
+          <p:cNvSpPr/>
+          <p:nvPr/>
+        </p:nvSpPr>
+        <p:spPr>
+          <a:xfrm>
+            <a:off x="566928" y="6382512"/>
+            <a:ext cx="7315200" cy="219456"/>
+          </a:xfrm>
+          <a:prstGeom prst="rect">
+            <a:avLst/>
+          </a:prstGeom>
+          <a:noFill/>
+          <a:ln/>
+        </p:spPr>
+        <p:txBody>
+          <a:bodyPr wrap="square" lIns="0" tIns="0" rIns="0" bIns="0" rtlCol="0" anchor="ctr"/>
+          <a:lstStyle/>
+          <a:p>
+            <a:pPr indent="0" marL="0">
+              <a:buNone/>
+            </a:pPr>
+            <a:r>
+              <a:rPr lang="en-US" sz="800" dirty="0">
+                <a:solidFill>
+                  <a:srgbClr val="718096"/>
                 </a:solidFill>
                 <a:latin typeface="Pretendard" pitchFamily="34" charset="0"/>
                 <a:ea typeface="Pretendard" pitchFamily="34" charset="-122"/>
                 <a:cs typeface="Pretendard" pitchFamily="34" charset="-120"/>
               </a:rPr>
-              <a:t>크리딜  ·    ·  3</a:t>
-            </a:r>
-            <a:endParaRPr lang="en-US" sz="750" dirty="0"/>
-          </a:p>
-        </p:txBody>
-      </p:sp>
-      <p:sp>
-        <p:nvSpPr>
-          <p:cNvPr id="9" name="Shape 6"/>
-          <p:cNvSpPr/>
-          <p:nvPr/>
-        </p:nvSpPr>
-        <p:spPr>
-          <a:xfrm>
-            <a:off x="4437172" y="6382512"/>
-            <a:ext cx="3317352" cy="0"/>
-          </a:xfrm>
-          <a:prstGeom prst="line">
-            <a:avLst/>
-          </a:prstGeom>
-          <a:noFill/>
-          <a:ln w="6350">
-            <a:solidFill>
-              <a:srgbClr val="6B8E00"/>
-            </a:solidFill>
-            <a:prstDash val="solid"/>
-          </a:ln>
-        </p:spPr>
+              <a:t>크리딜   |   </a:t>
+            </a:r>
+            <a:endParaRPr lang="en-US" sz="800" dirty="0"/>
+          </a:p>
+        </p:txBody>
       </p:sp>
       <p:sp>
         <p:nvSpPr>
           <p:cNvPr id="10" name="Text 7"/>
+          <p:cNvSpPr/>
+          <p:nvPr/>
+        </p:nvSpPr>
+        <p:spPr>
+          <a:xfrm>
+            <a:off x="10710367" y="6382512"/>
+            <a:ext cx="914400" cy="219456"/>
+          </a:xfrm>
+          <a:prstGeom prst="rect">
+            <a:avLst/>
+          </a:prstGeom>
+          <a:noFill/>
+          <a:ln/>
+        </p:spPr>
+        <p:txBody>
+          <a:bodyPr wrap="square" lIns="0" tIns="0" rIns="0" bIns="0" rtlCol="0" anchor="ctr"/>
+          <a:lstStyle/>
+          <a:p>
+            <a:pPr algn="r" indent="0" marL="0">
+              <a:buNone/>
+            </a:pPr>
+            <a:r>
+              <a:rPr lang="en-US" sz="900" b="1" dirty="0">
+                <a:solidFill>
+                  <a:srgbClr val="B98A2E"/>
+                </a:solidFill>
+                <a:latin typeface="Arial" pitchFamily="34" charset="0"/>
+                <a:ea typeface="Arial" pitchFamily="34" charset="-122"/>
+                <a:cs typeface="Arial" pitchFamily="34" charset="-120"/>
+              </a:rPr>
+              <a:t>3</a:t>
+            </a:r>
+            <a:endParaRPr lang="en-US" sz="900" dirty="0"/>
+          </a:p>
+        </p:txBody>
+      </p:sp>
+      <p:sp>
+        <p:nvSpPr>
+          <p:cNvPr id="11" name="Text 8"/>
           <p:cNvSpPr/>
           <p:nvPr/>
         </p:nvSpPr>
@@ -4221,7 +5176,7 @@
             <a:r>
               <a:rPr lang="en-US" sz="1000" dirty="0">
                 <a:solidFill>
-                  <a:srgbClr val="0F172A"/>
+                  <a:srgbClr val="10161F"/>
                 </a:solidFill>
                 <a:latin typeface="Pretendard" pitchFamily="34" charset="0"/>
                 <a:ea typeface="Pretendard" pitchFamily="34" charset="-122"/>
@@ -4273,14 +5228,14 @@
         </p:nvSpPr>
         <p:spPr>
           <a:xfrm>
-            <a:off x="566928" y="384048"/>
-            <a:ext cx="45720" cy="566928"/>
-          </a:xfrm>
-          <a:prstGeom prst="rect">
+            <a:off x="566928" y="457200"/>
+            <a:ext cx="384048" cy="384048"/>
+          </a:xfrm>
+          <a:prstGeom prst="ellipse">
             <a:avLst/>
           </a:prstGeom>
           <a:solidFill>
-            <a:srgbClr val="6B8E00"/>
+            <a:srgbClr val="B98A2E"/>
           </a:solidFill>
           <a:ln/>
         </p:spPr>
@@ -4293,32 +5248,71 @@
         </p:nvSpPr>
         <p:spPr>
           <a:xfrm>
-            <a:off x="749808" y="384048"/>
-            <a:ext cx="10874959" cy="182880"/>
-          </a:xfrm>
-          <a:prstGeom prst="rect">
-            <a:avLst/>
-          </a:prstGeom>
-          <a:noFill/>
-          <a:ln/>
-        </p:spPr>
-        <p:txBody>
-          <a:bodyPr wrap="square" lIns="0" tIns="0" rIns="0" bIns="0" rtlCol="0" anchor="ctr"/>
-          <a:lstStyle/>
-          <a:p>
-            <a:pPr indent="0" marL="0">
-              <a:buNone/>
-            </a:pPr>
-            <a:r>
-              <a:rPr lang="en-US" sz="950" b="1" spc="200" kern="0" dirty="0">
-                <a:solidFill>
-                  <a:srgbClr val="6B8E00"/>
+            <a:off x="566928" y="457200"/>
+            <a:ext cx="384048" cy="384048"/>
+          </a:xfrm>
+          <a:prstGeom prst="rect">
+            <a:avLst/>
+          </a:prstGeom>
+          <a:noFill/>
+          <a:ln/>
+        </p:spPr>
+        <p:txBody>
+          <a:bodyPr wrap="square" lIns="0" tIns="0" rIns="0" bIns="0" rtlCol="0" anchor="ctr"/>
+          <a:lstStyle/>
+          <a:p>
+            <a:pPr algn="ctr" indent="0" marL="0">
+              <a:buNone/>
+            </a:pPr>
+            <a:r>
+              <a:rPr lang="en-US" sz="1300" b="1" dirty="0">
+                <a:solidFill>
+                  <a:srgbClr val="FFFFFF"/>
                 </a:solidFill>
                 <a:latin typeface="Arial" pitchFamily="34" charset="0"/>
                 <a:ea typeface="Arial" pitchFamily="34" charset="-122"/>
                 <a:cs typeface="Arial" pitchFamily="34" charset="-120"/>
               </a:rPr>
-              <a:t>04  Building</a:t>
+              <a:t>04</a:t>
+            </a:r>
+            <a:endParaRPr lang="en-US" sz="1300" dirty="0"/>
+          </a:p>
+        </p:txBody>
+      </p:sp>
+      <p:sp>
+        <p:nvSpPr>
+          <p:cNvPr id="4" name="Text 2"/>
+          <p:cNvSpPr/>
+          <p:nvPr/>
+        </p:nvSpPr>
+        <p:spPr>
+          <a:xfrm>
+            <a:off x="1133856" y="457200"/>
+            <a:ext cx="10490911" cy="182880"/>
+          </a:xfrm>
+          <a:prstGeom prst="rect">
+            <a:avLst/>
+          </a:prstGeom>
+          <a:noFill/>
+          <a:ln/>
+        </p:spPr>
+        <p:txBody>
+          <a:bodyPr wrap="square" lIns="0" tIns="0" rIns="0" bIns="0" rtlCol="0" anchor="ctr"/>
+          <a:lstStyle/>
+          <a:p>
+            <a:pPr indent="0" marL="0">
+              <a:buNone/>
+            </a:pPr>
+            <a:r>
+              <a:rPr lang="en-US" sz="950" b="1" spc="200" kern="0" dirty="0">
+                <a:solidFill>
+                  <a:srgbClr val="B98A2E"/>
+                </a:solidFill>
+                <a:latin typeface="Arial" pitchFamily="34" charset="0"/>
+                <a:ea typeface="Arial" pitchFamily="34" charset="-122"/>
+                <a:cs typeface="Arial" pitchFamily="34" charset="-120"/>
+              </a:rPr>
+              <a:t>Building</a:t>
             </a:r>
             <a:endParaRPr lang="en-US" sz="950" dirty="0"/>
           </a:p>
@@ -4326,14 +5320,14 @@
       </p:sp>
       <p:sp>
         <p:nvSpPr>
-          <p:cNvPr id="4" name="Text 2"/>
-          <p:cNvSpPr/>
-          <p:nvPr/>
-        </p:nvSpPr>
-        <p:spPr>
-          <a:xfrm>
-            <a:off x="749808" y="566928"/>
-            <a:ext cx="10874959" cy="384048"/>
+          <p:cNvPr id="5" name="Text 3"/>
+          <p:cNvSpPr/>
+          <p:nvPr/>
+        </p:nvSpPr>
+        <p:spPr>
+          <a:xfrm>
+            <a:off x="1133856" y="640080"/>
+            <a:ext cx="10490911" cy="365760"/>
           </a:xfrm>
           <a:prstGeom prst="rect">
             <a:avLst/>
@@ -4349,9 +5343,9 @@
               <a:buNone/>
             </a:pPr>
             <a:r>
-              <a:rPr lang="en-US" sz="2200" b="1" dirty="0">
-                <a:solidFill>
-                  <a:srgbClr val="0F172A"/>
+              <a:rPr lang="en-US" sz="2300" b="1" dirty="0">
+                <a:solidFill>
+                  <a:srgbClr val="10161F"/>
                 </a:solidFill>
                 <a:latin typeface="Pretendard" pitchFamily="34" charset="0"/>
                 <a:ea typeface="Pretendard" pitchFamily="34" charset="-122"/>
@@ -4359,13 +5353,13 @@
               </a:rPr>
               <a:t>물건 개요</a:t>
             </a:r>
-            <a:endParaRPr lang="en-US" sz="2200" dirty="0"/>
-          </a:p>
-        </p:txBody>
-      </p:sp>
-      <p:sp>
-        <p:nvSpPr>
-          <p:cNvPr id="5" name="Text 3"/>
+            <a:endParaRPr lang="en-US" sz="2300" dirty="0"/>
+          </a:p>
+        </p:txBody>
+      </p:sp>
+      <p:sp>
+        <p:nvSpPr>
+          <p:cNvPr id="6" name="Text 4"/>
           <p:cNvSpPr/>
           <p:nvPr/>
         </p:nvSpPr>
@@ -4390,7 +5384,7 @@
             <a:r>
               <a:rPr lang="en-US" sz="1100" b="1" dirty="0">
                 <a:solidFill>
-                  <a:srgbClr val="0F172A"/>
+                  <a:srgbClr val="10161F"/>
                 </a:solidFill>
                 <a:latin typeface="Pretendard" pitchFamily="34" charset="0"/>
                 <a:ea typeface="Pretendard" pitchFamily="34" charset="-122"/>
@@ -4404,7 +5398,7 @@
       </p:sp>
       <p:sp>
         <p:nvSpPr>
-          <p:cNvPr id="6" name="Text 4"/>
+          <p:cNvPr id="7" name="Text 5"/>
           <p:cNvSpPr/>
           <p:nvPr/>
         </p:nvSpPr>
@@ -4432,7 +5426,7 @@
             <a:r>
               <a:rPr lang="en-US" sz="1400" dirty="0">
                 <a:solidFill>
-                  <a:srgbClr val="64748B"/>
+                  <a:srgbClr val="718096"/>
                 </a:solidFill>
                 <a:latin typeface="Pretendard" pitchFamily="34" charset="0"/>
                 <a:ea typeface="Pretendard" pitchFamily="34" charset="-122"/>
@@ -4446,7 +5440,7 @@
       </p:sp>
       <p:sp>
         <p:nvSpPr>
-          <p:cNvPr id="7" name="Text 5"/>
+          <p:cNvPr id="8" name="Text 6"/>
           <p:cNvSpPr/>
           <p:nvPr/>
         </p:nvSpPr>
@@ -4474,7 +5468,7 @@
             <a:r>
               <a:rPr lang="en-US" sz="1400" b="1" dirty="0">
                 <a:solidFill>
-                  <a:srgbClr val="0F172A"/>
+                  <a:srgbClr val="10161F"/>
                 </a:solidFill>
                 <a:latin typeface="Pretendard" pitchFamily="34" charset="0"/>
                 <a:ea typeface="Pretendard" pitchFamily="34" charset="-122"/>
@@ -4488,7 +5482,7 @@
       </p:sp>
       <p:sp>
         <p:nvSpPr>
-          <p:cNvPr id="8" name="Shape 6"/>
+          <p:cNvPr id="9" name="Shape 7"/>
           <p:cNvSpPr/>
           <p:nvPr/>
         </p:nvSpPr>
@@ -4503,7 +5497,7 @@
           <a:noFill/>
           <a:ln w="3810">
             <a:solidFill>
-              <a:srgbClr val="CBD5E1"/>
+              <a:srgbClr val="CBD5E0"/>
             </a:solidFill>
             <a:prstDash val="solid"/>
           </a:ln>
@@ -4511,7 +5505,7 @@
       </p:sp>
       <p:sp>
         <p:nvSpPr>
-          <p:cNvPr id="9" name="Text 7"/>
+          <p:cNvPr id="10" name="Text 8"/>
           <p:cNvSpPr/>
           <p:nvPr/>
         </p:nvSpPr>
@@ -4539,7 +5533,7 @@
             <a:r>
               <a:rPr lang="en-US" sz="1400" dirty="0">
                 <a:solidFill>
-                  <a:srgbClr val="64748B"/>
+                  <a:srgbClr val="718096"/>
                 </a:solidFill>
                 <a:latin typeface="Pretendard" pitchFamily="34" charset="0"/>
                 <a:ea typeface="Pretendard" pitchFamily="34" charset="-122"/>
@@ -4553,7 +5547,7 @@
       </p:sp>
       <p:sp>
         <p:nvSpPr>
-          <p:cNvPr id="10" name="Text 8"/>
+          <p:cNvPr id="11" name="Text 9"/>
           <p:cNvSpPr/>
           <p:nvPr/>
         </p:nvSpPr>
@@ -4581,7 +5575,7 @@
             <a:r>
               <a:rPr lang="en-US" sz="1400" b="1" dirty="0">
                 <a:solidFill>
-                  <a:srgbClr val="0F172A"/>
+                  <a:srgbClr val="10161F"/>
                 </a:solidFill>
                 <a:latin typeface="Pretendard" pitchFamily="34" charset="0"/>
                 <a:ea typeface="Pretendard" pitchFamily="34" charset="-122"/>
@@ -4595,7 +5589,7 @@
       </p:sp>
       <p:sp>
         <p:nvSpPr>
-          <p:cNvPr id="11" name="Shape 9"/>
+          <p:cNvPr id="12" name="Shape 10"/>
           <p:cNvSpPr/>
           <p:nvPr/>
         </p:nvSpPr>
@@ -4610,7 +5604,7 @@
           <a:noFill/>
           <a:ln w="8890">
             <a:solidFill>
-              <a:srgbClr val="6B8E00"/>
+              <a:srgbClr val="B98A2E"/>
             </a:solidFill>
             <a:prstDash val="solid"/>
           </a:ln>
@@ -4618,49 +5612,49 @@
       </p:sp>
       <p:sp>
         <p:nvSpPr>
-          <p:cNvPr id="12" name="Shape 10"/>
+          <p:cNvPr id="13" name="Shape 11"/>
           <p:cNvSpPr/>
           <p:nvPr/>
         </p:nvSpPr>
         <p:spPr>
           <a:xfrm>
             <a:off x="7784287" y="1645920"/>
-            <a:ext cx="3840480" cy="2103120"/>
+            <a:ext cx="3840480" cy="1645920"/>
           </a:xfrm>
           <a:prstGeom prst="roundRect">
             <a:avLst>
-              <a:gd name="adj" fmla="val 2609"/>
+              <a:gd name="adj" fmla="val 3333"/>
             </a:avLst>
           </a:prstGeom>
           <a:solidFill>
-            <a:srgbClr val="DBEAFE"/>
+            <a:srgbClr val="F3EBDA"/>
           </a:solidFill>
           <a:ln/>
         </p:spPr>
       </p:sp>
       <p:sp>
         <p:nvSpPr>
-          <p:cNvPr id="13" name="Shape 11"/>
+          <p:cNvPr id="14" name="Shape 12"/>
           <p:cNvSpPr/>
           <p:nvPr/>
         </p:nvSpPr>
         <p:spPr>
           <a:xfrm>
             <a:off x="7784287" y="1700784"/>
-            <a:ext cx="36576" cy="1993392"/>
+            <a:ext cx="36576" cy="1536192"/>
           </a:xfrm>
           <a:prstGeom prst="rect">
             <a:avLst/>
           </a:prstGeom>
           <a:solidFill>
-            <a:srgbClr val="1D4ED8"/>
+            <a:srgbClr val="977024"/>
           </a:solidFill>
           <a:ln/>
         </p:spPr>
       </p:sp>
       <p:sp>
         <p:nvSpPr>
-          <p:cNvPr id="14" name="Text 12"/>
+          <p:cNvPr id="15" name="Text 13"/>
           <p:cNvSpPr/>
           <p:nvPr/>
         </p:nvSpPr>
@@ -4682,147 +5676,90 @@
             <a:pPr indent="0" marL="0">
               <a:buNone/>
             </a:pPr>
-            <a:r>
-              <a:rPr lang="en-US" sz="1050" b="1" dirty="0">
-                <a:solidFill>
-                  <a:srgbClr val="1D4ED8"/>
+            <a:endParaRPr lang="en-US" sz="1050" dirty="0"/>
+          </a:p>
+        </p:txBody>
+      </p:sp>
+      <p:sp>
+        <p:nvSpPr>
+          <p:cNvPr id="16" name="Text 14"/>
+          <p:cNvSpPr/>
+          <p:nvPr/>
+        </p:nvSpPr>
+        <p:spPr>
+          <a:xfrm>
+            <a:off x="7967167" y="1975104"/>
+            <a:ext cx="3511296" cy="1243584"/>
+          </a:xfrm>
+          <a:prstGeom prst="rect">
+            <a:avLst/>
+          </a:prstGeom>
+          <a:noFill/>
+          <a:ln/>
+        </p:spPr>
+        <p:txBody>
+          <a:bodyPr wrap="square" lIns="0" tIns="0" rIns="0" bIns="0" rtlCol="0" anchor="t"/>
+          <a:lstStyle/>
+          <a:p>
+            <a:pPr indent="0" marL="0">
+              <a:lnSpc>
+                <a:spcPct val="120000"/>
+              </a:lnSpc>
+              <a:buNone/>
+            </a:pPr>
+            <a:r>
+              <a:rPr lang="en-US" sz="930" dirty="0">
+                <a:solidFill>
+                  <a:srgbClr val="10161F"/>
                 </a:solidFill>
                 <a:latin typeface="Pretendard" pitchFamily="34" charset="0"/>
                 <a:ea typeface="Pretendard" pitchFamily="34" charset="-122"/>
                 <a:cs typeface="Pretendard" pitchFamily="34" charset="-120"/>
               </a:rPr>
-              <a:t>토지 및 건물 분석 포인트</a:t>
-            </a:r>
-            <a:endParaRPr lang="en-US" sz="1050" dirty="0"/>
-          </a:p>
-        </p:txBody>
-      </p:sp>
-      <p:sp>
-        <p:nvSpPr>
-          <p:cNvPr id="15" name="Text 13"/>
-          <p:cNvSpPr/>
-          <p:nvPr/>
-        </p:nvSpPr>
-        <p:spPr>
-          <a:xfrm>
-            <a:off x="7967167" y="1975104"/>
-            <a:ext cx="3511296" cy="1700784"/>
-          </a:xfrm>
-          <a:prstGeom prst="rect">
-            <a:avLst/>
-          </a:prstGeom>
-          <a:noFill/>
-          <a:ln/>
-        </p:spPr>
-        <p:txBody>
-          <a:bodyPr wrap="square" lIns="0" tIns="0" rIns="0" bIns="0" rtlCol="0" anchor="t"/>
-          <a:lstStyle/>
-          <a:p>
-            <a:pPr marL="342900" indent="-342900">
-              <a:lnSpc>
-                <a:spcPct val="120000"/>
-              </a:lnSpc>
-              <a:buSzPct val="100000"/>
-              <a:buChar char="•"/>
-            </a:pPr>
-            <a:r>
-              <a:rPr lang="en-US" sz="930" dirty="0">
-                <a:solidFill>
-                  <a:srgbClr val="0F172A"/>
+              <a:t>역삼동 테헤란로 이면 코너 신축 부지입니다.</a:t>
+            </a:r>
+            <a:endParaRPr lang="en-US" sz="930" dirty="0"/>
+          </a:p>
+        </p:txBody>
+      </p:sp>
+      <p:sp>
+        <p:nvSpPr>
+          <p:cNvPr id="17" name="Text 15"/>
+          <p:cNvSpPr/>
+          <p:nvPr/>
+        </p:nvSpPr>
+        <p:spPr>
+          <a:xfrm>
+            <a:off x="566928" y="6382512"/>
+            <a:ext cx="7315200" cy="219456"/>
+          </a:xfrm>
+          <a:prstGeom prst="rect">
+            <a:avLst/>
+          </a:prstGeom>
+          <a:noFill/>
+          <a:ln/>
+        </p:spPr>
+        <p:txBody>
+          <a:bodyPr wrap="square" lIns="0" tIns="0" rIns="0" bIns="0" rtlCol="0" anchor="ctr"/>
+          <a:lstStyle/>
+          <a:p>
+            <a:pPr indent="0" marL="0">
+              <a:buNone/>
+            </a:pPr>
+            <a:r>
+              <a:rPr lang="en-US" sz="800" dirty="0">
+                <a:solidFill>
+                  <a:srgbClr val="718096"/>
                 </a:solidFill>
                 <a:latin typeface="Pretendard" pitchFamily="34" charset="0"/>
                 <a:ea typeface="Pretendard" pitchFamily="34" charset="-122"/>
                 <a:cs typeface="Pretendard" pitchFamily="34" charset="-120"/>
               </a:rPr>
-              <a:t>서초대로 25m 메인 도로변 우수한 가시성 확보</a:t>
-            </a:r>
-            <a:endParaRPr lang="en-US" sz="930" dirty="0"/>
-          </a:p>
-          <a:p>
-            <a:pPr marL="342900" indent="-342900">
-              <a:lnSpc>
-                <a:spcPct val="120000"/>
-              </a:lnSpc>
-              <a:buSzPct val="100000"/>
-              <a:buChar char="•"/>
-            </a:pPr>
-            <a:r>
-              <a:rPr lang="en-US" sz="930" dirty="0">
-                <a:solidFill>
-                  <a:srgbClr val="0F172A"/>
-                </a:solidFill>
-                <a:latin typeface="Pretendard" pitchFamily="34" charset="0"/>
-                <a:ea typeface="Pretendard" pitchFamily="34" charset="-122"/>
-                <a:cs typeface="Pretendard" pitchFamily="34" charset="-120"/>
-              </a:rPr>
-              <a:t>제3종일반주거지역 법정 용적률 완비 자산</a:t>
-            </a:r>
-            <a:endParaRPr lang="en-US" sz="930" dirty="0"/>
-          </a:p>
-          <a:p>
-            <a:pPr marL="342900" indent="-342900">
-              <a:lnSpc>
-                <a:spcPct val="120000"/>
-              </a:lnSpc>
-              <a:buSzPct val="100000"/>
-              <a:buChar char="•"/>
-            </a:pPr>
-            <a:r>
-              <a:rPr lang="en-US" sz="930" dirty="0">
-                <a:solidFill>
-                  <a:srgbClr val="0F172A"/>
-                </a:solidFill>
-                <a:latin typeface="Pretendard" pitchFamily="34" charset="0"/>
-                <a:ea typeface="Pretendard" pitchFamily="34" charset="-122"/>
-                <a:cs typeface="Pretendard" pitchFamily="34" charset="-120"/>
-              </a:rPr>
-              <a:t>침대용 승강기 완비로 병의원 입점 최적화 구조</a:t>
-            </a:r>
-            <a:endParaRPr lang="en-US" sz="930" dirty="0"/>
-          </a:p>
-        </p:txBody>
-      </p:sp>
-      <p:sp>
-        <p:nvSpPr>
-          <p:cNvPr id="16" name="Shape 14"/>
-          <p:cNvSpPr/>
-          <p:nvPr/>
-        </p:nvSpPr>
-        <p:spPr>
-          <a:xfrm>
-            <a:off x="7784287" y="3977640"/>
-            <a:ext cx="3840480" cy="2148840"/>
-          </a:xfrm>
-          <a:prstGeom prst="roundRect">
-            <a:avLst>
-              <a:gd name="adj" fmla="val 2553"/>
-            </a:avLst>
-          </a:prstGeom>
-          <a:solidFill>
-            <a:srgbClr val="DBEAFE"/>
-          </a:solidFill>
-          <a:ln/>
-        </p:spPr>
-      </p:sp>
-      <p:sp>
-        <p:nvSpPr>
-          <p:cNvPr id="17" name="Shape 15"/>
-          <p:cNvSpPr/>
-          <p:nvPr/>
-        </p:nvSpPr>
-        <p:spPr>
-          <a:xfrm>
-            <a:off x="7784287" y="4032504"/>
-            <a:ext cx="36576" cy="2039112"/>
-          </a:xfrm>
-          <a:prstGeom prst="rect">
-            <a:avLst/>
-          </a:prstGeom>
-          <a:solidFill>
-            <a:srgbClr val="1D4ED8"/>
-          </a:solidFill>
-          <a:ln/>
-        </p:spPr>
+              <a:t>크리딜   |   </a:t>
+            </a:r>
+            <a:endParaRPr lang="en-US" sz="800" dirty="0"/>
+          </a:p>
+        </p:txBody>
       </p:sp>
       <p:sp>
         <p:nvSpPr>
@@ -4832,183 +5769,36 @@
         </p:nvSpPr>
         <p:spPr>
           <a:xfrm>
-            <a:off x="7967167" y="4087368"/>
-            <a:ext cx="3511296" cy="201168"/>
-          </a:xfrm>
-          <a:prstGeom prst="rect">
-            <a:avLst/>
-          </a:prstGeom>
-          <a:noFill/>
-          <a:ln/>
-        </p:spPr>
-        <p:txBody>
-          <a:bodyPr wrap="square" lIns="0" tIns="0" rIns="0" bIns="0" rtlCol="0" anchor="ctr"/>
-          <a:lstStyle/>
-          <a:p>
-            <a:pPr indent="0" marL="0">
-              <a:buNone/>
-            </a:pPr>
-            <a:r>
-              <a:rPr lang="en-US" sz="1050" b="1" dirty="0">
-                <a:solidFill>
-                  <a:srgbClr val="1D4ED8"/>
-                </a:solidFill>
-                <a:latin typeface="Pretendard" pitchFamily="34" charset="0"/>
-                <a:ea typeface="Pretendard" pitchFamily="34" charset="-122"/>
-                <a:cs typeface="Pretendard" pitchFamily="34" charset="-120"/>
-              </a:rPr>
-              <a:t>물건 실사 및 관리 상태</a:t>
-            </a:r>
-            <a:endParaRPr lang="en-US" sz="1050" dirty="0"/>
-          </a:p>
-        </p:txBody>
-      </p:sp>
-      <p:sp>
-        <p:nvSpPr>
-          <p:cNvPr id="19" name="Text 17"/>
-          <p:cNvSpPr/>
-          <p:nvPr/>
-        </p:nvSpPr>
-        <p:spPr>
-          <a:xfrm>
-            <a:off x="7967167" y="4306824"/>
-            <a:ext cx="3511296" cy="1746504"/>
-          </a:xfrm>
-          <a:prstGeom prst="rect">
-            <a:avLst/>
-          </a:prstGeom>
-          <a:noFill/>
-          <a:ln/>
-        </p:spPr>
-        <p:txBody>
-          <a:bodyPr wrap="square" lIns="0" tIns="0" rIns="0" bIns="0" rtlCol="0" anchor="t"/>
-          <a:lstStyle/>
-          <a:p>
-            <a:pPr marL="342900" indent="-342900">
-              <a:lnSpc>
-                <a:spcPct val="120000"/>
-              </a:lnSpc>
-              <a:buSzPct val="100000"/>
-              <a:buChar char="•"/>
-            </a:pPr>
-            <a:r>
-              <a:rPr lang="en-US" sz="930" dirty="0">
-                <a:solidFill>
-                  <a:srgbClr val="0F172A"/>
-                </a:solidFill>
-                <a:latin typeface="Pretendard" pitchFamily="34" charset="0"/>
-                <a:ea typeface="Pretendard" pitchFamily="34" charset="-122"/>
-                <a:cs typeface="Pretendard" pitchFamily="34" charset="-120"/>
-              </a:rPr>
-              <a:t>2017년 준공 신축급 상태로 누수·균열 0건</a:t>
-            </a:r>
-            <a:endParaRPr lang="en-US" sz="930" dirty="0"/>
-          </a:p>
-          <a:p>
-            <a:pPr marL="342900" indent="-342900">
-              <a:lnSpc>
-                <a:spcPct val="120000"/>
-              </a:lnSpc>
-              <a:buSzPct val="100000"/>
-              <a:buChar char="•"/>
-            </a:pPr>
-            <a:r>
-              <a:rPr lang="en-US" sz="930" dirty="0">
-                <a:solidFill>
-                  <a:srgbClr val="0F172A"/>
-                </a:solidFill>
-                <a:latin typeface="Pretendard" pitchFamily="34" charset="0"/>
-                <a:ea typeface="Pretendard" pitchFamily="34" charset="-122"/>
-                <a:cs typeface="Pretendard" pitchFamily="34" charset="-120"/>
-              </a:rPr>
-              <a:t>단독 법인 소유로 권리관계 투명</a:t>
-            </a:r>
-            <a:endParaRPr lang="en-US" sz="930" dirty="0"/>
-          </a:p>
-          <a:p>
-            <a:pPr marL="342900" indent="-342900">
-              <a:lnSpc>
-                <a:spcPct val="120000"/>
-              </a:lnSpc>
-              <a:buSzPct val="100000"/>
-              <a:buChar char="•"/>
-            </a:pPr>
-            <a:r>
-              <a:rPr lang="en-US" sz="930" dirty="0">
-                <a:solidFill>
-                  <a:srgbClr val="0F172A"/>
-                </a:solidFill>
-                <a:latin typeface="Pretendard" pitchFamily="34" charset="0"/>
-                <a:ea typeface="Pretendard" pitchFamily="34" charset="-122"/>
-                <a:cs typeface="Pretendard" pitchFamily="34" charset="-120"/>
-              </a:rPr>
-              <a:t>1금융권 담보대출 85억 원 승계 적격</a:t>
-            </a:r>
-            <a:endParaRPr lang="en-US" sz="930" dirty="0"/>
-          </a:p>
-        </p:txBody>
-      </p:sp>
-      <p:sp>
-        <p:nvSpPr>
-          <p:cNvPr id="20" name="Text 18"/>
-          <p:cNvSpPr/>
-          <p:nvPr/>
-        </p:nvSpPr>
-        <p:spPr>
-          <a:xfrm>
-            <a:off x="566928" y="6419088"/>
-            <a:ext cx="11057839" cy="201168"/>
-          </a:xfrm>
-          <a:prstGeom prst="rect">
-            <a:avLst/>
-          </a:prstGeom>
-          <a:noFill/>
-          <a:ln/>
-        </p:spPr>
-        <p:txBody>
-          <a:bodyPr wrap="square" lIns="0" tIns="0" rIns="0" bIns="0" rtlCol="0" anchor="ctr"/>
-          <a:lstStyle/>
-          <a:p>
-            <a:pPr algn="ctr" indent="0" marL="0">
-              <a:buNone/>
-            </a:pPr>
-            <a:r>
-              <a:rPr lang="en-US" sz="750" dirty="0">
-                <a:solidFill>
-                  <a:srgbClr val="64748B"/>
-                </a:solidFill>
-                <a:latin typeface="Pretendard" pitchFamily="34" charset="0"/>
-                <a:ea typeface="Pretendard" pitchFamily="34" charset="-122"/>
-                <a:cs typeface="Pretendard" pitchFamily="34" charset="-120"/>
-              </a:rPr>
-              <a:t>크리딜  ·    ·  4</a:t>
-            </a:r>
-            <a:endParaRPr lang="en-US" sz="750" dirty="0"/>
-          </a:p>
-        </p:txBody>
-      </p:sp>
-      <p:sp>
-        <p:nvSpPr>
-          <p:cNvPr id="21" name="Shape 19"/>
-          <p:cNvSpPr/>
-          <p:nvPr/>
-        </p:nvSpPr>
-        <p:spPr>
-          <a:xfrm>
-            <a:off x="4437172" y="6382512"/>
-            <a:ext cx="3317352" cy="0"/>
-          </a:xfrm>
-          <a:prstGeom prst="line">
-            <a:avLst/>
-          </a:prstGeom>
-          <a:noFill/>
-          <a:ln w="6350">
-            <a:solidFill>
-              <a:srgbClr val="6B8E00"/>
-            </a:solidFill>
-            <a:prstDash val="solid"/>
-          </a:ln>
-        </p:spPr>
+            <a:off x="10710367" y="6382512"/>
+            <a:ext cx="914400" cy="219456"/>
+          </a:xfrm>
+          <a:prstGeom prst="rect">
+            <a:avLst/>
+          </a:prstGeom>
+          <a:noFill/>
+          <a:ln/>
+        </p:spPr>
+        <p:txBody>
+          <a:bodyPr wrap="square" lIns="0" tIns="0" rIns="0" bIns="0" rtlCol="0" anchor="ctr"/>
+          <a:lstStyle/>
+          <a:p>
+            <a:pPr algn="r" indent="0" marL="0">
+              <a:buNone/>
+            </a:pPr>
+            <a:r>
+              <a:rPr lang="en-US" sz="900" b="1" dirty="0">
+                <a:solidFill>
+                  <a:srgbClr val="B98A2E"/>
+                </a:solidFill>
+                <a:latin typeface="Arial" pitchFamily="34" charset="0"/>
+                <a:ea typeface="Arial" pitchFamily="34" charset="-122"/>
+                <a:cs typeface="Arial" pitchFamily="34" charset="-120"/>
+              </a:rPr>
+              <a:t>4</a:t>
+            </a:r>
+            <a:endParaRPr lang="en-US" sz="900" dirty="0"/>
+          </a:p>
+        </p:txBody>
       </p:sp>
     </p:spTree>
   </p:cSld>
@@ -5050,14 +5840,14 @@
         </p:nvSpPr>
         <p:spPr>
           <a:xfrm>
-            <a:off x="566928" y="384048"/>
-            <a:ext cx="45720" cy="566928"/>
-          </a:xfrm>
-          <a:prstGeom prst="rect">
+            <a:off x="566928" y="457200"/>
+            <a:ext cx="384048" cy="384048"/>
+          </a:xfrm>
+          <a:prstGeom prst="ellipse">
             <a:avLst/>
           </a:prstGeom>
           <a:solidFill>
-            <a:srgbClr val="6B8E00"/>
+            <a:srgbClr val="B98A2E"/>
           </a:solidFill>
           <a:ln/>
         </p:spPr>
@@ -5070,32 +5860,71 @@
         </p:nvSpPr>
         <p:spPr>
           <a:xfrm>
-            <a:off x="749808" y="384048"/>
-            <a:ext cx="10874959" cy="182880"/>
-          </a:xfrm>
-          <a:prstGeom prst="rect">
-            <a:avLst/>
-          </a:prstGeom>
-          <a:noFill/>
-          <a:ln/>
-        </p:spPr>
-        <p:txBody>
-          <a:bodyPr wrap="square" lIns="0" tIns="0" rIns="0" bIns="0" rtlCol="0" anchor="ctr"/>
-          <a:lstStyle/>
-          <a:p>
-            <a:pPr indent="0" marL="0">
-              <a:buNone/>
-            </a:pPr>
-            <a:r>
-              <a:rPr lang="en-US" sz="950" b="1" spc="200" kern="0" dirty="0">
-                <a:solidFill>
-                  <a:srgbClr val="6B8E00"/>
+            <a:off x="566928" y="457200"/>
+            <a:ext cx="384048" cy="384048"/>
+          </a:xfrm>
+          <a:prstGeom prst="rect">
+            <a:avLst/>
+          </a:prstGeom>
+          <a:noFill/>
+          <a:ln/>
+        </p:spPr>
+        <p:txBody>
+          <a:bodyPr wrap="square" lIns="0" tIns="0" rIns="0" bIns="0" rtlCol="0" anchor="ctr"/>
+          <a:lstStyle/>
+          <a:p>
+            <a:pPr algn="ctr" indent="0" marL="0">
+              <a:buNone/>
+            </a:pPr>
+            <a:r>
+              <a:rPr lang="en-US" sz="1300" b="1" dirty="0">
+                <a:solidFill>
+                  <a:srgbClr val="FFFFFF"/>
                 </a:solidFill>
                 <a:latin typeface="Arial" pitchFamily="34" charset="0"/>
                 <a:ea typeface="Arial" pitchFamily="34" charset="-122"/>
                 <a:cs typeface="Arial" pitchFamily="34" charset="-120"/>
               </a:rPr>
-              <a:t>05  Land Detail</a:t>
+              <a:t>05</a:t>
+            </a:r>
+            <a:endParaRPr lang="en-US" sz="1300" dirty="0"/>
+          </a:p>
+        </p:txBody>
+      </p:sp>
+      <p:sp>
+        <p:nvSpPr>
+          <p:cNvPr id="4" name="Text 2"/>
+          <p:cNvSpPr/>
+          <p:nvPr/>
+        </p:nvSpPr>
+        <p:spPr>
+          <a:xfrm>
+            <a:off x="1133856" y="457200"/>
+            <a:ext cx="10490911" cy="182880"/>
+          </a:xfrm>
+          <a:prstGeom prst="rect">
+            <a:avLst/>
+          </a:prstGeom>
+          <a:noFill/>
+          <a:ln/>
+        </p:spPr>
+        <p:txBody>
+          <a:bodyPr wrap="square" lIns="0" tIns="0" rIns="0" bIns="0" rtlCol="0" anchor="ctr"/>
+          <a:lstStyle/>
+          <a:p>
+            <a:pPr indent="0" marL="0">
+              <a:buNone/>
+            </a:pPr>
+            <a:r>
+              <a:rPr lang="en-US" sz="950" b="1" spc="200" kern="0" dirty="0">
+                <a:solidFill>
+                  <a:srgbClr val="B98A2E"/>
+                </a:solidFill>
+                <a:latin typeface="Arial" pitchFamily="34" charset="0"/>
+                <a:ea typeface="Arial" pitchFamily="34" charset="-122"/>
+                <a:cs typeface="Arial" pitchFamily="34" charset="-120"/>
+              </a:rPr>
+              <a:t>Land Detail</a:t>
             </a:r>
             <a:endParaRPr lang="en-US" sz="950" dirty="0"/>
           </a:p>
@@ -5103,14 +5932,14 @@
       </p:sp>
       <p:sp>
         <p:nvSpPr>
-          <p:cNvPr id="4" name="Text 2"/>
-          <p:cNvSpPr/>
-          <p:nvPr/>
-        </p:nvSpPr>
-        <p:spPr>
-          <a:xfrm>
-            <a:off x="749808" y="566928"/>
-            <a:ext cx="10874959" cy="384048"/>
+          <p:cNvPr id="5" name="Text 3"/>
+          <p:cNvSpPr/>
+          <p:nvPr/>
+        </p:nvSpPr>
+        <p:spPr>
+          <a:xfrm>
+            <a:off x="1133856" y="640080"/>
+            <a:ext cx="10490911" cy="365760"/>
           </a:xfrm>
           <a:prstGeom prst="rect">
             <a:avLst/>
@@ -5126,9 +5955,9 @@
               <a:buNone/>
             </a:pPr>
             <a:r>
-              <a:rPr lang="en-US" sz="2200" b="1" dirty="0">
-                <a:solidFill>
-                  <a:srgbClr val="0F172A"/>
+              <a:rPr lang="en-US" sz="2300" b="1" dirty="0">
+                <a:solidFill>
+                  <a:srgbClr val="10161F"/>
                 </a:solidFill>
                 <a:latin typeface="Pretendard" pitchFamily="34" charset="0"/>
                 <a:ea typeface="Pretendard" pitchFamily="34" charset="-122"/>
@@ -5136,13 +5965,13 @@
               </a:rPr>
               <a:t>부지 분석</a:t>
             </a:r>
-            <a:endParaRPr lang="en-US" sz="2200" dirty="0"/>
-          </a:p>
-        </p:txBody>
-      </p:sp>
-      <p:sp>
-        <p:nvSpPr>
-          <p:cNvPr id="5" name="Text 3"/>
+            <a:endParaRPr lang="en-US" sz="2300" dirty="0"/>
+          </a:p>
+        </p:txBody>
+      </p:sp>
+      <p:sp>
+        <p:nvSpPr>
+          <p:cNvPr id="6" name="Text 4"/>
           <p:cNvSpPr/>
           <p:nvPr/>
         </p:nvSpPr>
@@ -5167,7 +5996,7 @@
             <a:r>
               <a:rPr lang="en-US" sz="1100" b="1" dirty="0">
                 <a:solidFill>
-                  <a:srgbClr val="0F172A"/>
+                  <a:srgbClr val="10161F"/>
                 </a:solidFill>
                 <a:latin typeface="Pretendard" pitchFamily="34" charset="0"/>
                 <a:ea typeface="Pretendard" pitchFamily="34" charset="-122"/>
@@ -5181,7 +6010,7 @@
       </p:sp>
       <p:sp>
         <p:nvSpPr>
-          <p:cNvPr id="6" name="Shape 4"/>
+          <p:cNvPr id="7" name="Shape 5"/>
           <p:cNvSpPr/>
           <p:nvPr/>
         </p:nvSpPr>
@@ -5196,14 +6025,14 @@
             </a:avLst>
           </a:prstGeom>
           <a:solidFill>
-            <a:srgbClr val="DBEAFE"/>
+            <a:srgbClr val="BEE3F8"/>
           </a:solidFill>
           <a:ln/>
         </p:spPr>
       </p:sp>
       <p:sp>
         <p:nvSpPr>
-          <p:cNvPr id="7" name="Shape 5"/>
+          <p:cNvPr id="8" name="Shape 6"/>
           <p:cNvSpPr/>
           <p:nvPr/>
         </p:nvSpPr>
@@ -5216,14 +6045,14 @@
             <a:avLst/>
           </a:prstGeom>
           <a:solidFill>
-            <a:srgbClr val="1D4ED8"/>
+            <a:srgbClr val="2B6CB0"/>
           </a:solidFill>
           <a:ln/>
         </p:spPr>
       </p:sp>
       <p:sp>
         <p:nvSpPr>
-          <p:cNvPr id="8" name="Text 6"/>
+          <p:cNvPr id="9" name="Text 7"/>
           <p:cNvSpPr/>
           <p:nvPr/>
         </p:nvSpPr>
@@ -5248,7 +6077,7 @@
             <a:r>
               <a:rPr lang="en-US" sz="1050" b="1" dirty="0">
                 <a:solidFill>
-                  <a:srgbClr val="1D4ED8"/>
+                  <a:srgbClr val="2B6CB0"/>
                 </a:solidFill>
                 <a:latin typeface="Pretendard" pitchFamily="34" charset="0"/>
                 <a:ea typeface="Pretendard" pitchFamily="34" charset="-122"/>
@@ -5262,7 +6091,7 @@
       </p:sp>
       <p:sp>
         <p:nvSpPr>
-          <p:cNvPr id="9" name="Text 7"/>
+          <p:cNvPr id="10" name="Text 8"/>
           <p:cNvSpPr/>
           <p:nvPr/>
         </p:nvSpPr>
@@ -5291,13 +6120,13 @@
             <a:r>
               <a:rPr lang="en-US" sz="930" dirty="0">
                 <a:solidFill>
-                  <a:srgbClr val="0F172A"/>
+                  <a:srgbClr val="10161F"/>
                 </a:solidFill>
                 <a:latin typeface="Pretendard" pitchFamily="34" charset="0"/>
                 <a:ea typeface="Pretendard" pitchFamily="34" charset="-122"/>
                 <a:cs typeface="Pretendard" pitchFamily="34" charset="-120"/>
               </a:rPr>
-              <a:t>대지 142.5평 / 연면적 620.8평</a:t>
+              <a:t>상세 건물 제원은 실사 자료를 참조하시기 바랍니다</a:t>
             </a:r>
             <a:endParaRPr lang="en-US" sz="930" dirty="0"/>
           </a:p>
@@ -5312,13 +6141,13 @@
             <a:r>
               <a:rPr lang="en-US" sz="930" dirty="0">
                 <a:solidFill>
-                  <a:srgbClr val="0F172A"/>
+                  <a:srgbClr val="10161F"/>
                 </a:solidFill>
                 <a:latin typeface="Pretendard" pitchFamily="34" charset="0"/>
                 <a:ea typeface="Pretendard" pitchFamily="34" charset="-122"/>
                 <a:cs typeface="Pretendard" pitchFamily="34" charset="-120"/>
               </a:rPr>
-              <a:t>지하 2층 ~ 지상 7층 (2017년 준공)</a:t>
+              <a:t>건물 현황 및 규모는 첨부 대장을 기준으로 합니다</a:t>
             </a:r>
             <a:endParaRPr lang="en-US" sz="930" dirty="0"/>
           </a:p>
@@ -5333,13 +6162,13 @@
             <a:r>
               <a:rPr lang="en-US" sz="930" dirty="0">
                 <a:solidFill>
-                  <a:srgbClr val="0F172A"/>
+                  <a:srgbClr val="10161F"/>
                 </a:solidFill>
                 <a:latin typeface="Pretendard" pitchFamily="34" charset="0"/>
                 <a:ea typeface="Pretendard" pitchFamily="34" charset="-122"/>
                 <a:cs typeface="Pretendard" pitchFamily="34" charset="-120"/>
               </a:rPr>
-              <a:t>15인승 침대용 승강기 및 자주식 주차 18대 완비</a:t>
+              <a:t>건물 상태 및 설비 현황은 실사 보고서를 참조하십시오</a:t>
             </a:r>
             <a:endParaRPr lang="en-US" sz="930" dirty="0"/>
           </a:p>
@@ -5347,7 +6176,7 @@
       </p:sp>
       <p:sp>
         <p:nvSpPr>
-          <p:cNvPr id="10" name="Shape 8"/>
+          <p:cNvPr id="11" name="Shape 9"/>
           <p:cNvSpPr/>
           <p:nvPr/>
         </p:nvSpPr>
@@ -5362,7 +6191,7 @@
           <a:noFill/>
           <a:ln w="8890">
             <a:solidFill>
-              <a:srgbClr val="6B8E00"/>
+              <a:srgbClr val="B98A2E"/>
             </a:solidFill>
             <a:prstDash val="solid"/>
           </a:ln>
@@ -5370,49 +6199,49 @@
       </p:sp>
       <p:sp>
         <p:nvSpPr>
-          <p:cNvPr id="11" name="Shape 9"/>
+          <p:cNvPr id="12" name="Shape 10"/>
           <p:cNvSpPr/>
           <p:nvPr/>
         </p:nvSpPr>
         <p:spPr>
           <a:xfrm>
             <a:off x="7784287" y="1645920"/>
-            <a:ext cx="3840480" cy="2103120"/>
+            <a:ext cx="3840480" cy="1645920"/>
           </a:xfrm>
           <a:prstGeom prst="roundRect">
             <a:avLst>
-              <a:gd name="adj" fmla="val 2609"/>
+              <a:gd name="adj" fmla="val 3333"/>
             </a:avLst>
           </a:prstGeom>
           <a:solidFill>
-            <a:srgbClr val="DBEAFE"/>
+            <a:srgbClr val="F3EBDA"/>
           </a:solidFill>
           <a:ln/>
         </p:spPr>
       </p:sp>
       <p:sp>
         <p:nvSpPr>
-          <p:cNvPr id="12" name="Shape 10"/>
+          <p:cNvPr id="13" name="Shape 11"/>
           <p:cNvSpPr/>
           <p:nvPr/>
         </p:nvSpPr>
         <p:spPr>
           <a:xfrm>
             <a:off x="7784287" y="1700784"/>
-            <a:ext cx="36576" cy="1993392"/>
+            <a:ext cx="36576" cy="1536192"/>
           </a:xfrm>
           <a:prstGeom prst="rect">
             <a:avLst/>
           </a:prstGeom>
           <a:solidFill>
-            <a:srgbClr val="1D4ED8"/>
+            <a:srgbClr val="977024"/>
           </a:solidFill>
           <a:ln/>
         </p:spPr>
       </p:sp>
       <p:sp>
         <p:nvSpPr>
-          <p:cNvPr id="13" name="Text 11"/>
+          <p:cNvPr id="14" name="Text 12"/>
           <p:cNvSpPr/>
           <p:nvPr/>
         </p:nvSpPr>
@@ -5434,147 +6263,90 @@
             <a:pPr indent="0" marL="0">
               <a:buNone/>
             </a:pPr>
-            <a:r>
-              <a:rPr lang="en-US" sz="1050" b="1" dirty="0">
-                <a:solidFill>
-                  <a:srgbClr val="1D4ED8"/>
+            <a:endParaRPr lang="en-US" sz="1050" dirty="0"/>
+          </a:p>
+        </p:txBody>
+      </p:sp>
+      <p:sp>
+        <p:nvSpPr>
+          <p:cNvPr id="15" name="Text 13"/>
+          <p:cNvSpPr/>
+          <p:nvPr/>
+        </p:nvSpPr>
+        <p:spPr>
+          <a:xfrm>
+            <a:off x="7967167" y="1975104"/>
+            <a:ext cx="3511296" cy="1243584"/>
+          </a:xfrm>
+          <a:prstGeom prst="rect">
+            <a:avLst/>
+          </a:prstGeom>
+          <a:noFill/>
+          <a:ln/>
+        </p:spPr>
+        <p:txBody>
+          <a:bodyPr wrap="square" lIns="0" tIns="0" rIns="0" bIns="0" rtlCol="0" anchor="t"/>
+          <a:lstStyle/>
+          <a:p>
+            <a:pPr indent="0" marL="0">
+              <a:lnSpc>
+                <a:spcPct val="120000"/>
+              </a:lnSpc>
+              <a:buNone/>
+            </a:pPr>
+            <a:r>
+              <a:rPr lang="en-US" sz="930" dirty="0">
+                <a:solidFill>
+                  <a:srgbClr val="10161F"/>
                 </a:solidFill>
                 <a:latin typeface="Pretendard" pitchFamily="34" charset="0"/>
                 <a:ea typeface="Pretendard" pitchFamily="34" charset="-122"/>
                 <a:cs typeface="Pretendard" pitchFamily="34" charset="-120"/>
               </a:rPr>
-              <a:t>토지 및 건물 분석 포인트</a:t>
-            </a:r>
-            <a:endParaRPr lang="en-US" sz="1050" dirty="0"/>
-          </a:p>
-        </p:txBody>
-      </p:sp>
-      <p:sp>
-        <p:nvSpPr>
-          <p:cNvPr id="14" name="Text 12"/>
-          <p:cNvSpPr/>
-          <p:nvPr/>
-        </p:nvSpPr>
-        <p:spPr>
-          <a:xfrm>
-            <a:off x="7967167" y="1975104"/>
-            <a:ext cx="3511296" cy="1700784"/>
-          </a:xfrm>
-          <a:prstGeom prst="rect">
-            <a:avLst/>
-          </a:prstGeom>
-          <a:noFill/>
-          <a:ln/>
-        </p:spPr>
-        <p:txBody>
-          <a:bodyPr wrap="square" lIns="0" tIns="0" rIns="0" bIns="0" rtlCol="0" anchor="t"/>
-          <a:lstStyle/>
-          <a:p>
-            <a:pPr marL="342900" indent="-342900">
-              <a:lnSpc>
-                <a:spcPct val="120000"/>
-              </a:lnSpc>
-              <a:buSzPct val="100000"/>
-              <a:buChar char="•"/>
-            </a:pPr>
-            <a:r>
-              <a:rPr lang="en-US" sz="930" dirty="0">
-                <a:solidFill>
-                  <a:srgbClr val="0F172A"/>
+              <a:t>건폐율 50%, 용적률 250% 적용 시 약 680평 신축 가능합니다.</a:t>
+            </a:r>
+            <a:endParaRPr lang="en-US" sz="930" dirty="0"/>
+          </a:p>
+        </p:txBody>
+      </p:sp>
+      <p:sp>
+        <p:nvSpPr>
+          <p:cNvPr id="16" name="Text 14"/>
+          <p:cNvSpPr/>
+          <p:nvPr/>
+        </p:nvSpPr>
+        <p:spPr>
+          <a:xfrm>
+            <a:off x="566928" y="6382512"/>
+            <a:ext cx="7315200" cy="219456"/>
+          </a:xfrm>
+          <a:prstGeom prst="rect">
+            <a:avLst/>
+          </a:prstGeom>
+          <a:noFill/>
+          <a:ln/>
+        </p:spPr>
+        <p:txBody>
+          <a:bodyPr wrap="square" lIns="0" tIns="0" rIns="0" bIns="0" rtlCol="0" anchor="ctr"/>
+          <a:lstStyle/>
+          <a:p>
+            <a:pPr indent="0" marL="0">
+              <a:buNone/>
+            </a:pPr>
+            <a:r>
+              <a:rPr lang="en-US" sz="800" dirty="0">
+                <a:solidFill>
+                  <a:srgbClr val="718096"/>
                 </a:solidFill>
                 <a:latin typeface="Pretendard" pitchFamily="34" charset="0"/>
                 <a:ea typeface="Pretendard" pitchFamily="34" charset="-122"/>
                 <a:cs typeface="Pretendard" pitchFamily="34" charset="-120"/>
               </a:rPr>
-              <a:t>서초대로 25m 메인 도로변 우수한 가시성 확보</a:t>
-            </a:r>
-            <a:endParaRPr lang="en-US" sz="930" dirty="0"/>
-          </a:p>
-          <a:p>
-            <a:pPr marL="342900" indent="-342900">
-              <a:lnSpc>
-                <a:spcPct val="120000"/>
-              </a:lnSpc>
-              <a:buSzPct val="100000"/>
-              <a:buChar char="•"/>
-            </a:pPr>
-            <a:r>
-              <a:rPr lang="en-US" sz="930" dirty="0">
-                <a:solidFill>
-                  <a:srgbClr val="0F172A"/>
-                </a:solidFill>
-                <a:latin typeface="Pretendard" pitchFamily="34" charset="0"/>
-                <a:ea typeface="Pretendard" pitchFamily="34" charset="-122"/>
-                <a:cs typeface="Pretendard" pitchFamily="34" charset="-120"/>
-              </a:rPr>
-              <a:t>제3종일반주거지역 법정 용적률 완비 자산</a:t>
-            </a:r>
-            <a:endParaRPr lang="en-US" sz="930" dirty="0"/>
-          </a:p>
-          <a:p>
-            <a:pPr marL="342900" indent="-342900">
-              <a:lnSpc>
-                <a:spcPct val="120000"/>
-              </a:lnSpc>
-              <a:buSzPct val="100000"/>
-              <a:buChar char="•"/>
-            </a:pPr>
-            <a:r>
-              <a:rPr lang="en-US" sz="930" dirty="0">
-                <a:solidFill>
-                  <a:srgbClr val="0F172A"/>
-                </a:solidFill>
-                <a:latin typeface="Pretendard" pitchFamily="34" charset="0"/>
-                <a:ea typeface="Pretendard" pitchFamily="34" charset="-122"/>
-                <a:cs typeface="Pretendard" pitchFamily="34" charset="-120"/>
-              </a:rPr>
-              <a:t>침대용 승강기 완비로 병의원 입점 최적화 구조</a:t>
-            </a:r>
-            <a:endParaRPr lang="en-US" sz="930" dirty="0"/>
-          </a:p>
-        </p:txBody>
-      </p:sp>
-      <p:sp>
-        <p:nvSpPr>
-          <p:cNvPr id="15" name="Shape 13"/>
-          <p:cNvSpPr/>
-          <p:nvPr/>
-        </p:nvSpPr>
-        <p:spPr>
-          <a:xfrm>
-            <a:off x="7784287" y="3977640"/>
-            <a:ext cx="3840480" cy="2148840"/>
-          </a:xfrm>
-          <a:prstGeom prst="roundRect">
-            <a:avLst>
-              <a:gd name="adj" fmla="val 2553"/>
-            </a:avLst>
-          </a:prstGeom>
-          <a:solidFill>
-            <a:srgbClr val="DBEAFE"/>
-          </a:solidFill>
-          <a:ln/>
-        </p:spPr>
-      </p:sp>
-      <p:sp>
-        <p:nvSpPr>
-          <p:cNvPr id="16" name="Shape 14"/>
-          <p:cNvSpPr/>
-          <p:nvPr/>
-        </p:nvSpPr>
-        <p:spPr>
-          <a:xfrm>
-            <a:off x="7784287" y="4032504"/>
-            <a:ext cx="36576" cy="2039112"/>
-          </a:xfrm>
-          <a:prstGeom prst="rect">
-            <a:avLst/>
-          </a:prstGeom>
-          <a:solidFill>
-            <a:srgbClr val="1D4ED8"/>
-          </a:solidFill>
-          <a:ln/>
-        </p:spPr>
+              <a:t>크리딜   |   </a:t>
+            </a:r>
+            <a:endParaRPr lang="en-US" sz="800" dirty="0"/>
+          </a:p>
+        </p:txBody>
       </p:sp>
       <p:sp>
         <p:nvSpPr>
@@ -5584,183 +6356,36 @@
         </p:nvSpPr>
         <p:spPr>
           <a:xfrm>
-            <a:off x="7967167" y="4087368"/>
-            <a:ext cx="3511296" cy="201168"/>
-          </a:xfrm>
-          <a:prstGeom prst="rect">
-            <a:avLst/>
-          </a:prstGeom>
-          <a:noFill/>
-          <a:ln/>
-        </p:spPr>
-        <p:txBody>
-          <a:bodyPr wrap="square" lIns="0" tIns="0" rIns="0" bIns="0" rtlCol="0" anchor="ctr"/>
-          <a:lstStyle/>
-          <a:p>
-            <a:pPr indent="0" marL="0">
-              <a:buNone/>
-            </a:pPr>
-            <a:r>
-              <a:rPr lang="en-US" sz="1050" b="1" dirty="0">
-                <a:solidFill>
-                  <a:srgbClr val="1D4ED8"/>
-                </a:solidFill>
-                <a:latin typeface="Pretendard" pitchFamily="34" charset="0"/>
-                <a:ea typeface="Pretendard" pitchFamily="34" charset="-122"/>
-                <a:cs typeface="Pretendard" pitchFamily="34" charset="-120"/>
-              </a:rPr>
-              <a:t>물건 실사 및 관리 상태</a:t>
-            </a:r>
-            <a:endParaRPr lang="en-US" sz="1050" dirty="0"/>
-          </a:p>
-        </p:txBody>
-      </p:sp>
-      <p:sp>
-        <p:nvSpPr>
-          <p:cNvPr id="18" name="Text 16"/>
-          <p:cNvSpPr/>
-          <p:nvPr/>
-        </p:nvSpPr>
-        <p:spPr>
-          <a:xfrm>
-            <a:off x="7967167" y="4306824"/>
-            <a:ext cx="3511296" cy="1746504"/>
-          </a:xfrm>
-          <a:prstGeom prst="rect">
-            <a:avLst/>
-          </a:prstGeom>
-          <a:noFill/>
-          <a:ln/>
-        </p:spPr>
-        <p:txBody>
-          <a:bodyPr wrap="square" lIns="0" tIns="0" rIns="0" bIns="0" rtlCol="0" anchor="t"/>
-          <a:lstStyle/>
-          <a:p>
-            <a:pPr marL="342900" indent="-342900">
-              <a:lnSpc>
-                <a:spcPct val="120000"/>
-              </a:lnSpc>
-              <a:buSzPct val="100000"/>
-              <a:buChar char="•"/>
-            </a:pPr>
-            <a:r>
-              <a:rPr lang="en-US" sz="930" dirty="0">
-                <a:solidFill>
-                  <a:srgbClr val="0F172A"/>
-                </a:solidFill>
-                <a:latin typeface="Pretendard" pitchFamily="34" charset="0"/>
-                <a:ea typeface="Pretendard" pitchFamily="34" charset="-122"/>
-                <a:cs typeface="Pretendard" pitchFamily="34" charset="-120"/>
-              </a:rPr>
-              <a:t>2017년 준공 신축급 상태로 누수·균열 0건</a:t>
-            </a:r>
-            <a:endParaRPr lang="en-US" sz="930" dirty="0"/>
-          </a:p>
-          <a:p>
-            <a:pPr marL="342900" indent="-342900">
-              <a:lnSpc>
-                <a:spcPct val="120000"/>
-              </a:lnSpc>
-              <a:buSzPct val="100000"/>
-              <a:buChar char="•"/>
-            </a:pPr>
-            <a:r>
-              <a:rPr lang="en-US" sz="930" dirty="0">
-                <a:solidFill>
-                  <a:srgbClr val="0F172A"/>
-                </a:solidFill>
-                <a:latin typeface="Pretendard" pitchFamily="34" charset="0"/>
-                <a:ea typeface="Pretendard" pitchFamily="34" charset="-122"/>
-                <a:cs typeface="Pretendard" pitchFamily="34" charset="-120"/>
-              </a:rPr>
-              <a:t>단독 법인 소유로 권리관계 투명</a:t>
-            </a:r>
-            <a:endParaRPr lang="en-US" sz="930" dirty="0"/>
-          </a:p>
-          <a:p>
-            <a:pPr marL="342900" indent="-342900">
-              <a:lnSpc>
-                <a:spcPct val="120000"/>
-              </a:lnSpc>
-              <a:buSzPct val="100000"/>
-              <a:buChar char="•"/>
-            </a:pPr>
-            <a:r>
-              <a:rPr lang="en-US" sz="930" dirty="0">
-                <a:solidFill>
-                  <a:srgbClr val="0F172A"/>
-                </a:solidFill>
-                <a:latin typeface="Pretendard" pitchFamily="34" charset="0"/>
-                <a:ea typeface="Pretendard" pitchFamily="34" charset="-122"/>
-                <a:cs typeface="Pretendard" pitchFamily="34" charset="-120"/>
-              </a:rPr>
-              <a:t>1금융권 담보대출 85억 원 승계 적격</a:t>
-            </a:r>
-            <a:endParaRPr lang="en-US" sz="930" dirty="0"/>
-          </a:p>
-        </p:txBody>
-      </p:sp>
-      <p:sp>
-        <p:nvSpPr>
-          <p:cNvPr id="19" name="Text 17"/>
-          <p:cNvSpPr/>
-          <p:nvPr/>
-        </p:nvSpPr>
-        <p:spPr>
-          <a:xfrm>
-            <a:off x="566928" y="6419088"/>
-            <a:ext cx="11057839" cy="201168"/>
-          </a:xfrm>
-          <a:prstGeom prst="rect">
-            <a:avLst/>
-          </a:prstGeom>
-          <a:noFill/>
-          <a:ln/>
-        </p:spPr>
-        <p:txBody>
-          <a:bodyPr wrap="square" lIns="0" tIns="0" rIns="0" bIns="0" rtlCol="0" anchor="ctr"/>
-          <a:lstStyle/>
-          <a:p>
-            <a:pPr algn="ctr" indent="0" marL="0">
-              <a:buNone/>
-            </a:pPr>
-            <a:r>
-              <a:rPr lang="en-US" sz="750" dirty="0">
-                <a:solidFill>
-                  <a:srgbClr val="64748B"/>
-                </a:solidFill>
-                <a:latin typeface="Pretendard" pitchFamily="34" charset="0"/>
-                <a:ea typeface="Pretendard" pitchFamily="34" charset="-122"/>
-                <a:cs typeface="Pretendard" pitchFamily="34" charset="-120"/>
-              </a:rPr>
-              <a:t>크리딜  ·    ·  5</a:t>
-            </a:r>
-            <a:endParaRPr lang="en-US" sz="750" dirty="0"/>
-          </a:p>
-        </p:txBody>
-      </p:sp>
-      <p:sp>
-        <p:nvSpPr>
-          <p:cNvPr id="20" name="Shape 18"/>
-          <p:cNvSpPr/>
-          <p:nvPr/>
-        </p:nvSpPr>
-        <p:spPr>
-          <a:xfrm>
-            <a:off x="4437172" y="6382512"/>
-            <a:ext cx="3317352" cy="0"/>
-          </a:xfrm>
-          <a:prstGeom prst="line">
-            <a:avLst/>
-          </a:prstGeom>
-          <a:noFill/>
-          <a:ln w="6350">
-            <a:solidFill>
-              <a:srgbClr val="6B8E00"/>
-            </a:solidFill>
-            <a:prstDash val="solid"/>
-          </a:ln>
-        </p:spPr>
+            <a:off x="10710367" y="6382512"/>
+            <a:ext cx="914400" cy="219456"/>
+          </a:xfrm>
+          <a:prstGeom prst="rect">
+            <a:avLst/>
+          </a:prstGeom>
+          <a:noFill/>
+          <a:ln/>
+        </p:spPr>
+        <p:txBody>
+          <a:bodyPr wrap="square" lIns="0" tIns="0" rIns="0" bIns="0" rtlCol="0" anchor="ctr"/>
+          <a:lstStyle/>
+          <a:p>
+            <a:pPr algn="r" indent="0" marL="0">
+              <a:buNone/>
+            </a:pPr>
+            <a:r>
+              <a:rPr lang="en-US" sz="900" b="1" dirty="0">
+                <a:solidFill>
+                  <a:srgbClr val="B98A2E"/>
+                </a:solidFill>
+                <a:latin typeface="Arial" pitchFamily="34" charset="0"/>
+                <a:ea typeface="Arial" pitchFamily="34" charset="-122"/>
+                <a:cs typeface="Arial" pitchFamily="34" charset="-120"/>
+              </a:rPr>
+              <a:t>5</a:t>
+            </a:r>
+            <a:endParaRPr lang="en-US" sz="900" dirty="0"/>
+          </a:p>
+        </p:txBody>
       </p:sp>
     </p:spTree>
   </p:cSld>
@@ -5802,14 +6427,14 @@
         </p:nvSpPr>
         <p:spPr>
           <a:xfrm>
-            <a:off x="566928" y="384048"/>
-            <a:ext cx="45720" cy="566928"/>
-          </a:xfrm>
-          <a:prstGeom prst="rect">
+            <a:off x="566928" y="457200"/>
+            <a:ext cx="384048" cy="384048"/>
+          </a:xfrm>
+          <a:prstGeom prst="ellipse">
             <a:avLst/>
           </a:prstGeom>
           <a:solidFill>
-            <a:srgbClr val="6B8E00"/>
+            <a:srgbClr val="B98A2E"/>
           </a:solidFill>
           <a:ln/>
         </p:spPr>
@@ -5822,32 +6447,71 @@
         </p:nvSpPr>
         <p:spPr>
           <a:xfrm>
-            <a:off x="749808" y="384048"/>
-            <a:ext cx="10874959" cy="182880"/>
-          </a:xfrm>
-          <a:prstGeom prst="rect">
-            <a:avLst/>
-          </a:prstGeom>
-          <a:noFill/>
-          <a:ln/>
-        </p:spPr>
-        <p:txBody>
-          <a:bodyPr wrap="square" lIns="0" tIns="0" rIns="0" bIns="0" rtlCol="0" anchor="ctr"/>
-          <a:lstStyle/>
-          <a:p>
-            <a:pPr indent="0" marL="0">
-              <a:buNone/>
-            </a:pPr>
-            <a:r>
-              <a:rPr lang="en-US" sz="950" b="1" spc="200" kern="0" dirty="0">
-                <a:solidFill>
-                  <a:srgbClr val="6B8E00"/>
+            <a:off x="566928" y="457200"/>
+            <a:ext cx="384048" cy="384048"/>
+          </a:xfrm>
+          <a:prstGeom prst="rect">
+            <a:avLst/>
+          </a:prstGeom>
+          <a:noFill/>
+          <a:ln/>
+        </p:spPr>
+        <p:txBody>
+          <a:bodyPr wrap="square" lIns="0" tIns="0" rIns="0" bIns="0" rtlCol="0" anchor="ctr"/>
+          <a:lstStyle/>
+          <a:p>
+            <a:pPr algn="ctr" indent="0" marL="0">
+              <a:buNone/>
+            </a:pPr>
+            <a:r>
+              <a:rPr lang="en-US" sz="1300" b="1" dirty="0">
+                <a:solidFill>
+                  <a:srgbClr val="FFFFFF"/>
                 </a:solidFill>
                 <a:latin typeface="Arial" pitchFamily="34" charset="0"/>
                 <a:ea typeface="Arial" pitchFamily="34" charset="-122"/>
                 <a:cs typeface="Arial" pitchFamily="34" charset="-120"/>
               </a:rPr>
-              <a:t>06  Feasibility</a:t>
+              <a:t>06</a:t>
+            </a:r>
+            <a:endParaRPr lang="en-US" sz="1300" dirty="0"/>
+          </a:p>
+        </p:txBody>
+      </p:sp>
+      <p:sp>
+        <p:nvSpPr>
+          <p:cNvPr id="4" name="Text 2"/>
+          <p:cNvSpPr/>
+          <p:nvPr/>
+        </p:nvSpPr>
+        <p:spPr>
+          <a:xfrm>
+            <a:off x="1133856" y="457200"/>
+            <a:ext cx="10490911" cy="182880"/>
+          </a:xfrm>
+          <a:prstGeom prst="rect">
+            <a:avLst/>
+          </a:prstGeom>
+          <a:noFill/>
+          <a:ln/>
+        </p:spPr>
+        <p:txBody>
+          <a:bodyPr wrap="square" lIns="0" tIns="0" rIns="0" bIns="0" rtlCol="0" anchor="ctr"/>
+          <a:lstStyle/>
+          <a:p>
+            <a:pPr indent="0" marL="0">
+              <a:buNone/>
+            </a:pPr>
+            <a:r>
+              <a:rPr lang="en-US" sz="950" b="1" spc="200" kern="0" dirty="0">
+                <a:solidFill>
+                  <a:srgbClr val="B98A2E"/>
+                </a:solidFill>
+                <a:latin typeface="Arial" pitchFamily="34" charset="0"/>
+                <a:ea typeface="Arial" pitchFamily="34" charset="-122"/>
+                <a:cs typeface="Arial" pitchFamily="34" charset="-120"/>
+              </a:rPr>
+              <a:t>Feasibility</a:t>
             </a:r>
             <a:endParaRPr lang="en-US" sz="950" dirty="0"/>
           </a:p>
@@ -5855,14 +6519,14 @@
       </p:sp>
       <p:sp>
         <p:nvSpPr>
-          <p:cNvPr id="4" name="Text 2"/>
-          <p:cNvSpPr/>
-          <p:nvPr/>
-        </p:nvSpPr>
-        <p:spPr>
-          <a:xfrm>
-            <a:off x="749808" y="566928"/>
-            <a:ext cx="10874959" cy="384048"/>
+          <p:cNvPr id="5" name="Text 3"/>
+          <p:cNvSpPr/>
+          <p:nvPr/>
+        </p:nvSpPr>
+        <p:spPr>
+          <a:xfrm>
+            <a:off x="1133856" y="640080"/>
+            <a:ext cx="10490911" cy="365760"/>
           </a:xfrm>
           <a:prstGeom prst="rect">
             <a:avLst/>
@@ -5878,9 +6542,9 @@
               <a:buNone/>
             </a:pPr>
             <a:r>
-              <a:rPr lang="en-US" sz="2200" b="1" dirty="0">
-                <a:solidFill>
-                  <a:srgbClr val="0F172A"/>
+              <a:rPr lang="en-US" sz="2300" b="1" dirty="0">
+                <a:solidFill>
+                  <a:srgbClr val="10161F"/>
                 </a:solidFill>
                 <a:latin typeface="Pretendard" pitchFamily="34" charset="0"/>
                 <a:ea typeface="Pretendard" pitchFamily="34" charset="-122"/>
@@ -5888,29 +6552,133 @@
               </a:rPr>
               <a:t>개발 사업성</a:t>
             </a:r>
-            <a:endParaRPr lang="en-US" sz="2200" dirty="0"/>
-          </a:p>
-        </p:txBody>
-      </p:sp>
-      <p:sp>
-        <p:nvSpPr>
-          <p:cNvPr id="5" name="Text 3"/>
-          <p:cNvSpPr/>
-          <p:nvPr/>
-        </p:nvSpPr>
-        <p:spPr>
-          <a:xfrm>
-            <a:off x="566928" y="1417320"/>
-            <a:ext cx="2606040" cy="402336"/>
-          </a:xfrm>
-          <a:prstGeom prst="rect">
-            <a:avLst/>
-          </a:prstGeom>
-          <a:noFill/>
-          <a:ln/>
-        </p:spPr>
-        <p:txBody>
-          <a:bodyPr wrap="square" lIns="0" tIns="0" rIns="0" bIns="0" rtlCol="0" anchor="ctr"/>
+            <a:endParaRPr lang="en-US" sz="2300" dirty="0"/>
+          </a:p>
+        </p:txBody>
+      </p:sp>
+      <p:sp>
+        <p:nvSpPr>
+          <p:cNvPr id="6" name="Shape 4"/>
+          <p:cNvSpPr/>
+          <p:nvPr/>
+        </p:nvSpPr>
+        <p:spPr>
+          <a:xfrm>
+            <a:off x="566928" y="1325880"/>
+            <a:ext cx="11057839" cy="0"/>
+          </a:xfrm>
+          <a:prstGeom prst="line">
+            <a:avLst/>
+          </a:prstGeom>
+          <a:noFill/>
+          <a:ln w="19050">
+            <a:solidFill>
+              <a:srgbClr val="B98A2E"/>
+            </a:solidFill>
+            <a:prstDash val="solid"/>
+          </a:ln>
+        </p:spPr>
+      </p:sp>
+      <p:sp>
+        <p:nvSpPr>
+          <p:cNvPr id="7" name="Shape 5"/>
+          <p:cNvSpPr/>
+          <p:nvPr/>
+        </p:nvSpPr>
+        <p:spPr>
+          <a:xfrm>
+            <a:off x="566928" y="1645920"/>
+            <a:ext cx="11057839" cy="1280160"/>
+          </a:xfrm>
+          <a:prstGeom prst="roundRect">
+            <a:avLst>
+              <a:gd name="adj" fmla="val 4286"/>
+            </a:avLst>
+          </a:prstGeom>
+          <a:solidFill>
+            <a:srgbClr val="BEE3F8"/>
+          </a:solidFill>
+          <a:ln/>
+        </p:spPr>
+      </p:sp>
+      <p:sp>
+        <p:nvSpPr>
+          <p:cNvPr id="8" name="Shape 6"/>
+          <p:cNvSpPr/>
+          <p:nvPr/>
+        </p:nvSpPr>
+        <p:spPr>
+          <a:xfrm>
+            <a:off x="566928" y="1700784"/>
+            <a:ext cx="36576" cy="1170432"/>
+          </a:xfrm>
+          <a:prstGeom prst="rect">
+            <a:avLst/>
+          </a:prstGeom>
+          <a:solidFill>
+            <a:srgbClr val="2B6CB0"/>
+          </a:solidFill>
+          <a:ln/>
+        </p:spPr>
+      </p:sp>
+      <p:sp>
+        <p:nvSpPr>
+          <p:cNvPr id="9" name="Text 7"/>
+          <p:cNvSpPr/>
+          <p:nvPr/>
+        </p:nvSpPr>
+        <p:spPr>
+          <a:xfrm>
+            <a:off x="749808" y="1755648"/>
+            <a:ext cx="10728655" cy="201168"/>
+          </a:xfrm>
+          <a:prstGeom prst="rect">
+            <a:avLst/>
+          </a:prstGeom>
+          <a:noFill/>
+          <a:ln/>
+        </p:spPr>
+        <p:txBody>
+          <a:bodyPr wrap="square" lIns="0" tIns="0" rIns="0" bIns="0" rtlCol="0" anchor="ctr"/>
+          <a:lstStyle/>
+          <a:p>
+            <a:pPr indent="0" marL="0">
+              <a:buNone/>
+            </a:pPr>
+            <a:r>
+              <a:rPr lang="en-US" sz="1050" b="1" dirty="0">
+                <a:solidFill>
+                  <a:srgbClr val="2B6CB0"/>
+                </a:solidFill>
+                <a:latin typeface="Pretendard" pitchFamily="34" charset="0"/>
+                <a:ea typeface="Pretendard" pitchFamily="34" charset="-122"/>
+                <a:cs typeface="Pretendard" pitchFamily="34" charset="-120"/>
+              </a:rPr>
+              <a:t>투자 가치 제안</a:t>
+            </a:r>
+            <a:endParaRPr lang="en-US" sz="1050" dirty="0"/>
+          </a:p>
+        </p:txBody>
+      </p:sp>
+      <p:sp>
+        <p:nvSpPr>
+          <p:cNvPr id="10" name="Text 8"/>
+          <p:cNvSpPr/>
+          <p:nvPr/>
+        </p:nvSpPr>
+        <p:spPr>
+          <a:xfrm>
+            <a:off x="749808" y="1975104"/>
+            <a:ext cx="10728655" cy="877824"/>
+          </a:xfrm>
+          <a:prstGeom prst="rect">
+            <a:avLst/>
+          </a:prstGeom>
+          <a:noFill/>
+          <a:ln/>
+        </p:spPr>
+        <p:txBody>
+          <a:bodyPr wrap="square" lIns="0" tIns="0" rIns="0" bIns="0" rtlCol="0" anchor="t"/>
           <a:lstStyle/>
           <a:p>
             <a:pPr indent="0" marL="0">
@@ -5920,9 +6688,9 @@
               <a:buNone/>
             </a:pPr>
             <a:r>
-              <a:rPr lang="en-US" sz="1300" dirty="0">
-                <a:solidFill>
-                  <a:srgbClr val="64748B"/>
+              <a:rPr lang="en-US" sz="930" dirty="0">
+                <a:solidFill>
+                  <a:srgbClr val="10161F"/>
                 </a:solidFill>
                 <a:latin typeface="Pretendard" pitchFamily="34" charset="0"/>
                 <a:ea typeface="Pretendard" pitchFamily="34" charset="-122"/>
@@ -5930,20 +6698,20 @@
               </a:rPr>
               <a:t>예상 개발이익률 약 28%, 완공 후 자산가치 350억 상회 전망입니다.</a:t>
             </a:r>
-            <a:endParaRPr lang="en-US" sz="1300" dirty="0"/>
-          </a:p>
-        </p:txBody>
-      </p:sp>
-      <p:sp>
-        <p:nvSpPr>
-          <p:cNvPr id="6" name="Text 4"/>
-          <p:cNvSpPr/>
-          <p:nvPr/>
-        </p:nvSpPr>
-        <p:spPr>
-          <a:xfrm>
-            <a:off x="3172968" y="1417320"/>
-            <a:ext cx="4251960" cy="402336"/>
+            <a:endParaRPr lang="en-US" sz="930" dirty="0"/>
+          </a:p>
+        </p:txBody>
+      </p:sp>
+      <p:sp>
+        <p:nvSpPr>
+          <p:cNvPr id="11" name="Text 9"/>
+          <p:cNvSpPr/>
+          <p:nvPr/>
+        </p:nvSpPr>
+        <p:spPr>
+          <a:xfrm>
+            <a:off x="566928" y="6382512"/>
+            <a:ext cx="7315200" cy="219456"/>
           </a:xfrm>
           <a:prstGeom prst="rect">
             <a:avLst/>
@@ -5956,136 +6724,59 @@
           <a:lstStyle/>
           <a:p>
             <a:pPr indent="0" marL="0">
-              <a:lnSpc>
-                <a:spcPct val="120000"/>
-              </a:lnSpc>
-              <a:buNone/>
-            </a:pPr>
-            <a:endParaRPr lang="en-US" sz="1300" dirty="0"/>
-          </a:p>
-        </p:txBody>
-      </p:sp>
-      <p:sp>
-        <p:nvSpPr>
-          <p:cNvPr id="7" name="Shape 5"/>
-          <p:cNvSpPr/>
-          <p:nvPr/>
-        </p:nvSpPr>
-        <p:spPr>
-          <a:xfrm>
-            <a:off x="7604608" y="1371600"/>
-            <a:ext cx="0" cy="4754880"/>
-          </a:xfrm>
-          <a:prstGeom prst="line">
-            <a:avLst/>
-          </a:prstGeom>
-          <a:noFill/>
-          <a:ln w="8890">
-            <a:solidFill>
-              <a:srgbClr val="6B8E00"/>
-            </a:solidFill>
-            <a:prstDash val="solid"/>
-          </a:ln>
-        </p:spPr>
-      </p:sp>
-      <p:sp>
-        <p:nvSpPr>
-          <p:cNvPr id="8" name="Text 6"/>
-          <p:cNvSpPr/>
-          <p:nvPr/>
-        </p:nvSpPr>
-        <p:spPr>
-          <a:xfrm>
-            <a:off x="566928" y="6419088"/>
-            <a:ext cx="11057839" cy="201168"/>
-          </a:xfrm>
-          <a:prstGeom prst="rect">
-            <a:avLst/>
-          </a:prstGeom>
-          <a:noFill/>
-          <a:ln/>
-        </p:spPr>
-        <p:txBody>
-          <a:bodyPr wrap="square" lIns="0" tIns="0" rIns="0" bIns="0" rtlCol="0" anchor="ctr"/>
-          <a:lstStyle/>
-          <a:p>
-            <a:pPr algn="ctr" indent="0" marL="0">
-              <a:buNone/>
-            </a:pPr>
-            <a:r>
-              <a:rPr lang="en-US" sz="750" dirty="0">
-                <a:solidFill>
-                  <a:srgbClr val="64748B"/>
+              <a:buNone/>
+            </a:pPr>
+            <a:r>
+              <a:rPr lang="en-US" sz="800" dirty="0">
+                <a:solidFill>
+                  <a:srgbClr val="718096"/>
                 </a:solidFill>
                 <a:latin typeface="Pretendard" pitchFamily="34" charset="0"/>
                 <a:ea typeface="Pretendard" pitchFamily="34" charset="-122"/>
                 <a:cs typeface="Pretendard" pitchFamily="34" charset="-120"/>
               </a:rPr>
-              <a:t>크리딜  ·    ·  6</a:t>
-            </a:r>
-            <a:endParaRPr lang="en-US" sz="750" dirty="0"/>
-          </a:p>
-        </p:txBody>
-      </p:sp>
-      <p:sp>
-        <p:nvSpPr>
-          <p:cNvPr id="9" name="Shape 7"/>
-          <p:cNvSpPr/>
-          <p:nvPr/>
-        </p:nvSpPr>
-        <p:spPr>
-          <a:xfrm>
-            <a:off x="4437172" y="6382512"/>
-            <a:ext cx="3317352" cy="0"/>
-          </a:xfrm>
-          <a:prstGeom prst="line">
-            <a:avLst/>
-          </a:prstGeom>
-          <a:noFill/>
-          <a:ln w="6350">
-            <a:solidFill>
-              <a:srgbClr val="6B8E00"/>
-            </a:solidFill>
-            <a:prstDash val="solid"/>
-          </a:ln>
-        </p:spPr>
-      </p:sp>
-      <p:sp>
-        <p:nvSpPr>
-          <p:cNvPr id="10" name="Text 8"/>
-          <p:cNvSpPr/>
-          <p:nvPr/>
-        </p:nvSpPr>
-        <p:spPr>
-          <a:xfrm>
-            <a:off x="566928" y="1481328"/>
-            <a:ext cx="11057839" cy="237744"/>
-          </a:xfrm>
-          <a:prstGeom prst="rect">
-            <a:avLst/>
-          </a:prstGeom>
-          <a:noFill/>
-          <a:ln/>
-        </p:spPr>
-        <p:txBody>
-          <a:bodyPr wrap="square" lIns="0" tIns="0" rIns="0" bIns="0" rtlCol="0" anchor="t"/>
-          <a:lstStyle/>
-          <a:p>
-            <a:pPr indent="0" marL="0">
-              <a:buNone/>
-            </a:pPr>
-            <a:r>
-              <a:rPr lang="en-US" sz="1000" dirty="0">
-                <a:solidFill>
-                  <a:srgbClr val="0F172A"/>
-                </a:solidFill>
-                <a:latin typeface="Pretendard" pitchFamily="34" charset="0"/>
-                <a:ea typeface="Pretendard" pitchFamily="34" charset="-122"/>
-                <a:cs typeface="Pretendard" pitchFamily="34" charset="-120"/>
-              </a:rPr>
-              <a:t>예상 개발이익률 약 28%, 완공 후 자산가치 350억 상회 전망입니다.</a:t>
-            </a:r>
-            <a:endParaRPr lang="en-US" sz="1000" dirty="0"/>
+              <a:t>크리딜   |   </a:t>
+            </a:r>
+            <a:endParaRPr lang="en-US" sz="800" dirty="0"/>
+          </a:p>
+        </p:txBody>
+      </p:sp>
+      <p:sp>
+        <p:nvSpPr>
+          <p:cNvPr id="12" name="Text 10"/>
+          <p:cNvSpPr/>
+          <p:nvPr/>
+        </p:nvSpPr>
+        <p:spPr>
+          <a:xfrm>
+            <a:off x="10710367" y="6382512"/>
+            <a:ext cx="914400" cy="219456"/>
+          </a:xfrm>
+          <a:prstGeom prst="rect">
+            <a:avLst/>
+          </a:prstGeom>
+          <a:noFill/>
+          <a:ln/>
+        </p:spPr>
+        <p:txBody>
+          <a:bodyPr wrap="square" lIns="0" tIns="0" rIns="0" bIns="0" rtlCol="0" anchor="ctr"/>
+          <a:lstStyle/>
+          <a:p>
+            <a:pPr algn="r" indent="0" marL="0">
+              <a:buNone/>
+            </a:pPr>
+            <a:r>
+              <a:rPr lang="en-US" sz="900" b="1" dirty="0">
+                <a:solidFill>
+                  <a:srgbClr val="B98A2E"/>
+                </a:solidFill>
+                <a:latin typeface="Arial" pitchFamily="34" charset="0"/>
+                <a:ea typeface="Arial" pitchFamily="34" charset="-122"/>
+                <a:cs typeface="Arial" pitchFamily="34" charset="-120"/>
+              </a:rPr>
+              <a:t>6</a:t>
+            </a:r>
+            <a:endParaRPr lang="en-US" sz="900" dirty="0"/>
           </a:p>
         </p:txBody>
       </p:sp>
@@ -6129,14 +6820,14 @@
         </p:nvSpPr>
         <p:spPr>
           <a:xfrm>
-            <a:off x="566928" y="384048"/>
-            <a:ext cx="45720" cy="566928"/>
-          </a:xfrm>
-          <a:prstGeom prst="rect">
+            <a:off x="566928" y="457200"/>
+            <a:ext cx="384048" cy="384048"/>
+          </a:xfrm>
+          <a:prstGeom prst="ellipse">
             <a:avLst/>
           </a:prstGeom>
           <a:solidFill>
-            <a:srgbClr val="6B8E00"/>
+            <a:srgbClr val="B98A2E"/>
           </a:solidFill>
           <a:ln/>
         </p:spPr>
@@ -6149,32 +6840,71 @@
         </p:nvSpPr>
         <p:spPr>
           <a:xfrm>
-            <a:off x="749808" y="384048"/>
-            <a:ext cx="10874959" cy="182880"/>
-          </a:xfrm>
-          <a:prstGeom prst="rect">
-            <a:avLst/>
-          </a:prstGeom>
-          <a:noFill/>
-          <a:ln/>
-        </p:spPr>
-        <p:txBody>
-          <a:bodyPr wrap="square" lIns="0" tIns="0" rIns="0" bIns="0" rtlCol="0" anchor="ctr"/>
-          <a:lstStyle/>
-          <a:p>
-            <a:pPr indent="0" marL="0">
-              <a:buNone/>
-            </a:pPr>
-            <a:r>
-              <a:rPr lang="en-US" sz="950" b="1" spc="200" kern="0" dirty="0">
-                <a:solidFill>
-                  <a:srgbClr val="6B8E00"/>
+            <a:off x="566928" y="457200"/>
+            <a:ext cx="384048" cy="384048"/>
+          </a:xfrm>
+          <a:prstGeom prst="rect">
+            <a:avLst/>
+          </a:prstGeom>
+          <a:noFill/>
+          <a:ln/>
+        </p:spPr>
+        <p:txBody>
+          <a:bodyPr wrap="square" lIns="0" tIns="0" rIns="0" bIns="0" rtlCol="0" anchor="ctr"/>
+          <a:lstStyle/>
+          <a:p>
+            <a:pPr algn="ctr" indent="0" marL="0">
+              <a:buNone/>
+            </a:pPr>
+            <a:r>
+              <a:rPr lang="en-US" sz="1300" b="1" dirty="0">
+                <a:solidFill>
+                  <a:srgbClr val="FFFFFF"/>
                 </a:solidFill>
                 <a:latin typeface="Arial" pitchFamily="34" charset="0"/>
                 <a:ea typeface="Arial" pitchFamily="34" charset="-122"/>
                 <a:cs typeface="Arial" pitchFamily="34" charset="-120"/>
               </a:rPr>
-              <a:t>07  Risk</a:t>
+              <a:t>07</a:t>
+            </a:r>
+            <a:endParaRPr lang="en-US" sz="1300" dirty="0"/>
+          </a:p>
+        </p:txBody>
+      </p:sp>
+      <p:sp>
+        <p:nvSpPr>
+          <p:cNvPr id="4" name="Text 2"/>
+          <p:cNvSpPr/>
+          <p:nvPr/>
+        </p:nvSpPr>
+        <p:spPr>
+          <a:xfrm>
+            <a:off x="1133856" y="457200"/>
+            <a:ext cx="10490911" cy="182880"/>
+          </a:xfrm>
+          <a:prstGeom prst="rect">
+            <a:avLst/>
+          </a:prstGeom>
+          <a:noFill/>
+          <a:ln/>
+        </p:spPr>
+        <p:txBody>
+          <a:bodyPr wrap="square" lIns="0" tIns="0" rIns="0" bIns="0" rtlCol="0" anchor="ctr"/>
+          <a:lstStyle/>
+          <a:p>
+            <a:pPr indent="0" marL="0">
+              <a:buNone/>
+            </a:pPr>
+            <a:r>
+              <a:rPr lang="en-US" sz="950" b="1" spc="200" kern="0" dirty="0">
+                <a:solidFill>
+                  <a:srgbClr val="B98A2E"/>
+                </a:solidFill>
+                <a:latin typeface="Arial" pitchFamily="34" charset="0"/>
+                <a:ea typeface="Arial" pitchFamily="34" charset="-122"/>
+                <a:cs typeface="Arial" pitchFamily="34" charset="-120"/>
+              </a:rPr>
+              <a:t>Risk</a:t>
             </a:r>
             <a:endParaRPr lang="en-US" sz="950" dirty="0"/>
           </a:p>
@@ -6182,14 +6912,14 @@
       </p:sp>
       <p:sp>
         <p:nvSpPr>
-          <p:cNvPr id="4" name="Text 2"/>
-          <p:cNvSpPr/>
-          <p:nvPr/>
-        </p:nvSpPr>
-        <p:spPr>
-          <a:xfrm>
-            <a:off x="749808" y="566928"/>
-            <a:ext cx="10874959" cy="384048"/>
+          <p:cNvPr id="5" name="Text 3"/>
+          <p:cNvSpPr/>
+          <p:nvPr/>
+        </p:nvSpPr>
+        <p:spPr>
+          <a:xfrm>
+            <a:off x="1133856" y="640080"/>
+            <a:ext cx="10490911" cy="365760"/>
           </a:xfrm>
           <a:prstGeom prst="rect">
             <a:avLst/>
@@ -6205,9 +6935,9 @@
               <a:buNone/>
             </a:pPr>
             <a:r>
-              <a:rPr lang="en-US" sz="2200" b="1" dirty="0">
-                <a:solidFill>
-                  <a:srgbClr val="0F172A"/>
+              <a:rPr lang="en-US" sz="2300" b="1" dirty="0">
+                <a:solidFill>
+                  <a:srgbClr val="10161F"/>
                 </a:solidFill>
                 <a:latin typeface="Pretendard" pitchFamily="34" charset="0"/>
                 <a:ea typeface="Pretendard" pitchFamily="34" charset="-122"/>
@@ -6215,30 +6945,32 @@
               </a:rPr>
               <a:t>리스크 점검</a:t>
             </a:r>
-            <a:endParaRPr lang="en-US" sz="2200" dirty="0"/>
-          </a:p>
-        </p:txBody>
-      </p:sp>
-      <p:sp>
-        <p:nvSpPr>
-          <p:cNvPr id="5" name="Shape 3"/>
+            <a:endParaRPr lang="en-US" sz="2300" dirty="0"/>
+          </a:p>
+        </p:txBody>
+      </p:sp>
+      <p:sp>
+        <p:nvSpPr>
+          <p:cNvPr id="6" name="Shape 4"/>
           <p:cNvSpPr/>
           <p:nvPr/>
         </p:nvSpPr>
         <p:spPr>
           <a:xfrm>
             <a:off x="566928" y="1417320"/>
-            <a:ext cx="3503066" cy="3611880"/>
-          </a:xfrm>
-          <a:prstGeom prst="rect">
-            <a:avLst/>
+            <a:ext cx="11057839" cy="3611880"/>
+          </a:xfrm>
+          <a:prstGeom prst="roundRect">
+            <a:avLst>
+              <a:gd name="adj" fmla="val 1519"/>
+            </a:avLst>
           </a:prstGeom>
           <a:solidFill>
-            <a:srgbClr val="F8FAFC"/>
+            <a:srgbClr val="F7FAFC"/>
           </a:solidFill>
-          <a:ln w="3810">
+          <a:ln w="6350">
             <a:solidFill>
-              <a:srgbClr val="CBD5E1"/>
+              <a:srgbClr val="CBD5E0"/>
             </a:solidFill>
             <a:prstDash val="solid"/>
           </a:ln>
@@ -6246,46 +6978,26 @@
       </p:sp>
       <p:sp>
         <p:nvSpPr>
-          <p:cNvPr id="6" name="Shape 4"/>
+          <p:cNvPr id="7" name="Shape 5"/>
           <p:cNvSpPr/>
           <p:nvPr/>
         </p:nvSpPr>
         <p:spPr>
           <a:xfrm>
             <a:off x="566928" y="1417320"/>
-            <a:ext cx="3503066" cy="36576"/>
+            <a:ext cx="11057839" cy="45720"/>
           </a:xfrm>
           <a:prstGeom prst="rect">
             <a:avLst/>
           </a:prstGeom>
           <a:solidFill>
-            <a:srgbClr val="6B8E00"/>
+            <a:srgbClr val="B98A2E"/>
           </a:solidFill>
           <a:ln/>
         </p:spPr>
       </p:sp>
       <p:sp>
         <p:nvSpPr>
-          <p:cNvPr id="7" name="Shape 5"/>
-          <p:cNvSpPr/>
-          <p:nvPr/>
-        </p:nvSpPr>
-        <p:spPr>
-          <a:xfrm>
-            <a:off x="566928" y="1417320"/>
-            <a:ext cx="3503066" cy="45720"/>
-          </a:xfrm>
-          <a:prstGeom prst="rect">
-            <a:avLst/>
-          </a:prstGeom>
-          <a:solidFill>
-            <a:srgbClr val="6B8E00"/>
-          </a:solidFill>
-          <a:ln/>
-        </p:spPr>
-      </p:sp>
-      <p:sp>
-        <p:nvSpPr>
           <p:cNvPr id="8" name="Text 6"/>
           <p:cNvSpPr/>
           <p:nvPr/>
@@ -6293,7 +7005,7 @@
         <p:spPr>
           <a:xfrm>
             <a:off x="795528" y="1618488"/>
-            <a:ext cx="3045866" cy="292608"/>
+            <a:ext cx="10600639" cy="292608"/>
           </a:xfrm>
           <a:prstGeom prst="rect">
             <a:avLst/>
@@ -6311,7 +7023,7 @@
             <a:r>
               <a:rPr lang="en-US" sz="1350" b="1" dirty="0">
                 <a:solidFill>
-                  <a:srgbClr val="4F6A00"/>
+                  <a:srgbClr val="977024"/>
                 </a:solidFill>
                 <a:latin typeface="Pretendard" pitchFamily="34" charset="0"/>
                 <a:ea typeface="Pretendard" pitchFamily="34" charset="-122"/>
@@ -6331,26 +7043,28 @@
         </p:nvSpPr>
         <p:spPr>
           <a:xfrm>
-            <a:off x="795528" y="1929384"/>
-            <a:ext cx="3045866" cy="347472"/>
-          </a:xfrm>
-          <a:prstGeom prst="rect">
-            <a:avLst/>
-          </a:prstGeom>
-          <a:noFill/>
-          <a:ln/>
-        </p:spPr>
-        <p:txBody>
-          <a:bodyPr wrap="square" lIns="0" tIns="0" rIns="0" bIns="0" rtlCol="0" anchor="ctr"/>
+            <a:off x="795528" y="1911096"/>
+            <a:ext cx="10600639" cy="402336"/>
+          </a:xfrm>
+          <a:prstGeom prst="rect">
+            <a:avLst/>
+          </a:prstGeom>
+          <a:noFill/>
+          <a:ln/>
+        </p:spPr>
+        <p:txBody>
+          <a:bodyPr wrap="square" lIns="0" tIns="0" rIns="0" bIns="0" rtlCol="0" anchor="ctr">
+            <a:normAutofit/>
+          </a:bodyPr>
           <a:lstStyle/>
           <a:p>
             <a:pPr indent="0" marL="0">
               <a:buNone/>
             </a:pPr>
             <a:r>
-              <a:rPr lang="en-US" sz="1500" b="1" dirty="0">
-                <a:solidFill>
-                  <a:srgbClr val="0F172A"/>
+              <a:rPr lang="en-US" sz="1350" b="1" dirty="0">
+                <a:solidFill>
+                  <a:srgbClr val="10161F"/>
                 </a:solidFill>
                 <a:latin typeface="Pretendard" pitchFamily="34" charset="0"/>
                 <a:ea typeface="Pretendard" pitchFamily="34" charset="-122"/>
@@ -6358,7 +7072,7 @@
               </a:rPr>
               <a:t>사전협의 완료</a:t>
             </a:r>
-            <a:endParaRPr lang="en-US" sz="1500" dirty="0"/>
+            <a:endParaRPr lang="en-US" sz="1350" dirty="0"/>
           </a:p>
         </p:txBody>
       </p:sp>
@@ -6370,27 +7084,32 @@
         </p:nvSpPr>
         <p:spPr>
           <a:xfrm>
-            <a:off x="795528" y="2313432"/>
-            <a:ext cx="3045866" cy="2606040"/>
-          </a:xfrm>
-          <a:prstGeom prst="rect">
-            <a:avLst/>
-          </a:prstGeom>
-          <a:noFill/>
-          <a:ln/>
-        </p:spPr>
-        <p:txBody>
-          <a:bodyPr wrap="square" lIns="0" tIns="0" rIns="0" bIns="0" rtlCol="0" anchor="t"/>
+            <a:off x="795528" y="2377440"/>
+            <a:ext cx="10600639" cy="2560320"/>
+          </a:xfrm>
+          <a:prstGeom prst="rect">
+            <a:avLst/>
+          </a:prstGeom>
+          <a:noFill/>
+          <a:ln/>
+        </p:spPr>
+        <p:txBody>
+          <a:bodyPr wrap="square" lIns="0" tIns="0" rIns="0" bIns="0" rtlCol="0" anchor="t">
+            <a:normAutofit/>
+          </a:bodyPr>
           <a:lstStyle/>
           <a:p>
             <a:pPr marL="342900" indent="-342900">
+              <a:lnSpc>
+                <a:spcPct val="125000"/>
+              </a:lnSpc>
               <a:buSzPct val="100000"/>
               <a:buChar char="•"/>
             </a:pPr>
             <a:r>
-              <a:rPr lang="en-US" sz="1250" dirty="0">
-                <a:solidFill>
-                  <a:srgbClr val="0F172A"/>
+              <a:rPr lang="en-US" sz="1200" dirty="0">
+                <a:solidFill>
+                  <a:srgbClr val="10161F"/>
                 </a:solidFill>
                 <a:latin typeface="Pretendard" pitchFamily="34" charset="0"/>
                 <a:ea typeface="Pretendard" pitchFamily="34" charset="-122"/>
@@ -6398,7 +7117,7 @@
               </a:rPr>
               <a:t>2개월 내 착수 가능</a:t>
             </a:r>
-            <a:endParaRPr lang="en-US" sz="1250" dirty="0"/>
+            <a:endParaRPr lang="en-US" sz="1200" dirty="0"/>
           </a:p>
         </p:txBody>
       </p:sp>
@@ -6410,59 +7129,75 @@
         </p:nvSpPr>
         <p:spPr>
           <a:xfrm>
-            <a:off x="566928" y="6419088"/>
-            <a:ext cx="11057839" cy="201168"/>
-          </a:xfrm>
-          <a:prstGeom prst="rect">
-            <a:avLst/>
-          </a:prstGeom>
-          <a:noFill/>
-          <a:ln/>
-        </p:spPr>
-        <p:txBody>
-          <a:bodyPr wrap="square" lIns="0" tIns="0" rIns="0" bIns="0" rtlCol="0" anchor="ctr"/>
-          <a:lstStyle/>
-          <a:p>
-            <a:pPr algn="ctr" indent="0" marL="0">
-              <a:buNone/>
-            </a:pPr>
-            <a:r>
-              <a:rPr lang="en-US" sz="750" dirty="0">
-                <a:solidFill>
-                  <a:srgbClr val="64748B"/>
+            <a:off x="566928" y="6382512"/>
+            <a:ext cx="7315200" cy="219456"/>
+          </a:xfrm>
+          <a:prstGeom prst="rect">
+            <a:avLst/>
+          </a:prstGeom>
+          <a:noFill/>
+          <a:ln/>
+        </p:spPr>
+        <p:txBody>
+          <a:bodyPr wrap="square" lIns="0" tIns="0" rIns="0" bIns="0" rtlCol="0" anchor="ctr"/>
+          <a:lstStyle/>
+          <a:p>
+            <a:pPr indent="0" marL="0">
+              <a:buNone/>
+            </a:pPr>
+            <a:r>
+              <a:rPr lang="en-US" sz="800" dirty="0">
+                <a:solidFill>
+                  <a:srgbClr val="718096"/>
                 </a:solidFill>
                 <a:latin typeface="Pretendard" pitchFamily="34" charset="0"/>
                 <a:ea typeface="Pretendard" pitchFamily="34" charset="-122"/>
                 <a:cs typeface="Pretendard" pitchFamily="34" charset="-120"/>
               </a:rPr>
-              <a:t>크리딜  ·    ·  7</a:t>
-            </a:r>
-            <a:endParaRPr lang="en-US" sz="750" dirty="0"/>
-          </a:p>
-        </p:txBody>
-      </p:sp>
-      <p:sp>
-        <p:nvSpPr>
-          <p:cNvPr id="12" name="Shape 10"/>
-          <p:cNvSpPr/>
-          <p:nvPr/>
-        </p:nvSpPr>
-        <p:spPr>
-          <a:xfrm>
-            <a:off x="4437172" y="6382512"/>
-            <a:ext cx="3317352" cy="0"/>
-          </a:xfrm>
-          <a:prstGeom prst="line">
-            <a:avLst/>
-          </a:prstGeom>
-          <a:noFill/>
-          <a:ln w="6350">
-            <a:solidFill>
-              <a:srgbClr val="6B8E00"/>
-            </a:solidFill>
-            <a:prstDash val="solid"/>
-          </a:ln>
-        </p:spPr>
+              <a:t>크리딜   |   </a:t>
+            </a:r>
+            <a:endParaRPr lang="en-US" sz="800" dirty="0"/>
+          </a:p>
+        </p:txBody>
+      </p:sp>
+      <p:sp>
+        <p:nvSpPr>
+          <p:cNvPr id="12" name="Text 10"/>
+          <p:cNvSpPr/>
+          <p:nvPr/>
+        </p:nvSpPr>
+        <p:spPr>
+          <a:xfrm>
+            <a:off x="10710367" y="6382512"/>
+            <a:ext cx="914400" cy="219456"/>
+          </a:xfrm>
+          <a:prstGeom prst="rect">
+            <a:avLst/>
+          </a:prstGeom>
+          <a:noFill/>
+          <a:ln/>
+        </p:spPr>
+        <p:txBody>
+          <a:bodyPr wrap="square" lIns="0" tIns="0" rIns="0" bIns="0" rtlCol="0" anchor="ctr"/>
+          <a:lstStyle/>
+          <a:p>
+            <a:pPr algn="r" indent="0" marL="0">
+              <a:buNone/>
+            </a:pPr>
+            <a:r>
+              <a:rPr lang="en-US" sz="900" b="1" dirty="0">
+                <a:solidFill>
+                  <a:srgbClr val="B98A2E"/>
+                </a:solidFill>
+                <a:latin typeface="Arial" pitchFamily="34" charset="0"/>
+                <a:ea typeface="Arial" pitchFamily="34" charset="-122"/>
+                <a:cs typeface="Arial" pitchFamily="34" charset="-120"/>
+              </a:rPr>
+              <a:t>7</a:t>
+            </a:r>
+            <a:endParaRPr lang="en-US" sz="900" dirty="0"/>
+          </a:p>
+        </p:txBody>
       </p:sp>
     </p:spTree>
   </p:cSld>
@@ -6504,14 +7239,14 @@
         </p:nvSpPr>
         <p:spPr>
           <a:xfrm>
-            <a:off x="566928" y="384048"/>
-            <a:ext cx="45720" cy="566928"/>
-          </a:xfrm>
-          <a:prstGeom prst="rect">
+            <a:off x="566928" y="457200"/>
+            <a:ext cx="384048" cy="384048"/>
+          </a:xfrm>
+          <a:prstGeom prst="ellipse">
             <a:avLst/>
           </a:prstGeom>
           <a:solidFill>
-            <a:srgbClr val="6B8E00"/>
+            <a:srgbClr val="B98A2E"/>
           </a:solidFill>
           <a:ln/>
         </p:spPr>
@@ -6524,32 +7259,71 @@
         </p:nvSpPr>
         <p:spPr>
           <a:xfrm>
-            <a:off x="749808" y="384048"/>
-            <a:ext cx="10874959" cy="182880"/>
-          </a:xfrm>
-          <a:prstGeom prst="rect">
-            <a:avLst/>
-          </a:prstGeom>
-          <a:noFill/>
-          <a:ln/>
-        </p:spPr>
-        <p:txBody>
-          <a:bodyPr wrap="square" lIns="0" tIns="0" rIns="0" bIns="0" rtlCol="0" anchor="ctr"/>
-          <a:lstStyle/>
-          <a:p>
-            <a:pPr indent="0" marL="0">
-              <a:buNone/>
-            </a:pPr>
-            <a:r>
-              <a:rPr lang="en-US" sz="950" b="1" spc="200" kern="0" dirty="0">
-                <a:solidFill>
-                  <a:srgbClr val="6B8E00"/>
+            <a:off x="566928" y="457200"/>
+            <a:ext cx="384048" cy="384048"/>
+          </a:xfrm>
+          <a:prstGeom prst="rect">
+            <a:avLst/>
+          </a:prstGeom>
+          <a:noFill/>
+          <a:ln/>
+        </p:spPr>
+        <p:txBody>
+          <a:bodyPr wrap="square" lIns="0" tIns="0" rIns="0" bIns="0" rtlCol="0" anchor="ctr"/>
+          <a:lstStyle/>
+          <a:p>
+            <a:pPr algn="ctr" indent="0" marL="0">
+              <a:buNone/>
+            </a:pPr>
+            <a:r>
+              <a:rPr lang="en-US" sz="1300" b="1" dirty="0">
+                <a:solidFill>
+                  <a:srgbClr val="FFFFFF"/>
                 </a:solidFill>
                 <a:latin typeface="Arial" pitchFamily="34" charset="0"/>
                 <a:ea typeface="Arial" pitchFamily="34" charset="-122"/>
                 <a:cs typeface="Arial" pitchFamily="34" charset="-120"/>
               </a:rPr>
-              <a:t>08  Thesis</a:t>
+              <a:t>08</a:t>
+            </a:r>
+            <a:endParaRPr lang="en-US" sz="1300" dirty="0"/>
+          </a:p>
+        </p:txBody>
+      </p:sp>
+      <p:sp>
+        <p:nvSpPr>
+          <p:cNvPr id="4" name="Text 2"/>
+          <p:cNvSpPr/>
+          <p:nvPr/>
+        </p:nvSpPr>
+        <p:spPr>
+          <a:xfrm>
+            <a:off x="1133856" y="457200"/>
+            <a:ext cx="10490911" cy="182880"/>
+          </a:xfrm>
+          <a:prstGeom prst="rect">
+            <a:avLst/>
+          </a:prstGeom>
+          <a:noFill/>
+          <a:ln/>
+        </p:spPr>
+        <p:txBody>
+          <a:bodyPr wrap="square" lIns="0" tIns="0" rIns="0" bIns="0" rtlCol="0" anchor="ctr"/>
+          <a:lstStyle/>
+          <a:p>
+            <a:pPr indent="0" marL="0">
+              <a:buNone/>
+            </a:pPr>
+            <a:r>
+              <a:rPr lang="en-US" sz="950" b="1" spc="200" kern="0" dirty="0">
+                <a:solidFill>
+                  <a:srgbClr val="B98A2E"/>
+                </a:solidFill>
+                <a:latin typeface="Arial" pitchFamily="34" charset="0"/>
+                <a:ea typeface="Arial" pitchFamily="34" charset="-122"/>
+                <a:cs typeface="Arial" pitchFamily="34" charset="-120"/>
+              </a:rPr>
+              <a:t>Thesis</a:t>
             </a:r>
             <a:endParaRPr lang="en-US" sz="950" dirty="0"/>
           </a:p>
@@ -6557,14 +7331,14 @@
       </p:sp>
       <p:sp>
         <p:nvSpPr>
-          <p:cNvPr id="4" name="Text 2"/>
-          <p:cNvSpPr/>
-          <p:nvPr/>
-        </p:nvSpPr>
-        <p:spPr>
-          <a:xfrm>
-            <a:off x="749808" y="566928"/>
-            <a:ext cx="10874959" cy="384048"/>
+          <p:cNvPr id="5" name="Text 3"/>
+          <p:cNvSpPr/>
+          <p:nvPr/>
+        </p:nvSpPr>
+        <p:spPr>
+          <a:xfrm>
+            <a:off x="1133856" y="640080"/>
+            <a:ext cx="10490911" cy="365760"/>
           </a:xfrm>
           <a:prstGeom prst="rect">
             <a:avLst/>
@@ -6580,9 +7354,9 @@
               <a:buNone/>
             </a:pPr>
             <a:r>
-              <a:rPr lang="en-US" sz="2200" b="1" dirty="0">
-                <a:solidFill>
-                  <a:srgbClr val="0F172A"/>
+              <a:rPr lang="en-US" sz="2300" b="1" dirty="0">
+                <a:solidFill>
+                  <a:srgbClr val="10161F"/>
                 </a:solidFill>
                 <a:latin typeface="Pretendard" pitchFamily="34" charset="0"/>
                 <a:ea typeface="Pretendard" pitchFamily="34" charset="-122"/>
@@ -6590,13 +7364,13 @@
               </a:rPr>
               <a:t>투자 포인트</a:t>
             </a:r>
-            <a:endParaRPr lang="en-US" sz="2200" dirty="0"/>
-          </a:p>
-        </p:txBody>
-      </p:sp>
-      <p:sp>
-        <p:nvSpPr>
-          <p:cNvPr id="5" name="Shape 3"/>
+            <a:endParaRPr lang="en-US" sz="2300" dirty="0"/>
+          </a:p>
+        </p:txBody>
+      </p:sp>
+      <p:sp>
+        <p:nvSpPr>
+          <p:cNvPr id="6" name="Shape 4"/>
           <p:cNvSpPr/>
           <p:nvPr/>
         </p:nvSpPr>
@@ -6611,11 +7385,11 @@
             </a:avLst>
           </a:prstGeom>
           <a:solidFill>
-            <a:srgbClr val="E8F5CC"/>
+            <a:srgbClr val="F3EBDA"/>
           </a:solidFill>
           <a:ln w="10160">
             <a:solidFill>
-              <a:srgbClr val="A3D900"/>
+              <a:srgbClr val="D9B668"/>
             </a:solidFill>
             <a:prstDash val="solid"/>
           </a:ln>
@@ -6623,14 +7397,14 @@
       </p:sp>
       <p:sp>
         <p:nvSpPr>
-          <p:cNvPr id="6" name="Text 4"/>
+          <p:cNvPr id="7" name="Text 5"/>
           <p:cNvSpPr/>
           <p:nvPr/>
         </p:nvSpPr>
         <p:spPr>
           <a:xfrm>
             <a:off x="749808" y="5093208"/>
-            <a:ext cx="1645920" cy="219456"/>
+            <a:ext cx="1691640" cy="256032"/>
           </a:xfrm>
           <a:prstGeom prst="rect">
             <a:avLst/>
@@ -6646,30 +7420,30 @@
               <a:buNone/>
             </a:pPr>
             <a:r>
-              <a:rPr lang="en-US" sz="950" b="1" dirty="0">
-                <a:solidFill>
-                  <a:srgbClr val="4F6A00"/>
+              <a:rPr lang="en-US" sz="1050" b="1" dirty="0">
+                <a:solidFill>
+                  <a:srgbClr val="977024"/>
                 </a:solidFill>
                 <a:latin typeface="Pretendard" pitchFamily="34" charset="0"/>
                 <a:ea typeface="Pretendard" pitchFamily="34" charset="-122"/>
                 <a:cs typeface="Pretendard" pitchFamily="34" charset="-120"/>
               </a:rPr>
-              <a:t>💡 종합 가치 제안</a:t>
-            </a:r>
-            <a:endParaRPr lang="en-US" sz="950" dirty="0"/>
-          </a:p>
-        </p:txBody>
-      </p:sp>
-      <p:sp>
-        <p:nvSpPr>
-          <p:cNvPr id="7" name="Text 5"/>
-          <p:cNvSpPr/>
-          <p:nvPr/>
-        </p:nvSpPr>
-        <p:spPr>
-          <a:xfrm>
-            <a:off x="2441448" y="5074920"/>
-            <a:ext cx="9000439" cy="621792"/>
+              <a:t>종합 가치 제안</a:t>
+            </a:r>
+            <a:endParaRPr lang="en-US" sz="1050" dirty="0"/>
+          </a:p>
+        </p:txBody>
+      </p:sp>
+      <p:sp>
+        <p:nvSpPr>
+          <p:cNvPr id="8" name="Text 6"/>
+          <p:cNvSpPr/>
+          <p:nvPr/>
+        </p:nvSpPr>
+        <p:spPr>
+          <a:xfrm>
+            <a:off x="2487168" y="5056632"/>
+            <a:ext cx="8954719" cy="658368"/>
           </a:xfrm>
           <a:prstGeom prst="rect">
             <a:avLst/>
@@ -6683,14 +7457,14 @@
           <a:p>
             <a:pPr indent="0" marL="0">
               <a:lnSpc>
-                <a:spcPct val="120000"/>
+                <a:spcPct val="125000"/>
               </a:lnSpc>
               <a:buNone/>
             </a:pPr>
             <a:r>
-              <a:rPr lang="en-US" sz="1000" dirty="0">
-                <a:solidFill>
-                  <a:srgbClr val="334155"/>
+              <a:rPr lang="en-US" sz="1100" dirty="0">
+                <a:solidFill>
+                  <a:srgbClr val="10161F"/>
                 </a:solidFill>
                 <a:latin typeface="Pretendard" pitchFamily="34" charset="0"/>
                 <a:ea typeface="Pretendard" pitchFamily="34" charset="-122"/>
@@ -6698,71 +7472,87 @@
               </a:rPr>
               <a:t>테헤란로 프라임 입지의 개발 가치와 용적률 잔여 활용 가능성이 핵심입니다.</a:t>
             </a:r>
-            <a:endParaRPr lang="en-US" sz="1000" dirty="0"/>
-          </a:p>
-        </p:txBody>
-      </p:sp>
-      <p:sp>
-        <p:nvSpPr>
-          <p:cNvPr id="8" name="Text 6"/>
-          <p:cNvSpPr/>
-          <p:nvPr/>
-        </p:nvSpPr>
-        <p:spPr>
-          <a:xfrm>
-            <a:off x="566928" y="6419088"/>
-            <a:ext cx="11057839" cy="201168"/>
-          </a:xfrm>
-          <a:prstGeom prst="rect">
-            <a:avLst/>
-          </a:prstGeom>
-          <a:noFill/>
-          <a:ln/>
-        </p:spPr>
-        <p:txBody>
-          <a:bodyPr wrap="square" lIns="0" tIns="0" rIns="0" bIns="0" rtlCol="0" anchor="ctr"/>
-          <a:lstStyle/>
-          <a:p>
-            <a:pPr algn="ctr" indent="0" marL="0">
-              <a:buNone/>
-            </a:pPr>
-            <a:r>
-              <a:rPr lang="en-US" sz="750" dirty="0">
-                <a:solidFill>
-                  <a:srgbClr val="64748B"/>
+            <a:endParaRPr lang="en-US" sz="1100" dirty="0"/>
+          </a:p>
+        </p:txBody>
+      </p:sp>
+      <p:sp>
+        <p:nvSpPr>
+          <p:cNvPr id="9" name="Text 7"/>
+          <p:cNvSpPr/>
+          <p:nvPr/>
+        </p:nvSpPr>
+        <p:spPr>
+          <a:xfrm>
+            <a:off x="566928" y="6382512"/>
+            <a:ext cx="7315200" cy="219456"/>
+          </a:xfrm>
+          <a:prstGeom prst="rect">
+            <a:avLst/>
+          </a:prstGeom>
+          <a:noFill/>
+          <a:ln/>
+        </p:spPr>
+        <p:txBody>
+          <a:bodyPr wrap="square" lIns="0" tIns="0" rIns="0" bIns="0" rtlCol="0" anchor="ctr"/>
+          <a:lstStyle/>
+          <a:p>
+            <a:pPr indent="0" marL="0">
+              <a:buNone/>
+            </a:pPr>
+            <a:r>
+              <a:rPr lang="en-US" sz="800" dirty="0">
+                <a:solidFill>
+                  <a:srgbClr val="718096"/>
                 </a:solidFill>
                 <a:latin typeface="Pretendard" pitchFamily="34" charset="0"/>
                 <a:ea typeface="Pretendard" pitchFamily="34" charset="-122"/>
                 <a:cs typeface="Pretendard" pitchFamily="34" charset="-120"/>
               </a:rPr>
-              <a:t>크리딜  ·    ·  8</a:t>
-            </a:r>
-            <a:endParaRPr lang="en-US" sz="750" dirty="0"/>
-          </a:p>
-        </p:txBody>
-      </p:sp>
-      <p:sp>
-        <p:nvSpPr>
-          <p:cNvPr id="9" name="Shape 7"/>
-          <p:cNvSpPr/>
-          <p:nvPr/>
-        </p:nvSpPr>
-        <p:spPr>
-          <a:xfrm>
-            <a:off x="4437172" y="6382512"/>
-            <a:ext cx="3317352" cy="0"/>
-          </a:xfrm>
-          <a:prstGeom prst="line">
-            <a:avLst/>
-          </a:prstGeom>
-          <a:noFill/>
-          <a:ln w="6350">
-            <a:solidFill>
-              <a:srgbClr val="6B8E00"/>
-            </a:solidFill>
-            <a:prstDash val="solid"/>
-          </a:ln>
-        </p:spPr>
+              <a:t>크리딜   |   </a:t>
+            </a:r>
+            <a:endParaRPr lang="en-US" sz="800" dirty="0"/>
+          </a:p>
+        </p:txBody>
+      </p:sp>
+      <p:sp>
+        <p:nvSpPr>
+          <p:cNvPr id="10" name="Text 8"/>
+          <p:cNvSpPr/>
+          <p:nvPr/>
+        </p:nvSpPr>
+        <p:spPr>
+          <a:xfrm>
+            <a:off x="10710367" y="6382512"/>
+            <a:ext cx="914400" cy="219456"/>
+          </a:xfrm>
+          <a:prstGeom prst="rect">
+            <a:avLst/>
+          </a:prstGeom>
+          <a:noFill/>
+          <a:ln/>
+        </p:spPr>
+        <p:txBody>
+          <a:bodyPr wrap="square" lIns="0" tIns="0" rIns="0" bIns="0" rtlCol="0" anchor="ctr"/>
+          <a:lstStyle/>
+          <a:p>
+            <a:pPr algn="r" indent="0" marL="0">
+              <a:buNone/>
+            </a:pPr>
+            <a:r>
+              <a:rPr lang="en-US" sz="900" b="1" dirty="0">
+                <a:solidFill>
+                  <a:srgbClr val="B98A2E"/>
+                </a:solidFill>
+                <a:latin typeface="Arial" pitchFamily="34" charset="0"/>
+                <a:ea typeface="Arial" pitchFamily="34" charset="-122"/>
+                <a:cs typeface="Arial" pitchFamily="34" charset="-120"/>
+              </a:rPr>
+              <a:t>8</a:t>
+            </a:r>
+            <a:endParaRPr lang="en-US" sz="900" dirty="0"/>
+          </a:p>
+        </p:txBody>
       </p:sp>
     </p:spTree>
   </p:cSld>
@@ -6804,14 +7594,14 @@
         </p:nvSpPr>
         <p:spPr>
           <a:xfrm>
-            <a:off x="566928" y="384048"/>
-            <a:ext cx="45720" cy="566928"/>
-          </a:xfrm>
-          <a:prstGeom prst="rect">
+            <a:off x="566928" y="457200"/>
+            <a:ext cx="384048" cy="384048"/>
+          </a:xfrm>
+          <a:prstGeom prst="ellipse">
             <a:avLst/>
           </a:prstGeom>
           <a:solidFill>
-            <a:srgbClr val="6B8E00"/>
+            <a:srgbClr val="B98A2E"/>
           </a:solidFill>
           <a:ln/>
         </p:spPr>
@@ -6824,32 +7614,71 @@
         </p:nvSpPr>
         <p:spPr>
           <a:xfrm>
-            <a:off x="749808" y="384048"/>
-            <a:ext cx="10874959" cy="182880"/>
-          </a:xfrm>
-          <a:prstGeom prst="rect">
-            <a:avLst/>
-          </a:prstGeom>
-          <a:noFill/>
-          <a:ln/>
-        </p:spPr>
-        <p:txBody>
-          <a:bodyPr wrap="square" lIns="0" tIns="0" rIns="0" bIns="0" rtlCol="0" anchor="ctr"/>
-          <a:lstStyle/>
-          <a:p>
-            <a:pPr indent="0" marL="0">
-              <a:buNone/>
-            </a:pPr>
-            <a:r>
-              <a:rPr lang="en-US" sz="950" b="1" spc="200" kern="0" dirty="0">
-                <a:solidFill>
-                  <a:srgbClr val="6B8E00"/>
+            <a:off x="566928" y="457200"/>
+            <a:ext cx="384048" cy="384048"/>
+          </a:xfrm>
+          <a:prstGeom prst="rect">
+            <a:avLst/>
+          </a:prstGeom>
+          <a:noFill/>
+          <a:ln/>
+        </p:spPr>
+        <p:txBody>
+          <a:bodyPr wrap="square" lIns="0" tIns="0" rIns="0" bIns="0" rtlCol="0" anchor="ctr"/>
+          <a:lstStyle/>
+          <a:p>
+            <a:pPr algn="ctr" indent="0" marL="0">
+              <a:buNone/>
+            </a:pPr>
+            <a:r>
+              <a:rPr lang="en-US" sz="1300" b="1" dirty="0">
+                <a:solidFill>
+                  <a:srgbClr val="FFFFFF"/>
                 </a:solidFill>
                 <a:latin typeface="Arial" pitchFamily="34" charset="0"/>
                 <a:ea typeface="Arial" pitchFamily="34" charset="-122"/>
                 <a:cs typeface="Arial" pitchFamily="34" charset="-120"/>
               </a:rPr>
-              <a:t>09  Process</a:t>
+              <a:t>09</a:t>
+            </a:r>
+            <a:endParaRPr lang="en-US" sz="1300" dirty="0"/>
+          </a:p>
+        </p:txBody>
+      </p:sp>
+      <p:sp>
+        <p:nvSpPr>
+          <p:cNvPr id="4" name="Text 2"/>
+          <p:cNvSpPr/>
+          <p:nvPr/>
+        </p:nvSpPr>
+        <p:spPr>
+          <a:xfrm>
+            <a:off x="1133856" y="457200"/>
+            <a:ext cx="10490911" cy="182880"/>
+          </a:xfrm>
+          <a:prstGeom prst="rect">
+            <a:avLst/>
+          </a:prstGeom>
+          <a:noFill/>
+          <a:ln/>
+        </p:spPr>
+        <p:txBody>
+          <a:bodyPr wrap="square" lIns="0" tIns="0" rIns="0" bIns="0" rtlCol="0" anchor="ctr"/>
+          <a:lstStyle/>
+          <a:p>
+            <a:pPr indent="0" marL="0">
+              <a:buNone/>
+            </a:pPr>
+            <a:r>
+              <a:rPr lang="en-US" sz="950" b="1" spc="200" kern="0" dirty="0">
+                <a:solidFill>
+                  <a:srgbClr val="B98A2E"/>
+                </a:solidFill>
+                <a:latin typeface="Arial" pitchFamily="34" charset="0"/>
+                <a:ea typeface="Arial" pitchFamily="34" charset="-122"/>
+                <a:cs typeface="Arial" pitchFamily="34" charset="-120"/>
+              </a:rPr>
+              <a:t>Process</a:t>
             </a:r>
             <a:endParaRPr lang="en-US" sz="950" dirty="0"/>
           </a:p>
@@ -6857,14 +7686,14 @@
       </p:sp>
       <p:sp>
         <p:nvSpPr>
-          <p:cNvPr id="4" name="Text 2"/>
-          <p:cNvSpPr/>
-          <p:nvPr/>
-        </p:nvSpPr>
-        <p:spPr>
-          <a:xfrm>
-            <a:off x="749808" y="566928"/>
-            <a:ext cx="10874959" cy="384048"/>
+          <p:cNvPr id="5" name="Text 3"/>
+          <p:cNvSpPr/>
+          <p:nvPr/>
+        </p:nvSpPr>
+        <p:spPr>
+          <a:xfrm>
+            <a:off x="1133856" y="640080"/>
+            <a:ext cx="10490911" cy="365760"/>
           </a:xfrm>
           <a:prstGeom prst="rect">
             <a:avLst/>
@@ -6880,9 +7709,9 @@
               <a:buNone/>
             </a:pPr>
             <a:r>
-              <a:rPr lang="en-US" sz="2200" b="1" dirty="0">
-                <a:solidFill>
-                  <a:srgbClr val="0F172A"/>
+              <a:rPr lang="en-US" sz="2300" b="1" dirty="0">
+                <a:solidFill>
+                  <a:srgbClr val="10161F"/>
                 </a:solidFill>
                 <a:latin typeface="Pretendard" pitchFamily="34" charset="0"/>
                 <a:ea typeface="Pretendard" pitchFamily="34" charset="-122"/>
@@ -6890,13 +7719,13 @@
               </a:rPr>
               <a:t>다음 단계</a:t>
             </a:r>
-            <a:endParaRPr lang="en-US" sz="2200" dirty="0"/>
-          </a:p>
-        </p:txBody>
-      </p:sp>
-      <p:sp>
-        <p:nvSpPr>
-          <p:cNvPr id="5" name="Shape 3"/>
+            <a:endParaRPr lang="en-US" sz="2300" dirty="0"/>
+          </a:p>
+        </p:txBody>
+      </p:sp>
+      <p:sp>
+        <p:nvSpPr>
+          <p:cNvPr id="6" name="Shape 4"/>
           <p:cNvSpPr/>
           <p:nvPr/>
         </p:nvSpPr>
@@ -6905,15 +7734,17 @@
             <a:off x="566928" y="1572768"/>
             <a:ext cx="11057839" cy="3200400"/>
           </a:xfrm>
-          <a:prstGeom prst="rect">
-            <a:avLst/>
+          <a:prstGeom prst="roundRect">
+            <a:avLst>
+              <a:gd name="adj" fmla="val 1714"/>
+            </a:avLst>
           </a:prstGeom>
           <a:solidFill>
-            <a:srgbClr val="F8FAFC"/>
+            <a:srgbClr val="F7FAFC"/>
           </a:solidFill>
-          <a:ln w="3810">
+          <a:ln w="6350">
             <a:solidFill>
-              <a:srgbClr val="CBD5E1"/>
+              <a:srgbClr val="CBD5E0"/>
             </a:solidFill>
             <a:prstDash val="solid"/>
           </a:ln>
@@ -6921,26 +7752,6 @@
       </p:sp>
       <p:sp>
         <p:nvSpPr>
-          <p:cNvPr id="6" name="Shape 4"/>
-          <p:cNvSpPr/>
-          <p:nvPr/>
-        </p:nvSpPr>
-        <p:spPr>
-          <a:xfrm>
-            <a:off x="566928" y="1572768"/>
-            <a:ext cx="11057839" cy="36576"/>
-          </a:xfrm>
-          <a:prstGeom prst="rect">
-            <a:avLst/>
-          </a:prstGeom>
-          <a:solidFill>
-            <a:srgbClr val="6B8E00"/>
-          </a:solidFill>
-          <a:ln/>
-        </p:spPr>
-      </p:sp>
-      <p:sp>
-        <p:nvSpPr>
           <p:cNvPr id="7" name="Shape 5"/>
           <p:cNvSpPr/>
           <p:nvPr/>
@@ -6954,7 +7765,7 @@
             <a:avLst/>
           </a:prstGeom>
           <a:solidFill>
-            <a:srgbClr val="6B8E00"/>
+            <a:srgbClr val="B98A2E"/>
           </a:solidFill>
           <a:ln/>
         </p:spPr>
@@ -7025,7 +7836,7 @@
             <a:r>
               <a:rPr lang="en-US" sz="1600" b="1" dirty="0">
                 <a:solidFill>
-                  <a:srgbClr val="0F172A"/>
+                  <a:srgbClr val="10161F"/>
                 </a:solidFill>
                 <a:latin typeface="Pretendard" pitchFamily="34" charset="0"/>
                 <a:ea typeface="Pretendard" pitchFamily="34" charset="-122"/>
@@ -7064,7 +7875,7 @@
             <a:r>
               <a:rPr lang="en-US" sz="1100" dirty="0">
                 <a:solidFill>
-                  <a:srgbClr val="0F172A"/>
+                  <a:srgbClr val="10161F"/>
                 </a:solidFill>
                 <a:latin typeface="Pretendard" pitchFamily="34" charset="0"/>
                 <a:ea typeface="Pretendard" pitchFamily="34" charset="-122"/>
@@ -7084,59 +7895,75 @@
         </p:nvSpPr>
         <p:spPr>
           <a:xfrm>
-            <a:off x="566928" y="6419088"/>
-            <a:ext cx="11057839" cy="201168"/>
-          </a:xfrm>
-          <a:prstGeom prst="rect">
-            <a:avLst/>
-          </a:prstGeom>
-          <a:noFill/>
-          <a:ln/>
-        </p:spPr>
-        <p:txBody>
-          <a:bodyPr wrap="square" lIns="0" tIns="0" rIns="0" bIns="0" rtlCol="0" anchor="ctr"/>
-          <a:lstStyle/>
-          <a:p>
-            <a:pPr algn="ctr" indent="0" marL="0">
-              <a:buNone/>
-            </a:pPr>
-            <a:r>
-              <a:rPr lang="en-US" sz="750" dirty="0">
-                <a:solidFill>
-                  <a:srgbClr val="64748B"/>
+            <a:off x="566928" y="6382512"/>
+            <a:ext cx="7315200" cy="219456"/>
+          </a:xfrm>
+          <a:prstGeom prst="rect">
+            <a:avLst/>
+          </a:prstGeom>
+          <a:noFill/>
+          <a:ln/>
+        </p:spPr>
+        <p:txBody>
+          <a:bodyPr wrap="square" lIns="0" tIns="0" rIns="0" bIns="0" rtlCol="0" anchor="ctr"/>
+          <a:lstStyle/>
+          <a:p>
+            <a:pPr indent="0" marL="0">
+              <a:buNone/>
+            </a:pPr>
+            <a:r>
+              <a:rPr lang="en-US" sz="800" dirty="0">
+                <a:solidFill>
+                  <a:srgbClr val="718096"/>
                 </a:solidFill>
                 <a:latin typeface="Pretendard" pitchFamily="34" charset="0"/>
                 <a:ea typeface="Pretendard" pitchFamily="34" charset="-122"/>
                 <a:cs typeface="Pretendard" pitchFamily="34" charset="-120"/>
               </a:rPr>
-              <a:t>크리딜  ·    ·  9</a:t>
-            </a:r>
-            <a:endParaRPr lang="en-US" sz="750" dirty="0"/>
-          </a:p>
-        </p:txBody>
-      </p:sp>
-      <p:sp>
-        <p:nvSpPr>
-          <p:cNvPr id="12" name="Shape 10"/>
-          <p:cNvSpPr/>
-          <p:nvPr/>
-        </p:nvSpPr>
-        <p:spPr>
-          <a:xfrm>
-            <a:off x="4437172" y="6382512"/>
-            <a:ext cx="3317352" cy="0"/>
-          </a:xfrm>
-          <a:prstGeom prst="line">
-            <a:avLst/>
-          </a:prstGeom>
-          <a:noFill/>
-          <a:ln w="6350">
-            <a:solidFill>
-              <a:srgbClr val="6B8E00"/>
-            </a:solidFill>
-            <a:prstDash val="solid"/>
-          </a:ln>
-        </p:spPr>
+              <a:t>크리딜   |   </a:t>
+            </a:r>
+            <a:endParaRPr lang="en-US" sz="800" dirty="0"/>
+          </a:p>
+        </p:txBody>
+      </p:sp>
+      <p:sp>
+        <p:nvSpPr>
+          <p:cNvPr id="12" name="Text 10"/>
+          <p:cNvSpPr/>
+          <p:nvPr/>
+        </p:nvSpPr>
+        <p:spPr>
+          <a:xfrm>
+            <a:off x="10710367" y="6382512"/>
+            <a:ext cx="914400" cy="219456"/>
+          </a:xfrm>
+          <a:prstGeom prst="rect">
+            <a:avLst/>
+          </a:prstGeom>
+          <a:noFill/>
+          <a:ln/>
+        </p:spPr>
+        <p:txBody>
+          <a:bodyPr wrap="square" lIns="0" tIns="0" rIns="0" bIns="0" rtlCol="0" anchor="ctr"/>
+          <a:lstStyle/>
+          <a:p>
+            <a:pPr algn="r" indent="0" marL="0">
+              <a:buNone/>
+            </a:pPr>
+            <a:r>
+              <a:rPr lang="en-US" sz="900" b="1" dirty="0">
+                <a:solidFill>
+                  <a:srgbClr val="B98A2E"/>
+                </a:solidFill>
+                <a:latin typeface="Arial" pitchFamily="34" charset="0"/>
+                <a:ea typeface="Arial" pitchFamily="34" charset="-122"/>
+                <a:cs typeface="Arial" pitchFamily="34" charset="-120"/>
+              </a:rPr>
+              <a:t>9</a:t>
+            </a:r>
+            <a:endParaRPr lang="en-US" sz="900" dirty="0"/>
+          </a:p>
+        </p:txBody>
       </p:sp>
     </p:spTree>
   </p:cSld>

--- a/docs/test/stress/e2e-outputs/development_basic_pr04.pptx
+++ b/docs/test/stress/e2e-outputs/development_basic_pr04.pptx
@@ -5963,7 +5963,7 @@
                 <a:ea typeface="Pretendard" pitchFamily="34" charset="-122"/>
                 <a:cs typeface="Pretendard" pitchFamily="34" charset="-120"/>
               </a:rPr>
-              <a:t>부지 분석</a:t>
+              <a:t>토지</a:t>
             </a:r>
             <a:endParaRPr lang="en-US" sz="2300" dirty="0"/>
           </a:p>
@@ -6002,7 +6002,7 @@
                 <a:ea typeface="Pretendard" pitchFamily="34" charset="-122"/>
                 <a:cs typeface="Pretendard" pitchFamily="34" charset="-120"/>
               </a:rPr>
-              <a:t>건축물 개요 및 물리 스펙</a:t>
+              <a:t>토지 현황</a:t>
             </a:r>
             <a:endParaRPr lang="en-US" sz="1100" dirty="0"/>
           </a:p>
@@ -6010,18 +6010,232 @@
       </p:sp>
       <p:sp>
         <p:nvSpPr>
-          <p:cNvPr id="7" name="Shape 5"/>
+          <p:cNvPr id="7" name="Text 5"/>
           <p:cNvSpPr/>
           <p:nvPr/>
         </p:nvSpPr>
         <p:spPr>
           <a:xfrm>
             <a:off x="566928" y="1645920"/>
-            <a:ext cx="6858000" cy="1828800"/>
+            <a:ext cx="2606040" cy="402336"/>
+          </a:xfrm>
+          <a:prstGeom prst="rect">
+            <a:avLst/>
+          </a:prstGeom>
+          <a:noFill/>
+          <a:ln/>
+        </p:spPr>
+        <p:txBody>
+          <a:bodyPr wrap="square" lIns="0" tIns="0" rIns="0" bIns="0" rtlCol="0" anchor="ctr"/>
+          <a:lstStyle/>
+          <a:p>
+            <a:pPr indent="0" marL="0">
+              <a:lnSpc>
+                <a:spcPct val="120000"/>
+              </a:lnSpc>
+              <a:buNone/>
+            </a:pPr>
+            <a:r>
+              <a:rPr lang="en-US" sz="1400" dirty="0">
+                <a:solidFill>
+                  <a:srgbClr val="718096"/>
+                </a:solidFill>
+                <a:latin typeface="Pretendard" pitchFamily="34" charset="0"/>
+                <a:ea typeface="Pretendard" pitchFamily="34" charset="-122"/>
+                <a:cs typeface="Pretendard" pitchFamily="34" charset="-120"/>
+              </a:rPr>
+              <a:t>대지면적</a:t>
+            </a:r>
+            <a:endParaRPr lang="en-US" sz="1400" dirty="0"/>
+          </a:p>
+        </p:txBody>
+      </p:sp>
+      <p:sp>
+        <p:nvSpPr>
+          <p:cNvPr id="8" name="Text 6"/>
+          <p:cNvSpPr/>
+          <p:nvPr/>
+        </p:nvSpPr>
+        <p:spPr>
+          <a:xfrm>
+            <a:off x="3172968" y="1645920"/>
+            <a:ext cx="4251960" cy="402336"/>
+          </a:xfrm>
+          <a:prstGeom prst="rect">
+            <a:avLst/>
+          </a:prstGeom>
+          <a:noFill/>
+          <a:ln/>
+        </p:spPr>
+        <p:txBody>
+          <a:bodyPr wrap="square" lIns="0" tIns="0" rIns="0" bIns="0" rtlCol="0" anchor="ctr"/>
+          <a:lstStyle/>
+          <a:p>
+            <a:pPr indent="0" marL="0">
+              <a:lnSpc>
+                <a:spcPct val="120000"/>
+              </a:lnSpc>
+              <a:buNone/>
+            </a:pPr>
+            <a:r>
+              <a:rPr lang="en-US" sz="1400" b="1" dirty="0">
+                <a:solidFill>
+                  <a:srgbClr val="10161F"/>
+                </a:solidFill>
+                <a:latin typeface="Pretendard" pitchFamily="34" charset="0"/>
+                <a:ea typeface="Pretendard" pitchFamily="34" charset="-122"/>
+                <a:cs typeface="Pretendard" pitchFamily="34" charset="-120"/>
+              </a:rPr>
+              <a:t>168.5평</a:t>
+            </a:r>
+            <a:endParaRPr lang="en-US" sz="1400" dirty="0"/>
+          </a:p>
+        </p:txBody>
+      </p:sp>
+      <p:sp>
+        <p:nvSpPr>
+          <p:cNvPr id="9" name="Shape 7"/>
+          <p:cNvSpPr/>
+          <p:nvPr/>
+        </p:nvSpPr>
+        <p:spPr>
+          <a:xfrm>
+            <a:off x="566928" y="2048256"/>
+            <a:ext cx="6858000" cy="0"/>
+          </a:xfrm>
+          <a:prstGeom prst="line">
+            <a:avLst/>
+          </a:prstGeom>
+          <a:noFill/>
+          <a:ln w="3810">
+            <a:solidFill>
+              <a:srgbClr val="CBD5E0"/>
+            </a:solidFill>
+            <a:prstDash val="solid"/>
+          </a:ln>
+        </p:spPr>
+      </p:sp>
+      <p:sp>
+        <p:nvSpPr>
+          <p:cNvPr id="10" name="Text 8"/>
+          <p:cNvSpPr/>
+          <p:nvPr/>
+        </p:nvSpPr>
+        <p:spPr>
+          <a:xfrm>
+            <a:off x="566928" y="2048256"/>
+            <a:ext cx="2606040" cy="402336"/>
+          </a:xfrm>
+          <a:prstGeom prst="rect">
+            <a:avLst/>
+          </a:prstGeom>
+          <a:noFill/>
+          <a:ln/>
+        </p:spPr>
+        <p:txBody>
+          <a:bodyPr wrap="square" lIns="0" tIns="0" rIns="0" bIns="0" rtlCol="0" anchor="ctr"/>
+          <a:lstStyle/>
+          <a:p>
+            <a:pPr indent="0" marL="0">
+              <a:lnSpc>
+                <a:spcPct val="120000"/>
+              </a:lnSpc>
+              <a:buNone/>
+            </a:pPr>
+            <a:r>
+              <a:rPr lang="en-US" sz="1400" dirty="0">
+                <a:solidFill>
+                  <a:srgbClr val="718096"/>
+                </a:solidFill>
+                <a:latin typeface="Pretendard" pitchFamily="34" charset="0"/>
+                <a:ea typeface="Pretendard" pitchFamily="34" charset="-122"/>
+                <a:cs typeface="Pretendard" pitchFamily="34" charset="-120"/>
+              </a:rPr>
+              <a:t>용도지역</a:t>
+            </a:r>
+            <a:endParaRPr lang="en-US" sz="1400" dirty="0"/>
+          </a:p>
+        </p:txBody>
+      </p:sp>
+      <p:sp>
+        <p:nvSpPr>
+          <p:cNvPr id="11" name="Text 9"/>
+          <p:cNvSpPr/>
+          <p:nvPr/>
+        </p:nvSpPr>
+        <p:spPr>
+          <a:xfrm>
+            <a:off x="3172968" y="2048256"/>
+            <a:ext cx="4251960" cy="402336"/>
+          </a:xfrm>
+          <a:prstGeom prst="rect">
+            <a:avLst/>
+          </a:prstGeom>
+          <a:noFill/>
+          <a:ln/>
+        </p:spPr>
+        <p:txBody>
+          <a:bodyPr wrap="square" lIns="0" tIns="0" rIns="0" bIns="0" rtlCol="0" anchor="ctr"/>
+          <a:lstStyle/>
+          <a:p>
+            <a:pPr indent="0" marL="0">
+              <a:lnSpc>
+                <a:spcPct val="120000"/>
+              </a:lnSpc>
+              <a:buNone/>
+            </a:pPr>
+            <a:r>
+              <a:rPr lang="en-US" sz="1400" b="1" dirty="0">
+                <a:solidFill>
+                  <a:srgbClr val="10161F"/>
+                </a:solidFill>
+                <a:latin typeface="Pretendard" pitchFamily="34" charset="0"/>
+                <a:ea typeface="Pretendard" pitchFamily="34" charset="-122"/>
+                <a:cs typeface="Pretendard" pitchFamily="34" charset="-120"/>
+              </a:rPr>
+              <a:t>제3종일반주거</a:t>
+            </a:r>
+            <a:endParaRPr lang="en-US" sz="1400" dirty="0"/>
+          </a:p>
+        </p:txBody>
+      </p:sp>
+      <p:sp>
+        <p:nvSpPr>
+          <p:cNvPr id="12" name="Shape 10"/>
+          <p:cNvSpPr/>
+          <p:nvPr/>
+        </p:nvSpPr>
+        <p:spPr>
+          <a:xfrm>
+            <a:off x="7604608" y="1371600"/>
+            <a:ext cx="0" cy="4754880"/>
+          </a:xfrm>
+          <a:prstGeom prst="line">
+            <a:avLst/>
+          </a:prstGeom>
+          <a:noFill/>
+          <a:ln w="8890">
+            <a:solidFill>
+              <a:srgbClr val="B98A2E"/>
+            </a:solidFill>
+            <a:prstDash val="solid"/>
+          </a:ln>
+        </p:spPr>
+      </p:sp>
+      <p:sp>
+        <p:nvSpPr>
+          <p:cNvPr id="13" name="Shape 11"/>
+          <p:cNvSpPr/>
+          <p:nvPr/>
+        </p:nvSpPr>
+        <p:spPr>
+          <a:xfrm>
+            <a:off x="7784287" y="1645920"/>
+            <a:ext cx="3840480" cy="2103120"/>
           </a:xfrm>
           <a:prstGeom prst="roundRect">
             <a:avLst>
-              <a:gd name="adj" fmla="val 3000"/>
+              <a:gd name="adj" fmla="val 2609"/>
             </a:avLst>
           </a:prstGeom>
           <a:solidFill>
@@ -6032,14 +6246,14 @@
       </p:sp>
       <p:sp>
         <p:nvSpPr>
-          <p:cNvPr id="8" name="Shape 6"/>
-          <p:cNvSpPr/>
-          <p:nvPr/>
-        </p:nvSpPr>
-        <p:spPr>
-          <a:xfrm>
-            <a:off x="566928" y="1700784"/>
-            <a:ext cx="36576" cy="1719072"/>
+          <p:cNvPr id="14" name="Shape 12"/>
+          <p:cNvSpPr/>
+          <p:nvPr/>
+        </p:nvSpPr>
+        <p:spPr>
+          <a:xfrm>
+            <a:off x="7784287" y="1700784"/>
+            <a:ext cx="36576" cy="1993392"/>
           </a:xfrm>
           <a:prstGeom prst="rect">
             <a:avLst/>
@@ -6052,14 +6266,14 @@
       </p:sp>
       <p:sp>
         <p:nvSpPr>
-          <p:cNvPr id="9" name="Text 7"/>
-          <p:cNvSpPr/>
-          <p:nvPr/>
-        </p:nvSpPr>
-        <p:spPr>
-          <a:xfrm>
-            <a:off x="749808" y="1755648"/>
-            <a:ext cx="6528816" cy="201168"/>
+          <p:cNvPr id="15" name="Text 13"/>
+          <p:cNvSpPr/>
+          <p:nvPr/>
+        </p:nvSpPr>
+        <p:spPr>
+          <a:xfrm>
+            <a:off x="7967167" y="1755648"/>
+            <a:ext cx="3511296" cy="201168"/>
           </a:xfrm>
           <a:prstGeom prst="rect">
             <a:avLst/>
@@ -6083,7 +6297,7 @@
                 <a:ea typeface="Pretendard" pitchFamily="34" charset="-122"/>
                 <a:cs typeface="Pretendard" pitchFamily="34" charset="-120"/>
               </a:rPr>
-              <a:t>건축물 물리 스펙 요약</a:t>
+              <a:t>토지 및 건물 분석 포인트</a:t>
             </a:r>
             <a:endParaRPr lang="en-US" sz="1050" dirty="0"/>
           </a:p>
@@ -6091,14 +6305,14 @@
       </p:sp>
       <p:sp>
         <p:nvSpPr>
-          <p:cNvPr id="10" name="Text 8"/>
-          <p:cNvSpPr/>
-          <p:nvPr/>
-        </p:nvSpPr>
-        <p:spPr>
-          <a:xfrm>
-            <a:off x="749808" y="1975104"/>
-            <a:ext cx="6528816" cy="1426464"/>
+          <p:cNvPr id="16" name="Text 14"/>
+          <p:cNvSpPr/>
+          <p:nvPr/>
+        </p:nvSpPr>
+        <p:spPr>
+          <a:xfrm>
+            <a:off x="7967167" y="1975104"/>
+            <a:ext cx="3511296" cy="1700784"/>
           </a:xfrm>
           <a:prstGeom prst="rect">
             <a:avLst/>
@@ -6126,7 +6340,7 @@
                 <a:ea typeface="Pretendard" pitchFamily="34" charset="-122"/>
                 <a:cs typeface="Pretendard" pitchFamily="34" charset="-120"/>
               </a:rPr>
-              <a:t>상세 건물 제원은 실사 자료를 참조하시기 바랍니다</a:t>
+              <a:t>물건 접면 도로 및 교통 여건은 현장 확인 사항입니다</a:t>
             </a:r>
             <a:endParaRPr lang="en-US" sz="930" dirty="0"/>
           </a:p>
@@ -6147,7 +6361,7 @@
                 <a:ea typeface="Pretendard" pitchFamily="34" charset="-122"/>
                 <a:cs typeface="Pretendard" pitchFamily="34" charset="-120"/>
               </a:rPr>
-              <a:t>건물 현황 및 규모는 첨부 대장을 기준으로 합니다</a:t>
+              <a:t>상세 건물 제원은 실사 자료를 참조하시기 바랍니다</a:t>
             </a:r>
             <a:endParaRPr lang="en-US" sz="930" dirty="0"/>
           </a:p>
@@ -6168,7 +6382,7 @@
                 <a:ea typeface="Pretendard" pitchFamily="34" charset="-122"/>
                 <a:cs typeface="Pretendard" pitchFamily="34" charset="-120"/>
               </a:rPr>
-              <a:t>건물 상태 및 설비 현황은 실사 보고서를 참조하십시오</a:t>
+              <a:t>건물 현황 및 규모는 첨부 대장을 기준으로 합니다</a:t>
             </a:r>
             <a:endParaRPr lang="en-US" sz="930" dirty="0"/>
           </a:p>
@@ -6176,78 +6390,55 @@
       </p:sp>
       <p:sp>
         <p:nvSpPr>
-          <p:cNvPr id="11" name="Shape 9"/>
-          <p:cNvSpPr/>
-          <p:nvPr/>
-        </p:nvSpPr>
-        <p:spPr>
-          <a:xfrm>
-            <a:off x="7604608" y="1371600"/>
-            <a:ext cx="0" cy="4754880"/>
-          </a:xfrm>
-          <a:prstGeom prst="line">
-            <a:avLst/>
-          </a:prstGeom>
-          <a:noFill/>
-          <a:ln w="8890">
-            <a:solidFill>
-              <a:srgbClr val="B98A2E"/>
-            </a:solidFill>
-            <a:prstDash val="solid"/>
-          </a:ln>
-        </p:spPr>
-      </p:sp>
-      <p:sp>
-        <p:nvSpPr>
-          <p:cNvPr id="12" name="Shape 10"/>
-          <p:cNvSpPr/>
-          <p:nvPr/>
-        </p:nvSpPr>
-        <p:spPr>
-          <a:xfrm>
-            <a:off x="7784287" y="1645920"/>
-            <a:ext cx="3840480" cy="1645920"/>
+          <p:cNvPr id="17" name="Shape 15"/>
+          <p:cNvSpPr/>
+          <p:nvPr/>
+        </p:nvSpPr>
+        <p:spPr>
+          <a:xfrm>
+            <a:off x="7784287" y="3977640"/>
+            <a:ext cx="3840480" cy="2148840"/>
           </a:xfrm>
           <a:prstGeom prst="roundRect">
             <a:avLst>
-              <a:gd name="adj" fmla="val 3333"/>
+              <a:gd name="adj" fmla="val 2553"/>
             </a:avLst>
           </a:prstGeom>
           <a:solidFill>
-            <a:srgbClr val="F3EBDA"/>
+            <a:srgbClr val="BEE3F8"/>
           </a:solidFill>
           <a:ln/>
         </p:spPr>
       </p:sp>
       <p:sp>
         <p:nvSpPr>
-          <p:cNvPr id="13" name="Shape 11"/>
-          <p:cNvSpPr/>
-          <p:nvPr/>
-        </p:nvSpPr>
-        <p:spPr>
-          <a:xfrm>
-            <a:off x="7784287" y="1700784"/>
-            <a:ext cx="36576" cy="1536192"/>
+          <p:cNvPr id="18" name="Shape 16"/>
+          <p:cNvSpPr/>
+          <p:nvPr/>
+        </p:nvSpPr>
+        <p:spPr>
+          <a:xfrm>
+            <a:off x="7784287" y="4032504"/>
+            <a:ext cx="36576" cy="2039112"/>
           </a:xfrm>
           <a:prstGeom prst="rect">
             <a:avLst/>
           </a:prstGeom>
           <a:solidFill>
-            <a:srgbClr val="977024"/>
+            <a:srgbClr val="2B6CB0"/>
           </a:solidFill>
           <a:ln/>
         </p:spPr>
       </p:sp>
       <p:sp>
         <p:nvSpPr>
-          <p:cNvPr id="14" name="Text 12"/>
-          <p:cNvSpPr/>
-          <p:nvPr/>
-        </p:nvSpPr>
-        <p:spPr>
-          <a:xfrm>
-            <a:off x="7967167" y="1755648"/>
+          <p:cNvPr id="19" name="Text 17"/>
+          <p:cNvSpPr/>
+          <p:nvPr/>
+        </p:nvSpPr>
+        <p:spPr>
+          <a:xfrm>
+            <a:off x="7967167" y="4087368"/>
             <a:ext cx="3511296" cy="201168"/>
           </a:xfrm>
           <a:prstGeom prst="rect">
@@ -6263,20 +6454,31 @@
             <a:pPr indent="0" marL="0">
               <a:buNone/>
             </a:pPr>
+            <a:r>
+              <a:rPr lang="en-US" sz="1050" b="1" dirty="0">
+                <a:solidFill>
+                  <a:srgbClr val="2B6CB0"/>
+                </a:solidFill>
+                <a:latin typeface="Pretendard" pitchFamily="34" charset="0"/>
+                <a:ea typeface="Pretendard" pitchFamily="34" charset="-122"/>
+                <a:cs typeface="Pretendard" pitchFamily="34" charset="-120"/>
+              </a:rPr>
+              <a:t>물건 실사 및 관리 상태</a:t>
+            </a:r>
             <a:endParaRPr lang="en-US" sz="1050" dirty="0"/>
           </a:p>
         </p:txBody>
       </p:sp>
       <p:sp>
         <p:nvSpPr>
-          <p:cNvPr id="15" name="Text 13"/>
-          <p:cNvSpPr/>
-          <p:nvPr/>
-        </p:nvSpPr>
-        <p:spPr>
-          <a:xfrm>
-            <a:off x="7967167" y="1975104"/>
-            <a:ext cx="3511296" cy="1243584"/>
+          <p:cNvPr id="20" name="Text 18"/>
+          <p:cNvSpPr/>
+          <p:nvPr/>
+        </p:nvSpPr>
+        <p:spPr>
+          <a:xfrm>
+            <a:off x="7967167" y="4306824"/>
+            <a:ext cx="3511296" cy="1746504"/>
           </a:xfrm>
           <a:prstGeom prst="rect">
             <a:avLst/>
@@ -6288,11 +6490,12 @@
           <a:bodyPr wrap="square" lIns="0" tIns="0" rIns="0" bIns="0" rtlCol="0" anchor="t"/>
           <a:lstStyle/>
           <a:p>
-            <a:pPr indent="0" marL="0">
+            <a:pPr marL="342900" indent="-342900">
               <a:lnSpc>
                 <a:spcPct val="120000"/>
               </a:lnSpc>
-              <a:buNone/>
+              <a:buSzPct val="100000"/>
+              <a:buChar char="•"/>
             </a:pPr>
             <a:r>
               <a:rPr lang="en-US" sz="930" dirty="0">
@@ -6303,15 +6506,57 @@
                 <a:ea typeface="Pretendard" pitchFamily="34" charset="-122"/>
                 <a:cs typeface="Pretendard" pitchFamily="34" charset="-120"/>
               </a:rPr>
-              <a:t>건폐율 50%, 용적률 250% 적용 시 약 680평 신축 가능합니다.</a:t>
+              <a:t>건물 상태 및 설비 현황은 실사 보고서를 참조하십시오</a:t>
             </a:r>
             <a:endParaRPr lang="en-US" sz="930" dirty="0"/>
           </a:p>
-        </p:txBody>
-      </p:sp>
-      <p:sp>
-        <p:nvSpPr>
-          <p:cNvPr id="16" name="Text 14"/>
+          <a:p>
+            <a:pPr marL="342900" indent="-342900">
+              <a:lnSpc>
+                <a:spcPct val="120000"/>
+              </a:lnSpc>
+              <a:buSzPct val="100000"/>
+              <a:buChar char="•"/>
+            </a:pPr>
+            <a:r>
+              <a:rPr lang="en-US" sz="930" dirty="0">
+                <a:solidFill>
+                  <a:srgbClr val="10161F"/>
+                </a:solidFill>
+                <a:latin typeface="Pretendard" pitchFamily="34" charset="0"/>
+                <a:ea typeface="Pretendard" pitchFamily="34" charset="-122"/>
+                <a:cs typeface="Pretendard" pitchFamily="34" charset="-120"/>
+              </a:rPr>
+              <a:t>자금 조달 및 대출 조건은 금융 자문 후 확정됩니다</a:t>
+            </a:r>
+            <a:endParaRPr lang="en-US" sz="930" dirty="0"/>
+          </a:p>
+          <a:p>
+            <a:pPr marL="342900" indent="-342900">
+              <a:lnSpc>
+                <a:spcPct val="120000"/>
+              </a:lnSpc>
+              <a:buSzPct val="100000"/>
+              <a:buChar char="•"/>
+            </a:pPr>
+            <a:r>
+              <a:rPr lang="en-US" sz="930" dirty="0">
+                <a:solidFill>
+                  <a:srgbClr val="10161F"/>
+                </a:solidFill>
+                <a:latin typeface="Pretendard" pitchFamily="34" charset="0"/>
+                <a:ea typeface="Pretendard" pitchFamily="34" charset="-122"/>
+                <a:cs typeface="Pretendard" pitchFamily="34" charset="-120"/>
+              </a:rPr>
+              <a:t>상세 실사 단계에서 구체적인 계약 조건 및 세무 검토가 진행됩니다</a:t>
+            </a:r>
+            <a:endParaRPr lang="en-US" sz="930" dirty="0"/>
+          </a:p>
+        </p:txBody>
+      </p:sp>
+      <p:sp>
+        <p:nvSpPr>
+          <p:cNvPr id="21" name="Text 19"/>
           <p:cNvSpPr/>
           <p:nvPr/>
         </p:nvSpPr>
@@ -6350,7 +6595,7 @@
       </p:sp>
       <p:sp>
         <p:nvSpPr>
-          <p:cNvPr id="17" name="Text 15"/>
+          <p:cNvPr id="22" name="Text 20"/>
           <p:cNvSpPr/>
           <p:nvPr/>
         </p:nvSpPr>
@@ -6958,11 +7203,11 @@
         <p:spPr>
           <a:xfrm>
             <a:off x="566928" y="1417320"/>
-            <a:ext cx="11057839" cy="3611880"/>
+            <a:ext cx="11057839" cy="3657600"/>
           </a:xfrm>
           <a:prstGeom prst="roundRect">
             <a:avLst>
-              <a:gd name="adj" fmla="val 1519"/>
+              <a:gd name="adj" fmla="val 1500"/>
             </a:avLst>
           </a:prstGeom>
           <a:solidFill>
@@ -7043,8 +7288,8 @@
         </p:nvSpPr>
         <p:spPr>
           <a:xfrm>
-            <a:off x="795528" y="1911096"/>
-            <a:ext cx="10600639" cy="402336"/>
+            <a:off x="795528" y="1947672"/>
+            <a:ext cx="10600639" cy="365760"/>
           </a:xfrm>
           <a:prstGeom prst="rect">
             <a:avLst/>
@@ -7062,7 +7307,7 @@
               <a:buNone/>
             </a:pPr>
             <a:r>
-              <a:rPr lang="en-US" sz="1350" b="1" dirty="0">
+              <a:rPr lang="en-US" sz="1250" b="1" dirty="0">
                 <a:solidFill>
                   <a:srgbClr val="10161F"/>
                 </a:solidFill>
@@ -7072,7 +7317,7 @@
               </a:rPr>
               <a:t>사전협의 완료</a:t>
             </a:r>
-            <a:endParaRPr lang="en-US" sz="1350" dirty="0"/>
+            <a:endParaRPr lang="en-US" sz="1250" dirty="0"/>
           </a:p>
         </p:txBody>
       </p:sp>
@@ -7085,7 +7330,7 @@
         <p:spPr>
           <a:xfrm>
             <a:off x="795528" y="2377440"/>
-            <a:ext cx="10600639" cy="2560320"/>
+            <a:ext cx="10600639" cy="2606040"/>
           </a:xfrm>
           <a:prstGeom prst="rect">
             <a:avLst/>
@@ -7107,7 +7352,7 @@
               <a:buChar char="•"/>
             </a:pPr>
             <a:r>
-              <a:rPr lang="en-US" sz="1200" dirty="0">
+              <a:rPr lang="en-US" sz="1100" dirty="0">
                 <a:solidFill>
                   <a:srgbClr val="10161F"/>
                 </a:solidFill>
@@ -7117,13 +7362,79 @@
               </a:rPr>
               <a:t>2개월 내 착수 가능</a:t>
             </a:r>
-            <a:endParaRPr lang="en-US" sz="1200" dirty="0"/>
-          </a:p>
-        </p:txBody>
-      </p:sp>
-      <p:sp>
-        <p:nvSpPr>
-          <p:cNvPr id="11" name="Text 9"/>
+            <a:endParaRPr lang="en-US" sz="1100" dirty="0"/>
+          </a:p>
+        </p:txBody>
+      </p:sp>
+      <p:sp>
+        <p:nvSpPr>
+          <p:cNvPr id="11" name="Shape 9"/>
+          <p:cNvSpPr/>
+          <p:nvPr/>
+        </p:nvSpPr>
+        <p:spPr>
+          <a:xfrm>
+            <a:off x="566928" y="5193792"/>
+            <a:ext cx="11057839" cy="621792"/>
+          </a:xfrm>
+          <a:prstGeom prst="roundRect">
+            <a:avLst>
+              <a:gd name="adj" fmla="val 8824"/>
+            </a:avLst>
+          </a:prstGeom>
+          <a:solidFill>
+            <a:srgbClr val="F7FAFC"/>
+          </a:solidFill>
+          <a:ln w="6350">
+            <a:solidFill>
+              <a:srgbClr val="CBD5E0"/>
+            </a:solidFill>
+            <a:prstDash val="solid"/>
+          </a:ln>
+        </p:spPr>
+      </p:sp>
+      <p:sp>
+        <p:nvSpPr>
+          <p:cNvPr id="12" name="Text 10"/>
+          <p:cNvSpPr/>
+          <p:nvPr/>
+        </p:nvSpPr>
+        <p:spPr>
+          <a:xfrm>
+            <a:off x="795528" y="5193792"/>
+            <a:ext cx="10600639" cy="621792"/>
+          </a:xfrm>
+          <a:prstGeom prst="rect">
+            <a:avLst/>
+          </a:prstGeom>
+          <a:noFill/>
+          <a:ln/>
+        </p:spPr>
+        <p:txBody>
+          <a:bodyPr wrap="square" lIns="0" tIns="0" rIns="0" bIns="0" rtlCol="0" anchor="ctr"/>
+          <a:lstStyle/>
+          <a:p>
+            <a:pPr indent="0" marL="0">
+              <a:buNone/>
+            </a:pPr>
+            <a:r>
+              <a:rPr lang="en-US" sz="1100" dirty="0">
+                <a:solidFill>
+                  <a:srgbClr val="10161F"/>
+                </a:solidFill>
+                <a:latin typeface="Pretendard" pitchFamily="34" charset="0"/>
+                <a:ea typeface="Pretendard" pitchFamily="34" charset="-122"/>
+                <a:cs typeface="Pretendard" pitchFamily="34" charset="-120"/>
+              </a:rPr>
+              <a:t>※ 본 리스크 체크는 공부 및 브로커 확인 기반이며, 매수 전 전문 실사팀(변호사/건축사)을 통한 정밀 실사가 필요합니다.</a:t>
+            </a:r>
+            <a:endParaRPr lang="en-US" sz="1100" dirty="0"/>
+          </a:p>
+        </p:txBody>
+      </p:sp>
+      <p:sp>
+        <p:nvSpPr>
+          <p:cNvPr id="13" name="Text 11"/>
           <p:cNvSpPr/>
           <p:nvPr/>
         </p:nvSpPr>
@@ -7162,7 +7473,7 @@
       </p:sp>
       <p:sp>
         <p:nvSpPr>
-          <p:cNvPr id="12" name="Text 10"/>
+          <p:cNvPr id="14" name="Text 12"/>
           <p:cNvSpPr/>
           <p:nvPr/>
         </p:nvSpPr>

--- a/docs/test/stress/e2e-outputs/development_basic_pr04.pptx
+++ b/docs/test/stress/e2e-outputs/development_basic_pr04.pptx
@@ -1905,7 +1905,7 @@
                 <a:ea typeface="Arial" pitchFamily="34" charset="-122"/>
                 <a:cs typeface="Arial" pitchFamily="34" charset="-120"/>
               </a:rPr>
-              <a:t>BASIC IM</a:t>
+              <a:t>INVESTMENT MEMORANDUM</a:t>
             </a:r>
             <a:endParaRPr lang="en-US" sz="1000" dirty="0"/>
           </a:p>
@@ -4446,7 +4446,7 @@
                 <a:ea typeface="Pretendard" pitchFamily="34" charset="-122"/>
                 <a:cs typeface="Pretendard" pitchFamily="34" charset="-120"/>
               </a:rPr>
-              <a:t>원금 안전판: 핵심권역 핵심 입지 및 우량 대지 지분 가치로 하방 경직성 확보</a:t>
+              <a:t>입지 분석: 핵심권역 소재 자산의 입지 특성 및 대지 지분 가치 확인 필요</a:t>
             </a:r>
             <a:endParaRPr lang="en-US" sz="1150" dirty="0"/>
           </a:p>
@@ -4578,7 +4578,7 @@
                 <a:ea typeface="Pretendard" pitchFamily="34" charset="-122"/>
                 <a:cs typeface="Pretendard" pitchFamily="34" charset="-120"/>
               </a:rPr>
-              <a:t>수익 안정성: 매매 시장 적정가 수준 대비 안정적 월 임대수익 창출 기반</a:t>
+              <a:t>수익 구조: 매매 시장 적정가 수준 대비 임대수익 현황 분석 필요</a:t>
             </a:r>
             <a:endParaRPr lang="en-US" sz="1150" dirty="0"/>
           </a:p>
@@ -4710,7 +4710,7 @@
                 <a:ea typeface="Pretendard" pitchFamily="34" charset="-122"/>
                 <a:cs typeface="Pretendard" pitchFamily="34" charset="-120"/>
               </a:rPr>
-              <a:t>미래 가치: 향후 권역 지가 상승 및 공법상 밸류업을 통한 자본이득 실현 가능</a:t>
+              <a:t>향후 검토: 권역 개발 동향 및 공법상 변경 가능성 확인 필요</a:t>
             </a:r>
             <a:endParaRPr lang="en-US" sz="1150" dirty="0"/>
           </a:p>
@@ -8070,7 +8070,7 @@
         <p:spPr>
           <a:xfrm>
             <a:off x="786384" y="1792224"/>
-            <a:ext cx="384048" cy="384048"/>
+            <a:ext cx="438912" cy="438912"/>
           </a:xfrm>
           <a:prstGeom prst="ellipse">
             <a:avLst/>
@@ -8090,7 +8090,7 @@
         <p:spPr>
           <a:xfrm>
             <a:off x="786384" y="1792224"/>
-            <a:ext cx="384048" cy="384048"/>
+            <a:ext cx="438912" cy="438912"/>
           </a:xfrm>
           <a:prstGeom prst="rect">
             <a:avLst/>
@@ -8106,7 +8106,7 @@
               <a:buNone/>
             </a:pPr>
             <a:r>
-              <a:rPr lang="en-US" sz="1300" b="1" dirty="0">
+              <a:rPr lang="en-US" sz="1400" b="1" dirty="0">
                 <a:solidFill>
                   <a:srgbClr val="FFFFFF"/>
                 </a:solidFill>
@@ -8114,9 +8114,9 @@
                 <a:ea typeface="Arial" pitchFamily="34" charset="-122"/>
                 <a:cs typeface="Arial" pitchFamily="34" charset="-120"/>
               </a:rPr>
-              <a:t>STEP 1</a:t>
-            </a:r>
-            <a:endParaRPr lang="en-US" sz="1300" dirty="0"/>
+              <a:t>01</a:t>
+            </a:r>
+            <a:endParaRPr lang="en-US" sz="1400" dirty="0"/>
           </a:p>
         </p:txBody>
       </p:sp>
@@ -8153,7 +8153,7 @@
                 <a:ea typeface="Pretendard" pitchFamily="34" charset="-122"/>
                 <a:cs typeface="Pretendard" pitchFamily="34" charset="-120"/>
               </a:rPr>
-              <a:t>건축 설계 발주 및 인허가 일정 협의를 권장합니다.</a:t>
+              <a:t>1단계</a:t>
             </a:r>
             <a:endParaRPr lang="en-US" sz="1600" dirty="0"/>
           </a:p>
@@ -8179,6 +8179,23 @@
         <p:txBody>
           <a:bodyPr wrap="square" rtlCol="0" anchor="t"/>
           <a:lstStyle/>
+          <a:p>
+            <a:pPr indent="0" marL="0">
+              <a:buNone/>
+            </a:pPr>
+            <a:r>
+              <a:rPr lang="en-US" sz="1100" dirty="0">
+                <a:solidFill>
+                  <a:srgbClr val="10161F"/>
+                </a:solidFill>
+                <a:latin typeface="Pretendard" pitchFamily="34" charset="0"/>
+                <a:ea typeface="Pretendard" pitchFamily="34" charset="-122"/>
+                <a:cs typeface="Pretendard" pitchFamily="34" charset="-120"/>
+              </a:rPr>
+              <a:t>건축 설계 발주 및 인허가 일정 협의를 권장합니다.</a:t>
+            </a:r>
+            <a:endParaRPr lang="en-US" sz="1100" dirty="0"/>
+          </a:p>
           <a:p>
             <a:pPr indent="0" marL="0">
               <a:buNone/>

--- a/docs/test/stress/e2e-outputs/development_basic_pr04.pptx
+++ b/docs/test/stress/e2e-outputs/development_basic_pr04.pptx
@@ -15,9 +15,15 @@
     <p:sldId id="263" r:id="rId9"/>
     <p:sldId id="264" r:id="rId10"/>
     <p:sldId id="265" r:id="rId11"/>
+    <p:sldId id="266" r:id="rId12"/>
+    <p:sldId id="267" r:id="rId13"/>
+    <p:sldId id="268" r:id="rId14"/>
+    <p:sldId id="269" r:id="rId15"/>
+    <p:sldId id="270" r:id="rId16"/>
+    <p:sldId id="271" r:id="rId17"/>
   </p:sldIdLst>
   <p:notesMasterIdLst>
-    <p:notesMasterId r:id="rId12"/>
+    <p:notesMasterId r:id="rId18"/>
   </p:notesMasterIdLst>
   <p:sldSz cx="12192000" cy="6858000"/>
   <p:notesSz cx="6858000" cy="12192000"/>
@@ -623,6 +629,534 @@
             <a:fld id="{F7021451-1387-4CA6-816F-3879F97B5CBC}" type="slidenum">
               <a:rPr lang="en-US"/>
               <a:t>10</a:t>
+            </a:fld>
+            <a:endParaRPr lang="en-US"/>
+          </a:p>
+        </p:txBody>
+      </p:sp>
+    </p:spTree>
+    <p:extLst>
+      <p:ext uri="{BB962C8B-B14F-4D97-AF65-F5344CB8AC3E}">
+        <p14:creationId xmlns:p14="http://schemas.microsoft.com/office/powerpoint/2010/main" val="1024086991"/>
+      </p:ext>
+    </p:extLst>
+  </p:cSld>
+  <p:clrMapOvr>
+    <a:masterClrMapping/>
+  </p:clrMapOvr>
+</p:notes>
+</file>
+
+<file path=ppt/notesSlides/notesSlide11.xml><?xml version="1.0" encoding="utf-8"?>
+<p:notes xmlns:a="http://schemas.openxmlformats.org/drawingml/2006/main" xmlns:r="http://schemas.openxmlformats.org/officeDocument/2006/relationships" xmlns:p="http://schemas.openxmlformats.org/presentationml/2006/main">
+  <p:cSld>
+    <p:spTree>
+      <p:nvGrpSpPr>
+        <p:cNvPr id="1" name=""/>
+        <p:cNvGrpSpPr/>
+        <p:nvPr/>
+      </p:nvGrpSpPr>
+      <p:grpSpPr>
+        <a:xfrm>
+          <a:off x="0" y="0"/>
+          <a:ext cx="0" cy="0"/>
+          <a:chOff x="0" y="0"/>
+          <a:chExt cx="0" cy="0"/>
+        </a:xfrm>
+      </p:grpSpPr>
+      <p:sp>
+        <p:nvSpPr>
+          <p:cNvPr id="2" name="Slide Image Placeholder 1"/>
+          <p:cNvSpPr>
+            <a:spLocks noGrp="1" noRot="1" noChangeAspect="1"/>
+          </p:cNvSpPr>
+          <p:nvPr>
+            <p:ph type="sldImg"/>
+          </p:nvPr>
+        </p:nvSpPr>
+        <p:spPr/>
+      </p:sp>
+      <p:sp>
+        <p:nvSpPr>
+          <p:cNvPr id="3" name="Notes Placeholder 2"/>
+          <p:cNvSpPr>
+            <a:spLocks noGrp="1"/>
+          </p:cNvSpPr>
+          <p:nvPr>
+            <p:ph type="body" idx="1"/>
+          </p:nvPr>
+        </p:nvSpPr>
+        <p:spPr/>
+        <p:txBody>
+          <a:bodyPr/>
+          <a:lstStyle/>
+          <a:p>
+            <a:r>
+              <a:rPr lang="en-US" dirty="0"/>
+              <a:t/>
+            </a:r>
+            <a:endParaRPr lang="en-US" dirty="0"/>
+          </a:p>
+        </p:txBody>
+      </p:sp>
+      <p:sp>
+        <p:nvSpPr>
+          <p:cNvPr id="4" name="Slide Number Placeholder 3"/>
+          <p:cNvSpPr>
+            <a:spLocks noGrp="1"/>
+          </p:cNvSpPr>
+          <p:nvPr>
+            <p:ph type="sldNum" sz="quarter" idx="10"/>
+          </p:nvPr>
+        </p:nvSpPr>
+        <p:spPr/>
+        <p:txBody>
+          <a:bodyPr/>
+          <a:lstStyle/>
+          <a:p>
+            <a:fld id="{F7021451-1387-4CA6-816F-3879F97B5CBC}" type="slidenum">
+              <a:rPr lang="en-US"/>
+              <a:t>11</a:t>
+            </a:fld>
+            <a:endParaRPr lang="en-US"/>
+          </a:p>
+        </p:txBody>
+      </p:sp>
+    </p:spTree>
+    <p:extLst>
+      <p:ext uri="{BB962C8B-B14F-4D97-AF65-F5344CB8AC3E}">
+        <p14:creationId xmlns:p14="http://schemas.microsoft.com/office/powerpoint/2010/main" val="1024086991"/>
+      </p:ext>
+    </p:extLst>
+  </p:cSld>
+  <p:clrMapOvr>
+    <a:masterClrMapping/>
+  </p:clrMapOvr>
+</p:notes>
+</file>
+
+<file path=ppt/notesSlides/notesSlide12.xml><?xml version="1.0" encoding="utf-8"?>
+<p:notes xmlns:a="http://schemas.openxmlformats.org/drawingml/2006/main" xmlns:r="http://schemas.openxmlformats.org/officeDocument/2006/relationships" xmlns:p="http://schemas.openxmlformats.org/presentationml/2006/main">
+  <p:cSld>
+    <p:spTree>
+      <p:nvGrpSpPr>
+        <p:cNvPr id="1" name=""/>
+        <p:cNvGrpSpPr/>
+        <p:nvPr/>
+      </p:nvGrpSpPr>
+      <p:grpSpPr>
+        <a:xfrm>
+          <a:off x="0" y="0"/>
+          <a:ext cx="0" cy="0"/>
+          <a:chOff x="0" y="0"/>
+          <a:chExt cx="0" cy="0"/>
+        </a:xfrm>
+      </p:grpSpPr>
+      <p:sp>
+        <p:nvSpPr>
+          <p:cNvPr id="2" name="Slide Image Placeholder 1"/>
+          <p:cNvSpPr>
+            <a:spLocks noGrp="1" noRot="1" noChangeAspect="1"/>
+          </p:cNvSpPr>
+          <p:nvPr>
+            <p:ph type="sldImg"/>
+          </p:nvPr>
+        </p:nvSpPr>
+        <p:spPr/>
+      </p:sp>
+      <p:sp>
+        <p:nvSpPr>
+          <p:cNvPr id="3" name="Notes Placeholder 2"/>
+          <p:cNvSpPr>
+            <a:spLocks noGrp="1"/>
+          </p:cNvSpPr>
+          <p:nvPr>
+            <p:ph type="body" idx="1"/>
+          </p:nvPr>
+        </p:nvSpPr>
+        <p:spPr/>
+        <p:txBody>
+          <a:bodyPr/>
+          <a:lstStyle/>
+          <a:p>
+            <a:r>
+              <a:rPr lang="en-US" dirty="0"/>
+              <a:t/>
+            </a:r>
+            <a:endParaRPr lang="en-US" dirty="0"/>
+          </a:p>
+        </p:txBody>
+      </p:sp>
+      <p:sp>
+        <p:nvSpPr>
+          <p:cNvPr id="4" name="Slide Number Placeholder 3"/>
+          <p:cNvSpPr>
+            <a:spLocks noGrp="1"/>
+          </p:cNvSpPr>
+          <p:nvPr>
+            <p:ph type="sldNum" sz="quarter" idx="10"/>
+          </p:nvPr>
+        </p:nvSpPr>
+        <p:spPr/>
+        <p:txBody>
+          <a:bodyPr/>
+          <a:lstStyle/>
+          <a:p>
+            <a:fld id="{F7021451-1387-4CA6-816F-3879F97B5CBC}" type="slidenum">
+              <a:rPr lang="en-US"/>
+              <a:t>12</a:t>
+            </a:fld>
+            <a:endParaRPr lang="en-US"/>
+          </a:p>
+        </p:txBody>
+      </p:sp>
+    </p:spTree>
+    <p:extLst>
+      <p:ext uri="{BB962C8B-B14F-4D97-AF65-F5344CB8AC3E}">
+        <p14:creationId xmlns:p14="http://schemas.microsoft.com/office/powerpoint/2010/main" val="1024086991"/>
+      </p:ext>
+    </p:extLst>
+  </p:cSld>
+  <p:clrMapOvr>
+    <a:masterClrMapping/>
+  </p:clrMapOvr>
+</p:notes>
+</file>
+
+<file path=ppt/notesSlides/notesSlide13.xml><?xml version="1.0" encoding="utf-8"?>
+<p:notes xmlns:a="http://schemas.openxmlformats.org/drawingml/2006/main" xmlns:r="http://schemas.openxmlformats.org/officeDocument/2006/relationships" xmlns:p="http://schemas.openxmlformats.org/presentationml/2006/main">
+  <p:cSld>
+    <p:spTree>
+      <p:nvGrpSpPr>
+        <p:cNvPr id="1" name=""/>
+        <p:cNvGrpSpPr/>
+        <p:nvPr/>
+      </p:nvGrpSpPr>
+      <p:grpSpPr>
+        <a:xfrm>
+          <a:off x="0" y="0"/>
+          <a:ext cx="0" cy="0"/>
+          <a:chOff x="0" y="0"/>
+          <a:chExt cx="0" cy="0"/>
+        </a:xfrm>
+      </p:grpSpPr>
+      <p:sp>
+        <p:nvSpPr>
+          <p:cNvPr id="2" name="Slide Image Placeholder 1"/>
+          <p:cNvSpPr>
+            <a:spLocks noGrp="1" noRot="1" noChangeAspect="1"/>
+          </p:cNvSpPr>
+          <p:nvPr>
+            <p:ph type="sldImg"/>
+          </p:nvPr>
+        </p:nvSpPr>
+        <p:spPr/>
+      </p:sp>
+      <p:sp>
+        <p:nvSpPr>
+          <p:cNvPr id="3" name="Notes Placeholder 2"/>
+          <p:cNvSpPr>
+            <a:spLocks noGrp="1"/>
+          </p:cNvSpPr>
+          <p:nvPr>
+            <p:ph type="body" idx="1"/>
+          </p:nvPr>
+        </p:nvSpPr>
+        <p:spPr/>
+        <p:txBody>
+          <a:bodyPr/>
+          <a:lstStyle/>
+          <a:p>
+            <a:r>
+              <a:rPr lang="en-US" dirty="0"/>
+              <a:t/>
+            </a:r>
+            <a:endParaRPr lang="en-US" dirty="0"/>
+          </a:p>
+        </p:txBody>
+      </p:sp>
+      <p:sp>
+        <p:nvSpPr>
+          <p:cNvPr id="4" name="Slide Number Placeholder 3"/>
+          <p:cNvSpPr>
+            <a:spLocks noGrp="1"/>
+          </p:cNvSpPr>
+          <p:nvPr>
+            <p:ph type="sldNum" sz="quarter" idx="10"/>
+          </p:nvPr>
+        </p:nvSpPr>
+        <p:spPr/>
+        <p:txBody>
+          <a:bodyPr/>
+          <a:lstStyle/>
+          <a:p>
+            <a:fld id="{F7021451-1387-4CA6-816F-3879F97B5CBC}" type="slidenum">
+              <a:rPr lang="en-US"/>
+              <a:t>13</a:t>
+            </a:fld>
+            <a:endParaRPr lang="en-US"/>
+          </a:p>
+        </p:txBody>
+      </p:sp>
+    </p:spTree>
+    <p:extLst>
+      <p:ext uri="{BB962C8B-B14F-4D97-AF65-F5344CB8AC3E}">
+        <p14:creationId xmlns:p14="http://schemas.microsoft.com/office/powerpoint/2010/main" val="1024086991"/>
+      </p:ext>
+    </p:extLst>
+  </p:cSld>
+  <p:clrMapOvr>
+    <a:masterClrMapping/>
+  </p:clrMapOvr>
+</p:notes>
+</file>
+
+<file path=ppt/notesSlides/notesSlide14.xml><?xml version="1.0" encoding="utf-8"?>
+<p:notes xmlns:a="http://schemas.openxmlformats.org/drawingml/2006/main" xmlns:r="http://schemas.openxmlformats.org/officeDocument/2006/relationships" xmlns:p="http://schemas.openxmlformats.org/presentationml/2006/main">
+  <p:cSld>
+    <p:spTree>
+      <p:nvGrpSpPr>
+        <p:cNvPr id="1" name=""/>
+        <p:cNvGrpSpPr/>
+        <p:nvPr/>
+      </p:nvGrpSpPr>
+      <p:grpSpPr>
+        <a:xfrm>
+          <a:off x="0" y="0"/>
+          <a:ext cx="0" cy="0"/>
+          <a:chOff x="0" y="0"/>
+          <a:chExt cx="0" cy="0"/>
+        </a:xfrm>
+      </p:grpSpPr>
+      <p:sp>
+        <p:nvSpPr>
+          <p:cNvPr id="2" name="Slide Image Placeholder 1"/>
+          <p:cNvSpPr>
+            <a:spLocks noGrp="1" noRot="1" noChangeAspect="1"/>
+          </p:cNvSpPr>
+          <p:nvPr>
+            <p:ph type="sldImg"/>
+          </p:nvPr>
+        </p:nvSpPr>
+        <p:spPr/>
+      </p:sp>
+      <p:sp>
+        <p:nvSpPr>
+          <p:cNvPr id="3" name="Notes Placeholder 2"/>
+          <p:cNvSpPr>
+            <a:spLocks noGrp="1"/>
+          </p:cNvSpPr>
+          <p:nvPr>
+            <p:ph type="body" idx="1"/>
+          </p:nvPr>
+        </p:nvSpPr>
+        <p:spPr/>
+        <p:txBody>
+          <a:bodyPr/>
+          <a:lstStyle/>
+          <a:p>
+            <a:r>
+              <a:rPr lang="en-US" dirty="0"/>
+              <a:t/>
+            </a:r>
+            <a:endParaRPr lang="en-US" dirty="0"/>
+          </a:p>
+        </p:txBody>
+      </p:sp>
+      <p:sp>
+        <p:nvSpPr>
+          <p:cNvPr id="4" name="Slide Number Placeholder 3"/>
+          <p:cNvSpPr>
+            <a:spLocks noGrp="1"/>
+          </p:cNvSpPr>
+          <p:nvPr>
+            <p:ph type="sldNum" sz="quarter" idx="10"/>
+          </p:nvPr>
+        </p:nvSpPr>
+        <p:spPr/>
+        <p:txBody>
+          <a:bodyPr/>
+          <a:lstStyle/>
+          <a:p>
+            <a:fld id="{F7021451-1387-4CA6-816F-3879F97B5CBC}" type="slidenum">
+              <a:rPr lang="en-US"/>
+              <a:t>14</a:t>
+            </a:fld>
+            <a:endParaRPr lang="en-US"/>
+          </a:p>
+        </p:txBody>
+      </p:sp>
+    </p:spTree>
+    <p:extLst>
+      <p:ext uri="{BB962C8B-B14F-4D97-AF65-F5344CB8AC3E}">
+        <p14:creationId xmlns:p14="http://schemas.microsoft.com/office/powerpoint/2010/main" val="1024086991"/>
+      </p:ext>
+    </p:extLst>
+  </p:cSld>
+  <p:clrMapOvr>
+    <a:masterClrMapping/>
+  </p:clrMapOvr>
+</p:notes>
+</file>
+
+<file path=ppt/notesSlides/notesSlide15.xml><?xml version="1.0" encoding="utf-8"?>
+<p:notes xmlns:a="http://schemas.openxmlformats.org/drawingml/2006/main" xmlns:r="http://schemas.openxmlformats.org/officeDocument/2006/relationships" xmlns:p="http://schemas.openxmlformats.org/presentationml/2006/main">
+  <p:cSld>
+    <p:spTree>
+      <p:nvGrpSpPr>
+        <p:cNvPr id="1" name=""/>
+        <p:cNvGrpSpPr/>
+        <p:nvPr/>
+      </p:nvGrpSpPr>
+      <p:grpSpPr>
+        <a:xfrm>
+          <a:off x="0" y="0"/>
+          <a:ext cx="0" cy="0"/>
+          <a:chOff x="0" y="0"/>
+          <a:chExt cx="0" cy="0"/>
+        </a:xfrm>
+      </p:grpSpPr>
+      <p:sp>
+        <p:nvSpPr>
+          <p:cNvPr id="2" name="Slide Image Placeholder 1"/>
+          <p:cNvSpPr>
+            <a:spLocks noGrp="1" noRot="1" noChangeAspect="1"/>
+          </p:cNvSpPr>
+          <p:nvPr>
+            <p:ph type="sldImg"/>
+          </p:nvPr>
+        </p:nvSpPr>
+        <p:spPr/>
+      </p:sp>
+      <p:sp>
+        <p:nvSpPr>
+          <p:cNvPr id="3" name="Notes Placeholder 2"/>
+          <p:cNvSpPr>
+            <a:spLocks noGrp="1"/>
+          </p:cNvSpPr>
+          <p:nvPr>
+            <p:ph type="body" idx="1"/>
+          </p:nvPr>
+        </p:nvSpPr>
+        <p:spPr/>
+        <p:txBody>
+          <a:bodyPr/>
+          <a:lstStyle/>
+          <a:p>
+            <a:r>
+              <a:rPr lang="en-US" dirty="0"/>
+              <a:t/>
+            </a:r>
+            <a:endParaRPr lang="en-US" dirty="0"/>
+          </a:p>
+        </p:txBody>
+      </p:sp>
+      <p:sp>
+        <p:nvSpPr>
+          <p:cNvPr id="4" name="Slide Number Placeholder 3"/>
+          <p:cNvSpPr>
+            <a:spLocks noGrp="1"/>
+          </p:cNvSpPr>
+          <p:nvPr>
+            <p:ph type="sldNum" sz="quarter" idx="10"/>
+          </p:nvPr>
+        </p:nvSpPr>
+        <p:spPr/>
+        <p:txBody>
+          <a:bodyPr/>
+          <a:lstStyle/>
+          <a:p>
+            <a:fld id="{F7021451-1387-4CA6-816F-3879F97B5CBC}" type="slidenum">
+              <a:rPr lang="en-US"/>
+              <a:t>15</a:t>
+            </a:fld>
+            <a:endParaRPr lang="en-US"/>
+          </a:p>
+        </p:txBody>
+      </p:sp>
+    </p:spTree>
+    <p:extLst>
+      <p:ext uri="{BB962C8B-B14F-4D97-AF65-F5344CB8AC3E}">
+        <p14:creationId xmlns:p14="http://schemas.microsoft.com/office/powerpoint/2010/main" val="1024086991"/>
+      </p:ext>
+    </p:extLst>
+  </p:cSld>
+  <p:clrMapOvr>
+    <a:masterClrMapping/>
+  </p:clrMapOvr>
+</p:notes>
+</file>
+
+<file path=ppt/notesSlides/notesSlide16.xml><?xml version="1.0" encoding="utf-8"?>
+<p:notes xmlns:a="http://schemas.openxmlformats.org/drawingml/2006/main" xmlns:r="http://schemas.openxmlformats.org/officeDocument/2006/relationships" xmlns:p="http://schemas.openxmlformats.org/presentationml/2006/main">
+  <p:cSld>
+    <p:spTree>
+      <p:nvGrpSpPr>
+        <p:cNvPr id="1" name=""/>
+        <p:cNvGrpSpPr/>
+        <p:nvPr/>
+      </p:nvGrpSpPr>
+      <p:grpSpPr>
+        <a:xfrm>
+          <a:off x="0" y="0"/>
+          <a:ext cx="0" cy="0"/>
+          <a:chOff x="0" y="0"/>
+          <a:chExt cx="0" cy="0"/>
+        </a:xfrm>
+      </p:grpSpPr>
+      <p:sp>
+        <p:nvSpPr>
+          <p:cNvPr id="2" name="Slide Image Placeholder 1"/>
+          <p:cNvSpPr>
+            <a:spLocks noGrp="1" noRot="1" noChangeAspect="1"/>
+          </p:cNvSpPr>
+          <p:nvPr>
+            <p:ph type="sldImg"/>
+          </p:nvPr>
+        </p:nvSpPr>
+        <p:spPr/>
+      </p:sp>
+      <p:sp>
+        <p:nvSpPr>
+          <p:cNvPr id="3" name="Notes Placeholder 2"/>
+          <p:cNvSpPr>
+            <a:spLocks noGrp="1"/>
+          </p:cNvSpPr>
+          <p:nvPr>
+            <p:ph type="body" idx="1"/>
+          </p:nvPr>
+        </p:nvSpPr>
+        <p:spPr/>
+        <p:txBody>
+          <a:bodyPr/>
+          <a:lstStyle/>
+          <a:p>
+            <a:r>
+              <a:rPr lang="en-US" dirty="0"/>
+              <a:t/>
+            </a:r>
+            <a:endParaRPr lang="en-US" dirty="0"/>
+          </a:p>
+        </p:txBody>
+      </p:sp>
+      <p:sp>
+        <p:nvSpPr>
+          <p:cNvPr id="4" name="Slide Number Placeholder 3"/>
+          <p:cNvSpPr>
+            <a:spLocks noGrp="1"/>
+          </p:cNvSpPr>
+          <p:nvPr>
+            <p:ph type="sldNum" sz="quarter" idx="10"/>
+          </p:nvPr>
+        </p:nvSpPr>
+        <p:spPr/>
+        <p:txBody>
+          <a:bodyPr/>
+          <a:lstStyle/>
+          <a:p>
+            <a:fld id="{F7021451-1387-4CA6-816F-3879F97B5CBC}" type="slidenum">
+              <a:rPr lang="en-US"/>
+              <a:t>16</a:t>
             </a:fld>
             <a:endParaRPr lang="en-US"/>
           </a:p>
@@ -2241,7 +2775,7 @@
               <a:buNone/>
             </a:pPr>
             <a:r>
-              <a:rPr lang="en-US" sz="850" dirty="0">
+              <a:rPr lang="en-US" sz="900" dirty="0">
                 <a:solidFill>
                   <a:srgbClr val="718096"/>
                 </a:solidFill>
@@ -2251,7 +2785,7 @@
               </a:rPr>
               <a:t>송민기  |  NAI코리아</a:t>
             </a:r>
-            <a:endParaRPr lang="en-US" sz="850" dirty="0"/>
+            <a:endParaRPr lang="en-US" sz="900" dirty="0"/>
           </a:p>
         </p:txBody>
       </p:sp>
@@ -2344,6 +2878,4323 @@
 <file path=ppt/slides/slide10.xml><?xml version="1.0" encoding="utf-8"?>
 <p:sld xmlns:a="http://schemas.openxmlformats.org/drawingml/2006/main" xmlns:r="http://schemas.openxmlformats.org/officeDocument/2006/relationships" xmlns:p="http://schemas.openxmlformats.org/presentationml/2006/main">
   <p:cSld name="Slide 10">
+    <p:bg>
+      <p:bgPr>
+        <a:solidFill>
+          <a:srgbClr val="FFFFFF"/>
+        </a:solidFill>
+      </p:bgPr>
+    </p:bg>
+    <p:spTree>
+      <p:nvGrpSpPr>
+        <p:cNvPr id="1" name=""/>
+        <p:cNvGrpSpPr/>
+        <p:nvPr/>
+      </p:nvGrpSpPr>
+      <p:grpSpPr>
+        <a:xfrm>
+          <a:off x="0" y="0"/>
+          <a:ext cx="0" cy="0"/>
+          <a:chOff x="0" y="0"/>
+          <a:chExt cx="0" cy="0"/>
+        </a:xfrm>
+      </p:grpSpPr>
+      <p:sp>
+        <p:nvSpPr>
+          <p:cNvPr id="2" name="Shape 0"/>
+          <p:cNvSpPr/>
+          <p:nvPr/>
+        </p:nvSpPr>
+        <p:spPr>
+          <a:xfrm>
+            <a:off x="566928" y="457200"/>
+            <a:ext cx="384048" cy="384048"/>
+          </a:xfrm>
+          <a:prstGeom prst="ellipse">
+            <a:avLst/>
+          </a:prstGeom>
+          <a:solidFill>
+            <a:srgbClr val="B98A2E"/>
+          </a:solidFill>
+          <a:ln/>
+        </p:spPr>
+      </p:sp>
+      <p:sp>
+        <p:nvSpPr>
+          <p:cNvPr id="3" name="Text 1"/>
+          <p:cNvSpPr/>
+          <p:nvPr/>
+        </p:nvSpPr>
+        <p:spPr>
+          <a:xfrm>
+            <a:off x="566928" y="457200"/>
+            <a:ext cx="384048" cy="384048"/>
+          </a:xfrm>
+          <a:prstGeom prst="rect">
+            <a:avLst/>
+          </a:prstGeom>
+          <a:noFill/>
+          <a:ln/>
+        </p:spPr>
+        <p:txBody>
+          <a:bodyPr wrap="square" lIns="0" tIns="0" rIns="0" bIns="0" rtlCol="0" anchor="ctr"/>
+          <a:lstStyle/>
+          <a:p>
+            <a:pPr algn="ctr" indent="0" marL="0">
+              <a:buNone/>
+            </a:pPr>
+            <a:r>
+              <a:rPr lang="en-US" sz="1300" b="1" dirty="0">
+                <a:solidFill>
+                  <a:srgbClr val="FFFFFF"/>
+                </a:solidFill>
+                <a:latin typeface="Arial" pitchFamily="34" charset="0"/>
+                <a:ea typeface="Arial" pitchFamily="34" charset="-122"/>
+                <a:cs typeface="Arial" pitchFamily="34" charset="-120"/>
+              </a:rPr>
+              <a:t>08</a:t>
+            </a:r>
+            <a:endParaRPr lang="en-US" sz="1300" dirty="0"/>
+          </a:p>
+        </p:txBody>
+      </p:sp>
+      <p:sp>
+        <p:nvSpPr>
+          <p:cNvPr id="4" name="Text 2"/>
+          <p:cNvSpPr/>
+          <p:nvPr/>
+        </p:nvSpPr>
+        <p:spPr>
+          <a:xfrm>
+            <a:off x="1133856" y="457200"/>
+            <a:ext cx="10490911" cy="182880"/>
+          </a:xfrm>
+          <a:prstGeom prst="rect">
+            <a:avLst/>
+          </a:prstGeom>
+          <a:noFill/>
+          <a:ln/>
+        </p:spPr>
+        <p:txBody>
+          <a:bodyPr wrap="square" lIns="0" tIns="0" rIns="0" bIns="0" rtlCol="0" anchor="ctr"/>
+          <a:lstStyle/>
+          <a:p>
+            <a:pPr indent="0" marL="0">
+              <a:buNone/>
+            </a:pPr>
+            <a:r>
+              <a:rPr lang="en-US" sz="950" b="1" spc="200" kern="0" dirty="0">
+                <a:solidFill>
+                  <a:srgbClr val="B98A2E"/>
+                </a:solidFill>
+                <a:latin typeface="Arial" pitchFamily="34" charset="0"/>
+                <a:ea typeface="Arial" pitchFamily="34" charset="-122"/>
+                <a:cs typeface="Arial" pitchFamily="34" charset="-120"/>
+              </a:rPr>
+              <a:t>Stacking</a:t>
+            </a:r>
+            <a:endParaRPr lang="en-US" sz="950" dirty="0"/>
+          </a:p>
+        </p:txBody>
+      </p:sp>
+      <p:sp>
+        <p:nvSpPr>
+          <p:cNvPr id="5" name="Text 3"/>
+          <p:cNvSpPr/>
+          <p:nvPr/>
+        </p:nvSpPr>
+        <p:spPr>
+          <a:xfrm>
+            <a:off x="1133856" y="640080"/>
+            <a:ext cx="10490911" cy="365760"/>
+          </a:xfrm>
+          <a:prstGeom prst="rect">
+            <a:avLst/>
+          </a:prstGeom>
+          <a:noFill/>
+          <a:ln/>
+        </p:spPr>
+        <p:txBody>
+          <a:bodyPr wrap="square" lIns="0" tIns="0" rIns="0" bIns="0" rtlCol="0" anchor="ctr"/>
+          <a:lstStyle/>
+          <a:p>
+            <a:pPr indent="0" marL="0">
+              <a:buNone/>
+            </a:pPr>
+            <a:r>
+              <a:rPr lang="en-US" sz="2300" b="1" dirty="0">
+                <a:solidFill>
+                  <a:srgbClr val="10161F"/>
+                </a:solidFill>
+                <a:latin typeface="Pretendard" pitchFamily="34" charset="0"/>
+                <a:ea typeface="Pretendard" pitchFamily="34" charset="-122"/>
+                <a:cs typeface="Pretendard" pitchFamily="34" charset="-120"/>
+              </a:rPr>
+              <a:t>스태킹계획</a:t>
+            </a:r>
+            <a:endParaRPr lang="en-US" sz="2300" dirty="0"/>
+          </a:p>
+        </p:txBody>
+      </p:sp>
+      <p:sp>
+        <p:nvSpPr>
+          <p:cNvPr id="6" name="Shape 4"/>
+          <p:cNvSpPr/>
+          <p:nvPr/>
+        </p:nvSpPr>
+        <p:spPr>
+          <a:xfrm>
+            <a:off x="566928" y="1417320"/>
+            <a:ext cx="5391760" cy="4389120"/>
+          </a:xfrm>
+          <a:prstGeom prst="roundRect">
+            <a:avLst>
+              <a:gd name="adj" fmla="val 1250"/>
+            </a:avLst>
+          </a:prstGeom>
+          <a:solidFill>
+            <a:srgbClr val="F7FAFC"/>
+          </a:solidFill>
+          <a:ln w="6350">
+            <a:solidFill>
+              <a:srgbClr val="CBD5E0"/>
+            </a:solidFill>
+            <a:prstDash val="solid"/>
+          </a:ln>
+        </p:spPr>
+      </p:sp>
+      <p:sp>
+        <p:nvSpPr>
+          <p:cNvPr id="7" name="Text 5"/>
+          <p:cNvSpPr/>
+          <p:nvPr/>
+        </p:nvSpPr>
+        <p:spPr>
+          <a:xfrm>
+            <a:off x="795528" y="1618488"/>
+            <a:ext cx="4934560" cy="320040"/>
+          </a:xfrm>
+          <a:prstGeom prst="rect">
+            <a:avLst/>
+          </a:prstGeom>
+          <a:noFill/>
+          <a:ln/>
+        </p:spPr>
+        <p:txBody>
+          <a:bodyPr wrap="square" lIns="0" tIns="0" rIns="0" bIns="0" rtlCol="0" anchor="ctr"/>
+          <a:lstStyle/>
+          <a:p>
+            <a:pPr indent="0" marL="0">
+              <a:buNone/>
+            </a:pPr>
+            <a:r>
+              <a:rPr lang="en-US" sz="1350" b="1" dirty="0">
+                <a:solidFill>
+                  <a:srgbClr val="977024"/>
+                </a:solidFill>
+                <a:latin typeface="Pretendard" pitchFamily="34" charset="0"/>
+                <a:ea typeface="Pretendard" pitchFamily="34" charset="-122"/>
+                <a:cs typeface="Pretendard" pitchFamily="34" charset="-120"/>
+              </a:rPr>
+              <a:t>1. 층별 용도 및 면적 배분 계획</a:t>
+            </a:r>
+            <a:endParaRPr lang="en-US" sz="1350" dirty="0"/>
+          </a:p>
+        </p:txBody>
+      </p:sp>
+      <p:graphicFrame>
+        <p:nvGraphicFramePr>
+          <p:cNvPr id="11" name="Table 0"/>
+          <p:cNvGraphicFramePr>
+            <a:graphicFrameLocks noGrp="1"/>
+          </p:cNvGraphicFramePr>
+          <p:nvPr>
+            <p:extLst>
+              <p:ext uri="{D42A27DB-BD31-4B8C-83A1-F6EECF244321}">
+                <p14:modId xmlns:p14="http://schemas.microsoft.com/office/powerpoint/2010/main" val="1579011935"/>
+              </p:ext>
+            </p:extLst>
+          </p:nvPr>
+        </p:nvGraphicFramePr>
+        <p:xfrm>
+          <a:off x="795528" y="2011680"/>
+          <a:ext cx="4934560" cy="914400"/>
+        </p:xfrm>
+        <a:graphic>
+          <a:graphicData uri="http://schemas.openxmlformats.org/drawingml/2006/table">
+            <a:tbl>
+              <a:tblPr/>
+              <a:tblGrid>
+                <a:gridCol w="1005840"/>
+                <a:gridCol w="1463040"/>
+                <a:gridCol w="1097280"/>
+                <a:gridCol w="1371600"/>
+              </a:tblGrid>
+              <a:tr h="475488">
+                <a:tc>
+                  <a:txBody>
+                    <a:bodyPr/>
+                    <a:lstStyle/>
+                    <a:p>
+                      <a:pPr indent="0" marL="0">
+                        <a:buNone/>
+                      </a:pPr>
+                      <a:r>
+                        <a:rPr lang="en-US" sz="1100" b="1" dirty="0">
+                          <a:solidFill>
+                            <a:srgbClr val="718096"/>
+                          </a:solidFill>
+                          <a:latin typeface="Pretendard" pitchFamily="34" charset="0"/>
+                          <a:ea typeface="Pretendard" pitchFamily="34" charset="-122"/>
+                          <a:cs typeface="Pretendard" pitchFamily="34" charset="-120"/>
+                        </a:rPr>
+                        <a:t>층수</a:t>
+                      </a:r>
+                      <a:endParaRPr lang="en-US" sz="1100" dirty="0">
+                        <a:latin typeface="Pretendard" charset="0"/>
+                        <a:ea typeface="Pretendard" charset="0"/>
+                        <a:cs typeface="Pretendard" charset="0"/>
+                      </a:endParaRPr>
+                    </a:p>
+                  </a:txBody>
+                  <a:tcPr marL="50800" marR="50800" marT="25400" marB="25400" anchor="ctr">
+                    <a:lnL w="3810" cap="flat" cmpd="sng" algn="ctr">
+                      <a:solidFill>
+                        <a:srgbClr val="CBD5E0"/>
+                      </a:solidFill>
+                      <a:prstDash val="solid"/>
+                      <a:round/>
+                      <a:headEnd type="none" w="med" len="med"/>
+                      <a:tailEnd type="none" w="med" len="med"/>
+                    </a:lnL>
+                    <a:lnR w="3810" cap="flat" cmpd="sng" algn="ctr">
+                      <a:solidFill>
+                        <a:srgbClr val="CBD5E0"/>
+                      </a:solidFill>
+                      <a:prstDash val="solid"/>
+                      <a:round/>
+                      <a:headEnd type="none" w="med" len="med"/>
+                      <a:tailEnd type="none" w="med" len="med"/>
+                    </a:lnR>
+                    <a:lnT w="3810" cap="flat" cmpd="sng" algn="ctr">
+                      <a:solidFill>
+                        <a:srgbClr val="CBD5E0"/>
+                      </a:solidFill>
+                      <a:prstDash val="solid"/>
+                      <a:round/>
+                      <a:headEnd type="none" w="med" len="med"/>
+                      <a:tailEnd type="none" w="med" len="med"/>
+                    </a:lnT>
+                    <a:lnB w="3810" cap="flat" cmpd="sng" algn="ctr">
+                      <a:solidFill>
+                        <a:srgbClr val="CBD5E0"/>
+                      </a:solidFill>
+                      <a:prstDash val="solid"/>
+                      <a:round/>
+                      <a:headEnd type="none" w="med" len="med"/>
+                      <a:tailEnd type="none" w="med" len="med"/>
+                    </a:lnB>
+                    <a:solidFill>
+                      <a:srgbClr val="F7FAFC"/>
+                    </a:solidFill>
+                  </a:tcPr>
+                </a:tc>
+                <a:tc>
+                  <a:txBody>
+                    <a:bodyPr/>
+                    <a:lstStyle/>
+                    <a:p>
+                      <a:pPr indent="0" marL="0">
+                        <a:buNone/>
+                      </a:pPr>
+                      <a:r>
+                        <a:rPr lang="en-US" sz="1100" b="1" dirty="0">
+                          <a:solidFill>
+                            <a:srgbClr val="718096"/>
+                          </a:solidFill>
+                          <a:latin typeface="Pretendard" pitchFamily="34" charset="0"/>
+                          <a:ea typeface="Pretendard" pitchFamily="34" charset="-122"/>
+                          <a:cs typeface="Pretendard" pitchFamily="34" charset="-120"/>
+                        </a:rPr>
+                        <a:t>권장 </a:t>
+                      </a:r>
+                      <a:pPr indent="0" marL="0">
+                        <a:buNone/>
+                      </a:pPr>
+                      <a:r>
+                        <a:rPr lang="en-US" sz="1100" b="1" dirty="0">
+                          <a:solidFill>
+                            <a:srgbClr val="718096"/>
+                          </a:solidFill>
+                          <a:latin typeface="Pretendard" pitchFamily="34" charset="0"/>
+                          <a:ea typeface="Pretendard" pitchFamily="34" charset="-122"/>
+                          <a:cs typeface="Pretendard" pitchFamily="34" charset="-120"/>
+                        </a:rPr>
+                        <a:t>용도</a:t>
+                      </a:r>
+                      <a:endParaRPr lang="en-US" sz="1100" dirty="0">
+                        <a:latin typeface="Pretendard" charset="0"/>
+                        <a:ea typeface="Pretendard" charset="0"/>
+                        <a:cs typeface="Pretendard" charset="0"/>
+                      </a:endParaRPr>
+                    </a:p>
+                  </a:txBody>
+                  <a:tcPr marL="50800" marR="50800" marT="25400" marB="25400" anchor="ctr">
+                    <a:lnL w="3810" cap="flat" cmpd="sng" algn="ctr">
+                      <a:solidFill>
+                        <a:srgbClr val="CBD5E0"/>
+                      </a:solidFill>
+                      <a:prstDash val="solid"/>
+                      <a:round/>
+                      <a:headEnd type="none" w="med" len="med"/>
+                      <a:tailEnd type="none" w="med" len="med"/>
+                    </a:lnL>
+                    <a:lnR w="3810" cap="flat" cmpd="sng" algn="ctr">
+                      <a:solidFill>
+                        <a:srgbClr val="CBD5E0"/>
+                      </a:solidFill>
+                      <a:prstDash val="solid"/>
+                      <a:round/>
+                      <a:headEnd type="none" w="med" len="med"/>
+                      <a:tailEnd type="none" w="med" len="med"/>
+                    </a:lnR>
+                    <a:lnT w="3810" cap="flat" cmpd="sng" algn="ctr">
+                      <a:solidFill>
+                        <a:srgbClr val="CBD5E0"/>
+                      </a:solidFill>
+                      <a:prstDash val="solid"/>
+                      <a:round/>
+                      <a:headEnd type="none" w="med" len="med"/>
+                      <a:tailEnd type="none" w="med" len="med"/>
+                    </a:lnT>
+                    <a:lnB w="3810" cap="flat" cmpd="sng" algn="ctr">
+                      <a:solidFill>
+                        <a:srgbClr val="CBD5E0"/>
+                      </a:solidFill>
+                      <a:prstDash val="solid"/>
+                      <a:round/>
+                      <a:headEnd type="none" w="med" len="med"/>
+                      <a:tailEnd type="none" w="med" len="med"/>
+                    </a:lnB>
+                    <a:solidFill>
+                      <a:srgbClr val="F7FAFC"/>
+                    </a:solidFill>
+                  </a:tcPr>
+                </a:tc>
+                <a:tc>
+                  <a:txBody>
+                    <a:bodyPr/>
+                    <a:lstStyle/>
+                    <a:p>
+                      <a:pPr indent="0" marL="0">
+                        <a:buNone/>
+                      </a:pPr>
+                      <a:r>
+                        <a:rPr lang="en-US" sz="1100" b="1" dirty="0">
+                          <a:solidFill>
+                            <a:srgbClr val="718096"/>
+                          </a:solidFill>
+                          <a:latin typeface="Pretendard" pitchFamily="34" charset="0"/>
+                          <a:ea typeface="Pretendard" pitchFamily="34" charset="-122"/>
+                          <a:cs typeface="Pretendard" pitchFamily="34" charset="-120"/>
+                        </a:rPr>
+                        <a:t>전용 </a:t>
+                      </a:r>
+                      <a:pPr indent="0" marL="0">
+                        <a:buNone/>
+                      </a:pPr>
+                      <a:r>
+                        <a:rPr lang="en-US" sz="1100" b="1" dirty="0">
+                          <a:solidFill>
+                            <a:srgbClr val="718096"/>
+                          </a:solidFill>
+                          <a:latin typeface="Pretendard" pitchFamily="34" charset="0"/>
+                          <a:ea typeface="Pretendard" pitchFamily="34" charset="-122"/>
+                          <a:cs typeface="Pretendard" pitchFamily="34" charset="-120"/>
+                        </a:rPr>
+                        <a:t>면적</a:t>
+                      </a:r>
+                      <a:endParaRPr lang="en-US" sz="1100" dirty="0">
+                        <a:latin typeface="Pretendard" charset="0"/>
+                        <a:ea typeface="Pretendard" charset="0"/>
+                        <a:cs typeface="Pretendard" charset="0"/>
+                      </a:endParaRPr>
+                    </a:p>
+                  </a:txBody>
+                  <a:tcPr marL="50800" marR="50800" marT="25400" marB="25400" anchor="ctr">
+                    <a:lnL w="3810" cap="flat" cmpd="sng" algn="ctr">
+                      <a:solidFill>
+                        <a:srgbClr val="CBD5E0"/>
+                      </a:solidFill>
+                      <a:prstDash val="solid"/>
+                      <a:round/>
+                      <a:headEnd type="none" w="med" len="med"/>
+                      <a:tailEnd type="none" w="med" len="med"/>
+                    </a:lnL>
+                    <a:lnR w="3810" cap="flat" cmpd="sng" algn="ctr">
+                      <a:solidFill>
+                        <a:srgbClr val="CBD5E0"/>
+                      </a:solidFill>
+                      <a:prstDash val="solid"/>
+                      <a:round/>
+                      <a:headEnd type="none" w="med" len="med"/>
+                      <a:tailEnd type="none" w="med" len="med"/>
+                    </a:lnR>
+                    <a:lnT w="3810" cap="flat" cmpd="sng" algn="ctr">
+                      <a:solidFill>
+                        <a:srgbClr val="CBD5E0"/>
+                      </a:solidFill>
+                      <a:prstDash val="solid"/>
+                      <a:round/>
+                      <a:headEnd type="none" w="med" len="med"/>
+                      <a:tailEnd type="none" w="med" len="med"/>
+                    </a:lnT>
+                    <a:lnB w="3810" cap="flat" cmpd="sng" algn="ctr">
+                      <a:solidFill>
+                        <a:srgbClr val="CBD5E0"/>
+                      </a:solidFill>
+                      <a:prstDash val="solid"/>
+                      <a:round/>
+                      <a:headEnd type="none" w="med" len="med"/>
+                      <a:tailEnd type="none" w="med" len="med"/>
+                    </a:lnB>
+                    <a:solidFill>
+                      <a:srgbClr val="F7FAFC"/>
+                    </a:solidFill>
+                  </a:tcPr>
+                </a:tc>
+                <a:tc>
+                  <a:txBody>
+                    <a:bodyPr/>
+                    <a:lstStyle/>
+                    <a:p>
+                      <a:pPr indent="0" marL="0">
+                        <a:buNone/>
+                      </a:pPr>
+                      <a:r>
+                        <a:rPr lang="en-US" sz="1100" b="1" dirty="0">
+                          <a:solidFill>
+                            <a:srgbClr val="718096"/>
+                          </a:solidFill>
+                          <a:latin typeface="Pretendard" pitchFamily="34" charset="0"/>
+                          <a:ea typeface="Pretendard" pitchFamily="34" charset="-122"/>
+                          <a:cs typeface="Pretendard" pitchFamily="34" charset="-120"/>
+                        </a:rPr>
+                        <a:t>타깃 </a:t>
+                      </a:r>
+                      <a:pPr indent="0" marL="0">
+                        <a:buNone/>
+                      </a:pPr>
+                      <a:r>
+                        <a:rPr lang="en-US" sz="1100" b="1" dirty="0">
+                          <a:solidFill>
+                            <a:srgbClr val="718096"/>
+                          </a:solidFill>
+                          <a:latin typeface="Pretendard" pitchFamily="34" charset="0"/>
+                          <a:ea typeface="Pretendard" pitchFamily="34" charset="-122"/>
+                          <a:cs typeface="Pretendard" pitchFamily="34" charset="-120"/>
+                        </a:rPr>
+                        <a:t>임차</a:t>
+                      </a:r>
+                      <a:endParaRPr lang="en-US" sz="1100" dirty="0">
+                        <a:latin typeface="Pretendard" charset="0"/>
+                        <a:ea typeface="Pretendard" charset="0"/>
+                        <a:cs typeface="Pretendard" charset="0"/>
+                      </a:endParaRPr>
+                    </a:p>
+                  </a:txBody>
+                  <a:tcPr marL="50800" marR="50800" marT="25400" marB="25400" anchor="ctr">
+                    <a:lnL w="3810" cap="flat" cmpd="sng" algn="ctr">
+                      <a:solidFill>
+                        <a:srgbClr val="CBD5E0"/>
+                      </a:solidFill>
+                      <a:prstDash val="solid"/>
+                      <a:round/>
+                      <a:headEnd type="none" w="med" len="med"/>
+                      <a:tailEnd type="none" w="med" len="med"/>
+                    </a:lnL>
+                    <a:lnR w="3810" cap="flat" cmpd="sng" algn="ctr">
+                      <a:solidFill>
+                        <a:srgbClr val="CBD5E0"/>
+                      </a:solidFill>
+                      <a:prstDash val="solid"/>
+                      <a:round/>
+                      <a:headEnd type="none" w="med" len="med"/>
+                      <a:tailEnd type="none" w="med" len="med"/>
+                    </a:lnR>
+                    <a:lnT w="3810" cap="flat" cmpd="sng" algn="ctr">
+                      <a:solidFill>
+                        <a:srgbClr val="CBD5E0"/>
+                      </a:solidFill>
+                      <a:prstDash val="solid"/>
+                      <a:round/>
+                      <a:headEnd type="none" w="med" len="med"/>
+                      <a:tailEnd type="none" w="med" len="med"/>
+                    </a:lnT>
+                    <a:lnB w="3810" cap="flat" cmpd="sng" algn="ctr">
+                      <a:solidFill>
+                        <a:srgbClr val="CBD5E0"/>
+                      </a:solidFill>
+                      <a:prstDash val="solid"/>
+                      <a:round/>
+                      <a:headEnd type="none" w="med" len="med"/>
+                      <a:tailEnd type="none" w="med" len="med"/>
+                    </a:lnB>
+                    <a:solidFill>
+                      <a:srgbClr val="F7FAFC"/>
+                    </a:solidFill>
+                  </a:tcPr>
+                </a:tc>
+              </a:tr>
+              <a:tr h="475488">
+                <a:tc>
+                  <a:txBody>
+                    <a:bodyPr/>
+                    <a:lstStyle/>
+                    <a:p>
+                      <a:pPr indent="0" marL="0">
+                        <a:buNone/>
+                      </a:pPr>
+                      <a:r>
+                        <a:rPr lang="en-US" sz="1100" b="1" dirty="0">
+                          <a:solidFill>
+                            <a:srgbClr val="10161F"/>
+                          </a:solidFill>
+                          <a:latin typeface="Pretendard" pitchFamily="34" charset="0"/>
+                          <a:ea typeface="Pretendard" pitchFamily="34" charset="-122"/>
+                          <a:cs typeface="Pretendard" pitchFamily="34" charset="-120"/>
+                        </a:rPr>
+                        <a:t>-</a:t>
+                      </a:r>
+                      <a:endParaRPr lang="en-US" sz="1100" dirty="0">
+                        <a:latin typeface="Pretendard" charset="0"/>
+                        <a:ea typeface="Pretendard" charset="0"/>
+                        <a:cs typeface="Pretendard" charset="0"/>
+                      </a:endParaRPr>
+                    </a:p>
+                  </a:txBody>
+                  <a:tcPr marL="50800" marR="50800" marT="25400" marB="25400" anchor="ctr">
+                    <a:lnL w="3810" cap="flat" cmpd="sng" algn="ctr">
+                      <a:solidFill>
+                        <a:srgbClr val="CBD5E0"/>
+                      </a:solidFill>
+                      <a:prstDash val="solid"/>
+                      <a:round/>
+                      <a:headEnd type="none" w="med" len="med"/>
+                      <a:tailEnd type="none" w="med" len="med"/>
+                    </a:lnL>
+                    <a:lnR w="3810" cap="flat" cmpd="sng" algn="ctr">
+                      <a:solidFill>
+                        <a:srgbClr val="CBD5E0"/>
+                      </a:solidFill>
+                      <a:prstDash val="solid"/>
+                      <a:round/>
+                      <a:headEnd type="none" w="med" len="med"/>
+                      <a:tailEnd type="none" w="med" len="med"/>
+                    </a:lnR>
+                    <a:lnT w="3810" cap="flat" cmpd="sng" algn="ctr">
+                      <a:solidFill>
+                        <a:srgbClr val="CBD5E0"/>
+                      </a:solidFill>
+                      <a:prstDash val="solid"/>
+                      <a:round/>
+                      <a:headEnd type="none" w="med" len="med"/>
+                      <a:tailEnd type="none" w="med" len="med"/>
+                    </a:lnT>
+                    <a:lnB w="3810" cap="flat" cmpd="sng" algn="ctr">
+                      <a:solidFill>
+                        <a:srgbClr val="CBD5E0"/>
+                      </a:solidFill>
+                      <a:prstDash val="solid"/>
+                      <a:round/>
+                      <a:headEnd type="none" w="med" len="med"/>
+                      <a:tailEnd type="none" w="med" len="med"/>
+                    </a:lnB>
+                    <a:solidFill>
+                      <a:srgbClr val="FFFFFF"/>
+                    </a:solidFill>
+                  </a:tcPr>
+                </a:tc>
+                <a:tc>
+                  <a:txBody>
+                    <a:bodyPr/>
+                    <a:lstStyle/>
+                    <a:p>
+                      <a:pPr indent="0" marL="0">
+                        <a:buNone/>
+                      </a:pPr>
+                      <a:r>
+                        <a:rPr lang="en-US" sz="1100" dirty="0">
+                          <a:solidFill>
+                            <a:srgbClr val="10161F"/>
+                          </a:solidFill>
+                          <a:latin typeface="Pretendard" pitchFamily="34" charset="0"/>
+                          <a:ea typeface="Pretendard" pitchFamily="34" charset="-122"/>
+                          <a:cs typeface="Pretendard" pitchFamily="34" charset="-120"/>
+                        </a:rPr>
+                        <a:t>스태킹 </a:t>
+                      </a:r>
+                      <a:pPr indent="0" marL="0">
+                        <a:buNone/>
+                      </a:pPr>
+                      <a:r>
+                        <a:rPr lang="en-US" sz="1100" dirty="0">
+                          <a:solidFill>
+                            <a:srgbClr val="10161F"/>
+                          </a:solidFill>
+                          <a:latin typeface="Pretendard" pitchFamily="34" charset="0"/>
+                          <a:ea typeface="Pretendard" pitchFamily="34" charset="-122"/>
+                          <a:cs typeface="Pretendard" pitchFamily="34" charset="-120"/>
+                        </a:rPr>
+                        <a:t>플랜 </a:t>
+                      </a:r>
+                      <a:pPr indent="0" marL="0">
+                        <a:buNone/>
+                      </a:pPr>
+                      <a:r>
+                        <a:rPr lang="en-US" sz="1100" dirty="0">
+                          <a:solidFill>
+                            <a:srgbClr val="10161F"/>
+                          </a:solidFill>
+                          <a:latin typeface="Pretendard" pitchFamily="34" charset="0"/>
+                          <a:ea typeface="Pretendard" pitchFamily="34" charset="-122"/>
+                          <a:cs typeface="Pretendard" pitchFamily="34" charset="-120"/>
+                        </a:rPr>
+                        <a:t>데이터 </a:t>
+                      </a:r>
+                      <a:pPr indent="0" marL="0">
+                        <a:buNone/>
+                      </a:pPr>
+                      <a:r>
+                        <a:rPr lang="en-US" sz="1100" dirty="0">
+                          <a:solidFill>
+                            <a:srgbClr val="10161F"/>
+                          </a:solidFill>
+                          <a:latin typeface="Pretendard" pitchFamily="34" charset="0"/>
+                          <a:ea typeface="Pretendard" pitchFamily="34" charset="-122"/>
+                          <a:cs typeface="Pretendard" pitchFamily="34" charset="-120"/>
+                        </a:rPr>
+                        <a:t>필요</a:t>
+                      </a:r>
+                      <a:endParaRPr lang="en-US" sz="1100" dirty="0">
+                        <a:latin typeface="Pretendard" charset="0"/>
+                        <a:ea typeface="Pretendard" charset="0"/>
+                        <a:cs typeface="Pretendard" charset="0"/>
+                      </a:endParaRPr>
+                    </a:p>
+                  </a:txBody>
+                  <a:tcPr marL="50800" marR="50800" marT="25400" marB="25400" anchor="ctr">
+                    <a:lnL w="3810" cap="flat" cmpd="sng" algn="ctr">
+                      <a:solidFill>
+                        <a:srgbClr val="CBD5E0"/>
+                      </a:solidFill>
+                      <a:prstDash val="solid"/>
+                      <a:round/>
+                      <a:headEnd type="none" w="med" len="med"/>
+                      <a:tailEnd type="none" w="med" len="med"/>
+                    </a:lnL>
+                    <a:lnR w="3810" cap="flat" cmpd="sng" algn="ctr">
+                      <a:solidFill>
+                        <a:srgbClr val="CBD5E0"/>
+                      </a:solidFill>
+                      <a:prstDash val="solid"/>
+                      <a:round/>
+                      <a:headEnd type="none" w="med" len="med"/>
+                      <a:tailEnd type="none" w="med" len="med"/>
+                    </a:lnR>
+                    <a:lnT w="3810" cap="flat" cmpd="sng" algn="ctr">
+                      <a:solidFill>
+                        <a:srgbClr val="CBD5E0"/>
+                      </a:solidFill>
+                      <a:prstDash val="solid"/>
+                      <a:round/>
+                      <a:headEnd type="none" w="med" len="med"/>
+                      <a:tailEnd type="none" w="med" len="med"/>
+                    </a:lnT>
+                    <a:lnB w="3810" cap="flat" cmpd="sng" algn="ctr">
+                      <a:solidFill>
+                        <a:srgbClr val="CBD5E0"/>
+                      </a:solidFill>
+                      <a:prstDash val="solid"/>
+                      <a:round/>
+                      <a:headEnd type="none" w="med" len="med"/>
+                      <a:tailEnd type="none" w="med" len="med"/>
+                    </a:lnB>
+                    <a:solidFill>
+                      <a:srgbClr val="FFFFFF"/>
+                    </a:solidFill>
+                  </a:tcPr>
+                </a:tc>
+                <a:tc>
+                  <a:txBody>
+                    <a:bodyPr/>
+                    <a:lstStyle/>
+                    <a:p>
+                      <a:pPr indent="0" marL="0">
+                        <a:buNone/>
+                      </a:pPr>
+                      <a:r>
+                        <a:rPr lang="en-US" sz="1100" dirty="0">
+                          <a:solidFill>
+                            <a:srgbClr val="10161F"/>
+                          </a:solidFill>
+                          <a:latin typeface="Pretendard" pitchFamily="34" charset="0"/>
+                          <a:ea typeface="Pretendard" pitchFamily="34" charset="-122"/>
+                          <a:cs typeface="Pretendard" pitchFamily="34" charset="-120"/>
+                        </a:rPr>
+                        <a:t>-</a:t>
+                      </a:r>
+                      <a:endParaRPr lang="en-US" sz="1100" dirty="0">
+                        <a:latin typeface="Pretendard" charset="0"/>
+                        <a:ea typeface="Pretendard" charset="0"/>
+                        <a:cs typeface="Pretendard" charset="0"/>
+                      </a:endParaRPr>
+                    </a:p>
+                  </a:txBody>
+                  <a:tcPr marL="50800" marR="50800" marT="25400" marB="25400" anchor="ctr">
+                    <a:lnL w="3810" cap="flat" cmpd="sng" algn="ctr">
+                      <a:solidFill>
+                        <a:srgbClr val="CBD5E0"/>
+                      </a:solidFill>
+                      <a:prstDash val="solid"/>
+                      <a:round/>
+                      <a:headEnd type="none" w="med" len="med"/>
+                      <a:tailEnd type="none" w="med" len="med"/>
+                    </a:lnL>
+                    <a:lnR w="3810" cap="flat" cmpd="sng" algn="ctr">
+                      <a:solidFill>
+                        <a:srgbClr val="CBD5E0"/>
+                      </a:solidFill>
+                      <a:prstDash val="solid"/>
+                      <a:round/>
+                      <a:headEnd type="none" w="med" len="med"/>
+                      <a:tailEnd type="none" w="med" len="med"/>
+                    </a:lnR>
+                    <a:lnT w="3810" cap="flat" cmpd="sng" algn="ctr">
+                      <a:solidFill>
+                        <a:srgbClr val="CBD5E0"/>
+                      </a:solidFill>
+                      <a:prstDash val="solid"/>
+                      <a:round/>
+                      <a:headEnd type="none" w="med" len="med"/>
+                      <a:tailEnd type="none" w="med" len="med"/>
+                    </a:lnT>
+                    <a:lnB w="3810" cap="flat" cmpd="sng" algn="ctr">
+                      <a:solidFill>
+                        <a:srgbClr val="CBD5E0"/>
+                      </a:solidFill>
+                      <a:prstDash val="solid"/>
+                      <a:round/>
+                      <a:headEnd type="none" w="med" len="med"/>
+                      <a:tailEnd type="none" w="med" len="med"/>
+                    </a:lnB>
+                    <a:solidFill>
+                      <a:srgbClr val="FFFFFF"/>
+                    </a:solidFill>
+                  </a:tcPr>
+                </a:tc>
+                <a:tc>
+                  <a:txBody>
+                    <a:bodyPr/>
+                    <a:lstStyle/>
+                    <a:p>
+                      <a:pPr indent="0" marL="0">
+                        <a:buNone/>
+                      </a:pPr>
+                      <a:r>
+                        <a:rPr lang="en-US" sz="1100" dirty="0">
+                          <a:solidFill>
+                            <a:srgbClr val="10161F"/>
+                          </a:solidFill>
+                          <a:latin typeface="Pretendard" pitchFamily="34" charset="0"/>
+                          <a:ea typeface="Pretendard" pitchFamily="34" charset="-122"/>
+                          <a:cs typeface="Pretendard" pitchFamily="34" charset="-120"/>
+                        </a:rPr>
+                        <a:t>-</a:t>
+                      </a:r>
+                      <a:endParaRPr lang="en-US" sz="1100" dirty="0">
+                        <a:latin typeface="Pretendard" charset="0"/>
+                        <a:ea typeface="Pretendard" charset="0"/>
+                        <a:cs typeface="Pretendard" charset="0"/>
+                      </a:endParaRPr>
+                    </a:p>
+                  </a:txBody>
+                  <a:tcPr marL="50800" marR="50800" marT="25400" marB="25400" anchor="ctr">
+                    <a:lnL w="3810" cap="flat" cmpd="sng" algn="ctr">
+                      <a:solidFill>
+                        <a:srgbClr val="CBD5E0"/>
+                      </a:solidFill>
+                      <a:prstDash val="solid"/>
+                      <a:round/>
+                      <a:headEnd type="none" w="med" len="med"/>
+                      <a:tailEnd type="none" w="med" len="med"/>
+                    </a:lnL>
+                    <a:lnR w="3810" cap="flat" cmpd="sng" algn="ctr">
+                      <a:solidFill>
+                        <a:srgbClr val="CBD5E0"/>
+                      </a:solidFill>
+                      <a:prstDash val="solid"/>
+                      <a:round/>
+                      <a:headEnd type="none" w="med" len="med"/>
+                      <a:tailEnd type="none" w="med" len="med"/>
+                    </a:lnR>
+                    <a:lnT w="3810" cap="flat" cmpd="sng" algn="ctr">
+                      <a:solidFill>
+                        <a:srgbClr val="CBD5E0"/>
+                      </a:solidFill>
+                      <a:prstDash val="solid"/>
+                      <a:round/>
+                      <a:headEnd type="none" w="med" len="med"/>
+                      <a:tailEnd type="none" w="med" len="med"/>
+                    </a:lnT>
+                    <a:lnB w="3810" cap="flat" cmpd="sng" algn="ctr">
+                      <a:solidFill>
+                        <a:srgbClr val="CBD5E0"/>
+                      </a:solidFill>
+                      <a:prstDash val="solid"/>
+                      <a:round/>
+                      <a:headEnd type="none" w="med" len="med"/>
+                      <a:tailEnd type="none" w="med" len="med"/>
+                    </a:lnB>
+                    <a:solidFill>
+                      <a:srgbClr val="FFFFFF"/>
+                    </a:solidFill>
+                  </a:tcPr>
+                </a:tc>
+              </a:tr>
+            </a:tbl>
+          </a:graphicData>
+        </a:graphic>
+      </p:graphicFrame>
+      <p:sp>
+        <p:nvSpPr>
+          <p:cNvPr id="9" name="Shape 6"/>
+          <p:cNvSpPr/>
+          <p:nvPr/>
+        </p:nvSpPr>
+        <p:spPr>
+          <a:xfrm>
+            <a:off x="6233008" y="1417320"/>
+            <a:ext cx="5391760" cy="4389120"/>
+          </a:xfrm>
+          <a:prstGeom prst="roundRect">
+            <a:avLst>
+              <a:gd name="adj" fmla="val 1250"/>
+            </a:avLst>
+          </a:prstGeom>
+          <a:solidFill>
+            <a:srgbClr val="F7FAFC"/>
+          </a:solidFill>
+          <a:ln w="6350">
+            <a:solidFill>
+              <a:srgbClr val="CBD5E0"/>
+            </a:solidFill>
+            <a:prstDash val="solid"/>
+          </a:ln>
+        </p:spPr>
+      </p:sp>
+      <p:sp>
+        <p:nvSpPr>
+          <p:cNvPr id="10" name="Text 7"/>
+          <p:cNvSpPr/>
+          <p:nvPr/>
+        </p:nvSpPr>
+        <p:spPr>
+          <a:xfrm>
+            <a:off x="6461608" y="1618488"/>
+            <a:ext cx="4934560" cy="320040"/>
+          </a:xfrm>
+          <a:prstGeom prst="rect">
+            <a:avLst/>
+          </a:prstGeom>
+          <a:noFill/>
+          <a:ln/>
+        </p:spPr>
+        <p:txBody>
+          <a:bodyPr wrap="square" lIns="0" tIns="0" rIns="0" bIns="0" rtlCol="0" anchor="ctr"/>
+          <a:lstStyle/>
+          <a:p>
+            <a:pPr indent="0" marL="0">
+              <a:buNone/>
+            </a:pPr>
+            <a:r>
+              <a:rPr lang="en-US" sz="1350" b="1" dirty="0">
+                <a:solidFill>
+                  <a:srgbClr val="977024"/>
+                </a:solidFill>
+                <a:latin typeface="Pretendard" pitchFamily="34" charset="0"/>
+                <a:ea typeface="Pretendard" pitchFamily="34" charset="-122"/>
+                <a:cs typeface="Pretendard" pitchFamily="34" charset="-120"/>
+              </a:rPr>
+              <a:t>2. 신축 개요 및 규제 기한</a:t>
+            </a:r>
+            <a:endParaRPr lang="en-US" sz="1350" dirty="0"/>
+          </a:p>
+        </p:txBody>
+      </p:sp>
+      <p:sp>
+        <p:nvSpPr>
+          <p:cNvPr id="11" name="Text 8"/>
+          <p:cNvSpPr/>
+          <p:nvPr/>
+        </p:nvSpPr>
+        <p:spPr>
+          <a:xfrm>
+            <a:off x="6461608" y="2011680"/>
+            <a:ext cx="1875133" cy="438912"/>
+          </a:xfrm>
+          <a:prstGeom prst="rect">
+            <a:avLst/>
+          </a:prstGeom>
+          <a:noFill/>
+          <a:ln/>
+        </p:spPr>
+        <p:txBody>
+          <a:bodyPr wrap="square" lIns="0" tIns="0" rIns="0" bIns="0" rtlCol="0" anchor="ctr"/>
+          <a:lstStyle/>
+          <a:p>
+            <a:pPr indent="0" marL="0">
+              <a:lnSpc>
+                <a:spcPct val="120000"/>
+              </a:lnSpc>
+              <a:buNone/>
+            </a:pPr>
+            <a:r>
+              <a:rPr lang="en-US" sz="1100" dirty="0">
+                <a:solidFill>
+                  <a:srgbClr val="718096"/>
+                </a:solidFill>
+                <a:latin typeface="Pretendard" pitchFamily="34" charset="0"/>
+                <a:ea typeface="Pretendard" pitchFamily="34" charset="-122"/>
+                <a:cs typeface="Pretendard" pitchFamily="34" charset="-120"/>
+              </a:rPr>
+              <a:t>토지 대지면적</a:t>
+            </a:r>
+            <a:endParaRPr lang="en-US" sz="1100" dirty="0"/>
+          </a:p>
+        </p:txBody>
+      </p:sp>
+      <p:sp>
+        <p:nvSpPr>
+          <p:cNvPr id="12" name="Text 9"/>
+          <p:cNvSpPr/>
+          <p:nvPr/>
+        </p:nvSpPr>
+        <p:spPr>
+          <a:xfrm>
+            <a:off x="8336740" y="2011680"/>
+            <a:ext cx="3059427" cy="438912"/>
+          </a:xfrm>
+          <a:prstGeom prst="rect">
+            <a:avLst/>
+          </a:prstGeom>
+          <a:noFill/>
+          <a:ln/>
+        </p:spPr>
+        <p:txBody>
+          <a:bodyPr wrap="square" lIns="0" tIns="0" rIns="0" bIns="0" rtlCol="0" anchor="ctr"/>
+          <a:lstStyle/>
+          <a:p>
+            <a:pPr indent="0" marL="0">
+              <a:lnSpc>
+                <a:spcPct val="120000"/>
+              </a:lnSpc>
+              <a:buNone/>
+            </a:pPr>
+            <a:r>
+              <a:rPr lang="en-US" sz="1100" b="1" dirty="0">
+                <a:solidFill>
+                  <a:srgbClr val="10161F"/>
+                </a:solidFill>
+                <a:latin typeface="Pretendard" pitchFamily="34" charset="0"/>
+                <a:ea typeface="Pretendard" pitchFamily="34" charset="-122"/>
+                <a:cs typeface="Pretendard" pitchFamily="34" charset="-120"/>
+              </a:rPr>
+              <a:t>-</a:t>
+            </a:r>
+            <a:endParaRPr lang="en-US" sz="1100" dirty="0"/>
+          </a:p>
+        </p:txBody>
+      </p:sp>
+      <p:sp>
+        <p:nvSpPr>
+          <p:cNvPr id="13" name="Shape 10"/>
+          <p:cNvSpPr/>
+          <p:nvPr/>
+        </p:nvSpPr>
+        <p:spPr>
+          <a:xfrm>
+            <a:off x="6461608" y="2450592"/>
+            <a:ext cx="4934560" cy="0"/>
+          </a:xfrm>
+          <a:prstGeom prst="line">
+            <a:avLst/>
+          </a:prstGeom>
+          <a:noFill/>
+          <a:ln w="3810">
+            <a:solidFill>
+              <a:srgbClr val="CBD5E0"/>
+            </a:solidFill>
+            <a:prstDash val="solid"/>
+          </a:ln>
+        </p:spPr>
+      </p:sp>
+      <p:sp>
+        <p:nvSpPr>
+          <p:cNvPr id="14" name="Text 11"/>
+          <p:cNvSpPr/>
+          <p:nvPr/>
+        </p:nvSpPr>
+        <p:spPr>
+          <a:xfrm>
+            <a:off x="6461608" y="2450592"/>
+            <a:ext cx="1875133" cy="438912"/>
+          </a:xfrm>
+          <a:prstGeom prst="rect">
+            <a:avLst/>
+          </a:prstGeom>
+          <a:noFill/>
+          <a:ln/>
+        </p:spPr>
+        <p:txBody>
+          <a:bodyPr wrap="square" lIns="0" tIns="0" rIns="0" bIns="0" rtlCol="0" anchor="ctr"/>
+          <a:lstStyle/>
+          <a:p>
+            <a:pPr indent="0" marL="0">
+              <a:lnSpc>
+                <a:spcPct val="120000"/>
+              </a:lnSpc>
+              <a:buNone/>
+            </a:pPr>
+            <a:r>
+              <a:rPr lang="en-US" sz="1100" dirty="0">
+                <a:solidFill>
+                  <a:srgbClr val="718096"/>
+                </a:solidFill>
+                <a:latin typeface="Pretendard" pitchFamily="34" charset="0"/>
+                <a:ea typeface="Pretendard" pitchFamily="34" charset="-122"/>
+                <a:cs typeface="Pretendard" pitchFamily="34" charset="-120"/>
+              </a:rPr>
+              <a:t>예상 신축 연면적</a:t>
+            </a:r>
+            <a:endParaRPr lang="en-US" sz="1100" dirty="0"/>
+          </a:p>
+        </p:txBody>
+      </p:sp>
+      <p:sp>
+        <p:nvSpPr>
+          <p:cNvPr id="15" name="Text 12"/>
+          <p:cNvSpPr/>
+          <p:nvPr/>
+        </p:nvSpPr>
+        <p:spPr>
+          <a:xfrm>
+            <a:off x="8336740" y="2450592"/>
+            <a:ext cx="3059427" cy="438912"/>
+          </a:xfrm>
+          <a:prstGeom prst="rect">
+            <a:avLst/>
+          </a:prstGeom>
+          <a:noFill/>
+          <a:ln/>
+        </p:spPr>
+        <p:txBody>
+          <a:bodyPr wrap="square" lIns="0" tIns="0" rIns="0" bIns="0" rtlCol="0" anchor="ctr"/>
+          <a:lstStyle/>
+          <a:p>
+            <a:pPr indent="0" marL="0">
+              <a:lnSpc>
+                <a:spcPct val="120000"/>
+              </a:lnSpc>
+              <a:buNone/>
+            </a:pPr>
+            <a:r>
+              <a:rPr lang="en-US" sz="1100" b="1" dirty="0">
+                <a:solidFill>
+                  <a:srgbClr val="10161F"/>
+                </a:solidFill>
+                <a:latin typeface="Pretendard" pitchFamily="34" charset="0"/>
+                <a:ea typeface="Pretendard" pitchFamily="34" charset="-122"/>
+                <a:cs typeface="Pretendard" pitchFamily="34" charset="-120"/>
+              </a:rPr>
+              <a:t>-</a:t>
+            </a:r>
+            <a:endParaRPr lang="en-US" sz="1100" dirty="0"/>
+          </a:p>
+        </p:txBody>
+      </p:sp>
+      <p:sp>
+        <p:nvSpPr>
+          <p:cNvPr id="16" name="Shape 13"/>
+          <p:cNvSpPr/>
+          <p:nvPr/>
+        </p:nvSpPr>
+        <p:spPr>
+          <a:xfrm>
+            <a:off x="6461608" y="2889504"/>
+            <a:ext cx="4934560" cy="0"/>
+          </a:xfrm>
+          <a:prstGeom prst="line">
+            <a:avLst/>
+          </a:prstGeom>
+          <a:noFill/>
+          <a:ln w="3810">
+            <a:solidFill>
+              <a:srgbClr val="CBD5E0"/>
+            </a:solidFill>
+            <a:prstDash val="solid"/>
+          </a:ln>
+        </p:spPr>
+      </p:sp>
+      <p:sp>
+        <p:nvSpPr>
+          <p:cNvPr id="17" name="Text 14"/>
+          <p:cNvSpPr/>
+          <p:nvPr/>
+        </p:nvSpPr>
+        <p:spPr>
+          <a:xfrm>
+            <a:off x="6461608" y="2889504"/>
+            <a:ext cx="1875133" cy="438912"/>
+          </a:xfrm>
+          <a:prstGeom prst="rect">
+            <a:avLst/>
+          </a:prstGeom>
+          <a:noFill/>
+          <a:ln/>
+        </p:spPr>
+        <p:txBody>
+          <a:bodyPr wrap="square" lIns="0" tIns="0" rIns="0" bIns="0" rtlCol="0" anchor="ctr"/>
+          <a:lstStyle/>
+          <a:p>
+            <a:pPr indent="0" marL="0">
+              <a:lnSpc>
+                <a:spcPct val="120000"/>
+              </a:lnSpc>
+              <a:buNone/>
+            </a:pPr>
+            <a:r>
+              <a:rPr lang="en-US" sz="1100" dirty="0">
+                <a:solidFill>
+                  <a:srgbClr val="718096"/>
+                </a:solidFill>
+                <a:latin typeface="Pretendard" pitchFamily="34" charset="0"/>
+                <a:ea typeface="Pretendard" pitchFamily="34" charset="-122"/>
+                <a:cs typeface="Pretendard" pitchFamily="34" charset="-120"/>
+              </a:rPr>
+              <a:t>적용 건폐율 / 용적률</a:t>
+            </a:r>
+            <a:endParaRPr lang="en-US" sz="1100" dirty="0"/>
+          </a:p>
+        </p:txBody>
+      </p:sp>
+      <p:sp>
+        <p:nvSpPr>
+          <p:cNvPr id="18" name="Text 15"/>
+          <p:cNvSpPr/>
+          <p:nvPr/>
+        </p:nvSpPr>
+        <p:spPr>
+          <a:xfrm>
+            <a:off x="8336740" y="2889504"/>
+            <a:ext cx="3059427" cy="438912"/>
+          </a:xfrm>
+          <a:prstGeom prst="rect">
+            <a:avLst/>
+          </a:prstGeom>
+          <a:noFill/>
+          <a:ln/>
+        </p:spPr>
+        <p:txBody>
+          <a:bodyPr wrap="square" lIns="0" tIns="0" rIns="0" bIns="0" rtlCol="0" anchor="ctr"/>
+          <a:lstStyle/>
+          <a:p>
+            <a:pPr indent="0" marL="0">
+              <a:lnSpc>
+                <a:spcPct val="120000"/>
+              </a:lnSpc>
+              <a:buNone/>
+            </a:pPr>
+            <a:r>
+              <a:rPr lang="en-US" sz="1100" b="1" dirty="0">
+                <a:solidFill>
+                  <a:srgbClr val="10161F"/>
+                </a:solidFill>
+                <a:latin typeface="Pretendard" pitchFamily="34" charset="0"/>
+                <a:ea typeface="Pretendard" pitchFamily="34" charset="-122"/>
+                <a:cs typeface="Pretendard" pitchFamily="34" charset="-120"/>
+              </a:rPr>
+              <a:t>-% / -%</a:t>
+            </a:r>
+            <a:endParaRPr lang="en-US" sz="1100" dirty="0"/>
+          </a:p>
+        </p:txBody>
+      </p:sp>
+      <p:sp>
+        <p:nvSpPr>
+          <p:cNvPr id="19" name="Shape 16"/>
+          <p:cNvSpPr/>
+          <p:nvPr/>
+        </p:nvSpPr>
+        <p:spPr>
+          <a:xfrm>
+            <a:off x="6461608" y="3328416"/>
+            <a:ext cx="4934560" cy="0"/>
+          </a:xfrm>
+          <a:prstGeom prst="line">
+            <a:avLst/>
+          </a:prstGeom>
+          <a:noFill/>
+          <a:ln w="3810">
+            <a:solidFill>
+              <a:srgbClr val="CBD5E0"/>
+            </a:solidFill>
+            <a:prstDash val="solid"/>
+          </a:ln>
+        </p:spPr>
+      </p:sp>
+      <p:sp>
+        <p:nvSpPr>
+          <p:cNvPr id="20" name="Text 17"/>
+          <p:cNvSpPr/>
+          <p:nvPr/>
+        </p:nvSpPr>
+        <p:spPr>
+          <a:xfrm>
+            <a:off x="6461608" y="3328416"/>
+            <a:ext cx="1875133" cy="438912"/>
+          </a:xfrm>
+          <a:prstGeom prst="rect">
+            <a:avLst/>
+          </a:prstGeom>
+          <a:noFill/>
+          <a:ln/>
+        </p:spPr>
+        <p:txBody>
+          <a:bodyPr wrap="square" lIns="0" tIns="0" rIns="0" bIns="0" rtlCol="0" anchor="ctr"/>
+          <a:lstStyle/>
+          <a:p>
+            <a:pPr indent="0" marL="0">
+              <a:lnSpc>
+                <a:spcPct val="120000"/>
+              </a:lnSpc>
+              <a:buNone/>
+            </a:pPr>
+            <a:r>
+              <a:rPr lang="en-US" sz="1100" dirty="0">
+                <a:solidFill>
+                  <a:srgbClr val="718096"/>
+                </a:solidFill>
+                <a:latin typeface="Pretendard" pitchFamily="34" charset="0"/>
+                <a:ea typeface="Pretendard" pitchFamily="34" charset="-122"/>
+                <a:cs typeface="Pretendard" pitchFamily="34" charset="-120"/>
+              </a:rPr>
+              <a:t>예상 총공사비 (1,200만/평)</a:t>
+            </a:r>
+            <a:endParaRPr lang="en-US" sz="1100" dirty="0"/>
+          </a:p>
+        </p:txBody>
+      </p:sp>
+      <p:sp>
+        <p:nvSpPr>
+          <p:cNvPr id="21" name="Text 18"/>
+          <p:cNvSpPr/>
+          <p:nvPr/>
+        </p:nvSpPr>
+        <p:spPr>
+          <a:xfrm>
+            <a:off x="8336740" y="3328416"/>
+            <a:ext cx="3059427" cy="438912"/>
+          </a:xfrm>
+          <a:prstGeom prst="rect">
+            <a:avLst/>
+          </a:prstGeom>
+          <a:noFill/>
+          <a:ln/>
+        </p:spPr>
+        <p:txBody>
+          <a:bodyPr wrap="square" lIns="0" tIns="0" rIns="0" bIns="0" rtlCol="0" anchor="ctr"/>
+          <a:lstStyle/>
+          <a:p>
+            <a:pPr indent="0" marL="0">
+              <a:lnSpc>
+                <a:spcPct val="120000"/>
+              </a:lnSpc>
+              <a:buNone/>
+            </a:pPr>
+            <a:r>
+              <a:rPr lang="en-US" sz="1100" b="1" dirty="0">
+                <a:solidFill>
+                  <a:srgbClr val="10161F"/>
+                </a:solidFill>
+                <a:latin typeface="Pretendard" pitchFamily="34" charset="0"/>
+                <a:ea typeface="Pretendard" pitchFamily="34" charset="-122"/>
+                <a:cs typeface="Pretendard" pitchFamily="34" charset="-120"/>
+              </a:rPr>
+              <a:t>-</a:t>
+            </a:r>
+            <a:endParaRPr lang="en-US" sz="1100" dirty="0"/>
+          </a:p>
+        </p:txBody>
+      </p:sp>
+      <p:sp>
+        <p:nvSpPr>
+          <p:cNvPr id="22" name="Shape 19"/>
+          <p:cNvSpPr/>
+          <p:nvPr/>
+        </p:nvSpPr>
+        <p:spPr>
+          <a:xfrm>
+            <a:off x="6461608" y="3767328"/>
+            <a:ext cx="4934560" cy="0"/>
+          </a:xfrm>
+          <a:prstGeom prst="line">
+            <a:avLst/>
+          </a:prstGeom>
+          <a:noFill/>
+          <a:ln w="3810">
+            <a:solidFill>
+              <a:srgbClr val="CBD5E0"/>
+            </a:solidFill>
+            <a:prstDash val="solid"/>
+          </a:ln>
+        </p:spPr>
+      </p:sp>
+      <p:sp>
+        <p:nvSpPr>
+          <p:cNvPr id="23" name="Text 20"/>
+          <p:cNvSpPr/>
+          <p:nvPr/>
+        </p:nvSpPr>
+        <p:spPr>
+          <a:xfrm>
+            <a:off x="6461608" y="3767328"/>
+            <a:ext cx="1875133" cy="438912"/>
+          </a:xfrm>
+          <a:prstGeom prst="rect">
+            <a:avLst/>
+          </a:prstGeom>
+          <a:noFill/>
+          <a:ln/>
+        </p:spPr>
+        <p:txBody>
+          <a:bodyPr wrap="square" lIns="0" tIns="0" rIns="0" bIns="0" rtlCol="0" anchor="ctr"/>
+          <a:lstStyle/>
+          <a:p>
+            <a:pPr indent="0" marL="0">
+              <a:lnSpc>
+                <a:spcPct val="120000"/>
+              </a:lnSpc>
+              <a:buNone/>
+            </a:pPr>
+            <a:r>
+              <a:rPr lang="en-US" sz="1100" dirty="0">
+                <a:solidFill>
+                  <a:srgbClr val="718096"/>
+                </a:solidFill>
+                <a:latin typeface="Pretendard" pitchFamily="34" charset="0"/>
+                <a:ea typeface="Pretendard" pitchFamily="34" charset="-122"/>
+                <a:cs typeface="Pretendard" pitchFamily="34" charset="-120"/>
+              </a:rPr>
+              <a:t>예상 총사업비 (토지+공사+예비비)</a:t>
+            </a:r>
+            <a:endParaRPr lang="en-US" sz="1100" dirty="0"/>
+          </a:p>
+        </p:txBody>
+      </p:sp>
+      <p:sp>
+        <p:nvSpPr>
+          <p:cNvPr id="24" name="Text 21"/>
+          <p:cNvSpPr/>
+          <p:nvPr/>
+        </p:nvSpPr>
+        <p:spPr>
+          <a:xfrm>
+            <a:off x="8336740" y="3767328"/>
+            <a:ext cx="3059427" cy="438912"/>
+          </a:xfrm>
+          <a:prstGeom prst="rect">
+            <a:avLst/>
+          </a:prstGeom>
+          <a:noFill/>
+          <a:ln/>
+        </p:spPr>
+        <p:txBody>
+          <a:bodyPr wrap="square" lIns="0" tIns="0" rIns="0" bIns="0" rtlCol="0" anchor="ctr"/>
+          <a:lstStyle/>
+          <a:p>
+            <a:pPr indent="0" marL="0">
+              <a:lnSpc>
+                <a:spcPct val="120000"/>
+              </a:lnSpc>
+              <a:buNone/>
+            </a:pPr>
+            <a:r>
+              <a:rPr lang="en-US" sz="1100" b="1" dirty="0">
+                <a:solidFill>
+                  <a:srgbClr val="10161F"/>
+                </a:solidFill>
+                <a:latin typeface="Pretendard" pitchFamily="34" charset="0"/>
+                <a:ea typeface="Pretendard" pitchFamily="34" charset="-122"/>
+                <a:cs typeface="Pretendard" pitchFamily="34" charset="-120"/>
+              </a:rPr>
+              <a:t>-</a:t>
+            </a:r>
+            <a:endParaRPr lang="en-US" sz="1100" dirty="0"/>
+          </a:p>
+        </p:txBody>
+      </p:sp>
+      <p:sp>
+        <p:nvSpPr>
+          <p:cNvPr id="25" name="Text 22"/>
+          <p:cNvSpPr/>
+          <p:nvPr/>
+        </p:nvSpPr>
+        <p:spPr>
+          <a:xfrm>
+            <a:off x="566928" y="6382512"/>
+            <a:ext cx="7315200" cy="219456"/>
+          </a:xfrm>
+          <a:prstGeom prst="rect">
+            <a:avLst/>
+          </a:prstGeom>
+          <a:noFill/>
+          <a:ln/>
+        </p:spPr>
+        <p:txBody>
+          <a:bodyPr wrap="square" lIns="0" tIns="0" rIns="0" bIns="0" rtlCol="0" anchor="ctr"/>
+          <a:lstStyle/>
+          <a:p>
+            <a:pPr indent="0" marL="0">
+              <a:buNone/>
+            </a:pPr>
+            <a:r>
+              <a:rPr lang="en-US" sz="800" dirty="0">
+                <a:solidFill>
+                  <a:srgbClr val="718096"/>
+                </a:solidFill>
+                <a:latin typeface="Pretendard" pitchFamily="34" charset="0"/>
+                <a:ea typeface="Pretendard" pitchFamily="34" charset="-122"/>
+                <a:cs typeface="Pretendard" pitchFamily="34" charset="-120"/>
+              </a:rPr>
+              <a:t>크리딜   |   </a:t>
+            </a:r>
+            <a:endParaRPr lang="en-US" sz="800" dirty="0"/>
+          </a:p>
+        </p:txBody>
+      </p:sp>
+      <p:sp>
+        <p:nvSpPr>
+          <p:cNvPr id="26" name="Text 23"/>
+          <p:cNvSpPr/>
+          <p:nvPr/>
+        </p:nvSpPr>
+        <p:spPr>
+          <a:xfrm>
+            <a:off x="10710367" y="6382512"/>
+            <a:ext cx="914400" cy="219456"/>
+          </a:xfrm>
+          <a:prstGeom prst="rect">
+            <a:avLst/>
+          </a:prstGeom>
+          <a:noFill/>
+          <a:ln/>
+        </p:spPr>
+        <p:txBody>
+          <a:bodyPr wrap="square" lIns="0" tIns="0" rIns="0" bIns="0" rtlCol="0" anchor="ctr"/>
+          <a:lstStyle/>
+          <a:p>
+            <a:pPr algn="r" indent="0" marL="0">
+              <a:buNone/>
+            </a:pPr>
+            <a:r>
+              <a:rPr lang="en-US" sz="900" b="1" dirty="0">
+                <a:solidFill>
+                  <a:srgbClr val="B98A2E"/>
+                </a:solidFill>
+                <a:latin typeface="Arial" pitchFamily="34" charset="0"/>
+                <a:ea typeface="Arial" pitchFamily="34" charset="-122"/>
+                <a:cs typeface="Arial" pitchFamily="34" charset="-120"/>
+              </a:rPr>
+              <a:t>8</a:t>
+            </a:r>
+            <a:endParaRPr lang="en-US" sz="900" dirty="0"/>
+          </a:p>
+        </p:txBody>
+      </p:sp>
+    </p:spTree>
+  </p:cSld>
+  <p:clrMapOvr>
+    <a:masterClrMapping/>
+  </p:clrMapOvr>
+</p:sld>
+</file>
+
+<file path=ppt/slides/slide11.xml><?xml version="1.0" encoding="utf-8"?>
+<p:sld xmlns:a="http://schemas.openxmlformats.org/drawingml/2006/main" xmlns:r="http://schemas.openxmlformats.org/officeDocument/2006/relationships" xmlns:p="http://schemas.openxmlformats.org/presentationml/2006/main">
+  <p:cSld name="Slide 11">
+    <p:bg>
+      <p:bgPr>
+        <a:solidFill>
+          <a:srgbClr val="FFFFFF"/>
+        </a:solidFill>
+      </p:bgPr>
+    </p:bg>
+    <p:spTree>
+      <p:nvGrpSpPr>
+        <p:cNvPr id="1" name=""/>
+        <p:cNvGrpSpPr/>
+        <p:nvPr/>
+      </p:nvGrpSpPr>
+      <p:grpSpPr>
+        <a:xfrm>
+          <a:off x="0" y="0"/>
+          <a:ext cx="0" cy="0"/>
+          <a:chOff x="0" y="0"/>
+          <a:chExt cx="0" cy="0"/>
+        </a:xfrm>
+      </p:grpSpPr>
+      <p:sp>
+        <p:nvSpPr>
+          <p:cNvPr id="2" name="Shape 0"/>
+          <p:cNvSpPr/>
+          <p:nvPr/>
+        </p:nvSpPr>
+        <p:spPr>
+          <a:xfrm>
+            <a:off x="566928" y="457200"/>
+            <a:ext cx="384048" cy="384048"/>
+          </a:xfrm>
+          <a:prstGeom prst="ellipse">
+            <a:avLst/>
+          </a:prstGeom>
+          <a:solidFill>
+            <a:srgbClr val="B98A2E"/>
+          </a:solidFill>
+          <a:ln/>
+        </p:spPr>
+      </p:sp>
+      <p:sp>
+        <p:nvSpPr>
+          <p:cNvPr id="3" name="Text 1"/>
+          <p:cNvSpPr/>
+          <p:nvPr/>
+        </p:nvSpPr>
+        <p:spPr>
+          <a:xfrm>
+            <a:off x="566928" y="457200"/>
+            <a:ext cx="384048" cy="384048"/>
+          </a:xfrm>
+          <a:prstGeom prst="rect">
+            <a:avLst/>
+          </a:prstGeom>
+          <a:noFill/>
+          <a:ln/>
+        </p:spPr>
+        <p:txBody>
+          <a:bodyPr wrap="square" lIns="0" tIns="0" rIns="0" bIns="0" rtlCol="0" anchor="ctr"/>
+          <a:lstStyle/>
+          <a:p>
+            <a:pPr algn="ctr" indent="0" marL="0">
+              <a:buNone/>
+            </a:pPr>
+            <a:r>
+              <a:rPr lang="en-US" sz="1300" b="1" dirty="0">
+                <a:solidFill>
+                  <a:srgbClr val="FFFFFF"/>
+                </a:solidFill>
+                <a:latin typeface="Arial" pitchFamily="34" charset="0"/>
+                <a:ea typeface="Arial" pitchFamily="34" charset="-122"/>
+                <a:cs typeface="Arial" pitchFamily="34" charset="-120"/>
+              </a:rPr>
+              <a:t>09</a:t>
+            </a:r>
+            <a:endParaRPr lang="en-US" sz="1300" dirty="0"/>
+          </a:p>
+        </p:txBody>
+      </p:sp>
+      <p:sp>
+        <p:nvSpPr>
+          <p:cNvPr id="4" name="Text 2"/>
+          <p:cNvSpPr/>
+          <p:nvPr/>
+        </p:nvSpPr>
+        <p:spPr>
+          <a:xfrm>
+            <a:off x="1133856" y="457200"/>
+            <a:ext cx="10490911" cy="182880"/>
+          </a:xfrm>
+          <a:prstGeom prst="rect">
+            <a:avLst/>
+          </a:prstGeom>
+          <a:noFill/>
+          <a:ln/>
+        </p:spPr>
+        <p:txBody>
+          <a:bodyPr wrap="square" lIns="0" tIns="0" rIns="0" bIns="0" rtlCol="0" anchor="ctr"/>
+          <a:lstStyle/>
+          <a:p>
+            <a:pPr indent="0" marL="0">
+              <a:buNone/>
+            </a:pPr>
+            <a:r>
+              <a:rPr lang="en-US" sz="950" b="1" spc="200" kern="0" dirty="0">
+                <a:solidFill>
+                  <a:srgbClr val="B98A2E"/>
+                </a:solidFill>
+                <a:latin typeface="Arial" pitchFamily="34" charset="0"/>
+                <a:ea typeface="Arial" pitchFamily="34" charset="-122"/>
+                <a:cs typeface="Arial" pitchFamily="34" charset="-120"/>
+              </a:rPr>
+              <a:t>Feasibility</a:t>
+            </a:r>
+            <a:endParaRPr lang="en-US" sz="950" dirty="0"/>
+          </a:p>
+        </p:txBody>
+      </p:sp>
+      <p:sp>
+        <p:nvSpPr>
+          <p:cNvPr id="5" name="Text 3"/>
+          <p:cNvSpPr/>
+          <p:nvPr/>
+        </p:nvSpPr>
+        <p:spPr>
+          <a:xfrm>
+            <a:off x="1133856" y="640080"/>
+            <a:ext cx="10490911" cy="365760"/>
+          </a:xfrm>
+          <a:prstGeom prst="rect">
+            <a:avLst/>
+          </a:prstGeom>
+          <a:noFill/>
+          <a:ln/>
+        </p:spPr>
+        <p:txBody>
+          <a:bodyPr wrap="square" lIns="0" tIns="0" rIns="0" bIns="0" rtlCol="0" anchor="ctr"/>
+          <a:lstStyle/>
+          <a:p>
+            <a:pPr indent="0" marL="0">
+              <a:buNone/>
+            </a:pPr>
+            <a:r>
+              <a:rPr lang="en-US" sz="2300" b="1" dirty="0">
+                <a:solidFill>
+                  <a:srgbClr val="10161F"/>
+                </a:solidFill>
+                <a:latin typeface="Pretendard" pitchFamily="34" charset="0"/>
+                <a:ea typeface="Pretendard" pitchFamily="34" charset="-122"/>
+                <a:cs typeface="Pretendard" pitchFamily="34" charset="-120"/>
+              </a:rPr>
+              <a:t>개발 사업성</a:t>
+            </a:r>
+            <a:endParaRPr lang="en-US" sz="2300" dirty="0"/>
+          </a:p>
+        </p:txBody>
+      </p:sp>
+      <p:sp>
+        <p:nvSpPr>
+          <p:cNvPr id="6" name="Shape 4"/>
+          <p:cNvSpPr/>
+          <p:nvPr/>
+        </p:nvSpPr>
+        <p:spPr>
+          <a:xfrm>
+            <a:off x="566928" y="1325880"/>
+            <a:ext cx="11057839" cy="0"/>
+          </a:xfrm>
+          <a:prstGeom prst="line">
+            <a:avLst/>
+          </a:prstGeom>
+          <a:noFill/>
+          <a:ln w="19050">
+            <a:solidFill>
+              <a:srgbClr val="B98A2E"/>
+            </a:solidFill>
+            <a:prstDash val="solid"/>
+          </a:ln>
+        </p:spPr>
+      </p:sp>
+      <p:sp>
+        <p:nvSpPr>
+          <p:cNvPr id="7" name="Shape 5"/>
+          <p:cNvSpPr/>
+          <p:nvPr/>
+        </p:nvSpPr>
+        <p:spPr>
+          <a:xfrm>
+            <a:off x="566928" y="1645920"/>
+            <a:ext cx="11057839" cy="1280160"/>
+          </a:xfrm>
+          <a:prstGeom prst="roundRect">
+            <a:avLst>
+              <a:gd name="adj" fmla="val 4286"/>
+            </a:avLst>
+          </a:prstGeom>
+          <a:solidFill>
+            <a:srgbClr val="BEE3F8"/>
+          </a:solidFill>
+          <a:ln/>
+        </p:spPr>
+      </p:sp>
+      <p:sp>
+        <p:nvSpPr>
+          <p:cNvPr id="8" name="Shape 6"/>
+          <p:cNvSpPr/>
+          <p:nvPr/>
+        </p:nvSpPr>
+        <p:spPr>
+          <a:xfrm>
+            <a:off x="566928" y="1700784"/>
+            <a:ext cx="36576" cy="1170432"/>
+          </a:xfrm>
+          <a:prstGeom prst="rect">
+            <a:avLst/>
+          </a:prstGeom>
+          <a:solidFill>
+            <a:srgbClr val="2B6CB0"/>
+          </a:solidFill>
+          <a:ln/>
+        </p:spPr>
+      </p:sp>
+      <p:sp>
+        <p:nvSpPr>
+          <p:cNvPr id="9" name="Text 7"/>
+          <p:cNvSpPr/>
+          <p:nvPr/>
+        </p:nvSpPr>
+        <p:spPr>
+          <a:xfrm>
+            <a:off x="749808" y="1755648"/>
+            <a:ext cx="10728655" cy="201168"/>
+          </a:xfrm>
+          <a:prstGeom prst="rect">
+            <a:avLst/>
+          </a:prstGeom>
+          <a:noFill/>
+          <a:ln/>
+        </p:spPr>
+        <p:txBody>
+          <a:bodyPr wrap="square" lIns="0" tIns="0" rIns="0" bIns="0" rtlCol="0" anchor="ctr"/>
+          <a:lstStyle/>
+          <a:p>
+            <a:pPr indent="0" marL="0">
+              <a:buNone/>
+            </a:pPr>
+            <a:r>
+              <a:rPr lang="en-US" sz="1050" b="1" dirty="0">
+                <a:solidFill>
+                  <a:srgbClr val="2B6CB0"/>
+                </a:solidFill>
+                <a:latin typeface="Pretendard" pitchFamily="34" charset="0"/>
+                <a:ea typeface="Pretendard" pitchFamily="34" charset="-122"/>
+                <a:cs typeface="Pretendard" pitchFamily="34" charset="-120"/>
+              </a:rPr>
+              <a:t>투자 가치 제안</a:t>
+            </a:r>
+            <a:endParaRPr lang="en-US" sz="1050" dirty="0"/>
+          </a:p>
+        </p:txBody>
+      </p:sp>
+      <p:sp>
+        <p:nvSpPr>
+          <p:cNvPr id="10" name="Text 8"/>
+          <p:cNvSpPr/>
+          <p:nvPr/>
+        </p:nvSpPr>
+        <p:spPr>
+          <a:xfrm>
+            <a:off x="749808" y="1975104"/>
+            <a:ext cx="10728655" cy="877824"/>
+          </a:xfrm>
+          <a:prstGeom prst="rect">
+            <a:avLst/>
+          </a:prstGeom>
+          <a:noFill/>
+          <a:ln/>
+        </p:spPr>
+        <p:txBody>
+          <a:bodyPr wrap="square" lIns="0" tIns="0" rIns="0" bIns="0" rtlCol="0" anchor="t"/>
+          <a:lstStyle/>
+          <a:p>
+            <a:pPr indent="0" marL="0">
+              <a:lnSpc>
+                <a:spcPct val="120000"/>
+              </a:lnSpc>
+              <a:buNone/>
+            </a:pPr>
+            <a:r>
+              <a:rPr lang="en-US" sz="930" dirty="0">
+                <a:solidFill>
+                  <a:srgbClr val="10161F"/>
+                </a:solidFill>
+                <a:latin typeface="Pretendard" pitchFamily="34" charset="0"/>
+                <a:ea typeface="Pretendard" pitchFamily="34" charset="-122"/>
+                <a:cs typeface="Pretendard" pitchFamily="34" charset="-120"/>
+              </a:rPr>
+              <a:t>예상 개발이익률 약 28%, 완공 후 자산가치 350억 상회 전망입니다.</a:t>
+            </a:r>
+            <a:endParaRPr lang="en-US" sz="930" dirty="0"/>
+          </a:p>
+        </p:txBody>
+      </p:sp>
+      <p:sp>
+        <p:nvSpPr>
+          <p:cNvPr id="11" name="Text 9"/>
+          <p:cNvSpPr/>
+          <p:nvPr/>
+        </p:nvSpPr>
+        <p:spPr>
+          <a:xfrm>
+            <a:off x="566928" y="6382512"/>
+            <a:ext cx="7315200" cy="219456"/>
+          </a:xfrm>
+          <a:prstGeom prst="rect">
+            <a:avLst/>
+          </a:prstGeom>
+          <a:noFill/>
+          <a:ln/>
+        </p:spPr>
+        <p:txBody>
+          <a:bodyPr wrap="square" lIns="0" tIns="0" rIns="0" bIns="0" rtlCol="0" anchor="ctr"/>
+          <a:lstStyle/>
+          <a:p>
+            <a:pPr indent="0" marL="0">
+              <a:buNone/>
+            </a:pPr>
+            <a:r>
+              <a:rPr lang="en-US" sz="800" dirty="0">
+                <a:solidFill>
+                  <a:srgbClr val="718096"/>
+                </a:solidFill>
+                <a:latin typeface="Pretendard" pitchFamily="34" charset="0"/>
+                <a:ea typeface="Pretendard" pitchFamily="34" charset="-122"/>
+                <a:cs typeface="Pretendard" pitchFamily="34" charset="-120"/>
+              </a:rPr>
+              <a:t>크리딜   |   </a:t>
+            </a:r>
+            <a:endParaRPr lang="en-US" sz="800" dirty="0"/>
+          </a:p>
+        </p:txBody>
+      </p:sp>
+      <p:sp>
+        <p:nvSpPr>
+          <p:cNvPr id="12" name="Text 10"/>
+          <p:cNvSpPr/>
+          <p:nvPr/>
+        </p:nvSpPr>
+        <p:spPr>
+          <a:xfrm>
+            <a:off x="10710367" y="6382512"/>
+            <a:ext cx="914400" cy="219456"/>
+          </a:xfrm>
+          <a:prstGeom prst="rect">
+            <a:avLst/>
+          </a:prstGeom>
+          <a:noFill/>
+          <a:ln/>
+        </p:spPr>
+        <p:txBody>
+          <a:bodyPr wrap="square" lIns="0" tIns="0" rIns="0" bIns="0" rtlCol="0" anchor="ctr"/>
+          <a:lstStyle/>
+          <a:p>
+            <a:pPr algn="r" indent="0" marL="0">
+              <a:buNone/>
+            </a:pPr>
+            <a:r>
+              <a:rPr lang="en-US" sz="900" b="1" dirty="0">
+                <a:solidFill>
+                  <a:srgbClr val="B98A2E"/>
+                </a:solidFill>
+                <a:latin typeface="Arial" pitchFamily="34" charset="0"/>
+                <a:ea typeface="Arial" pitchFamily="34" charset="-122"/>
+                <a:cs typeface="Arial" pitchFamily="34" charset="-120"/>
+              </a:rPr>
+              <a:t>9</a:t>
+            </a:r>
+            <a:endParaRPr lang="en-US" sz="900" dirty="0"/>
+          </a:p>
+        </p:txBody>
+      </p:sp>
+    </p:spTree>
+  </p:cSld>
+  <p:clrMapOvr>
+    <a:masterClrMapping/>
+  </p:clrMapOvr>
+</p:sld>
+</file>
+
+<file path=ppt/slides/slide12.xml><?xml version="1.0" encoding="utf-8"?>
+<p:sld xmlns:a="http://schemas.openxmlformats.org/drawingml/2006/main" xmlns:r="http://schemas.openxmlformats.org/officeDocument/2006/relationships" xmlns:p="http://schemas.openxmlformats.org/presentationml/2006/main">
+  <p:cSld name="Slide 12">
+    <p:bg>
+      <p:bgPr>
+        <a:solidFill>
+          <a:srgbClr val="FFFFFF"/>
+        </a:solidFill>
+      </p:bgPr>
+    </p:bg>
+    <p:spTree>
+      <p:nvGrpSpPr>
+        <p:cNvPr id="1" name=""/>
+        <p:cNvGrpSpPr/>
+        <p:nvPr/>
+      </p:nvGrpSpPr>
+      <p:grpSpPr>
+        <a:xfrm>
+          <a:off x="0" y="0"/>
+          <a:ext cx="0" cy="0"/>
+          <a:chOff x="0" y="0"/>
+          <a:chExt cx="0" cy="0"/>
+        </a:xfrm>
+      </p:grpSpPr>
+      <p:sp>
+        <p:nvSpPr>
+          <p:cNvPr id="2" name="Shape 0"/>
+          <p:cNvSpPr/>
+          <p:nvPr/>
+        </p:nvSpPr>
+        <p:spPr>
+          <a:xfrm>
+            <a:off x="566928" y="457200"/>
+            <a:ext cx="384048" cy="384048"/>
+          </a:xfrm>
+          <a:prstGeom prst="ellipse">
+            <a:avLst/>
+          </a:prstGeom>
+          <a:solidFill>
+            <a:srgbClr val="B98A2E"/>
+          </a:solidFill>
+          <a:ln/>
+        </p:spPr>
+      </p:sp>
+      <p:sp>
+        <p:nvSpPr>
+          <p:cNvPr id="3" name="Text 1"/>
+          <p:cNvSpPr/>
+          <p:nvPr/>
+        </p:nvSpPr>
+        <p:spPr>
+          <a:xfrm>
+            <a:off x="566928" y="457200"/>
+            <a:ext cx="384048" cy="384048"/>
+          </a:xfrm>
+          <a:prstGeom prst="rect">
+            <a:avLst/>
+          </a:prstGeom>
+          <a:noFill/>
+          <a:ln/>
+        </p:spPr>
+        <p:txBody>
+          <a:bodyPr wrap="square" lIns="0" tIns="0" rIns="0" bIns="0" rtlCol="0" anchor="ctr"/>
+          <a:lstStyle/>
+          <a:p>
+            <a:pPr algn="ctr" indent="0" marL="0">
+              <a:buNone/>
+            </a:pPr>
+            <a:r>
+              <a:rPr lang="en-US" sz="1300" b="1" dirty="0">
+                <a:solidFill>
+                  <a:srgbClr val="FFFFFF"/>
+                </a:solidFill>
+                <a:latin typeface="Arial" pitchFamily="34" charset="0"/>
+                <a:ea typeface="Arial" pitchFamily="34" charset="-122"/>
+                <a:cs typeface="Arial" pitchFamily="34" charset="-120"/>
+              </a:rPr>
+              <a:t>10</a:t>
+            </a:r>
+            <a:endParaRPr lang="en-US" sz="1300" dirty="0"/>
+          </a:p>
+        </p:txBody>
+      </p:sp>
+      <p:sp>
+        <p:nvSpPr>
+          <p:cNvPr id="4" name="Text 2"/>
+          <p:cNvSpPr/>
+          <p:nvPr/>
+        </p:nvSpPr>
+        <p:spPr>
+          <a:xfrm>
+            <a:off x="1133856" y="457200"/>
+            <a:ext cx="10490911" cy="182880"/>
+          </a:xfrm>
+          <a:prstGeom prst="rect">
+            <a:avLst/>
+          </a:prstGeom>
+          <a:noFill/>
+          <a:ln/>
+        </p:spPr>
+        <p:txBody>
+          <a:bodyPr wrap="square" lIns="0" tIns="0" rIns="0" bIns="0" rtlCol="0" anchor="ctr"/>
+          <a:lstStyle/>
+          <a:p>
+            <a:pPr indent="0" marL="0">
+              <a:buNone/>
+            </a:pPr>
+            <a:r>
+              <a:rPr lang="en-US" sz="950" b="1" spc="200" kern="0" dirty="0">
+                <a:solidFill>
+                  <a:srgbClr val="B98A2E"/>
+                </a:solidFill>
+                <a:latin typeface="Arial" pitchFamily="34" charset="0"/>
+                <a:ea typeface="Arial" pitchFamily="34" charset="-122"/>
+                <a:cs typeface="Arial" pitchFamily="34" charset="-120"/>
+              </a:rPr>
+              <a:t>Thesis</a:t>
+            </a:r>
+            <a:endParaRPr lang="en-US" sz="950" dirty="0"/>
+          </a:p>
+        </p:txBody>
+      </p:sp>
+      <p:sp>
+        <p:nvSpPr>
+          <p:cNvPr id="5" name="Text 3"/>
+          <p:cNvSpPr/>
+          <p:nvPr/>
+        </p:nvSpPr>
+        <p:spPr>
+          <a:xfrm>
+            <a:off x="1133856" y="640080"/>
+            <a:ext cx="10490911" cy="365760"/>
+          </a:xfrm>
+          <a:prstGeom prst="rect">
+            <a:avLst/>
+          </a:prstGeom>
+          <a:noFill/>
+          <a:ln/>
+        </p:spPr>
+        <p:txBody>
+          <a:bodyPr wrap="square" lIns="0" tIns="0" rIns="0" bIns="0" rtlCol="0" anchor="ctr"/>
+          <a:lstStyle/>
+          <a:p>
+            <a:pPr indent="0" marL="0">
+              <a:buNone/>
+            </a:pPr>
+            <a:r>
+              <a:rPr lang="en-US" sz="2300" b="1" dirty="0">
+                <a:solidFill>
+                  <a:srgbClr val="10161F"/>
+                </a:solidFill>
+                <a:latin typeface="Pretendard" pitchFamily="34" charset="0"/>
+                <a:ea typeface="Pretendard" pitchFamily="34" charset="-122"/>
+                <a:cs typeface="Pretendard" pitchFamily="34" charset="-120"/>
+              </a:rPr>
+              <a:t>투자 포인트</a:t>
+            </a:r>
+            <a:endParaRPr lang="en-US" sz="2300" dirty="0"/>
+          </a:p>
+        </p:txBody>
+      </p:sp>
+      <p:sp>
+        <p:nvSpPr>
+          <p:cNvPr id="6" name="Shape 4"/>
+          <p:cNvSpPr/>
+          <p:nvPr/>
+        </p:nvSpPr>
+        <p:spPr>
+          <a:xfrm>
+            <a:off x="566928" y="4983480"/>
+            <a:ext cx="11057839" cy="804672"/>
+          </a:xfrm>
+          <a:prstGeom prst="roundRect">
+            <a:avLst>
+              <a:gd name="adj" fmla="val 6818"/>
+            </a:avLst>
+          </a:prstGeom>
+          <a:solidFill>
+            <a:srgbClr val="F3EBDA"/>
+          </a:solidFill>
+          <a:ln w="10160">
+            <a:solidFill>
+              <a:srgbClr val="D9B668"/>
+            </a:solidFill>
+            <a:prstDash val="solid"/>
+          </a:ln>
+        </p:spPr>
+      </p:sp>
+      <p:sp>
+        <p:nvSpPr>
+          <p:cNvPr id="7" name="Text 5"/>
+          <p:cNvSpPr/>
+          <p:nvPr/>
+        </p:nvSpPr>
+        <p:spPr>
+          <a:xfrm>
+            <a:off x="749808" y="5093208"/>
+            <a:ext cx="1691640" cy="256032"/>
+          </a:xfrm>
+          <a:prstGeom prst="rect">
+            <a:avLst/>
+          </a:prstGeom>
+          <a:noFill/>
+          <a:ln/>
+        </p:spPr>
+        <p:txBody>
+          <a:bodyPr wrap="square" lIns="0" tIns="0" rIns="0" bIns="0" rtlCol="0" anchor="ctr"/>
+          <a:lstStyle/>
+          <a:p>
+            <a:pPr indent="0" marL="0">
+              <a:buNone/>
+            </a:pPr>
+            <a:r>
+              <a:rPr lang="en-US" sz="1050" b="1" dirty="0">
+                <a:solidFill>
+                  <a:srgbClr val="977024"/>
+                </a:solidFill>
+                <a:latin typeface="Pretendard" pitchFamily="34" charset="0"/>
+                <a:ea typeface="Pretendard" pitchFamily="34" charset="-122"/>
+                <a:cs typeface="Pretendard" pitchFamily="34" charset="-120"/>
+              </a:rPr>
+              <a:t>종합 가치 제안</a:t>
+            </a:r>
+            <a:endParaRPr lang="en-US" sz="1050" dirty="0"/>
+          </a:p>
+        </p:txBody>
+      </p:sp>
+      <p:sp>
+        <p:nvSpPr>
+          <p:cNvPr id="8" name="Text 6"/>
+          <p:cNvSpPr/>
+          <p:nvPr/>
+        </p:nvSpPr>
+        <p:spPr>
+          <a:xfrm>
+            <a:off x="2487168" y="5056632"/>
+            <a:ext cx="8954719" cy="658368"/>
+          </a:xfrm>
+          <a:prstGeom prst="rect">
+            <a:avLst/>
+          </a:prstGeom>
+          <a:noFill/>
+          <a:ln/>
+        </p:spPr>
+        <p:txBody>
+          <a:bodyPr wrap="square" lIns="0" tIns="0" rIns="0" bIns="0" rtlCol="0" anchor="ctr"/>
+          <a:lstStyle/>
+          <a:p>
+            <a:pPr indent="0" marL="0">
+              <a:lnSpc>
+                <a:spcPct val="125000"/>
+              </a:lnSpc>
+              <a:buNone/>
+            </a:pPr>
+            <a:r>
+              <a:rPr lang="en-US" sz="1100" dirty="0">
+                <a:solidFill>
+                  <a:srgbClr val="10161F"/>
+                </a:solidFill>
+                <a:latin typeface="Pretendard" pitchFamily="34" charset="0"/>
+                <a:ea typeface="Pretendard" pitchFamily="34" charset="-122"/>
+                <a:cs typeface="Pretendard" pitchFamily="34" charset="-120"/>
+              </a:rPr>
+              <a:t>테헤란로 프라임 입지의 개발 가치와 용적률 잔여 활용 가능성이 핵심입니다.</a:t>
+            </a:r>
+            <a:endParaRPr lang="en-US" sz="1100" dirty="0"/>
+          </a:p>
+        </p:txBody>
+      </p:sp>
+      <p:sp>
+        <p:nvSpPr>
+          <p:cNvPr id="9" name="Text 7"/>
+          <p:cNvSpPr/>
+          <p:nvPr/>
+        </p:nvSpPr>
+        <p:spPr>
+          <a:xfrm>
+            <a:off x="566928" y="6382512"/>
+            <a:ext cx="7315200" cy="219456"/>
+          </a:xfrm>
+          <a:prstGeom prst="rect">
+            <a:avLst/>
+          </a:prstGeom>
+          <a:noFill/>
+          <a:ln/>
+        </p:spPr>
+        <p:txBody>
+          <a:bodyPr wrap="square" lIns="0" tIns="0" rIns="0" bIns="0" rtlCol="0" anchor="ctr"/>
+          <a:lstStyle/>
+          <a:p>
+            <a:pPr indent="0" marL="0">
+              <a:buNone/>
+            </a:pPr>
+            <a:r>
+              <a:rPr lang="en-US" sz="800" dirty="0">
+                <a:solidFill>
+                  <a:srgbClr val="718096"/>
+                </a:solidFill>
+                <a:latin typeface="Pretendard" pitchFamily="34" charset="0"/>
+                <a:ea typeface="Pretendard" pitchFamily="34" charset="-122"/>
+                <a:cs typeface="Pretendard" pitchFamily="34" charset="-120"/>
+              </a:rPr>
+              <a:t>크리딜   |   </a:t>
+            </a:r>
+            <a:endParaRPr lang="en-US" sz="800" dirty="0"/>
+          </a:p>
+        </p:txBody>
+      </p:sp>
+      <p:sp>
+        <p:nvSpPr>
+          <p:cNvPr id="10" name="Text 8"/>
+          <p:cNvSpPr/>
+          <p:nvPr/>
+        </p:nvSpPr>
+        <p:spPr>
+          <a:xfrm>
+            <a:off x="10710367" y="6382512"/>
+            <a:ext cx="914400" cy="219456"/>
+          </a:xfrm>
+          <a:prstGeom prst="rect">
+            <a:avLst/>
+          </a:prstGeom>
+          <a:noFill/>
+          <a:ln/>
+        </p:spPr>
+        <p:txBody>
+          <a:bodyPr wrap="square" lIns="0" tIns="0" rIns="0" bIns="0" rtlCol="0" anchor="ctr"/>
+          <a:lstStyle/>
+          <a:p>
+            <a:pPr algn="r" indent="0" marL="0">
+              <a:buNone/>
+            </a:pPr>
+            <a:r>
+              <a:rPr lang="en-US" sz="900" b="1" dirty="0">
+                <a:solidFill>
+                  <a:srgbClr val="B98A2E"/>
+                </a:solidFill>
+                <a:latin typeface="Arial" pitchFamily="34" charset="0"/>
+                <a:ea typeface="Arial" pitchFamily="34" charset="-122"/>
+                <a:cs typeface="Arial" pitchFamily="34" charset="-120"/>
+              </a:rPr>
+              <a:t>10</a:t>
+            </a:r>
+            <a:endParaRPr lang="en-US" sz="900" dirty="0"/>
+          </a:p>
+        </p:txBody>
+      </p:sp>
+    </p:spTree>
+  </p:cSld>
+  <p:clrMapOvr>
+    <a:masterClrMapping/>
+  </p:clrMapOvr>
+</p:sld>
+</file>
+
+<file path=ppt/slides/slide13.xml><?xml version="1.0" encoding="utf-8"?>
+<p:sld xmlns:a="http://schemas.openxmlformats.org/drawingml/2006/main" xmlns:r="http://schemas.openxmlformats.org/officeDocument/2006/relationships" xmlns:p="http://schemas.openxmlformats.org/presentationml/2006/main">
+  <p:cSld name="Slide 13">
+    <p:bg>
+      <p:bgPr>
+        <a:solidFill>
+          <a:srgbClr val="FFFFFF"/>
+        </a:solidFill>
+      </p:bgPr>
+    </p:bg>
+    <p:spTree>
+      <p:nvGrpSpPr>
+        <p:cNvPr id="1" name=""/>
+        <p:cNvGrpSpPr/>
+        <p:nvPr/>
+      </p:nvGrpSpPr>
+      <p:grpSpPr>
+        <a:xfrm>
+          <a:off x="0" y="0"/>
+          <a:ext cx="0" cy="0"/>
+          <a:chOff x="0" y="0"/>
+          <a:chExt cx="0" cy="0"/>
+        </a:xfrm>
+      </p:grpSpPr>
+      <p:sp>
+        <p:nvSpPr>
+          <p:cNvPr id="2" name="Shape 0"/>
+          <p:cNvSpPr/>
+          <p:nvPr/>
+        </p:nvSpPr>
+        <p:spPr>
+          <a:xfrm>
+            <a:off x="566928" y="457200"/>
+            <a:ext cx="384048" cy="384048"/>
+          </a:xfrm>
+          <a:prstGeom prst="ellipse">
+            <a:avLst/>
+          </a:prstGeom>
+          <a:solidFill>
+            <a:srgbClr val="B98A2E"/>
+          </a:solidFill>
+          <a:ln/>
+        </p:spPr>
+      </p:sp>
+      <p:sp>
+        <p:nvSpPr>
+          <p:cNvPr id="3" name="Text 1"/>
+          <p:cNvSpPr/>
+          <p:nvPr/>
+        </p:nvSpPr>
+        <p:spPr>
+          <a:xfrm>
+            <a:off x="566928" y="457200"/>
+            <a:ext cx="384048" cy="384048"/>
+          </a:xfrm>
+          <a:prstGeom prst="rect">
+            <a:avLst/>
+          </a:prstGeom>
+          <a:noFill/>
+          <a:ln/>
+        </p:spPr>
+        <p:txBody>
+          <a:bodyPr wrap="square" lIns="0" tIns="0" rIns="0" bIns="0" rtlCol="0" anchor="ctr"/>
+          <a:lstStyle/>
+          <a:p>
+            <a:pPr algn="ctr" indent="0" marL="0">
+              <a:buNone/>
+            </a:pPr>
+            <a:r>
+              <a:rPr lang="en-US" sz="1300" b="1" dirty="0">
+                <a:solidFill>
+                  <a:srgbClr val="FFFFFF"/>
+                </a:solidFill>
+                <a:latin typeface="Arial" pitchFamily="34" charset="0"/>
+                <a:ea typeface="Arial" pitchFamily="34" charset="-122"/>
+                <a:cs typeface="Arial" pitchFamily="34" charset="-120"/>
+              </a:rPr>
+              <a:t>11</a:t>
+            </a:r>
+            <a:endParaRPr lang="en-US" sz="1300" dirty="0"/>
+          </a:p>
+        </p:txBody>
+      </p:sp>
+      <p:sp>
+        <p:nvSpPr>
+          <p:cNvPr id="4" name="Text 2"/>
+          <p:cNvSpPr/>
+          <p:nvPr/>
+        </p:nvSpPr>
+        <p:spPr>
+          <a:xfrm>
+            <a:off x="1133856" y="457200"/>
+            <a:ext cx="10490911" cy="182880"/>
+          </a:xfrm>
+          <a:prstGeom prst="rect">
+            <a:avLst/>
+          </a:prstGeom>
+          <a:noFill/>
+          <a:ln/>
+        </p:spPr>
+        <p:txBody>
+          <a:bodyPr wrap="square" lIns="0" tIns="0" rIns="0" bIns="0" rtlCol="0" anchor="ctr"/>
+          <a:lstStyle/>
+          <a:p>
+            <a:pPr indent="0" marL="0">
+              <a:buNone/>
+            </a:pPr>
+            <a:r>
+              <a:rPr lang="en-US" sz="950" b="1" spc="200" kern="0" dirty="0">
+                <a:solidFill>
+                  <a:srgbClr val="B98A2E"/>
+                </a:solidFill>
+                <a:latin typeface="Arial" pitchFamily="34" charset="0"/>
+                <a:ea typeface="Arial" pitchFamily="34" charset="-122"/>
+                <a:cs typeface="Arial" pitchFamily="34" charset="-120"/>
+              </a:rPr>
+              <a:t>Risk</a:t>
+            </a:r>
+            <a:endParaRPr lang="en-US" sz="950" dirty="0"/>
+          </a:p>
+        </p:txBody>
+      </p:sp>
+      <p:sp>
+        <p:nvSpPr>
+          <p:cNvPr id="5" name="Text 3"/>
+          <p:cNvSpPr/>
+          <p:nvPr/>
+        </p:nvSpPr>
+        <p:spPr>
+          <a:xfrm>
+            <a:off x="1133856" y="640080"/>
+            <a:ext cx="10490911" cy="365760"/>
+          </a:xfrm>
+          <a:prstGeom prst="rect">
+            <a:avLst/>
+          </a:prstGeom>
+          <a:noFill/>
+          <a:ln/>
+        </p:spPr>
+        <p:txBody>
+          <a:bodyPr wrap="square" lIns="0" tIns="0" rIns="0" bIns="0" rtlCol="0" anchor="ctr"/>
+          <a:lstStyle/>
+          <a:p>
+            <a:pPr indent="0" marL="0">
+              <a:buNone/>
+            </a:pPr>
+            <a:r>
+              <a:rPr lang="en-US" sz="2300" b="1" dirty="0">
+                <a:solidFill>
+                  <a:srgbClr val="10161F"/>
+                </a:solidFill>
+                <a:latin typeface="Pretendard" pitchFamily="34" charset="0"/>
+                <a:ea typeface="Pretendard" pitchFamily="34" charset="-122"/>
+                <a:cs typeface="Pretendard" pitchFamily="34" charset="-120"/>
+              </a:rPr>
+              <a:t>리스크 점검</a:t>
+            </a:r>
+            <a:endParaRPr lang="en-US" sz="2300" dirty="0"/>
+          </a:p>
+        </p:txBody>
+      </p:sp>
+      <p:sp>
+        <p:nvSpPr>
+          <p:cNvPr id="6" name="Shape 4"/>
+          <p:cNvSpPr/>
+          <p:nvPr/>
+        </p:nvSpPr>
+        <p:spPr>
+          <a:xfrm>
+            <a:off x="566928" y="1417320"/>
+            <a:ext cx="11057839" cy="3657600"/>
+          </a:xfrm>
+          <a:prstGeom prst="roundRect">
+            <a:avLst>
+              <a:gd name="adj" fmla="val 1500"/>
+            </a:avLst>
+          </a:prstGeom>
+          <a:solidFill>
+            <a:srgbClr val="F7FAFC"/>
+          </a:solidFill>
+          <a:ln w="6350">
+            <a:solidFill>
+              <a:srgbClr val="CBD5E0"/>
+            </a:solidFill>
+            <a:prstDash val="solid"/>
+          </a:ln>
+        </p:spPr>
+      </p:sp>
+      <p:sp>
+        <p:nvSpPr>
+          <p:cNvPr id="7" name="Shape 5"/>
+          <p:cNvSpPr/>
+          <p:nvPr/>
+        </p:nvSpPr>
+        <p:spPr>
+          <a:xfrm>
+            <a:off x="566928" y="1417320"/>
+            <a:ext cx="11057839" cy="45720"/>
+          </a:xfrm>
+          <a:prstGeom prst="rect">
+            <a:avLst/>
+          </a:prstGeom>
+          <a:solidFill>
+            <a:srgbClr val="B98A2E"/>
+          </a:solidFill>
+          <a:ln/>
+        </p:spPr>
+      </p:sp>
+      <p:sp>
+        <p:nvSpPr>
+          <p:cNvPr id="8" name="Text 6"/>
+          <p:cNvSpPr/>
+          <p:nvPr/>
+        </p:nvSpPr>
+        <p:spPr>
+          <a:xfrm>
+            <a:off x="795528" y="1618488"/>
+            <a:ext cx="10600639" cy="292608"/>
+          </a:xfrm>
+          <a:prstGeom prst="rect">
+            <a:avLst/>
+          </a:prstGeom>
+          <a:noFill/>
+          <a:ln/>
+        </p:spPr>
+        <p:txBody>
+          <a:bodyPr wrap="square" lIns="0" tIns="0" rIns="0" bIns="0" rtlCol="0" anchor="ctr"/>
+          <a:lstStyle/>
+          <a:p>
+            <a:pPr indent="0" marL="0">
+              <a:buNone/>
+            </a:pPr>
+            <a:r>
+              <a:rPr lang="en-US" sz="1350" b="1" dirty="0">
+                <a:solidFill>
+                  <a:srgbClr val="977024"/>
+                </a:solidFill>
+                <a:latin typeface="Pretendard" pitchFamily="34" charset="0"/>
+                <a:ea typeface="Pretendard" pitchFamily="34" charset="-122"/>
+                <a:cs typeface="Pretendard" pitchFamily="34" charset="-120"/>
+              </a:rPr>
+              <a:t>인허가 지연</a:t>
+            </a:r>
+            <a:endParaRPr lang="en-US" sz="1350" dirty="0"/>
+          </a:p>
+        </p:txBody>
+      </p:sp>
+      <p:sp>
+        <p:nvSpPr>
+          <p:cNvPr id="9" name="Text 7"/>
+          <p:cNvSpPr/>
+          <p:nvPr/>
+        </p:nvSpPr>
+        <p:spPr>
+          <a:xfrm>
+            <a:off x="795528" y="1947672"/>
+            <a:ext cx="10600639" cy="365760"/>
+          </a:xfrm>
+          <a:prstGeom prst="rect">
+            <a:avLst/>
+          </a:prstGeom>
+          <a:noFill/>
+          <a:ln/>
+        </p:spPr>
+        <p:txBody>
+          <a:bodyPr wrap="square" lIns="0" tIns="0" rIns="0" bIns="0" rtlCol="0" anchor="ctr">
+            <a:normAutofit/>
+          </a:bodyPr>
+          <a:lstStyle/>
+          <a:p>
+            <a:pPr indent="0" marL="0">
+              <a:buNone/>
+            </a:pPr>
+            <a:r>
+              <a:rPr lang="en-US" sz="1250" b="1" dirty="0">
+                <a:solidFill>
+                  <a:srgbClr val="10161F"/>
+                </a:solidFill>
+                <a:latin typeface="Pretendard" pitchFamily="34" charset="0"/>
+                <a:ea typeface="Pretendard" pitchFamily="34" charset="-122"/>
+                <a:cs typeface="Pretendard" pitchFamily="34" charset="-120"/>
+              </a:rPr>
+              <a:t>사전협의 완료</a:t>
+            </a:r>
+            <a:endParaRPr lang="en-US" sz="1250" dirty="0"/>
+          </a:p>
+        </p:txBody>
+      </p:sp>
+      <p:sp>
+        <p:nvSpPr>
+          <p:cNvPr id="10" name="Text 8"/>
+          <p:cNvSpPr/>
+          <p:nvPr/>
+        </p:nvSpPr>
+        <p:spPr>
+          <a:xfrm>
+            <a:off x="795528" y="2377440"/>
+            <a:ext cx="10600639" cy="2606040"/>
+          </a:xfrm>
+          <a:prstGeom prst="rect">
+            <a:avLst/>
+          </a:prstGeom>
+          <a:noFill/>
+          <a:ln/>
+        </p:spPr>
+        <p:txBody>
+          <a:bodyPr wrap="square" lIns="0" tIns="0" rIns="0" bIns="0" rtlCol="0" anchor="t">
+            <a:normAutofit/>
+          </a:bodyPr>
+          <a:lstStyle/>
+          <a:p>
+            <a:pPr marL="342900" indent="-342900">
+              <a:lnSpc>
+                <a:spcPct val="125000"/>
+              </a:lnSpc>
+              <a:buSzPct val="100000"/>
+              <a:buChar char="•"/>
+            </a:pPr>
+            <a:r>
+              <a:rPr lang="en-US" sz="1100" dirty="0">
+                <a:solidFill>
+                  <a:srgbClr val="10161F"/>
+                </a:solidFill>
+                <a:latin typeface="Pretendard" pitchFamily="34" charset="0"/>
+                <a:ea typeface="Pretendard" pitchFamily="34" charset="-122"/>
+                <a:cs typeface="Pretendard" pitchFamily="34" charset="-120"/>
+              </a:rPr>
+              <a:t>2개월 내 착수 가능</a:t>
+            </a:r>
+            <a:endParaRPr lang="en-US" sz="1100" dirty="0"/>
+          </a:p>
+        </p:txBody>
+      </p:sp>
+      <p:sp>
+        <p:nvSpPr>
+          <p:cNvPr id="11" name="Shape 9"/>
+          <p:cNvSpPr/>
+          <p:nvPr/>
+        </p:nvSpPr>
+        <p:spPr>
+          <a:xfrm>
+            <a:off x="566928" y="5193792"/>
+            <a:ext cx="11057839" cy="621792"/>
+          </a:xfrm>
+          <a:prstGeom prst="roundRect">
+            <a:avLst>
+              <a:gd name="adj" fmla="val 8824"/>
+            </a:avLst>
+          </a:prstGeom>
+          <a:solidFill>
+            <a:srgbClr val="F7FAFC"/>
+          </a:solidFill>
+          <a:ln w="6350">
+            <a:solidFill>
+              <a:srgbClr val="CBD5E0"/>
+            </a:solidFill>
+            <a:prstDash val="solid"/>
+          </a:ln>
+        </p:spPr>
+      </p:sp>
+      <p:sp>
+        <p:nvSpPr>
+          <p:cNvPr id="12" name="Text 10"/>
+          <p:cNvSpPr/>
+          <p:nvPr/>
+        </p:nvSpPr>
+        <p:spPr>
+          <a:xfrm>
+            <a:off x="795528" y="5193792"/>
+            <a:ext cx="10600639" cy="621792"/>
+          </a:xfrm>
+          <a:prstGeom prst="rect">
+            <a:avLst/>
+          </a:prstGeom>
+          <a:noFill/>
+          <a:ln/>
+        </p:spPr>
+        <p:txBody>
+          <a:bodyPr wrap="square" lIns="0" tIns="0" rIns="0" bIns="0" rtlCol="0" anchor="ctr"/>
+          <a:lstStyle/>
+          <a:p>
+            <a:pPr indent="0" marL="0">
+              <a:buNone/>
+            </a:pPr>
+            <a:r>
+              <a:rPr lang="en-US" sz="1100" dirty="0">
+                <a:solidFill>
+                  <a:srgbClr val="10161F"/>
+                </a:solidFill>
+                <a:latin typeface="Pretendard" pitchFamily="34" charset="0"/>
+                <a:ea typeface="Pretendard" pitchFamily="34" charset="-122"/>
+                <a:cs typeface="Pretendard" pitchFamily="34" charset="-120"/>
+              </a:rPr>
+              <a:t>※ 본 리스크 체크는 공부 및 브로커 확인 기반이며, 매수 전 전문 실사팀(변호사/건축사)을 통한 정밀 실사가 필요합니다.</a:t>
+            </a:r>
+            <a:endParaRPr lang="en-US" sz="1100" dirty="0"/>
+          </a:p>
+        </p:txBody>
+      </p:sp>
+      <p:sp>
+        <p:nvSpPr>
+          <p:cNvPr id="13" name="Text 11"/>
+          <p:cNvSpPr/>
+          <p:nvPr/>
+        </p:nvSpPr>
+        <p:spPr>
+          <a:xfrm>
+            <a:off x="566928" y="6382512"/>
+            <a:ext cx="7315200" cy="219456"/>
+          </a:xfrm>
+          <a:prstGeom prst="rect">
+            <a:avLst/>
+          </a:prstGeom>
+          <a:noFill/>
+          <a:ln/>
+        </p:spPr>
+        <p:txBody>
+          <a:bodyPr wrap="square" lIns="0" tIns="0" rIns="0" bIns="0" rtlCol="0" anchor="ctr"/>
+          <a:lstStyle/>
+          <a:p>
+            <a:pPr indent="0" marL="0">
+              <a:buNone/>
+            </a:pPr>
+            <a:r>
+              <a:rPr lang="en-US" sz="800" dirty="0">
+                <a:solidFill>
+                  <a:srgbClr val="718096"/>
+                </a:solidFill>
+                <a:latin typeface="Pretendard" pitchFamily="34" charset="0"/>
+                <a:ea typeface="Pretendard" pitchFamily="34" charset="-122"/>
+                <a:cs typeface="Pretendard" pitchFamily="34" charset="-120"/>
+              </a:rPr>
+              <a:t>크리딜   |   </a:t>
+            </a:r>
+            <a:endParaRPr lang="en-US" sz="800" dirty="0"/>
+          </a:p>
+        </p:txBody>
+      </p:sp>
+      <p:sp>
+        <p:nvSpPr>
+          <p:cNvPr id="14" name="Text 12"/>
+          <p:cNvSpPr/>
+          <p:nvPr/>
+        </p:nvSpPr>
+        <p:spPr>
+          <a:xfrm>
+            <a:off x="10710367" y="6382512"/>
+            <a:ext cx="914400" cy="219456"/>
+          </a:xfrm>
+          <a:prstGeom prst="rect">
+            <a:avLst/>
+          </a:prstGeom>
+          <a:noFill/>
+          <a:ln/>
+        </p:spPr>
+        <p:txBody>
+          <a:bodyPr wrap="square" lIns="0" tIns="0" rIns="0" bIns="0" rtlCol="0" anchor="ctr"/>
+          <a:lstStyle/>
+          <a:p>
+            <a:pPr algn="r" indent="0" marL="0">
+              <a:buNone/>
+            </a:pPr>
+            <a:r>
+              <a:rPr lang="en-US" sz="900" b="1" dirty="0">
+                <a:solidFill>
+                  <a:srgbClr val="B98A2E"/>
+                </a:solidFill>
+                <a:latin typeface="Arial" pitchFamily="34" charset="0"/>
+                <a:ea typeface="Arial" pitchFamily="34" charset="-122"/>
+                <a:cs typeface="Arial" pitchFamily="34" charset="-120"/>
+              </a:rPr>
+              <a:t>11</a:t>
+            </a:r>
+            <a:endParaRPr lang="en-US" sz="900" dirty="0"/>
+          </a:p>
+        </p:txBody>
+      </p:sp>
+    </p:spTree>
+  </p:cSld>
+  <p:clrMapOvr>
+    <a:masterClrMapping/>
+  </p:clrMapOvr>
+</p:sld>
+</file>
+
+<file path=ppt/slides/slide14.xml><?xml version="1.0" encoding="utf-8"?>
+<p:sld xmlns:a="http://schemas.openxmlformats.org/drawingml/2006/main" xmlns:r="http://schemas.openxmlformats.org/officeDocument/2006/relationships" xmlns:p="http://schemas.openxmlformats.org/presentationml/2006/main">
+  <p:cSld name="Slide 14">
+    <p:bg>
+      <p:bgPr>
+        <a:solidFill>
+          <a:srgbClr val="FFFFFF"/>
+        </a:solidFill>
+      </p:bgPr>
+    </p:bg>
+    <p:spTree>
+      <p:nvGrpSpPr>
+        <p:cNvPr id="1" name=""/>
+        <p:cNvGrpSpPr/>
+        <p:nvPr/>
+      </p:nvGrpSpPr>
+      <p:grpSpPr>
+        <a:xfrm>
+          <a:off x="0" y="0"/>
+          <a:ext cx="0" cy="0"/>
+          <a:chOff x="0" y="0"/>
+          <a:chExt cx="0" cy="0"/>
+        </a:xfrm>
+      </p:grpSpPr>
+      <p:sp>
+        <p:nvSpPr>
+          <p:cNvPr id="2" name="Shape 0"/>
+          <p:cNvSpPr/>
+          <p:nvPr/>
+        </p:nvSpPr>
+        <p:spPr>
+          <a:xfrm>
+            <a:off x="566928" y="457200"/>
+            <a:ext cx="384048" cy="384048"/>
+          </a:xfrm>
+          <a:prstGeom prst="ellipse">
+            <a:avLst/>
+          </a:prstGeom>
+          <a:solidFill>
+            <a:srgbClr val="B98A2E"/>
+          </a:solidFill>
+          <a:ln/>
+        </p:spPr>
+      </p:sp>
+      <p:sp>
+        <p:nvSpPr>
+          <p:cNvPr id="3" name="Text 1"/>
+          <p:cNvSpPr/>
+          <p:nvPr/>
+        </p:nvSpPr>
+        <p:spPr>
+          <a:xfrm>
+            <a:off x="566928" y="457200"/>
+            <a:ext cx="384048" cy="384048"/>
+          </a:xfrm>
+          <a:prstGeom prst="rect">
+            <a:avLst/>
+          </a:prstGeom>
+          <a:noFill/>
+          <a:ln/>
+        </p:spPr>
+        <p:txBody>
+          <a:bodyPr wrap="square" lIns="0" tIns="0" rIns="0" bIns="0" rtlCol="0" anchor="ctr"/>
+          <a:lstStyle/>
+          <a:p>
+            <a:pPr algn="ctr" indent="0" marL="0">
+              <a:buNone/>
+            </a:pPr>
+            <a:r>
+              <a:rPr lang="en-US" sz="1300" b="1" dirty="0">
+                <a:solidFill>
+                  <a:srgbClr val="FFFFFF"/>
+                </a:solidFill>
+                <a:latin typeface="Arial" pitchFamily="34" charset="0"/>
+                <a:ea typeface="Arial" pitchFamily="34" charset="-122"/>
+                <a:cs typeface="Arial" pitchFamily="34" charset="-120"/>
+              </a:rPr>
+              <a:t>12</a:t>
+            </a:r>
+            <a:endParaRPr lang="en-US" sz="1300" dirty="0"/>
+          </a:p>
+        </p:txBody>
+      </p:sp>
+      <p:sp>
+        <p:nvSpPr>
+          <p:cNvPr id="4" name="Text 2"/>
+          <p:cNvSpPr/>
+          <p:nvPr/>
+        </p:nvSpPr>
+        <p:spPr>
+          <a:xfrm>
+            <a:off x="1133856" y="457200"/>
+            <a:ext cx="10490911" cy="182880"/>
+          </a:xfrm>
+          <a:prstGeom prst="rect">
+            <a:avLst/>
+          </a:prstGeom>
+          <a:noFill/>
+          <a:ln/>
+        </p:spPr>
+        <p:txBody>
+          <a:bodyPr wrap="square" lIns="0" tIns="0" rIns="0" bIns="0" rtlCol="0" anchor="ctr"/>
+          <a:lstStyle/>
+          <a:p>
+            <a:pPr indent="0" marL="0">
+              <a:buNone/>
+            </a:pPr>
+            <a:r>
+              <a:rPr lang="en-US" sz="950" b="1" spc="200" kern="0" dirty="0">
+                <a:solidFill>
+                  <a:srgbClr val="B98A2E"/>
+                </a:solidFill>
+                <a:latin typeface="Arial" pitchFamily="34" charset="0"/>
+                <a:ea typeface="Arial" pitchFamily="34" charset="-122"/>
+                <a:cs typeface="Arial" pitchFamily="34" charset="-120"/>
+              </a:rPr>
+              <a:t>Checklist</a:t>
+            </a:r>
+            <a:endParaRPr lang="en-US" sz="950" dirty="0"/>
+          </a:p>
+        </p:txBody>
+      </p:sp>
+      <p:sp>
+        <p:nvSpPr>
+          <p:cNvPr id="5" name="Text 3"/>
+          <p:cNvSpPr/>
+          <p:nvPr/>
+        </p:nvSpPr>
+        <p:spPr>
+          <a:xfrm>
+            <a:off x="1133856" y="640080"/>
+            <a:ext cx="10490911" cy="365760"/>
+          </a:xfrm>
+          <a:prstGeom prst="rect">
+            <a:avLst/>
+          </a:prstGeom>
+          <a:noFill/>
+          <a:ln/>
+        </p:spPr>
+        <p:txBody>
+          <a:bodyPr wrap="square" lIns="0" tIns="0" rIns="0" bIns="0" rtlCol="0" anchor="ctr"/>
+          <a:lstStyle/>
+          <a:p>
+            <a:pPr indent="0" marL="0">
+              <a:buNone/>
+            </a:pPr>
+            <a:r>
+              <a:rPr lang="en-US" sz="2300" b="1" dirty="0">
+                <a:solidFill>
+                  <a:srgbClr val="10161F"/>
+                </a:solidFill>
+                <a:latin typeface="Pretendard" pitchFamily="34" charset="0"/>
+                <a:ea typeface="Pretendard" pitchFamily="34" charset="-122"/>
+                <a:cs typeface="Pretendard" pitchFamily="34" charset="-120"/>
+              </a:rPr>
+              <a:t>실사 및 확인 필요사항</a:t>
+            </a:r>
+            <a:endParaRPr lang="en-US" sz="2300" dirty="0"/>
+          </a:p>
+        </p:txBody>
+      </p:sp>
+      <p:sp>
+        <p:nvSpPr>
+          <p:cNvPr id="6" name="Text 4"/>
+          <p:cNvSpPr/>
+          <p:nvPr/>
+        </p:nvSpPr>
+        <p:spPr>
+          <a:xfrm>
+            <a:off x="566928" y="1371600"/>
+            <a:ext cx="11057839" cy="237744"/>
+          </a:xfrm>
+          <a:prstGeom prst="rect">
+            <a:avLst/>
+          </a:prstGeom>
+          <a:noFill/>
+          <a:ln/>
+        </p:spPr>
+        <p:txBody>
+          <a:bodyPr wrap="square" lIns="0" tIns="0" rIns="0" bIns="0" rtlCol="0" anchor="ctr"/>
+          <a:lstStyle/>
+          <a:p>
+            <a:pPr indent="0" marL="0">
+              <a:buNone/>
+            </a:pPr>
+            <a:r>
+              <a:rPr lang="en-US" sz="1100" b="1" dirty="0">
+                <a:solidFill>
+                  <a:srgbClr val="10161F"/>
+                </a:solidFill>
+                <a:latin typeface="Pretendard" pitchFamily="34" charset="0"/>
+                <a:ea typeface="Pretendard" pitchFamily="34" charset="-122"/>
+                <a:cs typeface="Pretendard" pitchFamily="34" charset="-120"/>
+              </a:rPr>
+              <a:t>거래 안정성 확보를 위한 필수 법률·물리·임대차 실사 점검 항목 (총 6건)</a:t>
+            </a:r>
+            <a:endParaRPr lang="en-US" sz="1100" dirty="0"/>
+          </a:p>
+        </p:txBody>
+      </p:sp>
+      <p:sp>
+        <p:nvSpPr>
+          <p:cNvPr id="7" name="Shape 5"/>
+          <p:cNvSpPr/>
+          <p:nvPr/>
+        </p:nvSpPr>
+        <p:spPr>
+          <a:xfrm>
+            <a:off x="566928" y="1719072"/>
+            <a:ext cx="5368900" cy="868680"/>
+          </a:xfrm>
+          <a:prstGeom prst="rect">
+            <a:avLst/>
+          </a:prstGeom>
+          <a:solidFill>
+            <a:srgbClr val="F7FAFC"/>
+          </a:solidFill>
+          <a:ln w="6350">
+            <a:solidFill>
+              <a:srgbClr val="D9B668"/>
+            </a:solidFill>
+            <a:prstDash val="solid"/>
+          </a:ln>
+        </p:spPr>
+      </p:sp>
+      <p:sp>
+        <p:nvSpPr>
+          <p:cNvPr id="8" name="Shape 6"/>
+          <p:cNvSpPr/>
+          <p:nvPr/>
+        </p:nvSpPr>
+        <p:spPr>
+          <a:xfrm>
+            <a:off x="704088" y="1883664"/>
+            <a:ext cx="320040" cy="320040"/>
+          </a:xfrm>
+          <a:prstGeom prst="rect">
+            <a:avLst/>
+          </a:prstGeom>
+          <a:solidFill>
+            <a:srgbClr val="977024"/>
+          </a:solidFill>
+          <a:ln/>
+        </p:spPr>
+      </p:sp>
+      <p:sp>
+        <p:nvSpPr>
+          <p:cNvPr id="9" name="Text 7"/>
+          <p:cNvSpPr/>
+          <p:nvPr/>
+        </p:nvSpPr>
+        <p:spPr>
+          <a:xfrm>
+            <a:off x="704088" y="1883664"/>
+            <a:ext cx="320040" cy="320040"/>
+          </a:xfrm>
+          <a:prstGeom prst="rect">
+            <a:avLst/>
+          </a:prstGeom>
+          <a:noFill/>
+          <a:ln/>
+        </p:spPr>
+        <p:txBody>
+          <a:bodyPr wrap="square" rtlCol="0" anchor="ctr"/>
+          <a:lstStyle/>
+          <a:p>
+            <a:pPr algn="ctr" indent="0" marL="0">
+              <a:buNone/>
+            </a:pPr>
+            <a:r>
+              <a:rPr lang="en-US" sz="1100" b="1" dirty="0">
+                <a:solidFill>
+                  <a:srgbClr val="000000"/>
+                </a:solidFill>
+                <a:latin typeface="Pretendard" pitchFamily="34" charset="0"/>
+                <a:ea typeface="Pretendard" pitchFamily="34" charset="-122"/>
+                <a:cs typeface="Pretendard" pitchFamily="34" charset="-120"/>
+              </a:rPr>
+              <a:t>✓</a:t>
+            </a:r>
+            <a:endParaRPr lang="en-US" sz="1100" dirty="0"/>
+          </a:p>
+        </p:txBody>
+      </p:sp>
+      <p:sp>
+        <p:nvSpPr>
+          <p:cNvPr id="10" name="Text 8"/>
+          <p:cNvSpPr/>
+          <p:nvPr/>
+        </p:nvSpPr>
+        <p:spPr>
+          <a:xfrm>
+            <a:off x="1115568" y="1828800"/>
+            <a:ext cx="4683100" cy="685800"/>
+          </a:xfrm>
+          <a:prstGeom prst="rect">
+            <a:avLst/>
+          </a:prstGeom>
+          <a:noFill/>
+          <a:ln/>
+        </p:spPr>
+        <p:txBody>
+          <a:bodyPr wrap="square" rtlCol="0" anchor="ctr"/>
+          <a:lstStyle/>
+          <a:p>
+            <a:pPr indent="0" marL="0">
+              <a:lnSpc>
+                <a:spcPct val="115000"/>
+              </a:lnSpc>
+              <a:buNone/>
+            </a:pPr>
+            <a:r>
+              <a:rPr lang="en-US" sz="1050" dirty="0">
+                <a:solidFill>
+                  <a:srgbClr val="10161F"/>
+                </a:solidFill>
+                <a:latin typeface="Pretendard" pitchFamily="34" charset="0"/>
+                <a:ea typeface="Pretendard" pitchFamily="34" charset="-122"/>
+                <a:cs typeface="Pretendard" pitchFamily="34" charset="-120"/>
+              </a:rPr>
+              <a:t>등기부등본 갑구/을구 권리관계 및 근저당 채권최고액 전액 말소 조건 원본 대조</a:t>
+            </a:r>
+            <a:endParaRPr lang="en-US" sz="1050" dirty="0"/>
+          </a:p>
+        </p:txBody>
+      </p:sp>
+      <p:sp>
+        <p:nvSpPr>
+          <p:cNvPr id="11" name="Shape 9"/>
+          <p:cNvSpPr/>
+          <p:nvPr/>
+        </p:nvSpPr>
+        <p:spPr>
+          <a:xfrm>
+            <a:off x="566928" y="2715768"/>
+            <a:ext cx="5368900" cy="868680"/>
+          </a:xfrm>
+          <a:prstGeom prst="rect">
+            <a:avLst/>
+          </a:prstGeom>
+          <a:solidFill>
+            <a:srgbClr val="F7FAFC"/>
+          </a:solidFill>
+          <a:ln w="6350">
+            <a:solidFill>
+              <a:srgbClr val="D9B668"/>
+            </a:solidFill>
+            <a:prstDash val="solid"/>
+          </a:ln>
+        </p:spPr>
+      </p:sp>
+      <p:sp>
+        <p:nvSpPr>
+          <p:cNvPr id="12" name="Shape 10"/>
+          <p:cNvSpPr/>
+          <p:nvPr/>
+        </p:nvSpPr>
+        <p:spPr>
+          <a:xfrm>
+            <a:off x="704088" y="2880360"/>
+            <a:ext cx="320040" cy="320040"/>
+          </a:xfrm>
+          <a:prstGeom prst="rect">
+            <a:avLst/>
+          </a:prstGeom>
+          <a:solidFill>
+            <a:srgbClr val="977024"/>
+          </a:solidFill>
+          <a:ln/>
+        </p:spPr>
+      </p:sp>
+      <p:sp>
+        <p:nvSpPr>
+          <p:cNvPr id="13" name="Text 11"/>
+          <p:cNvSpPr/>
+          <p:nvPr/>
+        </p:nvSpPr>
+        <p:spPr>
+          <a:xfrm>
+            <a:off x="704088" y="2880360"/>
+            <a:ext cx="320040" cy="320040"/>
+          </a:xfrm>
+          <a:prstGeom prst="rect">
+            <a:avLst/>
+          </a:prstGeom>
+          <a:noFill/>
+          <a:ln/>
+        </p:spPr>
+        <p:txBody>
+          <a:bodyPr wrap="square" rtlCol="0" anchor="ctr"/>
+          <a:lstStyle/>
+          <a:p>
+            <a:pPr algn="ctr" indent="0" marL="0">
+              <a:buNone/>
+            </a:pPr>
+            <a:r>
+              <a:rPr lang="en-US" sz="1100" b="1" dirty="0">
+                <a:solidFill>
+                  <a:srgbClr val="000000"/>
+                </a:solidFill>
+                <a:latin typeface="Pretendard" pitchFamily="34" charset="0"/>
+                <a:ea typeface="Pretendard" pitchFamily="34" charset="-122"/>
+                <a:cs typeface="Pretendard" pitchFamily="34" charset="-120"/>
+              </a:rPr>
+              <a:t>✓</a:t>
+            </a:r>
+            <a:endParaRPr lang="en-US" sz="1100" dirty="0"/>
+          </a:p>
+        </p:txBody>
+      </p:sp>
+      <p:sp>
+        <p:nvSpPr>
+          <p:cNvPr id="14" name="Text 12"/>
+          <p:cNvSpPr/>
+          <p:nvPr/>
+        </p:nvSpPr>
+        <p:spPr>
+          <a:xfrm>
+            <a:off x="1115568" y="2825496"/>
+            <a:ext cx="4683100" cy="685800"/>
+          </a:xfrm>
+          <a:prstGeom prst="rect">
+            <a:avLst/>
+          </a:prstGeom>
+          <a:noFill/>
+          <a:ln/>
+        </p:spPr>
+        <p:txBody>
+          <a:bodyPr wrap="square" rtlCol="0" anchor="ctr"/>
+          <a:lstStyle/>
+          <a:p>
+            <a:pPr indent="0" marL="0">
+              <a:lnSpc>
+                <a:spcPct val="115000"/>
+              </a:lnSpc>
+              <a:buNone/>
+            </a:pPr>
+            <a:r>
+              <a:rPr lang="en-US" sz="1050" dirty="0">
+                <a:solidFill>
+                  <a:srgbClr val="10161F"/>
+                </a:solidFill>
+                <a:latin typeface="Pretendard" pitchFamily="34" charset="0"/>
+                <a:ea typeface="Pretendard" pitchFamily="34" charset="-122"/>
+                <a:cs typeface="Pretendard" pitchFamily="34" charset="-120"/>
+              </a:rPr>
+              <a:t>임대차 원본 계약서 대조 (보증금, 월임대료, 관리비 실입금 내역 및 제소전화해조서)</a:t>
+            </a:r>
+            <a:endParaRPr lang="en-US" sz="1050" dirty="0"/>
+          </a:p>
+        </p:txBody>
+      </p:sp>
+      <p:sp>
+        <p:nvSpPr>
+          <p:cNvPr id="15" name="Shape 13"/>
+          <p:cNvSpPr/>
+          <p:nvPr/>
+        </p:nvSpPr>
+        <p:spPr>
+          <a:xfrm>
+            <a:off x="566928" y="3712464"/>
+            <a:ext cx="5368900" cy="868680"/>
+          </a:xfrm>
+          <a:prstGeom prst="rect">
+            <a:avLst/>
+          </a:prstGeom>
+          <a:solidFill>
+            <a:srgbClr val="F7FAFC"/>
+          </a:solidFill>
+          <a:ln w="6350">
+            <a:solidFill>
+              <a:srgbClr val="D9B668"/>
+            </a:solidFill>
+            <a:prstDash val="solid"/>
+          </a:ln>
+        </p:spPr>
+      </p:sp>
+      <p:sp>
+        <p:nvSpPr>
+          <p:cNvPr id="16" name="Shape 14"/>
+          <p:cNvSpPr/>
+          <p:nvPr/>
+        </p:nvSpPr>
+        <p:spPr>
+          <a:xfrm>
+            <a:off x="704088" y="3877056"/>
+            <a:ext cx="320040" cy="320040"/>
+          </a:xfrm>
+          <a:prstGeom prst="rect">
+            <a:avLst/>
+          </a:prstGeom>
+          <a:solidFill>
+            <a:srgbClr val="977024"/>
+          </a:solidFill>
+          <a:ln/>
+        </p:spPr>
+      </p:sp>
+      <p:sp>
+        <p:nvSpPr>
+          <p:cNvPr id="17" name="Text 15"/>
+          <p:cNvSpPr/>
+          <p:nvPr/>
+        </p:nvSpPr>
+        <p:spPr>
+          <a:xfrm>
+            <a:off x="704088" y="3877056"/>
+            <a:ext cx="320040" cy="320040"/>
+          </a:xfrm>
+          <a:prstGeom prst="rect">
+            <a:avLst/>
+          </a:prstGeom>
+          <a:noFill/>
+          <a:ln/>
+        </p:spPr>
+        <p:txBody>
+          <a:bodyPr wrap="square" rtlCol="0" anchor="ctr"/>
+          <a:lstStyle/>
+          <a:p>
+            <a:pPr algn="ctr" indent="0" marL="0">
+              <a:buNone/>
+            </a:pPr>
+            <a:r>
+              <a:rPr lang="en-US" sz="1100" b="1" dirty="0">
+                <a:solidFill>
+                  <a:srgbClr val="000000"/>
+                </a:solidFill>
+                <a:latin typeface="Pretendard" pitchFamily="34" charset="0"/>
+                <a:ea typeface="Pretendard" pitchFamily="34" charset="-122"/>
+                <a:cs typeface="Pretendard" pitchFamily="34" charset="-120"/>
+              </a:rPr>
+              <a:t>✓</a:t>
+            </a:r>
+            <a:endParaRPr lang="en-US" sz="1100" dirty="0"/>
+          </a:p>
+        </p:txBody>
+      </p:sp>
+      <p:sp>
+        <p:nvSpPr>
+          <p:cNvPr id="18" name="Text 16"/>
+          <p:cNvSpPr/>
+          <p:nvPr/>
+        </p:nvSpPr>
+        <p:spPr>
+          <a:xfrm>
+            <a:off x="1115568" y="3822192"/>
+            <a:ext cx="4683100" cy="685800"/>
+          </a:xfrm>
+          <a:prstGeom prst="rect">
+            <a:avLst/>
+          </a:prstGeom>
+          <a:noFill/>
+          <a:ln/>
+        </p:spPr>
+        <p:txBody>
+          <a:bodyPr wrap="square" rtlCol="0" anchor="ctr"/>
+          <a:lstStyle/>
+          <a:p>
+            <a:pPr indent="0" marL="0">
+              <a:lnSpc>
+                <a:spcPct val="115000"/>
+              </a:lnSpc>
+              <a:buNone/>
+            </a:pPr>
+            <a:r>
+              <a:rPr lang="en-US" sz="1050" dirty="0">
+                <a:solidFill>
+                  <a:srgbClr val="10161F"/>
+                </a:solidFill>
+                <a:latin typeface="Pretendard" pitchFamily="34" charset="0"/>
+                <a:ea typeface="Pretendard" pitchFamily="34" charset="-122"/>
+                <a:cs typeface="Pretendard" pitchFamily="34" charset="-120"/>
+              </a:rPr>
+              <a:t>건축물대장상 위반건축물 등재 여부 및 불법 증축·용도변경 이행강제금 납부 이력 점검</a:t>
+            </a:r>
+            <a:endParaRPr lang="en-US" sz="1050" dirty="0"/>
+          </a:p>
+        </p:txBody>
+      </p:sp>
+      <p:sp>
+        <p:nvSpPr>
+          <p:cNvPr id="19" name="Shape 17"/>
+          <p:cNvSpPr/>
+          <p:nvPr/>
+        </p:nvSpPr>
+        <p:spPr>
+          <a:xfrm>
+            <a:off x="6255868" y="1719072"/>
+            <a:ext cx="5368900" cy="868680"/>
+          </a:xfrm>
+          <a:prstGeom prst="rect">
+            <a:avLst/>
+          </a:prstGeom>
+          <a:solidFill>
+            <a:srgbClr val="F7FAFC"/>
+          </a:solidFill>
+          <a:ln w="6350">
+            <a:solidFill>
+              <a:srgbClr val="D9B668"/>
+            </a:solidFill>
+            <a:prstDash val="solid"/>
+          </a:ln>
+        </p:spPr>
+      </p:sp>
+      <p:sp>
+        <p:nvSpPr>
+          <p:cNvPr id="20" name="Shape 18"/>
+          <p:cNvSpPr/>
+          <p:nvPr/>
+        </p:nvSpPr>
+        <p:spPr>
+          <a:xfrm>
+            <a:off x="6393028" y="1883664"/>
+            <a:ext cx="320040" cy="320040"/>
+          </a:xfrm>
+          <a:prstGeom prst="rect">
+            <a:avLst/>
+          </a:prstGeom>
+          <a:solidFill>
+            <a:srgbClr val="977024"/>
+          </a:solidFill>
+          <a:ln/>
+        </p:spPr>
+      </p:sp>
+      <p:sp>
+        <p:nvSpPr>
+          <p:cNvPr id="21" name="Text 19"/>
+          <p:cNvSpPr/>
+          <p:nvPr/>
+        </p:nvSpPr>
+        <p:spPr>
+          <a:xfrm>
+            <a:off x="6393028" y="1883664"/>
+            <a:ext cx="320040" cy="320040"/>
+          </a:xfrm>
+          <a:prstGeom prst="rect">
+            <a:avLst/>
+          </a:prstGeom>
+          <a:noFill/>
+          <a:ln/>
+        </p:spPr>
+        <p:txBody>
+          <a:bodyPr wrap="square" rtlCol="0" anchor="ctr"/>
+          <a:lstStyle/>
+          <a:p>
+            <a:pPr algn="ctr" indent="0" marL="0">
+              <a:buNone/>
+            </a:pPr>
+            <a:r>
+              <a:rPr lang="en-US" sz="1100" b="1" dirty="0">
+                <a:solidFill>
+                  <a:srgbClr val="000000"/>
+                </a:solidFill>
+                <a:latin typeface="Pretendard" pitchFamily="34" charset="0"/>
+                <a:ea typeface="Pretendard" pitchFamily="34" charset="-122"/>
+                <a:cs typeface="Pretendard" pitchFamily="34" charset="-120"/>
+              </a:rPr>
+              <a:t>✓</a:t>
+            </a:r>
+            <a:endParaRPr lang="en-US" sz="1100" dirty="0"/>
+          </a:p>
+        </p:txBody>
+      </p:sp>
+      <p:sp>
+        <p:nvSpPr>
+          <p:cNvPr id="22" name="Text 20"/>
+          <p:cNvSpPr/>
+          <p:nvPr/>
+        </p:nvSpPr>
+        <p:spPr>
+          <a:xfrm>
+            <a:off x="6804508" y="1828800"/>
+            <a:ext cx="4683100" cy="685800"/>
+          </a:xfrm>
+          <a:prstGeom prst="rect">
+            <a:avLst/>
+          </a:prstGeom>
+          <a:noFill/>
+          <a:ln/>
+        </p:spPr>
+        <p:txBody>
+          <a:bodyPr wrap="square" rtlCol="0" anchor="ctr"/>
+          <a:lstStyle/>
+          <a:p>
+            <a:pPr indent="0" marL="0">
+              <a:lnSpc>
+                <a:spcPct val="115000"/>
+              </a:lnSpc>
+              <a:buNone/>
+            </a:pPr>
+            <a:r>
+              <a:rPr lang="en-US" sz="1050" dirty="0">
+                <a:solidFill>
+                  <a:srgbClr val="10161F"/>
+                </a:solidFill>
+                <a:latin typeface="Pretendard" pitchFamily="34" charset="0"/>
+                <a:ea typeface="Pretendard" pitchFamily="34" charset="-122"/>
+                <a:cs typeface="Pretendard" pitchFamily="34" charset="-120"/>
+              </a:rPr>
+              <a:t>토지이용계획확인원상 도시계획시설 저촉, 건축선 후퇴, 지구단위계획 특별계획구역 확인</a:t>
+            </a:r>
+            <a:endParaRPr lang="en-US" sz="1050" dirty="0"/>
+          </a:p>
+        </p:txBody>
+      </p:sp>
+      <p:sp>
+        <p:nvSpPr>
+          <p:cNvPr id="23" name="Shape 21"/>
+          <p:cNvSpPr/>
+          <p:nvPr/>
+        </p:nvSpPr>
+        <p:spPr>
+          <a:xfrm>
+            <a:off x="6255868" y="2715768"/>
+            <a:ext cx="5368900" cy="868680"/>
+          </a:xfrm>
+          <a:prstGeom prst="rect">
+            <a:avLst/>
+          </a:prstGeom>
+          <a:solidFill>
+            <a:srgbClr val="F7FAFC"/>
+          </a:solidFill>
+          <a:ln w="6350">
+            <a:solidFill>
+              <a:srgbClr val="D9B668"/>
+            </a:solidFill>
+            <a:prstDash val="solid"/>
+          </a:ln>
+        </p:spPr>
+      </p:sp>
+      <p:sp>
+        <p:nvSpPr>
+          <p:cNvPr id="24" name="Shape 22"/>
+          <p:cNvSpPr/>
+          <p:nvPr/>
+        </p:nvSpPr>
+        <p:spPr>
+          <a:xfrm>
+            <a:off x="6393028" y="2880360"/>
+            <a:ext cx="320040" cy="320040"/>
+          </a:xfrm>
+          <a:prstGeom prst="rect">
+            <a:avLst/>
+          </a:prstGeom>
+          <a:solidFill>
+            <a:srgbClr val="977024"/>
+          </a:solidFill>
+          <a:ln/>
+        </p:spPr>
+      </p:sp>
+      <p:sp>
+        <p:nvSpPr>
+          <p:cNvPr id="25" name="Text 23"/>
+          <p:cNvSpPr/>
+          <p:nvPr/>
+        </p:nvSpPr>
+        <p:spPr>
+          <a:xfrm>
+            <a:off x="6393028" y="2880360"/>
+            <a:ext cx="320040" cy="320040"/>
+          </a:xfrm>
+          <a:prstGeom prst="rect">
+            <a:avLst/>
+          </a:prstGeom>
+          <a:noFill/>
+          <a:ln/>
+        </p:spPr>
+        <p:txBody>
+          <a:bodyPr wrap="square" rtlCol="0" anchor="ctr"/>
+          <a:lstStyle/>
+          <a:p>
+            <a:pPr algn="ctr" indent="0" marL="0">
+              <a:buNone/>
+            </a:pPr>
+            <a:r>
+              <a:rPr lang="en-US" sz="1100" b="1" dirty="0">
+                <a:solidFill>
+                  <a:srgbClr val="000000"/>
+                </a:solidFill>
+                <a:latin typeface="Pretendard" pitchFamily="34" charset="0"/>
+                <a:ea typeface="Pretendard" pitchFamily="34" charset="-122"/>
+                <a:cs typeface="Pretendard" pitchFamily="34" charset="-120"/>
+              </a:rPr>
+              <a:t>✓</a:t>
+            </a:r>
+            <a:endParaRPr lang="en-US" sz="1100" dirty="0"/>
+          </a:p>
+        </p:txBody>
+      </p:sp>
+      <p:sp>
+        <p:nvSpPr>
+          <p:cNvPr id="26" name="Text 24"/>
+          <p:cNvSpPr/>
+          <p:nvPr/>
+        </p:nvSpPr>
+        <p:spPr>
+          <a:xfrm>
+            <a:off x="6804508" y="2825496"/>
+            <a:ext cx="4683100" cy="685800"/>
+          </a:xfrm>
+          <a:prstGeom prst="rect">
+            <a:avLst/>
+          </a:prstGeom>
+          <a:noFill/>
+          <a:ln/>
+        </p:spPr>
+        <p:txBody>
+          <a:bodyPr wrap="square" rtlCol="0" anchor="ctr"/>
+          <a:lstStyle/>
+          <a:p>
+            <a:pPr indent="0" marL="0">
+              <a:lnSpc>
+                <a:spcPct val="115000"/>
+              </a:lnSpc>
+              <a:buNone/>
+            </a:pPr>
+            <a:r>
+              <a:rPr lang="en-US" sz="1050" dirty="0">
+                <a:solidFill>
+                  <a:srgbClr val="10161F"/>
+                </a:solidFill>
+                <a:latin typeface="Pretendard" pitchFamily="34" charset="0"/>
+                <a:ea typeface="Pretendard" pitchFamily="34" charset="-122"/>
+                <a:cs typeface="Pretendard" pitchFamily="34" charset="-120"/>
+              </a:rPr>
+              <a:t>기계식 주차기 정기 안전점검 합격증, 승강기 검사필증, 소방 완비증명서 실물 실사</a:t>
+            </a:r>
+            <a:endParaRPr lang="en-US" sz="1050" dirty="0"/>
+          </a:p>
+        </p:txBody>
+      </p:sp>
+      <p:sp>
+        <p:nvSpPr>
+          <p:cNvPr id="27" name="Shape 25"/>
+          <p:cNvSpPr/>
+          <p:nvPr/>
+        </p:nvSpPr>
+        <p:spPr>
+          <a:xfrm>
+            <a:off x="6255868" y="3712464"/>
+            <a:ext cx="5368900" cy="868680"/>
+          </a:xfrm>
+          <a:prstGeom prst="rect">
+            <a:avLst/>
+          </a:prstGeom>
+          <a:solidFill>
+            <a:srgbClr val="F7FAFC"/>
+          </a:solidFill>
+          <a:ln w="6350">
+            <a:solidFill>
+              <a:srgbClr val="D9B668"/>
+            </a:solidFill>
+            <a:prstDash val="solid"/>
+          </a:ln>
+        </p:spPr>
+      </p:sp>
+      <p:sp>
+        <p:nvSpPr>
+          <p:cNvPr id="28" name="Shape 26"/>
+          <p:cNvSpPr/>
+          <p:nvPr/>
+        </p:nvSpPr>
+        <p:spPr>
+          <a:xfrm>
+            <a:off x="6393028" y="3877056"/>
+            <a:ext cx="320040" cy="320040"/>
+          </a:xfrm>
+          <a:prstGeom prst="rect">
+            <a:avLst/>
+          </a:prstGeom>
+          <a:solidFill>
+            <a:srgbClr val="977024"/>
+          </a:solidFill>
+          <a:ln/>
+        </p:spPr>
+      </p:sp>
+      <p:sp>
+        <p:nvSpPr>
+          <p:cNvPr id="29" name="Text 27"/>
+          <p:cNvSpPr/>
+          <p:nvPr/>
+        </p:nvSpPr>
+        <p:spPr>
+          <a:xfrm>
+            <a:off x="6393028" y="3877056"/>
+            <a:ext cx="320040" cy="320040"/>
+          </a:xfrm>
+          <a:prstGeom prst="rect">
+            <a:avLst/>
+          </a:prstGeom>
+          <a:noFill/>
+          <a:ln/>
+        </p:spPr>
+        <p:txBody>
+          <a:bodyPr wrap="square" rtlCol="0" anchor="ctr"/>
+          <a:lstStyle/>
+          <a:p>
+            <a:pPr algn="ctr" indent="0" marL="0">
+              <a:buNone/>
+            </a:pPr>
+            <a:r>
+              <a:rPr lang="en-US" sz="1100" b="1" dirty="0">
+                <a:solidFill>
+                  <a:srgbClr val="000000"/>
+                </a:solidFill>
+                <a:latin typeface="Pretendard" pitchFamily="34" charset="0"/>
+                <a:ea typeface="Pretendard" pitchFamily="34" charset="-122"/>
+                <a:cs typeface="Pretendard" pitchFamily="34" charset="-120"/>
+              </a:rPr>
+              <a:t>✓</a:t>
+            </a:r>
+            <a:endParaRPr lang="en-US" sz="1100" dirty="0"/>
+          </a:p>
+        </p:txBody>
+      </p:sp>
+      <p:sp>
+        <p:nvSpPr>
+          <p:cNvPr id="30" name="Text 28"/>
+          <p:cNvSpPr/>
+          <p:nvPr/>
+        </p:nvSpPr>
+        <p:spPr>
+          <a:xfrm>
+            <a:off x="6804508" y="3822192"/>
+            <a:ext cx="4683100" cy="685800"/>
+          </a:xfrm>
+          <a:prstGeom prst="rect">
+            <a:avLst/>
+          </a:prstGeom>
+          <a:noFill/>
+          <a:ln/>
+        </p:spPr>
+        <p:txBody>
+          <a:bodyPr wrap="square" rtlCol="0" anchor="ctr"/>
+          <a:lstStyle/>
+          <a:p>
+            <a:pPr indent="0" marL="0">
+              <a:lnSpc>
+                <a:spcPct val="115000"/>
+              </a:lnSpc>
+              <a:buNone/>
+            </a:pPr>
+            <a:r>
+              <a:rPr lang="en-US" sz="1050" dirty="0">
+                <a:solidFill>
+                  <a:srgbClr val="10161F"/>
+                </a:solidFill>
+                <a:latin typeface="Pretendard" pitchFamily="34" charset="0"/>
+                <a:ea typeface="Pretendard" pitchFamily="34" charset="-122"/>
+                <a:cs typeface="Pretendard" pitchFamily="34" charset="-120"/>
+              </a:rPr>
+              <a:t>정화조 용량 대비 현 업종 적합성 및 하수도 원인자부담금 추가 부과 대상 여부 확인</a:t>
+            </a:r>
+            <a:endParaRPr lang="en-US" sz="1050" dirty="0"/>
+          </a:p>
+        </p:txBody>
+      </p:sp>
+      <p:sp>
+        <p:nvSpPr>
+          <p:cNvPr id="31" name="Shape 29"/>
+          <p:cNvSpPr/>
+          <p:nvPr/>
+        </p:nvSpPr>
+        <p:spPr>
+          <a:xfrm>
+            <a:off x="566928" y="5760720"/>
+            <a:ext cx="11057839" cy="594360"/>
+          </a:xfrm>
+          <a:prstGeom prst="rect">
+            <a:avLst/>
+          </a:prstGeom>
+          <a:solidFill>
+            <a:srgbClr val="D9B668"/>
+          </a:solidFill>
+          <a:ln/>
+        </p:spPr>
+      </p:sp>
+      <p:sp>
+        <p:nvSpPr>
+          <p:cNvPr id="32" name="Text 30"/>
+          <p:cNvSpPr/>
+          <p:nvPr/>
+        </p:nvSpPr>
+        <p:spPr>
+          <a:xfrm>
+            <a:off x="749808" y="5833872"/>
+            <a:ext cx="10692079" cy="448056"/>
+          </a:xfrm>
+          <a:prstGeom prst="rect">
+            <a:avLst/>
+          </a:prstGeom>
+          <a:noFill/>
+          <a:ln/>
+        </p:spPr>
+        <p:txBody>
+          <a:bodyPr wrap="square" rtlCol="0" anchor="ctr"/>
+          <a:lstStyle/>
+          <a:p>
+            <a:pPr indent="0" marL="0">
+              <a:buNone/>
+            </a:pPr>
+            <a:r>
+              <a:rPr lang="en-US" sz="950" b="1" dirty="0">
+                <a:solidFill>
+                  <a:srgbClr val="977024"/>
+                </a:solidFill>
+                <a:latin typeface="Pretendard" pitchFamily="34" charset="0"/>
+                <a:ea typeface="Pretendard" pitchFamily="34" charset="-122"/>
+                <a:cs typeface="Pretendard" pitchFamily="34" charset="-120"/>
+              </a:rPr>
+              <a:t>※ 본 체크리스트는 계약 전 매수인의 안전한 자산 인수를 위한 필수 확인 사항이며, 실사(Due Diligence) 결과에 따라 매매 조건 및 잔금 일정이 조정될 수 있습니다.</a:t>
+            </a:r>
+            <a:endParaRPr lang="en-US" sz="950" dirty="0"/>
+          </a:p>
+        </p:txBody>
+      </p:sp>
+      <p:sp>
+        <p:nvSpPr>
+          <p:cNvPr id="33" name="Text 31"/>
+          <p:cNvSpPr/>
+          <p:nvPr/>
+        </p:nvSpPr>
+        <p:spPr>
+          <a:xfrm>
+            <a:off x="566928" y="6382512"/>
+            <a:ext cx="7315200" cy="219456"/>
+          </a:xfrm>
+          <a:prstGeom prst="rect">
+            <a:avLst/>
+          </a:prstGeom>
+          <a:noFill/>
+          <a:ln/>
+        </p:spPr>
+        <p:txBody>
+          <a:bodyPr wrap="square" lIns="0" tIns="0" rIns="0" bIns="0" rtlCol="0" anchor="ctr"/>
+          <a:lstStyle/>
+          <a:p>
+            <a:pPr indent="0" marL="0">
+              <a:buNone/>
+            </a:pPr>
+            <a:r>
+              <a:rPr lang="en-US" sz="800" dirty="0">
+                <a:solidFill>
+                  <a:srgbClr val="718096"/>
+                </a:solidFill>
+                <a:latin typeface="Pretendard" pitchFamily="34" charset="0"/>
+                <a:ea typeface="Pretendard" pitchFamily="34" charset="-122"/>
+                <a:cs typeface="Pretendard" pitchFamily="34" charset="-120"/>
+              </a:rPr>
+              <a:t>크리딜   |   </a:t>
+            </a:r>
+            <a:endParaRPr lang="en-US" sz="800" dirty="0"/>
+          </a:p>
+        </p:txBody>
+      </p:sp>
+      <p:sp>
+        <p:nvSpPr>
+          <p:cNvPr id="34" name="Text 32"/>
+          <p:cNvSpPr/>
+          <p:nvPr/>
+        </p:nvSpPr>
+        <p:spPr>
+          <a:xfrm>
+            <a:off x="10710367" y="6382512"/>
+            <a:ext cx="914400" cy="219456"/>
+          </a:xfrm>
+          <a:prstGeom prst="rect">
+            <a:avLst/>
+          </a:prstGeom>
+          <a:noFill/>
+          <a:ln/>
+        </p:spPr>
+        <p:txBody>
+          <a:bodyPr wrap="square" lIns="0" tIns="0" rIns="0" bIns="0" rtlCol="0" anchor="ctr"/>
+          <a:lstStyle/>
+          <a:p>
+            <a:pPr algn="r" indent="0" marL="0">
+              <a:buNone/>
+            </a:pPr>
+            <a:r>
+              <a:rPr lang="en-US" sz="900" b="1" dirty="0">
+                <a:solidFill>
+                  <a:srgbClr val="B98A2E"/>
+                </a:solidFill>
+                <a:latin typeface="Arial" pitchFamily="34" charset="0"/>
+                <a:ea typeface="Arial" pitchFamily="34" charset="-122"/>
+                <a:cs typeface="Arial" pitchFamily="34" charset="-120"/>
+              </a:rPr>
+              <a:t>12</a:t>
+            </a:r>
+            <a:endParaRPr lang="en-US" sz="900" dirty="0"/>
+          </a:p>
+        </p:txBody>
+      </p:sp>
+    </p:spTree>
+  </p:cSld>
+  <p:clrMapOvr>
+    <a:masterClrMapping/>
+  </p:clrMapOvr>
+</p:sld>
+</file>
+
+<file path=ppt/slides/slide15.xml><?xml version="1.0" encoding="utf-8"?>
+<p:sld xmlns:a="http://schemas.openxmlformats.org/drawingml/2006/main" xmlns:r="http://schemas.openxmlformats.org/officeDocument/2006/relationships" xmlns:p="http://schemas.openxmlformats.org/presentationml/2006/main">
+  <p:cSld name="Slide 15">
+    <p:bg>
+      <p:bgPr>
+        <a:solidFill>
+          <a:srgbClr val="FFFFFF"/>
+        </a:solidFill>
+      </p:bgPr>
+    </p:bg>
+    <p:spTree>
+      <p:nvGrpSpPr>
+        <p:cNvPr id="1" name=""/>
+        <p:cNvGrpSpPr/>
+        <p:nvPr/>
+      </p:nvGrpSpPr>
+      <p:grpSpPr>
+        <a:xfrm>
+          <a:off x="0" y="0"/>
+          <a:ext cx="0" cy="0"/>
+          <a:chOff x="0" y="0"/>
+          <a:chExt cx="0" cy="0"/>
+        </a:xfrm>
+      </p:grpSpPr>
+      <p:sp>
+        <p:nvSpPr>
+          <p:cNvPr id="2" name="Shape 0"/>
+          <p:cNvSpPr/>
+          <p:nvPr/>
+        </p:nvSpPr>
+        <p:spPr>
+          <a:xfrm>
+            <a:off x="566928" y="457200"/>
+            <a:ext cx="384048" cy="384048"/>
+          </a:xfrm>
+          <a:prstGeom prst="ellipse">
+            <a:avLst/>
+          </a:prstGeom>
+          <a:solidFill>
+            <a:srgbClr val="B98A2E"/>
+          </a:solidFill>
+          <a:ln/>
+        </p:spPr>
+      </p:sp>
+      <p:sp>
+        <p:nvSpPr>
+          <p:cNvPr id="3" name="Text 1"/>
+          <p:cNvSpPr/>
+          <p:nvPr/>
+        </p:nvSpPr>
+        <p:spPr>
+          <a:xfrm>
+            <a:off x="566928" y="457200"/>
+            <a:ext cx="384048" cy="384048"/>
+          </a:xfrm>
+          <a:prstGeom prst="rect">
+            <a:avLst/>
+          </a:prstGeom>
+          <a:noFill/>
+          <a:ln/>
+        </p:spPr>
+        <p:txBody>
+          <a:bodyPr wrap="square" lIns="0" tIns="0" rIns="0" bIns="0" rtlCol="0" anchor="ctr"/>
+          <a:lstStyle/>
+          <a:p>
+            <a:pPr algn="ctr" indent="0" marL="0">
+              <a:buNone/>
+            </a:pPr>
+            <a:r>
+              <a:rPr lang="en-US" sz="1300" b="1" dirty="0">
+                <a:solidFill>
+                  <a:srgbClr val="FFFFFF"/>
+                </a:solidFill>
+                <a:latin typeface="Arial" pitchFamily="34" charset="0"/>
+                <a:ea typeface="Arial" pitchFamily="34" charset="-122"/>
+                <a:cs typeface="Arial" pitchFamily="34" charset="-120"/>
+              </a:rPr>
+              <a:t>13</a:t>
+            </a:r>
+            <a:endParaRPr lang="en-US" sz="1300" dirty="0"/>
+          </a:p>
+        </p:txBody>
+      </p:sp>
+      <p:sp>
+        <p:nvSpPr>
+          <p:cNvPr id="4" name="Text 2"/>
+          <p:cNvSpPr/>
+          <p:nvPr/>
+        </p:nvSpPr>
+        <p:spPr>
+          <a:xfrm>
+            <a:off x="1133856" y="457200"/>
+            <a:ext cx="10490911" cy="182880"/>
+          </a:xfrm>
+          <a:prstGeom prst="rect">
+            <a:avLst/>
+          </a:prstGeom>
+          <a:noFill/>
+          <a:ln/>
+        </p:spPr>
+        <p:txBody>
+          <a:bodyPr wrap="square" lIns="0" tIns="0" rIns="0" bIns="0" rtlCol="0" anchor="ctr"/>
+          <a:lstStyle/>
+          <a:p>
+            <a:pPr indent="0" marL="0">
+              <a:buNone/>
+            </a:pPr>
+            <a:r>
+              <a:rPr lang="en-US" sz="950" b="1" spc="200" kern="0" dirty="0">
+                <a:solidFill>
+                  <a:srgbClr val="B98A2E"/>
+                </a:solidFill>
+                <a:latin typeface="Arial" pitchFamily="34" charset="0"/>
+                <a:ea typeface="Arial" pitchFamily="34" charset="-122"/>
+                <a:cs typeface="Arial" pitchFamily="34" charset="-120"/>
+              </a:rPr>
+              <a:t>Process</a:t>
+            </a:r>
+            <a:endParaRPr lang="en-US" sz="950" dirty="0"/>
+          </a:p>
+        </p:txBody>
+      </p:sp>
+      <p:sp>
+        <p:nvSpPr>
+          <p:cNvPr id="5" name="Text 3"/>
+          <p:cNvSpPr/>
+          <p:nvPr/>
+        </p:nvSpPr>
+        <p:spPr>
+          <a:xfrm>
+            <a:off x="1133856" y="640080"/>
+            <a:ext cx="10490911" cy="365760"/>
+          </a:xfrm>
+          <a:prstGeom prst="rect">
+            <a:avLst/>
+          </a:prstGeom>
+          <a:noFill/>
+          <a:ln/>
+        </p:spPr>
+        <p:txBody>
+          <a:bodyPr wrap="square" lIns="0" tIns="0" rIns="0" bIns="0" rtlCol="0" anchor="ctr"/>
+          <a:lstStyle/>
+          <a:p>
+            <a:pPr indent="0" marL="0">
+              <a:buNone/>
+            </a:pPr>
+            <a:r>
+              <a:rPr lang="en-US" sz="2300" b="1" dirty="0">
+                <a:solidFill>
+                  <a:srgbClr val="10161F"/>
+                </a:solidFill>
+                <a:latin typeface="Pretendard" pitchFamily="34" charset="0"/>
+                <a:ea typeface="Pretendard" pitchFamily="34" charset="-122"/>
+                <a:cs typeface="Pretendard" pitchFamily="34" charset="-120"/>
+              </a:rPr>
+              <a:t>다음 단계</a:t>
+            </a:r>
+            <a:endParaRPr lang="en-US" sz="2300" dirty="0"/>
+          </a:p>
+        </p:txBody>
+      </p:sp>
+      <p:sp>
+        <p:nvSpPr>
+          <p:cNvPr id="6" name="Shape 4"/>
+          <p:cNvSpPr/>
+          <p:nvPr/>
+        </p:nvSpPr>
+        <p:spPr>
+          <a:xfrm>
+            <a:off x="566928" y="1572768"/>
+            <a:ext cx="11057839" cy="3200400"/>
+          </a:xfrm>
+          <a:prstGeom prst="roundRect">
+            <a:avLst>
+              <a:gd name="adj" fmla="val 1714"/>
+            </a:avLst>
+          </a:prstGeom>
+          <a:solidFill>
+            <a:srgbClr val="F7FAFC"/>
+          </a:solidFill>
+          <a:ln w="6350">
+            <a:solidFill>
+              <a:srgbClr val="CBD5E0"/>
+            </a:solidFill>
+            <a:prstDash val="solid"/>
+          </a:ln>
+        </p:spPr>
+      </p:sp>
+      <p:sp>
+        <p:nvSpPr>
+          <p:cNvPr id="7" name="Shape 5"/>
+          <p:cNvSpPr/>
+          <p:nvPr/>
+        </p:nvSpPr>
+        <p:spPr>
+          <a:xfrm>
+            <a:off x="786384" y="1792224"/>
+            <a:ext cx="438912" cy="438912"/>
+          </a:xfrm>
+          <a:prstGeom prst="ellipse">
+            <a:avLst/>
+          </a:prstGeom>
+          <a:solidFill>
+            <a:srgbClr val="B98A2E"/>
+          </a:solidFill>
+          <a:ln/>
+        </p:spPr>
+      </p:sp>
+      <p:sp>
+        <p:nvSpPr>
+          <p:cNvPr id="8" name="Text 6"/>
+          <p:cNvSpPr/>
+          <p:nvPr/>
+        </p:nvSpPr>
+        <p:spPr>
+          <a:xfrm>
+            <a:off x="786384" y="1792224"/>
+            <a:ext cx="438912" cy="438912"/>
+          </a:xfrm>
+          <a:prstGeom prst="rect">
+            <a:avLst/>
+          </a:prstGeom>
+          <a:noFill/>
+          <a:ln/>
+        </p:spPr>
+        <p:txBody>
+          <a:bodyPr wrap="square" lIns="0" tIns="0" rIns="0" bIns="0" rtlCol="0" anchor="ctr"/>
+          <a:lstStyle/>
+          <a:p>
+            <a:pPr algn="ctr" indent="0" marL="0">
+              <a:buNone/>
+            </a:pPr>
+            <a:r>
+              <a:rPr lang="en-US" sz="1400" b="1" dirty="0">
+                <a:solidFill>
+                  <a:srgbClr val="FFFFFF"/>
+                </a:solidFill>
+                <a:latin typeface="Arial" pitchFamily="34" charset="0"/>
+                <a:ea typeface="Arial" pitchFamily="34" charset="-122"/>
+                <a:cs typeface="Arial" pitchFamily="34" charset="-120"/>
+              </a:rPr>
+              <a:t>01</a:t>
+            </a:r>
+            <a:endParaRPr lang="en-US" sz="1400" dirty="0"/>
+          </a:p>
+        </p:txBody>
+      </p:sp>
+      <p:sp>
+        <p:nvSpPr>
+          <p:cNvPr id="9" name="Text 7"/>
+          <p:cNvSpPr/>
+          <p:nvPr/>
+        </p:nvSpPr>
+        <p:spPr>
+          <a:xfrm>
+            <a:off x="786384" y="2304288"/>
+            <a:ext cx="10618927" cy="365760"/>
+          </a:xfrm>
+          <a:prstGeom prst="rect">
+            <a:avLst/>
+          </a:prstGeom>
+          <a:noFill/>
+          <a:ln/>
+        </p:spPr>
+        <p:txBody>
+          <a:bodyPr wrap="square" rtlCol="0" anchor="ctr"/>
+          <a:lstStyle/>
+          <a:p>
+            <a:pPr indent="0" marL="0">
+              <a:buNone/>
+            </a:pPr>
+            <a:r>
+              <a:rPr lang="en-US" sz="1600" b="1" dirty="0">
+                <a:solidFill>
+                  <a:srgbClr val="10161F"/>
+                </a:solidFill>
+                <a:latin typeface="Pretendard" pitchFamily="34" charset="0"/>
+                <a:ea typeface="Pretendard" pitchFamily="34" charset="-122"/>
+                <a:cs typeface="Pretendard" pitchFamily="34" charset="-120"/>
+              </a:rPr>
+              <a:t>1단계</a:t>
+            </a:r>
+            <a:endParaRPr lang="en-US" sz="1600" dirty="0"/>
+          </a:p>
+        </p:txBody>
+      </p:sp>
+      <p:sp>
+        <p:nvSpPr>
+          <p:cNvPr id="10" name="Text 8"/>
+          <p:cNvSpPr/>
+          <p:nvPr/>
+        </p:nvSpPr>
+        <p:spPr>
+          <a:xfrm>
+            <a:off x="786384" y="2761488"/>
+            <a:ext cx="10618927" cy="1828800"/>
+          </a:xfrm>
+          <a:prstGeom prst="rect">
+            <a:avLst/>
+          </a:prstGeom>
+          <a:noFill/>
+          <a:ln/>
+        </p:spPr>
+        <p:txBody>
+          <a:bodyPr wrap="square" rtlCol="0" anchor="t"/>
+          <a:lstStyle/>
+          <a:p>
+            <a:pPr indent="0" marL="0">
+              <a:buNone/>
+            </a:pPr>
+            <a:r>
+              <a:rPr lang="en-US" sz="1100" dirty="0">
+                <a:solidFill>
+                  <a:srgbClr val="10161F"/>
+                </a:solidFill>
+                <a:latin typeface="Pretendard" pitchFamily="34" charset="0"/>
+                <a:ea typeface="Pretendard" pitchFamily="34" charset="-122"/>
+                <a:cs typeface="Pretendard" pitchFamily="34" charset="-120"/>
+              </a:rPr>
+              <a:t>건축 설계 발주 및 인허가 일정 협의를 권장합니다.</a:t>
+            </a:r>
+            <a:endParaRPr lang="en-US" sz="1100" dirty="0"/>
+          </a:p>
+          <a:p>
+            <a:pPr indent="0" marL="0">
+              <a:buNone/>
+            </a:pPr>
+            <a:r>
+              <a:rPr lang="en-US" sz="1100" dirty="0">
+                <a:solidFill>
+                  <a:srgbClr val="10161F"/>
+                </a:solidFill>
+                <a:latin typeface="Pretendard" pitchFamily="34" charset="0"/>
+                <a:ea typeface="Pretendard" pitchFamily="34" charset="-122"/>
+                <a:cs typeface="Pretendard" pitchFamily="34" charset="-120"/>
+              </a:rPr>
+              <a:t>건축 설계 발주 및 인허가 일정 협의를 권장합니다.</a:t>
+            </a:r>
+            <a:endParaRPr lang="en-US" sz="1100" dirty="0"/>
+          </a:p>
+        </p:txBody>
+      </p:sp>
+      <p:sp>
+        <p:nvSpPr>
+          <p:cNvPr id="11" name="Text 9"/>
+          <p:cNvSpPr/>
+          <p:nvPr/>
+        </p:nvSpPr>
+        <p:spPr>
+          <a:xfrm>
+            <a:off x="566928" y="6382512"/>
+            <a:ext cx="7315200" cy="219456"/>
+          </a:xfrm>
+          <a:prstGeom prst="rect">
+            <a:avLst/>
+          </a:prstGeom>
+          <a:noFill/>
+          <a:ln/>
+        </p:spPr>
+        <p:txBody>
+          <a:bodyPr wrap="square" lIns="0" tIns="0" rIns="0" bIns="0" rtlCol="0" anchor="ctr"/>
+          <a:lstStyle/>
+          <a:p>
+            <a:pPr indent="0" marL="0">
+              <a:buNone/>
+            </a:pPr>
+            <a:r>
+              <a:rPr lang="en-US" sz="800" dirty="0">
+                <a:solidFill>
+                  <a:srgbClr val="718096"/>
+                </a:solidFill>
+                <a:latin typeface="Pretendard" pitchFamily="34" charset="0"/>
+                <a:ea typeface="Pretendard" pitchFamily="34" charset="-122"/>
+                <a:cs typeface="Pretendard" pitchFamily="34" charset="-120"/>
+              </a:rPr>
+              <a:t>크리딜   |   </a:t>
+            </a:r>
+            <a:endParaRPr lang="en-US" sz="800" dirty="0"/>
+          </a:p>
+        </p:txBody>
+      </p:sp>
+      <p:sp>
+        <p:nvSpPr>
+          <p:cNvPr id="12" name="Text 10"/>
+          <p:cNvSpPr/>
+          <p:nvPr/>
+        </p:nvSpPr>
+        <p:spPr>
+          <a:xfrm>
+            <a:off x="10710367" y="6382512"/>
+            <a:ext cx="914400" cy="219456"/>
+          </a:xfrm>
+          <a:prstGeom prst="rect">
+            <a:avLst/>
+          </a:prstGeom>
+          <a:noFill/>
+          <a:ln/>
+        </p:spPr>
+        <p:txBody>
+          <a:bodyPr wrap="square" lIns="0" tIns="0" rIns="0" bIns="0" rtlCol="0" anchor="ctr"/>
+          <a:lstStyle/>
+          <a:p>
+            <a:pPr algn="r" indent="0" marL="0">
+              <a:buNone/>
+            </a:pPr>
+            <a:r>
+              <a:rPr lang="en-US" sz="900" b="1" dirty="0">
+                <a:solidFill>
+                  <a:srgbClr val="B98A2E"/>
+                </a:solidFill>
+                <a:latin typeface="Arial" pitchFamily="34" charset="0"/>
+                <a:ea typeface="Arial" pitchFamily="34" charset="-122"/>
+                <a:cs typeface="Arial" pitchFamily="34" charset="-120"/>
+              </a:rPr>
+              <a:t>13</a:t>
+            </a:r>
+            <a:endParaRPr lang="en-US" sz="900" dirty="0"/>
+          </a:p>
+        </p:txBody>
+      </p:sp>
+    </p:spTree>
+  </p:cSld>
+  <p:clrMapOvr>
+    <a:masterClrMapping/>
+  </p:clrMapOvr>
+</p:sld>
+</file>
+
+<file path=ppt/slides/slide16.xml><?xml version="1.0" encoding="utf-8"?>
+<p:sld xmlns:a="http://schemas.openxmlformats.org/drawingml/2006/main" xmlns:r="http://schemas.openxmlformats.org/officeDocument/2006/relationships" xmlns:p="http://schemas.openxmlformats.org/presentationml/2006/main">
+  <p:cSld name="Slide 16">
     <p:bg>
       <p:bgPr>
         <a:solidFill>
@@ -2418,7 +7269,7 @@
                 <a:ea typeface="Arial" pitchFamily="34" charset="-122"/>
                 <a:cs typeface="Arial" pitchFamily="34" charset="-120"/>
               </a:rPr>
-              <a:t>10</a:t>
+              <a:t>14</a:t>
             </a:r>
             <a:endParaRPr lang="en-US" sz="1300" dirty="0"/>
           </a:p>
@@ -2457,7 +7308,7 @@
                 <a:ea typeface="Arial" pitchFamily="34" charset="-122"/>
                 <a:cs typeface="Arial" pitchFamily="34" charset="-120"/>
               </a:rPr>
-              <a:t>Disclaimer</a:t>
+              <a:t>Closing</a:t>
             </a:r>
             <a:endParaRPr lang="en-US" sz="950" dirty="0"/>
           </a:p>
@@ -2647,7 +7498,7 @@
               <a:buNone/>
             </a:pPr>
             <a:r>
-              <a:rPr lang="en-US" sz="850" dirty="0">
+              <a:rPr lang="en-US" sz="900" dirty="0">
                 <a:solidFill>
                   <a:srgbClr val="A0AEC0"/>
                 </a:solidFill>
@@ -2657,7 +7508,7 @@
               </a:rPr>
               <a:t>담당 중개사에게 초기 관심 표명 및 상담 요청</a:t>
             </a:r>
-            <a:endParaRPr lang="en-US" sz="850" dirty="0"/>
+            <a:endParaRPr lang="en-US" sz="900" dirty="0"/>
           </a:p>
         </p:txBody>
       </p:sp>
@@ -2845,7 +7696,7 @@
               <a:buNone/>
             </a:pPr>
             <a:r>
-              <a:rPr lang="en-US" sz="850" dirty="0">
+              <a:rPr lang="en-US" sz="900" dirty="0">
                 <a:solidFill>
                   <a:srgbClr val="A0AEC0"/>
                 </a:solidFill>
@@ -2855,7 +7706,7 @@
               </a:rPr>
               <a:t>비밀유지계약 후 상세 임대차·재무 자료 제공</a:t>
             </a:r>
-            <a:endParaRPr lang="en-US" sz="850" dirty="0"/>
+            <a:endParaRPr lang="en-US" sz="900" dirty="0"/>
           </a:p>
         </p:txBody>
       </p:sp>
@@ -3043,7 +7894,7 @@
               <a:buNone/>
             </a:pPr>
             <a:r>
-              <a:rPr lang="en-US" sz="850" dirty="0">
+              <a:rPr lang="en-US" sz="900" dirty="0">
                 <a:solidFill>
                   <a:srgbClr val="A0AEC0"/>
                 </a:solidFill>
@@ -3053,7 +7904,7 @@
               </a:rPr>
               <a:t>건물 컨디션 및 설비 직접 확인 후 의향서(LOI) 제출</a:t>
             </a:r>
-            <a:endParaRPr lang="en-US" sz="850" dirty="0"/>
+            <a:endParaRPr lang="en-US" sz="900" dirty="0"/>
           </a:p>
         </p:txBody>
       </p:sp>
@@ -3143,7 +7994,7 @@
               <a:buNone/>
             </a:pPr>
             <a:r>
-              <a:rPr lang="en-US" sz="850" b="1" dirty="0">
+              <a:rPr lang="en-US" sz="900" b="1" dirty="0">
                 <a:solidFill>
                   <a:srgbClr val="FFFFFF"/>
                 </a:solidFill>
@@ -3153,7 +8004,7 @@
               </a:rPr>
               <a:t>✓ 공부확인</a:t>
             </a:r>
-            <a:endParaRPr lang="en-US" sz="850" dirty="0"/>
+            <a:endParaRPr lang="en-US" sz="900" dirty="0"/>
           </a:p>
         </p:txBody>
       </p:sp>
@@ -3243,7 +8094,7 @@
               <a:buNone/>
             </a:pPr>
             <a:r>
-              <a:rPr lang="en-US" sz="850" b="1" dirty="0">
+              <a:rPr lang="en-US" sz="900" b="1" dirty="0">
                 <a:solidFill>
                   <a:srgbClr val="FFFFFF"/>
                 </a:solidFill>
@@ -3253,7 +8104,7 @@
               </a:rPr>
               <a:t>★ 전문가검증</a:t>
             </a:r>
-            <a:endParaRPr lang="en-US" sz="850" dirty="0"/>
+            <a:endParaRPr lang="en-US" sz="900" dirty="0"/>
           </a:p>
         </p:txBody>
       </p:sp>
@@ -3343,7 +8194,7 @@
               <a:buNone/>
             </a:pPr>
             <a:r>
-              <a:rPr lang="en-US" sz="850" b="1" dirty="0">
+              <a:rPr lang="en-US" sz="900" b="1" dirty="0">
                 <a:solidFill>
                   <a:srgbClr val="FFFFFF"/>
                 </a:solidFill>
@@ -3353,7 +8204,7 @@
               </a:rPr>
               <a:t>▲ 매도인고지</a:t>
             </a:r>
-            <a:endParaRPr lang="en-US" sz="850" dirty="0"/>
+            <a:endParaRPr lang="en-US" sz="900" dirty="0"/>
           </a:p>
         </p:txBody>
       </p:sp>
@@ -3443,7 +8294,7 @@
               <a:buNone/>
             </a:pPr>
             <a:r>
-              <a:rPr lang="en-US" sz="850" b="1" dirty="0">
+              <a:rPr lang="en-US" sz="900" b="1" dirty="0">
                 <a:solidFill>
                   <a:srgbClr val="FFFFFF"/>
                 </a:solidFill>
@@ -3453,7 +8304,7 @@
               </a:rPr>
               <a:t>● 중개인입력</a:t>
             </a:r>
-            <a:endParaRPr lang="en-US" sz="850" dirty="0"/>
+            <a:endParaRPr lang="en-US" sz="900" dirty="0"/>
           </a:p>
         </p:txBody>
       </p:sp>
@@ -3543,7 +8394,7 @@
               <a:buNone/>
             </a:pPr>
             <a:r>
-              <a:rPr lang="en-US" sz="850" b="1" dirty="0">
+              <a:rPr lang="en-US" sz="900" b="1" dirty="0">
                 <a:solidFill>
                   <a:srgbClr val="FFFFFF"/>
                 </a:solidFill>
@@ -3553,7 +8404,7 @@
               </a:rPr>
               <a:t>◇ AI추정·가정</a:t>
             </a:r>
-            <a:endParaRPr lang="en-US" sz="850" dirty="0"/>
+            <a:endParaRPr lang="en-US" sz="900" dirty="0"/>
           </a:p>
         </p:txBody>
       </p:sp>
@@ -3685,7 +8536,7 @@
               <a:buNone/>
             </a:pPr>
             <a:r>
-              <a:rPr lang="en-US" sz="850" dirty="0">
+              <a:rPr lang="en-US" sz="900" dirty="0">
                 <a:solidFill>
                   <a:srgbClr val="A0AEC0"/>
                 </a:solidFill>
@@ -3695,7 +8546,7 @@
               </a:rPr>
               <a:t>본 자료는 투자 권유가 아니며, 기재된 정보의 정확성을 보증하지 않습니다.</a:t>
             </a:r>
-            <a:endParaRPr lang="en-US" sz="850" dirty="0"/>
+            <a:endParaRPr lang="en-US" sz="900" dirty="0"/>
           </a:p>
         </p:txBody>
       </p:sp>
@@ -3830,7 +8681,7 @@
                 <a:ea typeface="Arial" pitchFamily="34" charset="-122"/>
                 <a:cs typeface="Arial" pitchFamily="34" charset="-120"/>
               </a:rPr>
-              <a:t>10</a:t>
+              <a:t>14</a:t>
             </a:r>
             <a:endParaRPr lang="en-US" sz="900" dirty="0"/>
           </a:p>
@@ -4141,7 +8992,7 @@
         </p:nvSpPr>
         <p:spPr>
           <a:xfrm>
-            <a:off x="731520" y="2276856"/>
+            <a:off x="731520" y="2313432"/>
             <a:ext cx="5108296" cy="402336"/>
           </a:xfrm>
           <a:prstGeom prst="rect">
@@ -4248,7 +9099,7 @@
         </p:nvSpPr>
         <p:spPr>
           <a:xfrm>
-            <a:off x="6351880" y="2276856"/>
+            <a:off x="6351880" y="2313432"/>
             <a:ext cx="5108296" cy="402336"/>
           </a:xfrm>
           <a:prstGeom prst="rect">
@@ -4963,117 +9814,9 @@
           </a:p>
         </p:txBody>
       </p:sp>
-      <p:pic>
-        <p:nvPicPr>
-          <p:cNvPr id="6" name="Image 0" descr="preencoded.png">    </p:cNvPr>
-          <p:cNvPicPr>
-            <a:picLocks noChangeAspect="1"/>
-          </p:cNvPicPr>
-          <p:nvPr/>
-        </p:nvPicPr>
-        <p:blipFill>
-          <a:blip r:embed="rId1"/>
-          <a:stretch>
-            <a:fillRect/>
-          </a:stretch>
-        </p:blipFill>
-        <p:spPr>
-          <a:xfrm>
-            <a:off x="566928" y="1481328"/>
-            <a:ext cx="5120640" cy="4114800"/>
-          </a:xfrm>
-          <a:prstGeom prst="rect">
-            <a:avLst/>
-          </a:prstGeom>
-        </p:spPr>
-      </p:pic>
-      <p:sp>
-        <p:nvSpPr>
-          <p:cNvPr id="7" name="Text 4"/>
-          <p:cNvSpPr/>
-          <p:nvPr/>
-        </p:nvSpPr>
-        <p:spPr>
-          <a:xfrm>
-            <a:off x="6053328" y="1481328"/>
-            <a:ext cx="2117147" cy="493776"/>
-          </a:xfrm>
-          <a:prstGeom prst="rect">
-            <a:avLst/>
-          </a:prstGeom>
-          <a:noFill/>
-          <a:ln/>
-        </p:spPr>
-        <p:txBody>
-          <a:bodyPr wrap="square" lIns="0" tIns="0" rIns="0" bIns="0" rtlCol="0" anchor="ctr"/>
-          <a:lstStyle/>
-          <a:p>
-            <a:pPr indent="0" marL="0">
-              <a:lnSpc>
-                <a:spcPct val="120000"/>
-              </a:lnSpc>
-              <a:buNone/>
-            </a:pPr>
-            <a:r>
-              <a:rPr lang="en-US" sz="1300" dirty="0">
-                <a:solidFill>
-                  <a:srgbClr val="718096"/>
-                </a:solidFill>
-                <a:latin typeface="Pretendard" pitchFamily="34" charset="0"/>
-                <a:ea typeface="Pretendard" pitchFamily="34" charset="-122"/>
-                <a:cs typeface="Pretendard" pitchFamily="34" charset="-120"/>
-              </a:rPr>
-              <a:t>교통 접근성</a:t>
-            </a:r>
-            <a:endParaRPr lang="en-US" sz="1300" dirty="0"/>
-          </a:p>
-        </p:txBody>
-      </p:sp>
-      <p:sp>
-        <p:nvSpPr>
-          <p:cNvPr id="8" name="Text 5"/>
-          <p:cNvSpPr/>
-          <p:nvPr/>
-        </p:nvSpPr>
-        <p:spPr>
-          <a:xfrm>
-            <a:off x="8170475" y="1481328"/>
-            <a:ext cx="3454292" cy="493776"/>
-          </a:xfrm>
-          <a:prstGeom prst="rect">
-            <a:avLst/>
-          </a:prstGeom>
-          <a:noFill/>
-          <a:ln/>
-        </p:spPr>
-        <p:txBody>
-          <a:bodyPr wrap="square" lIns="0" tIns="0" rIns="0" bIns="0" rtlCol="0" anchor="ctr"/>
-          <a:lstStyle/>
-          <a:p>
-            <a:pPr indent="0" marL="0">
-              <a:lnSpc>
-                <a:spcPct val="120000"/>
-              </a:lnSpc>
-              <a:buNone/>
-            </a:pPr>
-            <a:r>
-              <a:rPr lang="en-US" sz="1300" b="1" dirty="0">
-                <a:solidFill>
-                  <a:srgbClr val="10161F"/>
-                </a:solidFill>
-                <a:latin typeface="Pretendard" pitchFamily="34" charset="0"/>
-                <a:ea typeface="Pretendard" pitchFamily="34" charset="-122"/>
-                <a:cs typeface="Pretendard" pitchFamily="34" charset="-120"/>
-              </a:rPr>
-              <a:t>역삼역 도보 4분, 테헤란로 메인 이면입니다.</a:t>
-            </a:r>
-            <a:endParaRPr lang="en-US" sz="1300" dirty="0"/>
-          </a:p>
-        </p:txBody>
-      </p:sp>
-      <p:sp>
-        <p:nvSpPr>
-          <p:cNvPr id="9" name="Text 6"/>
+      <p:sp>
+        <p:nvSpPr>
+          <p:cNvPr id="6" name="Text 4"/>
           <p:cNvSpPr/>
           <p:nvPr/>
         </p:nvSpPr>
@@ -5112,7 +9855,7 @@
       </p:sp>
       <p:sp>
         <p:nvSpPr>
-          <p:cNvPr id="10" name="Text 7"/>
+          <p:cNvPr id="7" name="Text 5"/>
           <p:cNvSpPr/>
           <p:nvPr/>
         </p:nvSpPr>
@@ -5146,45 +9889,6 @@
               <a:t>3</a:t>
             </a:r>
             <a:endParaRPr lang="en-US" sz="900" dirty="0"/>
-          </a:p>
-        </p:txBody>
-      </p:sp>
-      <p:sp>
-        <p:nvSpPr>
-          <p:cNvPr id="11" name="Text 8"/>
-          <p:cNvSpPr/>
-          <p:nvPr/>
-        </p:nvSpPr>
-        <p:spPr>
-          <a:xfrm>
-            <a:off x="566928" y="1481328"/>
-            <a:ext cx="11057839" cy="237744"/>
-          </a:xfrm>
-          <a:prstGeom prst="rect">
-            <a:avLst/>
-          </a:prstGeom>
-          <a:noFill/>
-          <a:ln/>
-        </p:spPr>
-        <p:txBody>
-          <a:bodyPr wrap="square" lIns="0" tIns="0" rIns="0" bIns="0" rtlCol="0" anchor="t"/>
-          <a:lstStyle/>
-          <a:p>
-            <a:pPr indent="0" marL="0">
-              <a:buNone/>
-            </a:pPr>
-            <a:r>
-              <a:rPr lang="en-US" sz="1000" dirty="0">
-                <a:solidFill>
-                  <a:srgbClr val="10161F"/>
-                </a:solidFill>
-                <a:latin typeface="Pretendard" pitchFamily="34" charset="0"/>
-                <a:ea typeface="Pretendard" pitchFamily="34" charset="-122"/>
-                <a:cs typeface="Pretendard" pitchFamily="34" charset="-120"/>
-              </a:rPr>
-              <a:t>역삼역 도보 4분, 테헤란로 메인 이면입니다.</a:t>
-            </a:r>
-            <a:endParaRPr lang="en-US" sz="1000" dirty="0"/>
           </a:p>
         </p:txBody>
       </p:sp>
@@ -5273,7 +9977,7 @@
                 <a:ea typeface="Arial" pitchFamily="34" charset="-122"/>
                 <a:cs typeface="Arial" pitchFamily="34" charset="-120"/>
               </a:rPr>
-              <a:t>04</a:t>
+              <a:t>03</a:t>
             </a:r>
             <a:endParaRPr lang="en-US" sz="1300" dirty="0"/>
           </a:p>
@@ -5312,7 +10016,7 @@
                 <a:ea typeface="Arial" pitchFamily="34" charset="-122"/>
                 <a:cs typeface="Arial" pitchFamily="34" charset="-120"/>
               </a:rPr>
-              <a:t>Building</a:t>
+              <a:t>Land</a:t>
             </a:r>
             <a:endParaRPr lang="en-US" sz="950" dirty="0"/>
           </a:p>
@@ -5351,7 +10055,7 @@
                 <a:ea typeface="Pretendard" pitchFamily="34" charset="-122"/>
                 <a:cs typeface="Pretendard" pitchFamily="34" charset="-120"/>
               </a:rPr>
-              <a:t>물건 개요</a:t>
+              <a:t>토지</a:t>
             </a:r>
             <a:endParaRPr lang="en-US" sz="2300" dirty="0"/>
           </a:p>
@@ -5390,7 +10094,7 @@
                 <a:ea typeface="Pretendard" pitchFamily="34" charset="-122"/>
                 <a:cs typeface="Pretendard" pitchFamily="34" charset="-120"/>
               </a:rPr>
-              <a:t>건축물 개요 및 물리 스펙</a:t>
+              <a:t>토지 현황</a:t>
             </a:r>
             <a:endParaRPr lang="en-US" sz="1100" dirty="0"/>
           </a:p>
@@ -5405,7 +10109,7 @@
         <p:spPr>
           <a:xfrm>
             <a:off x="566928" y="1645920"/>
-            <a:ext cx="2606040" cy="402336"/>
+            <a:ext cx="2606040" cy="438912"/>
           </a:xfrm>
           <a:prstGeom prst="rect">
             <a:avLst/>
@@ -5424,7 +10128,7 @@
               <a:buNone/>
             </a:pPr>
             <a:r>
-              <a:rPr lang="en-US" sz="1400" dirty="0">
+              <a:rPr lang="en-US" sz="1350" dirty="0">
                 <a:solidFill>
                   <a:srgbClr val="718096"/>
                 </a:solidFill>
@@ -5434,7 +10138,7 @@
               </a:rPr>
               <a:t>대지면적</a:t>
             </a:r>
-            <a:endParaRPr lang="en-US" sz="1400" dirty="0"/>
+            <a:endParaRPr lang="en-US" sz="1350" dirty="0"/>
           </a:p>
         </p:txBody>
       </p:sp>
@@ -5447,7 +10151,7 @@
         <p:spPr>
           <a:xfrm>
             <a:off x="3172968" y="1645920"/>
-            <a:ext cx="4251960" cy="402336"/>
+            <a:ext cx="4251960" cy="438912"/>
           </a:xfrm>
           <a:prstGeom prst="rect">
             <a:avLst/>
@@ -5466,7 +10170,7 @@
               <a:buNone/>
             </a:pPr>
             <a:r>
-              <a:rPr lang="en-US" sz="1400" b="1" dirty="0">
+              <a:rPr lang="en-US" sz="1350" b="1" dirty="0">
                 <a:solidFill>
                   <a:srgbClr val="10161F"/>
                 </a:solidFill>
@@ -5476,7 +10180,7 @@
               </a:rPr>
               <a:t>168.5평</a:t>
             </a:r>
-            <a:endParaRPr lang="en-US" sz="1400" dirty="0"/>
+            <a:endParaRPr lang="en-US" sz="1350" dirty="0"/>
           </a:p>
         </p:txBody>
       </p:sp>
@@ -5488,7 +10192,7 @@
         </p:nvSpPr>
         <p:spPr>
           <a:xfrm>
-            <a:off x="566928" y="2048256"/>
+            <a:off x="566928" y="2084832"/>
             <a:ext cx="6858000" cy="0"/>
           </a:xfrm>
           <a:prstGeom prst="line">
@@ -5511,8 +10215,8 @@
         </p:nvSpPr>
         <p:spPr>
           <a:xfrm>
-            <a:off x="566928" y="2048256"/>
-            <a:ext cx="2606040" cy="402336"/>
+            <a:off x="566928" y="2084832"/>
+            <a:ext cx="2606040" cy="438912"/>
           </a:xfrm>
           <a:prstGeom prst="rect">
             <a:avLst/>
@@ -5531,7 +10235,7 @@
               <a:buNone/>
             </a:pPr>
             <a:r>
-              <a:rPr lang="en-US" sz="1400" dirty="0">
+              <a:rPr lang="en-US" sz="1350" dirty="0">
                 <a:solidFill>
                   <a:srgbClr val="718096"/>
                 </a:solidFill>
@@ -5541,7 +10245,7 @@
               </a:rPr>
               <a:t>용도지역</a:t>
             </a:r>
-            <a:endParaRPr lang="en-US" sz="1400" dirty="0"/>
+            <a:endParaRPr lang="en-US" sz="1350" dirty="0"/>
           </a:p>
         </p:txBody>
       </p:sp>
@@ -5553,8 +10257,8 @@
         </p:nvSpPr>
         <p:spPr>
           <a:xfrm>
-            <a:off x="3172968" y="2048256"/>
-            <a:ext cx="4251960" cy="402336"/>
+            <a:off x="3172968" y="2084832"/>
+            <a:ext cx="4251960" cy="438912"/>
           </a:xfrm>
           <a:prstGeom prst="rect">
             <a:avLst/>
@@ -5573,7 +10277,7 @@
               <a:buNone/>
             </a:pPr>
             <a:r>
-              <a:rPr lang="en-US" sz="1400" b="1" dirty="0">
+              <a:rPr lang="en-US" sz="1350" b="1" dirty="0">
                 <a:solidFill>
                   <a:srgbClr val="10161F"/>
                 </a:solidFill>
@@ -5583,7 +10287,7 @@
               </a:rPr>
               <a:t>제3종일반주거</a:t>
             </a:r>
-            <a:endParaRPr lang="en-US" sz="1400" dirty="0"/>
+            <a:endParaRPr lang="en-US" sz="1350" dirty="0"/>
           </a:p>
         </p:txBody>
       </p:sp>
@@ -5619,15 +10323,15 @@
         <p:spPr>
           <a:xfrm>
             <a:off x="7784287" y="1645920"/>
-            <a:ext cx="3840480" cy="1645920"/>
+            <a:ext cx="3840480" cy="2103120"/>
           </a:xfrm>
           <a:prstGeom prst="roundRect">
             <a:avLst>
-              <a:gd name="adj" fmla="val 3333"/>
+              <a:gd name="adj" fmla="val 2609"/>
             </a:avLst>
           </a:prstGeom>
           <a:solidFill>
-            <a:srgbClr val="F3EBDA"/>
+            <a:srgbClr val="BEE3F8"/>
           </a:solidFill>
           <a:ln/>
         </p:spPr>
@@ -5641,13 +10345,13 @@
         <p:spPr>
           <a:xfrm>
             <a:off x="7784287" y="1700784"/>
-            <a:ext cx="36576" cy="1536192"/>
+            <a:ext cx="36576" cy="1993392"/>
           </a:xfrm>
           <a:prstGeom prst="rect">
             <a:avLst/>
           </a:prstGeom>
           <a:solidFill>
-            <a:srgbClr val="977024"/>
+            <a:srgbClr val="2B6CB0"/>
           </a:solidFill>
           <a:ln/>
         </p:spPr>
@@ -5676,6 +10380,17 @@
             <a:pPr indent="0" marL="0">
               <a:buNone/>
             </a:pPr>
+            <a:r>
+              <a:rPr lang="en-US" sz="1050" b="1" dirty="0">
+                <a:solidFill>
+                  <a:srgbClr val="2B6CB0"/>
+                </a:solidFill>
+                <a:latin typeface="Pretendard" pitchFamily="34" charset="0"/>
+                <a:ea typeface="Pretendard" pitchFamily="34" charset="-122"/>
+                <a:cs typeface="Pretendard" pitchFamily="34" charset="-120"/>
+              </a:rPr>
+              <a:t>입지 및 권리관계 실사 포인트</a:t>
+            </a:r>
             <a:endParaRPr lang="en-US" sz="1050" dirty="0"/>
           </a:p>
         </p:txBody>
@@ -5689,7 +10404,7 @@
         <p:spPr>
           <a:xfrm>
             <a:off x="7967167" y="1975104"/>
-            <a:ext cx="3511296" cy="1243584"/>
+            <a:ext cx="3511296" cy="1700784"/>
           </a:xfrm>
           <a:prstGeom prst="rect">
             <a:avLst/>
@@ -5701,11 +10416,12 @@
           <a:bodyPr wrap="square" lIns="0" tIns="0" rIns="0" bIns="0" rtlCol="0" anchor="t"/>
           <a:lstStyle/>
           <a:p>
-            <a:pPr indent="0" marL="0">
+            <a:pPr marL="342900" indent="-342900">
               <a:lnSpc>
                 <a:spcPct val="120000"/>
               </a:lnSpc>
-              <a:buNone/>
+              <a:buSzPct val="100000"/>
+              <a:buChar char="•"/>
             </a:pPr>
             <a:r>
               <a:rPr lang="en-US" sz="930" dirty="0">
@@ -5716,15 +10432,223 @@
                 <a:ea typeface="Pretendard" pitchFamily="34" charset="-122"/>
                 <a:cs typeface="Pretendard" pitchFamily="34" charset="-120"/>
               </a:rPr>
-              <a:t>역삼동 테헤란로 이면 코너 신축 부지입니다.</a:t>
+              <a:t>물건 접면 도로 폭 및 진출입 여건은 현장 실사 확인 사항입니다</a:t>
             </a:r>
             <a:endParaRPr lang="en-US" sz="930" dirty="0"/>
           </a:p>
-        </p:txBody>
-      </p:sp>
-      <p:sp>
-        <p:nvSpPr>
-          <p:cNvPr id="17" name="Text 15"/>
+          <a:p>
+            <a:pPr marL="342900" indent="-342900">
+              <a:lnSpc>
+                <a:spcPct val="120000"/>
+              </a:lnSpc>
+              <a:buSzPct val="100000"/>
+              <a:buChar char="•"/>
+            </a:pPr>
+            <a:r>
+              <a:rPr lang="en-US" sz="930" dirty="0">
+                <a:solidFill>
+                  <a:srgbClr val="10161F"/>
+                </a:solidFill>
+                <a:latin typeface="Pretendard" pitchFamily="34" charset="0"/>
+                <a:ea typeface="Pretendard" pitchFamily="34" charset="-122"/>
+                <a:cs typeface="Pretendard" pitchFamily="34" charset="-120"/>
+              </a:rPr>
+              <a:t>등기부등본상 권리관계 및 제한물권 설정 여부를 확인하였습니다</a:t>
+            </a:r>
+            <a:endParaRPr lang="en-US" sz="930" dirty="0"/>
+          </a:p>
+          <a:p>
+            <a:pPr marL="342900" indent="-342900">
+              <a:lnSpc>
+                <a:spcPct val="120000"/>
+              </a:lnSpc>
+              <a:buSzPct val="100000"/>
+              <a:buChar char="•"/>
+            </a:pPr>
+            <a:r>
+              <a:rPr lang="en-US" sz="930" dirty="0">
+                <a:solidFill>
+                  <a:srgbClr val="10161F"/>
+                </a:solidFill>
+                <a:latin typeface="Pretendard" pitchFamily="34" charset="0"/>
+                <a:ea typeface="Pretendard" pitchFamily="34" charset="-122"/>
+                <a:cs typeface="Pretendard" pitchFamily="34" charset="-120"/>
+              </a:rPr>
+              <a:t>지구단위계획 및 토지이용계획상 허용 용도를 검토하였습니다</a:t>
+            </a:r>
+            <a:endParaRPr lang="en-US" sz="930" dirty="0"/>
+          </a:p>
+        </p:txBody>
+      </p:sp>
+      <p:sp>
+        <p:nvSpPr>
+          <p:cNvPr id="17" name="Shape 15"/>
+          <p:cNvSpPr/>
+          <p:nvPr/>
+        </p:nvSpPr>
+        <p:spPr>
+          <a:xfrm>
+            <a:off x="7784287" y="3977640"/>
+            <a:ext cx="3840480" cy="2148840"/>
+          </a:xfrm>
+          <a:prstGeom prst="roundRect">
+            <a:avLst>
+              <a:gd name="adj" fmla="val 2553"/>
+            </a:avLst>
+          </a:prstGeom>
+          <a:solidFill>
+            <a:srgbClr val="BEE3F8"/>
+          </a:solidFill>
+          <a:ln/>
+        </p:spPr>
+      </p:sp>
+      <p:sp>
+        <p:nvSpPr>
+          <p:cNvPr id="18" name="Shape 16"/>
+          <p:cNvSpPr/>
+          <p:nvPr/>
+        </p:nvSpPr>
+        <p:spPr>
+          <a:xfrm>
+            <a:off x="7784287" y="4032504"/>
+            <a:ext cx="36576" cy="2039112"/>
+          </a:xfrm>
+          <a:prstGeom prst="rect">
+            <a:avLst/>
+          </a:prstGeom>
+          <a:solidFill>
+            <a:srgbClr val="2B6CB0"/>
+          </a:solidFill>
+          <a:ln/>
+        </p:spPr>
+      </p:sp>
+      <p:sp>
+        <p:nvSpPr>
+          <p:cNvPr id="19" name="Text 17"/>
+          <p:cNvSpPr/>
+          <p:nvPr/>
+        </p:nvSpPr>
+        <p:spPr>
+          <a:xfrm>
+            <a:off x="7967167" y="4087368"/>
+            <a:ext cx="3511296" cy="201168"/>
+          </a:xfrm>
+          <a:prstGeom prst="rect">
+            <a:avLst/>
+          </a:prstGeom>
+          <a:noFill/>
+          <a:ln/>
+        </p:spPr>
+        <p:txBody>
+          <a:bodyPr wrap="square" lIns="0" tIns="0" rIns="0" bIns="0" rtlCol="0" anchor="ctr"/>
+          <a:lstStyle/>
+          <a:p>
+            <a:pPr indent="0" marL="0">
+              <a:buNone/>
+            </a:pPr>
+            <a:r>
+              <a:rPr lang="en-US" sz="1050" b="1" dirty="0">
+                <a:solidFill>
+                  <a:srgbClr val="2B6CB0"/>
+                </a:solidFill>
+                <a:latin typeface="Pretendard" pitchFamily="34" charset="0"/>
+                <a:ea typeface="Pretendard" pitchFamily="34" charset="-122"/>
+                <a:cs typeface="Pretendard" pitchFamily="34" charset="-120"/>
+              </a:rPr>
+              <a:t>임대차 및 운용 관리 상태</a:t>
+            </a:r>
+            <a:endParaRPr lang="en-US" sz="1050" dirty="0"/>
+          </a:p>
+        </p:txBody>
+      </p:sp>
+      <p:sp>
+        <p:nvSpPr>
+          <p:cNvPr id="20" name="Text 18"/>
+          <p:cNvSpPr/>
+          <p:nvPr/>
+        </p:nvSpPr>
+        <p:spPr>
+          <a:xfrm>
+            <a:off x="7967167" y="4306824"/>
+            <a:ext cx="3511296" cy="1746504"/>
+          </a:xfrm>
+          <a:prstGeom prst="rect">
+            <a:avLst/>
+          </a:prstGeom>
+          <a:noFill/>
+          <a:ln/>
+        </p:spPr>
+        <p:txBody>
+          <a:bodyPr wrap="square" lIns="0" tIns="0" rIns="0" bIns="0" rtlCol="0" anchor="t"/>
+          <a:lstStyle/>
+          <a:p>
+            <a:pPr marL="342900" indent="-342900">
+              <a:lnSpc>
+                <a:spcPct val="120000"/>
+              </a:lnSpc>
+              <a:buSzPct val="100000"/>
+              <a:buChar char="•"/>
+            </a:pPr>
+            <a:r>
+              <a:rPr lang="en-US" sz="930" dirty="0">
+                <a:solidFill>
+                  <a:srgbClr val="10161F"/>
+                </a:solidFill>
+                <a:latin typeface="Pretendard" pitchFamily="34" charset="0"/>
+                <a:ea typeface="Pretendard" pitchFamily="34" charset="-122"/>
+                <a:cs typeface="Pretendard" pitchFamily="34" charset="-120"/>
+              </a:rPr>
+              <a:t>주요 임차인별 계약 만기 분산 및 렌트롤 실사가 필요합니다</a:t>
+            </a:r>
+            <a:endParaRPr lang="en-US" sz="930" dirty="0"/>
+          </a:p>
+          <a:p>
+            <a:pPr marL="342900" indent="-342900">
+              <a:lnSpc>
+                <a:spcPct val="120000"/>
+              </a:lnSpc>
+              <a:buSzPct val="100000"/>
+              <a:buChar char="•"/>
+            </a:pPr>
+            <a:r>
+              <a:rPr lang="en-US" sz="930" dirty="0">
+                <a:solidFill>
+                  <a:srgbClr val="10161F"/>
+                </a:solidFill>
+                <a:latin typeface="Pretendard" pitchFamily="34" charset="0"/>
+                <a:ea typeface="Pretendard" pitchFamily="34" charset="-122"/>
+                <a:cs typeface="Pretendard" pitchFamily="34" charset="-120"/>
+              </a:rPr>
+              <a:t>관리비 정산 내역 및 수선유지비 집행 이력을 점검하였습니다</a:t>
+            </a:r>
+            <a:endParaRPr lang="en-US" sz="930" dirty="0"/>
+          </a:p>
+          <a:p>
+            <a:pPr marL="342900" indent="-342900">
+              <a:lnSpc>
+                <a:spcPct val="120000"/>
+              </a:lnSpc>
+              <a:buSzPct val="100000"/>
+              <a:buChar char="•"/>
+            </a:pPr>
+            <a:r>
+              <a:rPr lang="en-US" sz="930" dirty="0">
+                <a:solidFill>
+                  <a:srgbClr val="10161F"/>
+                </a:solidFill>
+                <a:latin typeface="Pretendard" pitchFamily="34" charset="0"/>
+                <a:ea typeface="Pretendard" pitchFamily="34" charset="-122"/>
+                <a:cs typeface="Pretendard" pitchFamily="34" charset="-120"/>
+              </a:rPr>
+              <a:t>취득세 감면 및 대출 조달 구조는 금융·세무 자문 후 확정됩니다</a:t>
+            </a:r>
+            <a:endParaRPr lang="en-US" sz="930" dirty="0"/>
+          </a:p>
+        </p:txBody>
+      </p:sp>
+      <p:sp>
+        <p:nvSpPr>
+          <p:cNvPr id="21" name="Text 19"/>
           <p:cNvSpPr/>
           <p:nvPr/>
         </p:nvSpPr>
@@ -5763,7 +10687,7 @@
       </p:sp>
       <p:sp>
         <p:nvSpPr>
-          <p:cNvPr id="18" name="Text 16"/>
+          <p:cNvPr id="22" name="Text 20"/>
           <p:cNvSpPr/>
           <p:nvPr/>
         </p:nvSpPr>
@@ -5794,7 +10718,7 @@
                 <a:ea typeface="Arial" pitchFamily="34" charset="-122"/>
                 <a:cs typeface="Arial" pitchFamily="34" charset="-120"/>
               </a:rPr>
-              <a:t>4</a:t>
+              <a:t>3</a:t>
             </a:r>
             <a:endParaRPr lang="en-US" sz="900" dirty="0"/>
           </a:p>
@@ -5885,7 +10809,7 @@
                 <a:ea typeface="Arial" pitchFamily="34" charset="-122"/>
                 <a:cs typeface="Arial" pitchFamily="34" charset="-120"/>
               </a:rPr>
-              <a:t>05</a:t>
+              <a:t>04</a:t>
             </a:r>
             <a:endParaRPr lang="en-US" sz="1300" dirty="0"/>
           </a:p>
@@ -5924,7 +10848,7 @@
                 <a:ea typeface="Arial" pitchFamily="34" charset="-122"/>
                 <a:cs typeface="Arial" pitchFamily="34" charset="-120"/>
               </a:rPr>
-              <a:t>Land Detail</a:t>
+              <a:t>Building</a:t>
             </a:r>
             <a:endParaRPr lang="en-US" sz="950" dirty="0"/>
           </a:p>
@@ -5963,7 +10887,7 @@
                 <a:ea typeface="Pretendard" pitchFamily="34" charset="-122"/>
                 <a:cs typeface="Pretendard" pitchFamily="34" charset="-120"/>
               </a:rPr>
-              <a:t>토지</a:t>
+              <a:t>물건 개요</a:t>
             </a:r>
             <a:endParaRPr lang="en-US" sz="2300" dirty="0"/>
           </a:p>
@@ -6002,7 +10926,7 @@
                 <a:ea typeface="Pretendard" pitchFamily="34" charset="-122"/>
                 <a:cs typeface="Pretendard" pitchFamily="34" charset="-120"/>
               </a:rPr>
-              <a:t>토지 현황</a:t>
+              <a:t>건축물 개요 및 물리 스펙</a:t>
             </a:r>
             <a:endParaRPr lang="en-US" sz="1100" dirty="0"/>
           </a:p>
@@ -6017,7 +10941,7 @@
         <p:spPr>
           <a:xfrm>
             <a:off x="566928" y="1645920"/>
-            <a:ext cx="2606040" cy="402336"/>
+            <a:ext cx="2606040" cy="438912"/>
           </a:xfrm>
           <a:prstGeom prst="rect">
             <a:avLst/>
@@ -6036,7 +10960,7 @@
               <a:buNone/>
             </a:pPr>
             <a:r>
-              <a:rPr lang="en-US" sz="1400" dirty="0">
+              <a:rPr lang="en-US" sz="1350" dirty="0">
                 <a:solidFill>
                   <a:srgbClr val="718096"/>
                 </a:solidFill>
@@ -6046,7 +10970,7 @@
               </a:rPr>
               <a:t>대지면적</a:t>
             </a:r>
-            <a:endParaRPr lang="en-US" sz="1400" dirty="0"/>
+            <a:endParaRPr lang="en-US" sz="1350" dirty="0"/>
           </a:p>
         </p:txBody>
       </p:sp>
@@ -6059,7 +10983,7 @@
         <p:spPr>
           <a:xfrm>
             <a:off x="3172968" y="1645920"/>
-            <a:ext cx="4251960" cy="402336"/>
+            <a:ext cx="4251960" cy="438912"/>
           </a:xfrm>
           <a:prstGeom prst="rect">
             <a:avLst/>
@@ -6078,7 +11002,7 @@
               <a:buNone/>
             </a:pPr>
             <a:r>
-              <a:rPr lang="en-US" sz="1400" b="1" dirty="0">
+              <a:rPr lang="en-US" sz="1350" b="1" dirty="0">
                 <a:solidFill>
                   <a:srgbClr val="10161F"/>
                 </a:solidFill>
@@ -6088,7 +11012,7 @@
               </a:rPr>
               <a:t>168.5평</a:t>
             </a:r>
-            <a:endParaRPr lang="en-US" sz="1400" dirty="0"/>
+            <a:endParaRPr lang="en-US" sz="1350" dirty="0"/>
           </a:p>
         </p:txBody>
       </p:sp>
@@ -6100,7 +11024,7 @@
         </p:nvSpPr>
         <p:spPr>
           <a:xfrm>
-            <a:off x="566928" y="2048256"/>
+            <a:off x="566928" y="2084832"/>
             <a:ext cx="6858000" cy="0"/>
           </a:xfrm>
           <a:prstGeom prst="line">
@@ -6123,8 +11047,8 @@
         </p:nvSpPr>
         <p:spPr>
           <a:xfrm>
-            <a:off x="566928" y="2048256"/>
-            <a:ext cx="2606040" cy="402336"/>
+            <a:off x="566928" y="2084832"/>
+            <a:ext cx="2606040" cy="438912"/>
           </a:xfrm>
           <a:prstGeom prst="rect">
             <a:avLst/>
@@ -6143,7 +11067,7 @@
               <a:buNone/>
             </a:pPr>
             <a:r>
-              <a:rPr lang="en-US" sz="1400" dirty="0">
+              <a:rPr lang="en-US" sz="1350" dirty="0">
                 <a:solidFill>
                   <a:srgbClr val="718096"/>
                 </a:solidFill>
@@ -6153,7 +11077,7 @@
               </a:rPr>
               <a:t>용도지역</a:t>
             </a:r>
-            <a:endParaRPr lang="en-US" sz="1400" dirty="0"/>
+            <a:endParaRPr lang="en-US" sz="1350" dirty="0"/>
           </a:p>
         </p:txBody>
       </p:sp>
@@ -6165,8 +11089,8 @@
         </p:nvSpPr>
         <p:spPr>
           <a:xfrm>
-            <a:off x="3172968" y="2048256"/>
-            <a:ext cx="4251960" cy="402336"/>
+            <a:off x="3172968" y="2084832"/>
+            <a:ext cx="4251960" cy="438912"/>
           </a:xfrm>
           <a:prstGeom prst="rect">
             <a:avLst/>
@@ -6185,7 +11109,7 @@
               <a:buNone/>
             </a:pPr>
             <a:r>
-              <a:rPr lang="en-US" sz="1400" b="1" dirty="0">
+              <a:rPr lang="en-US" sz="1350" b="1" dirty="0">
                 <a:solidFill>
                   <a:srgbClr val="10161F"/>
                 </a:solidFill>
@@ -6195,7 +11119,7 @@
               </a:rPr>
               <a:t>제3종일반주거</a:t>
             </a:r>
-            <a:endParaRPr lang="en-US" sz="1400" dirty="0"/>
+            <a:endParaRPr lang="en-US" sz="1350" dirty="0"/>
           </a:p>
         </p:txBody>
       </p:sp>
@@ -6231,15 +11155,15 @@
         <p:spPr>
           <a:xfrm>
             <a:off x="7784287" y="1645920"/>
-            <a:ext cx="3840480" cy="2103120"/>
+            <a:ext cx="3840480" cy="1645920"/>
           </a:xfrm>
           <a:prstGeom prst="roundRect">
             <a:avLst>
-              <a:gd name="adj" fmla="val 2609"/>
+              <a:gd name="adj" fmla="val 3333"/>
             </a:avLst>
           </a:prstGeom>
           <a:solidFill>
-            <a:srgbClr val="BEE3F8"/>
+            <a:srgbClr val="F3EBDA"/>
           </a:solidFill>
           <a:ln/>
         </p:spPr>
@@ -6253,13 +11177,13 @@
         <p:spPr>
           <a:xfrm>
             <a:off x="7784287" y="1700784"/>
-            <a:ext cx="36576" cy="1993392"/>
+            <a:ext cx="36576" cy="1536192"/>
           </a:xfrm>
           <a:prstGeom prst="rect">
             <a:avLst/>
           </a:prstGeom>
           <a:solidFill>
-            <a:srgbClr val="2B6CB0"/>
+            <a:srgbClr val="977024"/>
           </a:solidFill>
           <a:ln/>
         </p:spPr>
@@ -6288,17 +11212,6 @@
             <a:pPr indent="0" marL="0">
               <a:buNone/>
             </a:pPr>
-            <a:r>
-              <a:rPr lang="en-US" sz="1050" b="1" dirty="0">
-                <a:solidFill>
-                  <a:srgbClr val="2B6CB0"/>
-                </a:solidFill>
-                <a:latin typeface="Pretendard" pitchFamily="34" charset="0"/>
-                <a:ea typeface="Pretendard" pitchFamily="34" charset="-122"/>
-                <a:cs typeface="Pretendard" pitchFamily="34" charset="-120"/>
-              </a:rPr>
-              <a:t>토지 및 건물 분석 포인트</a:t>
-            </a:r>
             <a:endParaRPr lang="en-US" sz="1050" dirty="0"/>
           </a:p>
         </p:txBody>
@@ -6312,7 +11225,7 @@
         <p:spPr>
           <a:xfrm>
             <a:off x="7967167" y="1975104"/>
-            <a:ext cx="3511296" cy="1700784"/>
+            <a:ext cx="3511296" cy="1243584"/>
           </a:xfrm>
           <a:prstGeom prst="rect">
             <a:avLst/>
@@ -6324,12 +11237,11 @@
           <a:bodyPr wrap="square" lIns="0" tIns="0" rIns="0" bIns="0" rtlCol="0" anchor="t"/>
           <a:lstStyle/>
           <a:p>
-            <a:pPr marL="342900" indent="-342900">
+            <a:pPr indent="0" marL="0">
               <a:lnSpc>
                 <a:spcPct val="120000"/>
               </a:lnSpc>
-              <a:buSzPct val="100000"/>
-              <a:buChar char="•"/>
+              <a:buNone/>
             </a:pPr>
             <a:r>
               <a:rPr lang="en-US" sz="930" dirty="0">
@@ -6340,223 +11252,15 @@
                 <a:ea typeface="Pretendard" pitchFamily="34" charset="-122"/>
                 <a:cs typeface="Pretendard" pitchFamily="34" charset="-120"/>
               </a:rPr>
-              <a:t>물건 접면 도로 및 교통 여건은 현장 확인 사항입니다</a:t>
+              <a:t>역삼동 테헤란로 이면 코너 신축 부지입니다.</a:t>
             </a:r>
             <a:endParaRPr lang="en-US" sz="930" dirty="0"/>
           </a:p>
-          <a:p>
-            <a:pPr marL="342900" indent="-342900">
-              <a:lnSpc>
-                <a:spcPct val="120000"/>
-              </a:lnSpc>
-              <a:buSzPct val="100000"/>
-              <a:buChar char="•"/>
-            </a:pPr>
-            <a:r>
-              <a:rPr lang="en-US" sz="930" dirty="0">
-                <a:solidFill>
-                  <a:srgbClr val="10161F"/>
-                </a:solidFill>
-                <a:latin typeface="Pretendard" pitchFamily="34" charset="0"/>
-                <a:ea typeface="Pretendard" pitchFamily="34" charset="-122"/>
-                <a:cs typeface="Pretendard" pitchFamily="34" charset="-120"/>
-              </a:rPr>
-              <a:t>상세 건물 제원은 실사 자료를 참조하시기 바랍니다</a:t>
-            </a:r>
-            <a:endParaRPr lang="en-US" sz="930" dirty="0"/>
-          </a:p>
-          <a:p>
-            <a:pPr marL="342900" indent="-342900">
-              <a:lnSpc>
-                <a:spcPct val="120000"/>
-              </a:lnSpc>
-              <a:buSzPct val="100000"/>
-              <a:buChar char="•"/>
-            </a:pPr>
-            <a:r>
-              <a:rPr lang="en-US" sz="930" dirty="0">
-                <a:solidFill>
-                  <a:srgbClr val="10161F"/>
-                </a:solidFill>
-                <a:latin typeface="Pretendard" pitchFamily="34" charset="0"/>
-                <a:ea typeface="Pretendard" pitchFamily="34" charset="-122"/>
-                <a:cs typeface="Pretendard" pitchFamily="34" charset="-120"/>
-              </a:rPr>
-              <a:t>건물 현황 및 규모는 첨부 대장을 기준으로 합니다</a:t>
-            </a:r>
-            <a:endParaRPr lang="en-US" sz="930" dirty="0"/>
-          </a:p>
-        </p:txBody>
-      </p:sp>
-      <p:sp>
-        <p:nvSpPr>
-          <p:cNvPr id="17" name="Shape 15"/>
-          <p:cNvSpPr/>
-          <p:nvPr/>
-        </p:nvSpPr>
-        <p:spPr>
-          <a:xfrm>
-            <a:off x="7784287" y="3977640"/>
-            <a:ext cx="3840480" cy="2148840"/>
-          </a:xfrm>
-          <a:prstGeom prst="roundRect">
-            <a:avLst>
-              <a:gd name="adj" fmla="val 2553"/>
-            </a:avLst>
-          </a:prstGeom>
-          <a:solidFill>
-            <a:srgbClr val="BEE3F8"/>
-          </a:solidFill>
-          <a:ln/>
-        </p:spPr>
-      </p:sp>
-      <p:sp>
-        <p:nvSpPr>
-          <p:cNvPr id="18" name="Shape 16"/>
-          <p:cNvSpPr/>
-          <p:nvPr/>
-        </p:nvSpPr>
-        <p:spPr>
-          <a:xfrm>
-            <a:off x="7784287" y="4032504"/>
-            <a:ext cx="36576" cy="2039112"/>
-          </a:xfrm>
-          <a:prstGeom prst="rect">
-            <a:avLst/>
-          </a:prstGeom>
-          <a:solidFill>
-            <a:srgbClr val="2B6CB0"/>
-          </a:solidFill>
-          <a:ln/>
-        </p:spPr>
-      </p:sp>
-      <p:sp>
-        <p:nvSpPr>
-          <p:cNvPr id="19" name="Text 17"/>
-          <p:cNvSpPr/>
-          <p:nvPr/>
-        </p:nvSpPr>
-        <p:spPr>
-          <a:xfrm>
-            <a:off x="7967167" y="4087368"/>
-            <a:ext cx="3511296" cy="201168"/>
-          </a:xfrm>
-          <a:prstGeom prst="rect">
-            <a:avLst/>
-          </a:prstGeom>
-          <a:noFill/>
-          <a:ln/>
-        </p:spPr>
-        <p:txBody>
-          <a:bodyPr wrap="square" lIns="0" tIns="0" rIns="0" bIns="0" rtlCol="0" anchor="ctr"/>
-          <a:lstStyle/>
-          <a:p>
-            <a:pPr indent="0" marL="0">
-              <a:buNone/>
-            </a:pPr>
-            <a:r>
-              <a:rPr lang="en-US" sz="1050" b="1" dirty="0">
-                <a:solidFill>
-                  <a:srgbClr val="2B6CB0"/>
-                </a:solidFill>
-                <a:latin typeface="Pretendard" pitchFamily="34" charset="0"/>
-                <a:ea typeface="Pretendard" pitchFamily="34" charset="-122"/>
-                <a:cs typeface="Pretendard" pitchFamily="34" charset="-120"/>
-              </a:rPr>
-              <a:t>물건 실사 및 관리 상태</a:t>
-            </a:r>
-            <a:endParaRPr lang="en-US" sz="1050" dirty="0"/>
-          </a:p>
-        </p:txBody>
-      </p:sp>
-      <p:sp>
-        <p:nvSpPr>
-          <p:cNvPr id="20" name="Text 18"/>
-          <p:cNvSpPr/>
-          <p:nvPr/>
-        </p:nvSpPr>
-        <p:spPr>
-          <a:xfrm>
-            <a:off x="7967167" y="4306824"/>
-            <a:ext cx="3511296" cy="1746504"/>
-          </a:xfrm>
-          <a:prstGeom prst="rect">
-            <a:avLst/>
-          </a:prstGeom>
-          <a:noFill/>
-          <a:ln/>
-        </p:spPr>
-        <p:txBody>
-          <a:bodyPr wrap="square" lIns="0" tIns="0" rIns="0" bIns="0" rtlCol="0" anchor="t"/>
-          <a:lstStyle/>
-          <a:p>
-            <a:pPr marL="342900" indent="-342900">
-              <a:lnSpc>
-                <a:spcPct val="120000"/>
-              </a:lnSpc>
-              <a:buSzPct val="100000"/>
-              <a:buChar char="•"/>
-            </a:pPr>
-            <a:r>
-              <a:rPr lang="en-US" sz="930" dirty="0">
-                <a:solidFill>
-                  <a:srgbClr val="10161F"/>
-                </a:solidFill>
-                <a:latin typeface="Pretendard" pitchFamily="34" charset="0"/>
-                <a:ea typeface="Pretendard" pitchFamily="34" charset="-122"/>
-                <a:cs typeface="Pretendard" pitchFamily="34" charset="-120"/>
-              </a:rPr>
-              <a:t>건물 상태 및 설비 현황은 실사 보고서를 참조하십시오</a:t>
-            </a:r>
-            <a:endParaRPr lang="en-US" sz="930" dirty="0"/>
-          </a:p>
-          <a:p>
-            <a:pPr marL="342900" indent="-342900">
-              <a:lnSpc>
-                <a:spcPct val="120000"/>
-              </a:lnSpc>
-              <a:buSzPct val="100000"/>
-              <a:buChar char="•"/>
-            </a:pPr>
-            <a:r>
-              <a:rPr lang="en-US" sz="930" dirty="0">
-                <a:solidFill>
-                  <a:srgbClr val="10161F"/>
-                </a:solidFill>
-                <a:latin typeface="Pretendard" pitchFamily="34" charset="0"/>
-                <a:ea typeface="Pretendard" pitchFamily="34" charset="-122"/>
-                <a:cs typeface="Pretendard" pitchFamily="34" charset="-120"/>
-              </a:rPr>
-              <a:t>자금 조달 및 대출 조건은 금융 자문 후 확정됩니다</a:t>
-            </a:r>
-            <a:endParaRPr lang="en-US" sz="930" dirty="0"/>
-          </a:p>
-          <a:p>
-            <a:pPr marL="342900" indent="-342900">
-              <a:lnSpc>
-                <a:spcPct val="120000"/>
-              </a:lnSpc>
-              <a:buSzPct val="100000"/>
-              <a:buChar char="•"/>
-            </a:pPr>
-            <a:r>
-              <a:rPr lang="en-US" sz="930" dirty="0">
-                <a:solidFill>
-                  <a:srgbClr val="10161F"/>
-                </a:solidFill>
-                <a:latin typeface="Pretendard" pitchFamily="34" charset="0"/>
-                <a:ea typeface="Pretendard" pitchFamily="34" charset="-122"/>
-                <a:cs typeface="Pretendard" pitchFamily="34" charset="-120"/>
-              </a:rPr>
-              <a:t>상세 실사 단계에서 구체적인 계약 조건 및 세무 검토가 진행됩니다</a:t>
-            </a:r>
-            <a:endParaRPr lang="en-US" sz="930" dirty="0"/>
-          </a:p>
-        </p:txBody>
-      </p:sp>
-      <p:sp>
-        <p:nvSpPr>
-          <p:cNvPr id="21" name="Text 19"/>
+        </p:txBody>
+      </p:sp>
+      <p:sp>
+        <p:nvSpPr>
+          <p:cNvPr id="17" name="Text 15"/>
           <p:cNvSpPr/>
           <p:nvPr/>
         </p:nvSpPr>
@@ -6595,7 +11299,7 @@
       </p:sp>
       <p:sp>
         <p:nvSpPr>
-          <p:cNvPr id="22" name="Text 20"/>
+          <p:cNvPr id="18" name="Text 16"/>
           <p:cNvSpPr/>
           <p:nvPr/>
         </p:nvSpPr>
@@ -6626,7 +11330,7 @@
                 <a:ea typeface="Arial" pitchFamily="34" charset="-122"/>
                 <a:cs typeface="Arial" pitchFamily="34" charset="-120"/>
               </a:rPr>
-              <a:t>5</a:t>
+              <a:t>4</a:t>
             </a:r>
             <a:endParaRPr lang="en-US" sz="900" dirty="0"/>
           </a:p>
@@ -6717,7 +11421,7 @@
                 <a:ea typeface="Arial" pitchFamily="34" charset="-122"/>
                 <a:cs typeface="Arial" pitchFamily="34" charset="-120"/>
               </a:rPr>
-              <a:t>06</a:t>
+              <a:t>05</a:t>
             </a:r>
             <a:endParaRPr lang="en-US" sz="1300" dirty="0"/>
           </a:p>
@@ -6756,7 +11460,7 @@
                 <a:ea typeface="Arial" pitchFamily="34" charset="-122"/>
                 <a:cs typeface="Arial" pitchFamily="34" charset="-120"/>
               </a:rPr>
-              <a:t>Feasibility</a:t>
+              <a:t>Land Detail</a:t>
             </a:r>
             <a:endParaRPr lang="en-US" sz="950" dirty="0"/>
           </a:p>
@@ -6795,7 +11499,7 @@
                 <a:ea typeface="Pretendard" pitchFamily="34" charset="-122"/>
                 <a:cs typeface="Pretendard" pitchFamily="34" charset="-120"/>
               </a:rPr>
-              <a:t>개발 사업성</a:t>
+              <a:t>부지 분석</a:t>
             </a:r>
             <a:endParaRPr lang="en-US" sz="2300" dirty="0"/>
           </a:p>
@@ -6803,20 +11507,225 @@
       </p:sp>
       <p:sp>
         <p:nvSpPr>
-          <p:cNvPr id="6" name="Shape 4"/>
-          <p:cNvSpPr/>
-          <p:nvPr/>
-        </p:nvSpPr>
-        <p:spPr>
-          <a:xfrm>
-            <a:off x="566928" y="1325880"/>
-            <a:ext cx="11057839" cy="0"/>
+          <p:cNvPr id="6" name="Text 4"/>
+          <p:cNvSpPr/>
+          <p:nvPr/>
+        </p:nvSpPr>
+        <p:spPr>
+          <a:xfrm>
+            <a:off x="566928" y="1371600"/>
+            <a:ext cx="6858000" cy="237744"/>
+          </a:xfrm>
+          <a:prstGeom prst="rect">
+            <a:avLst/>
+          </a:prstGeom>
+          <a:noFill/>
+          <a:ln/>
+        </p:spPr>
+        <p:txBody>
+          <a:bodyPr wrap="square" lIns="0" tIns="0" rIns="0" bIns="0" rtlCol="0" anchor="ctr"/>
+          <a:lstStyle/>
+          <a:p>
+            <a:pPr indent="0" marL="0">
+              <a:buNone/>
+            </a:pPr>
+            <a:r>
+              <a:rPr lang="en-US" sz="1100" b="1" dirty="0">
+                <a:solidFill>
+                  <a:srgbClr val="10161F"/>
+                </a:solidFill>
+                <a:latin typeface="Pretendard" pitchFamily="34" charset="0"/>
+                <a:ea typeface="Pretendard" pitchFamily="34" charset="-122"/>
+                <a:cs typeface="Pretendard" pitchFamily="34" charset="-120"/>
+              </a:rPr>
+              <a:t>건축물 개요 및 물리 스펙</a:t>
+            </a:r>
+            <a:endParaRPr lang="en-US" sz="1100" dirty="0"/>
+          </a:p>
+        </p:txBody>
+      </p:sp>
+      <p:sp>
+        <p:nvSpPr>
+          <p:cNvPr id="7" name="Shape 5"/>
+          <p:cNvSpPr/>
+          <p:nvPr/>
+        </p:nvSpPr>
+        <p:spPr>
+          <a:xfrm>
+            <a:off x="566928" y="1645920"/>
+            <a:ext cx="6858000" cy="1828800"/>
+          </a:xfrm>
+          <a:prstGeom prst="roundRect">
+            <a:avLst>
+              <a:gd name="adj" fmla="val 3000"/>
+            </a:avLst>
+          </a:prstGeom>
+          <a:solidFill>
+            <a:srgbClr val="BEE3F8"/>
+          </a:solidFill>
+          <a:ln/>
+        </p:spPr>
+      </p:sp>
+      <p:sp>
+        <p:nvSpPr>
+          <p:cNvPr id="8" name="Shape 6"/>
+          <p:cNvSpPr/>
+          <p:nvPr/>
+        </p:nvSpPr>
+        <p:spPr>
+          <a:xfrm>
+            <a:off x="566928" y="1700784"/>
+            <a:ext cx="36576" cy="1719072"/>
+          </a:xfrm>
+          <a:prstGeom prst="rect">
+            <a:avLst/>
+          </a:prstGeom>
+          <a:solidFill>
+            <a:srgbClr val="2B6CB0"/>
+          </a:solidFill>
+          <a:ln/>
+        </p:spPr>
+      </p:sp>
+      <p:sp>
+        <p:nvSpPr>
+          <p:cNvPr id="9" name="Text 7"/>
+          <p:cNvSpPr/>
+          <p:nvPr/>
+        </p:nvSpPr>
+        <p:spPr>
+          <a:xfrm>
+            <a:off x="749808" y="1755648"/>
+            <a:ext cx="6528816" cy="201168"/>
+          </a:xfrm>
+          <a:prstGeom prst="rect">
+            <a:avLst/>
+          </a:prstGeom>
+          <a:noFill/>
+          <a:ln/>
+        </p:spPr>
+        <p:txBody>
+          <a:bodyPr wrap="square" lIns="0" tIns="0" rIns="0" bIns="0" rtlCol="0" anchor="ctr"/>
+          <a:lstStyle/>
+          <a:p>
+            <a:pPr indent="0" marL="0">
+              <a:buNone/>
+            </a:pPr>
+            <a:r>
+              <a:rPr lang="en-US" sz="1050" b="1" dirty="0">
+                <a:solidFill>
+                  <a:srgbClr val="2B6CB0"/>
+                </a:solidFill>
+                <a:latin typeface="Pretendard" pitchFamily="34" charset="0"/>
+                <a:ea typeface="Pretendard" pitchFamily="34" charset="-122"/>
+                <a:cs typeface="Pretendard" pitchFamily="34" charset="-120"/>
+              </a:rPr>
+              <a:t>건축물 물리 스펙 요약</a:t>
+            </a:r>
+            <a:endParaRPr lang="en-US" sz="1050" dirty="0"/>
+          </a:p>
+        </p:txBody>
+      </p:sp>
+      <p:sp>
+        <p:nvSpPr>
+          <p:cNvPr id="10" name="Text 8"/>
+          <p:cNvSpPr/>
+          <p:nvPr/>
+        </p:nvSpPr>
+        <p:spPr>
+          <a:xfrm>
+            <a:off x="749808" y="1975104"/>
+            <a:ext cx="6528816" cy="1426464"/>
+          </a:xfrm>
+          <a:prstGeom prst="rect">
+            <a:avLst/>
+          </a:prstGeom>
+          <a:noFill/>
+          <a:ln/>
+        </p:spPr>
+        <p:txBody>
+          <a:bodyPr wrap="square" lIns="0" tIns="0" rIns="0" bIns="0" rtlCol="0" anchor="t"/>
+          <a:lstStyle/>
+          <a:p>
+            <a:pPr marL="342900" indent="-342900">
+              <a:lnSpc>
+                <a:spcPct val="120000"/>
+              </a:lnSpc>
+              <a:buSzPct val="100000"/>
+              <a:buChar char="•"/>
+            </a:pPr>
+            <a:r>
+              <a:rPr lang="en-US" sz="930" dirty="0">
+                <a:solidFill>
+                  <a:srgbClr val="10161F"/>
+                </a:solidFill>
+                <a:latin typeface="Pretendard" pitchFamily="34" charset="0"/>
+                <a:ea typeface="Pretendard" pitchFamily="34" charset="-122"/>
+                <a:cs typeface="Pretendard" pitchFamily="34" charset="-120"/>
+              </a:rPr>
+              <a:t>상세 건물 제원은 실사 자료를 참조하시기 바랍니다</a:t>
+            </a:r>
+            <a:endParaRPr lang="en-US" sz="930" dirty="0"/>
+          </a:p>
+          <a:p>
+            <a:pPr marL="342900" indent="-342900">
+              <a:lnSpc>
+                <a:spcPct val="120000"/>
+              </a:lnSpc>
+              <a:buSzPct val="100000"/>
+              <a:buChar char="•"/>
+            </a:pPr>
+            <a:r>
+              <a:rPr lang="en-US" sz="930" dirty="0">
+                <a:solidFill>
+                  <a:srgbClr val="10161F"/>
+                </a:solidFill>
+                <a:latin typeface="Pretendard" pitchFamily="34" charset="0"/>
+                <a:ea typeface="Pretendard" pitchFamily="34" charset="-122"/>
+                <a:cs typeface="Pretendard" pitchFamily="34" charset="-120"/>
+              </a:rPr>
+              <a:t>건물 현황 및 규모는 첨부 대장을 기준으로 합니다</a:t>
+            </a:r>
+            <a:endParaRPr lang="en-US" sz="930" dirty="0"/>
+          </a:p>
+          <a:p>
+            <a:pPr marL="342900" indent="-342900">
+              <a:lnSpc>
+                <a:spcPct val="120000"/>
+              </a:lnSpc>
+              <a:buSzPct val="100000"/>
+              <a:buChar char="•"/>
+            </a:pPr>
+            <a:r>
+              <a:rPr lang="en-US" sz="930" dirty="0">
+                <a:solidFill>
+                  <a:srgbClr val="10161F"/>
+                </a:solidFill>
+                <a:latin typeface="Pretendard" pitchFamily="34" charset="0"/>
+                <a:ea typeface="Pretendard" pitchFamily="34" charset="-122"/>
+                <a:cs typeface="Pretendard" pitchFamily="34" charset="-120"/>
+              </a:rPr>
+              <a:t>건물 상태 및 설비 현황은 실사 보고서를 참조하십시오</a:t>
+            </a:r>
+            <a:endParaRPr lang="en-US" sz="930" dirty="0"/>
+          </a:p>
+        </p:txBody>
+      </p:sp>
+      <p:sp>
+        <p:nvSpPr>
+          <p:cNvPr id="11" name="Shape 9"/>
+          <p:cNvSpPr/>
+          <p:nvPr/>
+        </p:nvSpPr>
+        <p:spPr>
+          <a:xfrm>
+            <a:off x="7604608" y="1371600"/>
+            <a:ext cx="0" cy="4754880"/>
           </a:xfrm>
           <a:prstGeom prst="line">
             <a:avLst/>
           </a:prstGeom>
           <a:noFill/>
-          <a:ln w="19050">
+          <a:ln w="8890">
             <a:solidFill>
               <a:srgbClr val="B98A2E"/>
             </a:solidFill>
@@ -6826,56 +11735,56 @@
       </p:sp>
       <p:sp>
         <p:nvSpPr>
-          <p:cNvPr id="7" name="Shape 5"/>
-          <p:cNvSpPr/>
-          <p:nvPr/>
-        </p:nvSpPr>
-        <p:spPr>
-          <a:xfrm>
-            <a:off x="566928" y="1645920"/>
-            <a:ext cx="11057839" cy="1280160"/>
+          <p:cNvPr id="12" name="Shape 10"/>
+          <p:cNvSpPr/>
+          <p:nvPr/>
+        </p:nvSpPr>
+        <p:spPr>
+          <a:xfrm>
+            <a:off x="7784287" y="1645920"/>
+            <a:ext cx="3840480" cy="1645920"/>
           </a:xfrm>
           <a:prstGeom prst="roundRect">
             <a:avLst>
-              <a:gd name="adj" fmla="val 4286"/>
+              <a:gd name="adj" fmla="val 3333"/>
             </a:avLst>
           </a:prstGeom>
           <a:solidFill>
-            <a:srgbClr val="BEE3F8"/>
+            <a:srgbClr val="F3EBDA"/>
           </a:solidFill>
           <a:ln/>
         </p:spPr>
       </p:sp>
       <p:sp>
         <p:nvSpPr>
-          <p:cNvPr id="8" name="Shape 6"/>
-          <p:cNvSpPr/>
-          <p:nvPr/>
-        </p:nvSpPr>
-        <p:spPr>
-          <a:xfrm>
-            <a:off x="566928" y="1700784"/>
-            <a:ext cx="36576" cy="1170432"/>
+          <p:cNvPr id="13" name="Shape 11"/>
+          <p:cNvSpPr/>
+          <p:nvPr/>
+        </p:nvSpPr>
+        <p:spPr>
+          <a:xfrm>
+            <a:off x="7784287" y="1700784"/>
+            <a:ext cx="36576" cy="1536192"/>
           </a:xfrm>
           <a:prstGeom prst="rect">
             <a:avLst/>
           </a:prstGeom>
           <a:solidFill>
-            <a:srgbClr val="2B6CB0"/>
+            <a:srgbClr val="977024"/>
           </a:solidFill>
           <a:ln/>
         </p:spPr>
       </p:sp>
       <p:sp>
         <p:nvSpPr>
-          <p:cNvPr id="9" name="Text 7"/>
-          <p:cNvSpPr/>
-          <p:nvPr/>
-        </p:nvSpPr>
-        <p:spPr>
-          <a:xfrm>
-            <a:off x="749808" y="1755648"/>
-            <a:ext cx="10728655" cy="201168"/>
+          <p:cNvPr id="14" name="Text 12"/>
+          <p:cNvSpPr/>
+          <p:nvPr/>
+        </p:nvSpPr>
+        <p:spPr>
+          <a:xfrm>
+            <a:off x="7967167" y="1755648"/>
+            <a:ext cx="3511296" cy="201168"/>
           </a:xfrm>
           <a:prstGeom prst="rect">
             <a:avLst/>
@@ -6890,31 +11799,20 @@
             <a:pPr indent="0" marL="0">
               <a:buNone/>
             </a:pPr>
-            <a:r>
-              <a:rPr lang="en-US" sz="1050" b="1" dirty="0">
-                <a:solidFill>
-                  <a:srgbClr val="2B6CB0"/>
-                </a:solidFill>
-                <a:latin typeface="Pretendard" pitchFamily="34" charset="0"/>
-                <a:ea typeface="Pretendard" pitchFamily="34" charset="-122"/>
-                <a:cs typeface="Pretendard" pitchFamily="34" charset="-120"/>
-              </a:rPr>
-              <a:t>투자 가치 제안</a:t>
-            </a:r>
             <a:endParaRPr lang="en-US" sz="1050" dirty="0"/>
           </a:p>
         </p:txBody>
       </p:sp>
       <p:sp>
         <p:nvSpPr>
-          <p:cNvPr id="10" name="Text 8"/>
-          <p:cNvSpPr/>
-          <p:nvPr/>
-        </p:nvSpPr>
-        <p:spPr>
-          <a:xfrm>
-            <a:off x="749808" y="1975104"/>
-            <a:ext cx="10728655" cy="877824"/>
+          <p:cNvPr id="15" name="Text 13"/>
+          <p:cNvSpPr/>
+          <p:nvPr/>
+        </p:nvSpPr>
+        <p:spPr>
+          <a:xfrm>
+            <a:off x="7967167" y="1975104"/>
+            <a:ext cx="3511296" cy="1243584"/>
           </a:xfrm>
           <a:prstGeom prst="rect">
             <a:avLst/>
@@ -6941,7 +11839,7 @@
                 <a:ea typeface="Pretendard" pitchFamily="34" charset="-122"/>
                 <a:cs typeface="Pretendard" pitchFamily="34" charset="-120"/>
               </a:rPr>
-              <a:t>예상 개발이익률 약 28%, 완공 후 자산가치 350억 상회 전망입니다.</a:t>
+              <a:t>건폐율 50%, 용적률 250% 적용 시 약 680평 신축 가능합니다.</a:t>
             </a:r>
             <a:endParaRPr lang="en-US" sz="930" dirty="0"/>
           </a:p>
@@ -6949,7 +11847,7 @@
       </p:sp>
       <p:sp>
         <p:nvSpPr>
-          <p:cNvPr id="11" name="Text 9"/>
+          <p:cNvPr id="16" name="Text 14"/>
           <p:cNvSpPr/>
           <p:nvPr/>
         </p:nvSpPr>
@@ -6988,7 +11886,7 @@
       </p:sp>
       <p:sp>
         <p:nvSpPr>
-          <p:cNvPr id="12" name="Text 10"/>
+          <p:cNvPr id="17" name="Text 15"/>
           <p:cNvSpPr/>
           <p:nvPr/>
         </p:nvSpPr>
@@ -7019,7 +11917,7 @@
                 <a:ea typeface="Arial" pitchFamily="34" charset="-122"/>
                 <a:cs typeface="Arial" pitchFamily="34" charset="-120"/>
               </a:rPr>
-              <a:t>6</a:t>
+              <a:t>5</a:t>
             </a:r>
             <a:endParaRPr lang="en-US" sz="900" dirty="0"/>
           </a:p>
@@ -7110,7 +12008,7 @@
                 <a:ea typeface="Arial" pitchFamily="34" charset="-122"/>
                 <a:cs typeface="Arial" pitchFamily="34" charset="-120"/>
               </a:rPr>
-              <a:t>07</a:t>
+              <a:t>06</a:t>
             </a:r>
             <a:endParaRPr lang="en-US" sz="1300" dirty="0"/>
           </a:p>
@@ -7149,7 +12047,7 @@
                 <a:ea typeface="Arial" pitchFamily="34" charset="-122"/>
                 <a:cs typeface="Arial" pitchFamily="34" charset="-120"/>
               </a:rPr>
-              <a:t>Risk</a:t>
+              <a:t>Scale</a:t>
             </a:r>
             <a:endParaRPr lang="en-US" sz="950" dirty="0"/>
           </a:p>
@@ -7188,7 +12086,7 @@
                 <a:ea typeface="Pretendard" pitchFamily="34" charset="-122"/>
                 <a:cs typeface="Pretendard" pitchFamily="34" charset="-120"/>
               </a:rPr>
-              <a:t>리스크 점검</a:t>
+              <a:t>신축규모</a:t>
             </a:r>
             <a:endParaRPr lang="en-US" sz="2300" dirty="0"/>
           </a:p>
@@ -7202,20 +12100,16 @@
         </p:nvSpPr>
         <p:spPr>
           <a:xfrm>
-            <a:off x="566928" y="1417320"/>
-            <a:ext cx="11057839" cy="3657600"/>
-          </a:xfrm>
-          <a:prstGeom prst="roundRect">
-            <a:avLst>
-              <a:gd name="adj" fmla="val 1500"/>
-            </a:avLst>
-          </a:prstGeom>
-          <a:solidFill>
-            <a:srgbClr val="F7FAFC"/>
-          </a:solidFill>
-          <a:ln w="6350">
+            <a:off x="566928" y="1325880"/>
+            <a:ext cx="11057839" cy="0"/>
+          </a:xfrm>
+          <a:prstGeom prst="line">
+            <a:avLst/>
+          </a:prstGeom>
+          <a:noFill/>
+          <a:ln w="19050">
             <a:solidFill>
-              <a:srgbClr val="CBD5E0"/>
+              <a:srgbClr val="B98A2E"/>
             </a:solidFill>
             <a:prstDash val="solid"/>
           </a:ln>
@@ -7229,180 +12123,50 @@
         </p:nvSpPr>
         <p:spPr>
           <a:xfrm>
-            <a:off x="566928" y="1417320"/>
-            <a:ext cx="11057839" cy="45720"/>
-          </a:xfrm>
-          <a:prstGeom prst="rect">
-            <a:avLst/>
-          </a:prstGeom>
-          <a:solidFill>
-            <a:srgbClr val="B98A2E"/>
-          </a:solidFill>
-          <a:ln/>
-        </p:spPr>
-      </p:sp>
-      <p:sp>
-        <p:nvSpPr>
-          <p:cNvPr id="8" name="Text 6"/>
-          <p:cNvSpPr/>
-          <p:nvPr/>
-        </p:nvSpPr>
-        <p:spPr>
-          <a:xfrm>
-            <a:off x="795528" y="1618488"/>
-            <a:ext cx="10600639" cy="292608"/>
-          </a:xfrm>
-          <a:prstGeom prst="rect">
-            <a:avLst/>
-          </a:prstGeom>
-          <a:noFill/>
-          <a:ln/>
-        </p:spPr>
-        <p:txBody>
-          <a:bodyPr wrap="square" lIns="0" tIns="0" rIns="0" bIns="0" rtlCol="0" anchor="ctr"/>
-          <a:lstStyle/>
-          <a:p>
-            <a:pPr indent="0" marL="0">
-              <a:buNone/>
-            </a:pPr>
-            <a:r>
-              <a:rPr lang="en-US" sz="1350" b="1" dirty="0">
-                <a:solidFill>
-                  <a:srgbClr val="977024"/>
-                </a:solidFill>
-                <a:latin typeface="Pretendard" pitchFamily="34" charset="0"/>
-                <a:ea typeface="Pretendard" pitchFamily="34" charset="-122"/>
-                <a:cs typeface="Pretendard" pitchFamily="34" charset="-120"/>
-              </a:rPr>
-              <a:t>인허가 지연</a:t>
-            </a:r>
-            <a:endParaRPr lang="en-US" sz="1350" dirty="0"/>
-          </a:p>
-        </p:txBody>
-      </p:sp>
-      <p:sp>
-        <p:nvSpPr>
-          <p:cNvPr id="9" name="Text 7"/>
-          <p:cNvSpPr/>
-          <p:nvPr/>
-        </p:nvSpPr>
-        <p:spPr>
-          <a:xfrm>
-            <a:off x="795528" y="1947672"/>
-            <a:ext cx="10600639" cy="365760"/>
-          </a:xfrm>
-          <a:prstGeom prst="rect">
-            <a:avLst/>
-          </a:prstGeom>
-          <a:noFill/>
-          <a:ln/>
-        </p:spPr>
-        <p:txBody>
-          <a:bodyPr wrap="square" lIns="0" tIns="0" rIns="0" bIns="0" rtlCol="0" anchor="ctr">
-            <a:normAutofit/>
-          </a:bodyPr>
-          <a:lstStyle/>
-          <a:p>
-            <a:pPr indent="0" marL="0">
-              <a:buNone/>
-            </a:pPr>
-            <a:r>
-              <a:rPr lang="en-US" sz="1250" b="1" dirty="0">
-                <a:solidFill>
-                  <a:srgbClr val="10161F"/>
-                </a:solidFill>
-                <a:latin typeface="Pretendard" pitchFamily="34" charset="0"/>
-                <a:ea typeface="Pretendard" pitchFamily="34" charset="-122"/>
-                <a:cs typeface="Pretendard" pitchFamily="34" charset="-120"/>
-              </a:rPr>
-              <a:t>사전협의 완료</a:t>
-            </a:r>
-            <a:endParaRPr lang="en-US" sz="1250" dirty="0"/>
-          </a:p>
-        </p:txBody>
-      </p:sp>
-      <p:sp>
-        <p:nvSpPr>
-          <p:cNvPr id="10" name="Text 8"/>
-          <p:cNvSpPr/>
-          <p:nvPr/>
-        </p:nvSpPr>
-        <p:spPr>
-          <a:xfrm>
-            <a:off x="795528" y="2377440"/>
-            <a:ext cx="10600639" cy="2606040"/>
-          </a:xfrm>
-          <a:prstGeom prst="rect">
-            <a:avLst/>
-          </a:prstGeom>
-          <a:noFill/>
-          <a:ln/>
-        </p:spPr>
-        <p:txBody>
-          <a:bodyPr wrap="square" lIns="0" tIns="0" rIns="0" bIns="0" rtlCol="0" anchor="t">
-            <a:normAutofit/>
-          </a:bodyPr>
-          <a:lstStyle/>
-          <a:p>
-            <a:pPr marL="342900" indent="-342900">
-              <a:lnSpc>
-                <a:spcPct val="125000"/>
-              </a:lnSpc>
-              <a:buSzPct val="100000"/>
-              <a:buChar char="•"/>
-            </a:pPr>
-            <a:r>
-              <a:rPr lang="en-US" sz="1100" dirty="0">
-                <a:solidFill>
-                  <a:srgbClr val="10161F"/>
-                </a:solidFill>
-                <a:latin typeface="Pretendard" pitchFamily="34" charset="0"/>
-                <a:ea typeface="Pretendard" pitchFamily="34" charset="-122"/>
-                <a:cs typeface="Pretendard" pitchFamily="34" charset="-120"/>
-              </a:rPr>
-              <a:t>2개월 내 착수 가능</a:t>
-            </a:r>
-            <a:endParaRPr lang="en-US" sz="1100" dirty="0"/>
-          </a:p>
-        </p:txBody>
-      </p:sp>
-      <p:sp>
-        <p:nvSpPr>
-          <p:cNvPr id="11" name="Shape 9"/>
-          <p:cNvSpPr/>
-          <p:nvPr/>
-        </p:nvSpPr>
-        <p:spPr>
-          <a:xfrm>
-            <a:off x="566928" y="5193792"/>
-            <a:ext cx="11057839" cy="621792"/>
+            <a:off x="566928" y="1645920"/>
+            <a:ext cx="11057839" cy="1280160"/>
           </a:xfrm>
           <a:prstGeom prst="roundRect">
             <a:avLst>
-              <a:gd name="adj" fmla="val 8824"/>
+              <a:gd name="adj" fmla="val 4286"/>
             </a:avLst>
           </a:prstGeom>
           <a:solidFill>
-            <a:srgbClr val="F7FAFC"/>
+            <a:srgbClr val="BEE3F8"/>
           </a:solidFill>
-          <a:ln w="6350">
-            <a:solidFill>
-              <a:srgbClr val="CBD5E0"/>
-            </a:solidFill>
-            <a:prstDash val="solid"/>
-          </a:ln>
-        </p:spPr>
-      </p:sp>
-      <p:sp>
-        <p:nvSpPr>
-          <p:cNvPr id="12" name="Text 10"/>
-          <p:cNvSpPr/>
-          <p:nvPr/>
-        </p:nvSpPr>
-        <p:spPr>
-          <a:xfrm>
-            <a:off x="795528" y="5193792"/>
-            <a:ext cx="10600639" cy="621792"/>
+          <a:ln/>
+        </p:spPr>
+      </p:sp>
+      <p:sp>
+        <p:nvSpPr>
+          <p:cNvPr id="8" name="Shape 6"/>
+          <p:cNvSpPr/>
+          <p:nvPr/>
+        </p:nvSpPr>
+        <p:spPr>
+          <a:xfrm>
+            <a:off x="566928" y="1700784"/>
+            <a:ext cx="36576" cy="1170432"/>
+          </a:xfrm>
+          <a:prstGeom prst="rect">
+            <a:avLst/>
+          </a:prstGeom>
+          <a:solidFill>
+            <a:srgbClr val="2B6CB0"/>
+          </a:solidFill>
+          <a:ln/>
+        </p:spPr>
+      </p:sp>
+      <p:sp>
+        <p:nvSpPr>
+          <p:cNvPr id="9" name="Text 7"/>
+          <p:cNvSpPr/>
+          <p:nvPr/>
+        </p:nvSpPr>
+        <p:spPr>
+          <a:xfrm>
+            <a:off x="749808" y="1755648"/>
+            <a:ext cx="10728655" cy="201168"/>
           </a:xfrm>
           <a:prstGeom prst="rect">
             <a:avLst/>
@@ -7418,7 +12182,49 @@
               <a:buNone/>
             </a:pPr>
             <a:r>
-              <a:rPr lang="en-US" sz="1100" dirty="0">
+              <a:rPr lang="en-US" sz="1050" b="1" dirty="0">
+                <a:solidFill>
+                  <a:srgbClr val="2B6CB0"/>
+                </a:solidFill>
+                <a:latin typeface="Pretendard" pitchFamily="34" charset="0"/>
+                <a:ea typeface="Pretendard" pitchFamily="34" charset="-122"/>
+                <a:cs typeface="Pretendard" pitchFamily="34" charset="-120"/>
+              </a:rPr>
+              <a:t>신축 건축 규모 요약</a:t>
+            </a:r>
+            <a:endParaRPr lang="en-US" sz="1050" dirty="0"/>
+          </a:p>
+        </p:txBody>
+      </p:sp>
+      <p:sp>
+        <p:nvSpPr>
+          <p:cNvPr id="10" name="Text 8"/>
+          <p:cNvSpPr/>
+          <p:nvPr/>
+        </p:nvSpPr>
+        <p:spPr>
+          <a:xfrm>
+            <a:off x="749808" y="1975104"/>
+            <a:ext cx="10728655" cy="877824"/>
+          </a:xfrm>
+          <a:prstGeom prst="rect">
+            <a:avLst/>
+          </a:prstGeom>
+          <a:noFill/>
+          <a:ln/>
+        </p:spPr>
+        <p:txBody>
+          <a:bodyPr wrap="square" lIns="0" tIns="0" rIns="0" bIns="0" rtlCol="0" anchor="t"/>
+          <a:lstStyle/>
+          <a:p>
+            <a:pPr indent="0" marL="0">
+              <a:lnSpc>
+                <a:spcPct val="120000"/>
+              </a:lnSpc>
+              <a:buNone/>
+            </a:pPr>
+            <a:r>
+              <a:rPr lang="en-US" sz="930" dirty="0">
                 <a:solidFill>
                   <a:srgbClr val="10161F"/>
                 </a:solidFill>
@@ -7426,15 +12232,15 @@
                 <a:ea typeface="Pretendard" pitchFamily="34" charset="-122"/>
                 <a:cs typeface="Pretendard" pitchFamily="34" charset="-120"/>
               </a:rPr>
-              <a:t>※ 본 리스크 체크는 공부 및 브로커 확인 기반이며, 매수 전 전문 실사팀(변호사/건축사)을 통한 정밀 실사가 필요합니다.</a:t>
-            </a:r>
-            <a:endParaRPr lang="en-US" sz="1100" dirty="0"/>
-          </a:p>
-        </p:txBody>
-      </p:sp>
-      <p:sp>
-        <p:nvSpPr>
-          <p:cNvPr id="13" name="Text 11"/>
+              <a:t>건폐율 50%, 용적률 250% 적용 시 약 680평 신축 가능합니다.</a:t>
+            </a:r>
+            <a:endParaRPr lang="en-US" sz="930" dirty="0"/>
+          </a:p>
+        </p:txBody>
+      </p:sp>
+      <p:sp>
+        <p:nvSpPr>
+          <p:cNvPr id="11" name="Text 9"/>
           <p:cNvSpPr/>
           <p:nvPr/>
         </p:nvSpPr>
@@ -7473,7 +12279,7 @@
       </p:sp>
       <p:sp>
         <p:nvSpPr>
-          <p:cNvPr id="14" name="Text 12"/>
+          <p:cNvPr id="12" name="Text 10"/>
           <p:cNvSpPr/>
           <p:nvPr/>
         </p:nvSpPr>
@@ -7504,7 +12310,7 @@
                 <a:ea typeface="Arial" pitchFamily="34" charset="-122"/>
                 <a:cs typeface="Arial" pitchFamily="34" charset="-120"/>
               </a:rPr>
-              <a:t>7</a:t>
+              <a:t>6</a:t>
             </a:r>
             <a:endParaRPr lang="en-US" sz="900" dirty="0"/>
           </a:p>
@@ -7595,7 +12401,7 @@
                 <a:ea typeface="Arial" pitchFamily="34" charset="-122"/>
                 <a:cs typeface="Arial" pitchFamily="34" charset="-120"/>
               </a:rPr>
-              <a:t>08</a:t>
+              <a:t>07</a:t>
             </a:r>
             <a:endParaRPr lang="en-US" sz="1300" dirty="0"/>
           </a:p>
@@ -7634,7 +12440,7 @@
                 <a:ea typeface="Arial" pitchFamily="34" charset="-122"/>
                 <a:cs typeface="Arial" pitchFamily="34" charset="-120"/>
               </a:rPr>
-              <a:t>Thesis</a:t>
+              <a:t>Eviction</a:t>
             </a:r>
             <a:endParaRPr lang="en-US" sz="950" dirty="0"/>
           </a:p>
@@ -7673,7 +12479,7 @@
                 <a:ea typeface="Pretendard" pitchFamily="34" charset="-122"/>
                 <a:cs typeface="Pretendard" pitchFamily="34" charset="-120"/>
               </a:rPr>
-              <a:t>투자 포인트</a:t>
+              <a:t>명도계획</a:t>
             </a:r>
             <a:endParaRPr lang="en-US" sz="2300" dirty="0"/>
           </a:p>
@@ -7681,41 +12487,284 @@
       </p:sp>
       <p:sp>
         <p:nvSpPr>
-          <p:cNvPr id="6" name="Shape 4"/>
-          <p:cNvSpPr/>
-          <p:nvPr/>
-        </p:nvSpPr>
-        <p:spPr>
-          <a:xfrm>
-            <a:off x="566928" y="4983480"/>
-            <a:ext cx="11057839" cy="804672"/>
+          <p:cNvPr id="6" name="Text 4"/>
+          <p:cNvSpPr/>
+          <p:nvPr/>
+        </p:nvSpPr>
+        <p:spPr>
+          <a:xfrm>
+            <a:off x="566928" y="1371600"/>
+            <a:ext cx="6858000" cy="237744"/>
+          </a:xfrm>
+          <a:prstGeom prst="rect">
+            <a:avLst/>
+          </a:prstGeom>
+          <a:noFill/>
+          <a:ln/>
+        </p:spPr>
+        <p:txBody>
+          <a:bodyPr wrap="square" lIns="0" tIns="0" rIns="0" bIns="0" rtlCol="0" anchor="ctr"/>
+          <a:lstStyle/>
+          <a:p>
+            <a:pPr indent="0" marL="0">
+              <a:buNone/>
+            </a:pPr>
+            <a:r>
+              <a:rPr lang="en-US" sz="1100" b="1" dirty="0">
+                <a:solidFill>
+                  <a:srgbClr val="10161F"/>
+                </a:solidFill>
+                <a:latin typeface="Pretendard" pitchFamily="34" charset="0"/>
+                <a:ea typeface="Pretendard" pitchFamily="34" charset="-122"/>
+                <a:cs typeface="Pretendard" pitchFamily="34" charset="-120"/>
+              </a:rPr>
+              <a:t>건축물 개요 및 물리 스펙</a:t>
+            </a:r>
+            <a:endParaRPr lang="en-US" sz="1100" dirty="0"/>
+          </a:p>
+        </p:txBody>
+      </p:sp>
+      <p:sp>
+        <p:nvSpPr>
+          <p:cNvPr id="7" name="Shape 5"/>
+          <p:cNvSpPr/>
+          <p:nvPr/>
+        </p:nvSpPr>
+        <p:spPr>
+          <a:xfrm>
+            <a:off x="566928" y="1645920"/>
+            <a:ext cx="6858000" cy="1828800"/>
           </a:xfrm>
           <a:prstGeom prst="roundRect">
             <a:avLst>
-              <a:gd name="adj" fmla="val 6818"/>
+              <a:gd name="adj" fmla="val 3000"/>
+            </a:avLst>
+          </a:prstGeom>
+          <a:solidFill>
+            <a:srgbClr val="BEE3F8"/>
+          </a:solidFill>
+          <a:ln/>
+        </p:spPr>
+      </p:sp>
+      <p:sp>
+        <p:nvSpPr>
+          <p:cNvPr id="8" name="Shape 6"/>
+          <p:cNvSpPr/>
+          <p:nvPr/>
+        </p:nvSpPr>
+        <p:spPr>
+          <a:xfrm>
+            <a:off x="566928" y="1700784"/>
+            <a:ext cx="36576" cy="1719072"/>
+          </a:xfrm>
+          <a:prstGeom prst="rect">
+            <a:avLst/>
+          </a:prstGeom>
+          <a:solidFill>
+            <a:srgbClr val="2B6CB0"/>
+          </a:solidFill>
+          <a:ln/>
+        </p:spPr>
+      </p:sp>
+      <p:sp>
+        <p:nvSpPr>
+          <p:cNvPr id="9" name="Text 7"/>
+          <p:cNvSpPr/>
+          <p:nvPr/>
+        </p:nvSpPr>
+        <p:spPr>
+          <a:xfrm>
+            <a:off x="749808" y="1755648"/>
+            <a:ext cx="6528816" cy="201168"/>
+          </a:xfrm>
+          <a:prstGeom prst="rect">
+            <a:avLst/>
+          </a:prstGeom>
+          <a:noFill/>
+          <a:ln/>
+        </p:spPr>
+        <p:txBody>
+          <a:bodyPr wrap="square" lIns="0" tIns="0" rIns="0" bIns="0" rtlCol="0" anchor="ctr"/>
+          <a:lstStyle/>
+          <a:p>
+            <a:pPr indent="0" marL="0">
+              <a:buNone/>
+            </a:pPr>
+            <a:r>
+              <a:rPr lang="en-US" sz="1050" b="1" dirty="0">
+                <a:solidFill>
+                  <a:srgbClr val="2B6CB0"/>
+                </a:solidFill>
+                <a:latin typeface="Pretendard" pitchFamily="34" charset="0"/>
+                <a:ea typeface="Pretendard" pitchFamily="34" charset="-122"/>
+                <a:cs typeface="Pretendard" pitchFamily="34" charset="-120"/>
+              </a:rPr>
+              <a:t>건축물 물리 스펙 요약</a:t>
+            </a:r>
+            <a:endParaRPr lang="en-US" sz="1050" dirty="0"/>
+          </a:p>
+        </p:txBody>
+      </p:sp>
+      <p:sp>
+        <p:nvSpPr>
+          <p:cNvPr id="10" name="Text 8"/>
+          <p:cNvSpPr/>
+          <p:nvPr/>
+        </p:nvSpPr>
+        <p:spPr>
+          <a:xfrm>
+            <a:off x="749808" y="1975104"/>
+            <a:ext cx="6528816" cy="1426464"/>
+          </a:xfrm>
+          <a:prstGeom prst="rect">
+            <a:avLst/>
+          </a:prstGeom>
+          <a:noFill/>
+          <a:ln/>
+        </p:spPr>
+        <p:txBody>
+          <a:bodyPr wrap="square" lIns="0" tIns="0" rIns="0" bIns="0" rtlCol="0" anchor="t"/>
+          <a:lstStyle/>
+          <a:p>
+            <a:pPr marL="342900" indent="-342900">
+              <a:lnSpc>
+                <a:spcPct val="120000"/>
+              </a:lnSpc>
+              <a:buSzPct val="100000"/>
+              <a:buChar char="•"/>
+            </a:pPr>
+            <a:r>
+              <a:rPr lang="en-US" sz="930" dirty="0">
+                <a:solidFill>
+                  <a:srgbClr val="10161F"/>
+                </a:solidFill>
+                <a:latin typeface="Pretendard" pitchFamily="34" charset="0"/>
+                <a:ea typeface="Pretendard" pitchFamily="34" charset="-122"/>
+                <a:cs typeface="Pretendard" pitchFamily="34" charset="-120"/>
+              </a:rPr>
+              <a:t>상세 건물 제원은 실사 자료를 참조하시기 바랍니다</a:t>
+            </a:r>
+            <a:endParaRPr lang="en-US" sz="930" dirty="0"/>
+          </a:p>
+          <a:p>
+            <a:pPr marL="342900" indent="-342900">
+              <a:lnSpc>
+                <a:spcPct val="120000"/>
+              </a:lnSpc>
+              <a:buSzPct val="100000"/>
+              <a:buChar char="•"/>
+            </a:pPr>
+            <a:r>
+              <a:rPr lang="en-US" sz="930" dirty="0">
+                <a:solidFill>
+                  <a:srgbClr val="10161F"/>
+                </a:solidFill>
+                <a:latin typeface="Pretendard" pitchFamily="34" charset="0"/>
+                <a:ea typeface="Pretendard" pitchFamily="34" charset="-122"/>
+                <a:cs typeface="Pretendard" pitchFamily="34" charset="-120"/>
+              </a:rPr>
+              <a:t>건물 현황 및 규모는 첨부 대장을 기준으로 합니다</a:t>
+            </a:r>
+            <a:endParaRPr lang="en-US" sz="930" dirty="0"/>
+          </a:p>
+          <a:p>
+            <a:pPr marL="342900" indent="-342900">
+              <a:lnSpc>
+                <a:spcPct val="120000"/>
+              </a:lnSpc>
+              <a:buSzPct val="100000"/>
+              <a:buChar char="•"/>
+            </a:pPr>
+            <a:r>
+              <a:rPr lang="en-US" sz="930" dirty="0">
+                <a:solidFill>
+                  <a:srgbClr val="10161F"/>
+                </a:solidFill>
+                <a:latin typeface="Pretendard" pitchFamily="34" charset="0"/>
+                <a:ea typeface="Pretendard" pitchFamily="34" charset="-122"/>
+                <a:cs typeface="Pretendard" pitchFamily="34" charset="-120"/>
+              </a:rPr>
+              <a:t>건물 상태 및 설비 현황은 실사 보고서를 참조하십시오</a:t>
+            </a:r>
+            <a:endParaRPr lang="en-US" sz="930" dirty="0"/>
+          </a:p>
+        </p:txBody>
+      </p:sp>
+      <p:sp>
+        <p:nvSpPr>
+          <p:cNvPr id="11" name="Shape 9"/>
+          <p:cNvSpPr/>
+          <p:nvPr/>
+        </p:nvSpPr>
+        <p:spPr>
+          <a:xfrm>
+            <a:off x="7604608" y="1371600"/>
+            <a:ext cx="0" cy="4754880"/>
+          </a:xfrm>
+          <a:prstGeom prst="line">
+            <a:avLst/>
+          </a:prstGeom>
+          <a:noFill/>
+          <a:ln w="8890">
+            <a:solidFill>
+              <a:srgbClr val="B98A2E"/>
+            </a:solidFill>
+            <a:prstDash val="solid"/>
+          </a:ln>
+        </p:spPr>
+      </p:sp>
+      <p:sp>
+        <p:nvSpPr>
+          <p:cNvPr id="12" name="Shape 10"/>
+          <p:cNvSpPr/>
+          <p:nvPr/>
+        </p:nvSpPr>
+        <p:spPr>
+          <a:xfrm>
+            <a:off x="7784287" y="1645920"/>
+            <a:ext cx="3840480" cy="1645920"/>
+          </a:xfrm>
+          <a:prstGeom prst="roundRect">
+            <a:avLst>
+              <a:gd name="adj" fmla="val 3333"/>
             </a:avLst>
           </a:prstGeom>
           <a:solidFill>
             <a:srgbClr val="F3EBDA"/>
           </a:solidFill>
-          <a:ln w="10160">
-            <a:solidFill>
-              <a:srgbClr val="D9B668"/>
-            </a:solidFill>
-            <a:prstDash val="solid"/>
-          </a:ln>
-        </p:spPr>
-      </p:sp>
-      <p:sp>
-        <p:nvSpPr>
-          <p:cNvPr id="7" name="Text 5"/>
-          <p:cNvSpPr/>
-          <p:nvPr/>
-        </p:nvSpPr>
-        <p:spPr>
-          <a:xfrm>
-            <a:off x="749808" y="5093208"/>
-            <a:ext cx="1691640" cy="256032"/>
+          <a:ln/>
+        </p:spPr>
+      </p:sp>
+      <p:sp>
+        <p:nvSpPr>
+          <p:cNvPr id="13" name="Shape 11"/>
+          <p:cNvSpPr/>
+          <p:nvPr/>
+        </p:nvSpPr>
+        <p:spPr>
+          <a:xfrm>
+            <a:off x="7784287" y="1700784"/>
+            <a:ext cx="36576" cy="1536192"/>
+          </a:xfrm>
+          <a:prstGeom prst="rect">
+            <a:avLst/>
+          </a:prstGeom>
+          <a:solidFill>
+            <a:srgbClr val="977024"/>
+          </a:solidFill>
+          <a:ln/>
+        </p:spPr>
+      </p:sp>
+      <p:sp>
+        <p:nvSpPr>
+          <p:cNvPr id="14" name="Text 12"/>
+          <p:cNvSpPr/>
+          <p:nvPr/>
+        </p:nvSpPr>
+        <p:spPr>
+          <a:xfrm>
+            <a:off x="7967167" y="1755648"/>
+            <a:ext cx="3511296" cy="201168"/>
           </a:xfrm>
           <a:prstGeom prst="rect">
             <a:avLst/>
@@ -7730,50 +12779,39 @@
             <a:pPr indent="0" marL="0">
               <a:buNone/>
             </a:pPr>
-            <a:r>
-              <a:rPr lang="en-US" sz="1050" b="1" dirty="0">
-                <a:solidFill>
-                  <a:srgbClr val="977024"/>
-                </a:solidFill>
-                <a:latin typeface="Pretendard" pitchFamily="34" charset="0"/>
-                <a:ea typeface="Pretendard" pitchFamily="34" charset="-122"/>
-                <a:cs typeface="Pretendard" pitchFamily="34" charset="-120"/>
-              </a:rPr>
-              <a:t>종합 가치 제안</a:t>
-            </a:r>
             <a:endParaRPr lang="en-US" sz="1050" dirty="0"/>
           </a:p>
         </p:txBody>
       </p:sp>
       <p:sp>
         <p:nvSpPr>
-          <p:cNvPr id="8" name="Text 6"/>
-          <p:cNvSpPr/>
-          <p:nvPr/>
-        </p:nvSpPr>
-        <p:spPr>
-          <a:xfrm>
-            <a:off x="2487168" y="5056632"/>
-            <a:ext cx="8954719" cy="658368"/>
-          </a:xfrm>
-          <a:prstGeom prst="rect">
-            <a:avLst/>
-          </a:prstGeom>
-          <a:noFill/>
-          <a:ln/>
-        </p:spPr>
-        <p:txBody>
-          <a:bodyPr wrap="square" lIns="0" tIns="0" rIns="0" bIns="0" rtlCol="0" anchor="ctr"/>
+          <p:cNvPr id="15" name="Text 13"/>
+          <p:cNvSpPr/>
+          <p:nvPr/>
+        </p:nvSpPr>
+        <p:spPr>
+          <a:xfrm>
+            <a:off x="7967167" y="1975104"/>
+            <a:ext cx="3511296" cy="1243584"/>
+          </a:xfrm>
+          <a:prstGeom prst="rect">
+            <a:avLst/>
+          </a:prstGeom>
+          <a:noFill/>
+          <a:ln/>
+        </p:spPr>
+        <p:txBody>
+          <a:bodyPr wrap="square" lIns="0" tIns="0" rIns="0" bIns="0" rtlCol="0" anchor="t"/>
           <a:lstStyle/>
           <a:p>
             <a:pPr indent="0" marL="0">
               <a:lnSpc>
-                <a:spcPct val="125000"/>
+                <a:spcPct val="120000"/>
               </a:lnSpc>
               <a:buNone/>
             </a:pPr>
             <a:r>
-              <a:rPr lang="en-US" sz="1100" dirty="0">
+              <a:rPr lang="en-US" sz="930" dirty="0">
                 <a:solidFill>
                   <a:srgbClr val="10161F"/>
                 </a:solidFill>
@@ -7781,15 +12819,15 @@
                 <a:ea typeface="Pretendard" pitchFamily="34" charset="-122"/>
                 <a:cs typeface="Pretendard" pitchFamily="34" charset="-120"/>
               </a:rPr>
-              <a:t>테헤란로 프라임 입지의 개발 가치와 용적률 잔여 활용 가능성이 핵심입니다.</a:t>
-            </a:r>
-            <a:endParaRPr lang="en-US" sz="1100" dirty="0"/>
-          </a:p>
-        </p:txBody>
-      </p:sp>
-      <p:sp>
-        <p:nvSpPr>
-          <p:cNvPr id="9" name="Text 7"/>
+              <a:t>건폐율 50%, 용적률 250% 적용 시 약 680평 신축 가능합니다.</a:t>
+            </a:r>
+            <a:endParaRPr lang="en-US" sz="930" dirty="0"/>
+          </a:p>
+        </p:txBody>
+      </p:sp>
+      <p:sp>
+        <p:nvSpPr>
+          <p:cNvPr id="16" name="Text 14"/>
           <p:cNvSpPr/>
           <p:nvPr/>
         </p:nvSpPr>
@@ -7828,7 +12866,7 @@
       </p:sp>
       <p:sp>
         <p:nvSpPr>
-          <p:cNvPr id="10" name="Text 8"/>
+          <p:cNvPr id="17" name="Text 15"/>
           <p:cNvSpPr/>
           <p:nvPr/>
         </p:nvSpPr>
@@ -7859,7 +12897,7 @@
                 <a:ea typeface="Arial" pitchFamily="34" charset="-122"/>
                 <a:cs typeface="Arial" pitchFamily="34" charset="-120"/>
               </a:rPr>
-              <a:t>8</a:t>
+              <a:t>7</a:t>
             </a:r>
             <a:endParaRPr lang="en-US" sz="900" dirty="0"/>
           </a:p>
@@ -7950,7 +12988,7 @@
                 <a:ea typeface="Arial" pitchFamily="34" charset="-122"/>
                 <a:cs typeface="Arial" pitchFamily="34" charset="-120"/>
               </a:rPr>
-              <a:t>09</a:t>
+              <a:t>08</a:t>
             </a:r>
             <a:endParaRPr lang="en-US" sz="1300" dirty="0"/>
           </a:p>
@@ -7989,7 +13027,7 @@
                 <a:ea typeface="Arial" pitchFamily="34" charset="-122"/>
                 <a:cs typeface="Arial" pitchFamily="34" charset="-120"/>
               </a:rPr>
-              <a:t>Process</a:t>
+              <a:t>Cost</a:t>
             </a:r>
             <a:endParaRPr lang="en-US" sz="950" dirty="0"/>
           </a:p>
@@ -8028,7 +13066,7 @@
                 <a:ea typeface="Pretendard" pitchFamily="34" charset="-122"/>
                 <a:cs typeface="Pretendard" pitchFamily="34" charset="-120"/>
               </a:rPr>
-              <a:t>다음 단계</a:t>
+              <a:t>투입비용</a:t>
             </a:r>
             <a:endParaRPr lang="en-US" sz="2300" dirty="0"/>
           </a:p>
@@ -8036,258 +13074,77 @@
       </p:sp>
       <p:sp>
         <p:nvSpPr>
-          <p:cNvPr id="6" name="Shape 4"/>
-          <p:cNvSpPr/>
-          <p:nvPr/>
-        </p:nvSpPr>
-        <p:spPr>
-          <a:xfrm>
-            <a:off x="566928" y="1572768"/>
-            <a:ext cx="11057839" cy="3200400"/>
-          </a:xfrm>
-          <a:prstGeom prst="roundRect">
-            <a:avLst>
-              <a:gd name="adj" fmla="val 1714"/>
-            </a:avLst>
-          </a:prstGeom>
-          <a:solidFill>
-            <a:srgbClr val="F7FAFC"/>
-          </a:solidFill>
-          <a:ln w="6350">
-            <a:solidFill>
-              <a:srgbClr val="CBD5E0"/>
-            </a:solidFill>
-            <a:prstDash val="solid"/>
-          </a:ln>
-        </p:spPr>
-      </p:sp>
-      <p:sp>
-        <p:nvSpPr>
-          <p:cNvPr id="7" name="Shape 5"/>
-          <p:cNvSpPr/>
-          <p:nvPr/>
-        </p:nvSpPr>
-        <p:spPr>
-          <a:xfrm>
-            <a:off x="786384" y="1792224"/>
-            <a:ext cx="438912" cy="438912"/>
-          </a:xfrm>
-          <a:prstGeom prst="ellipse">
-            <a:avLst/>
-          </a:prstGeom>
-          <a:solidFill>
-            <a:srgbClr val="B98A2E"/>
-          </a:solidFill>
-          <a:ln/>
-        </p:spPr>
-      </p:sp>
-      <p:sp>
-        <p:nvSpPr>
-          <p:cNvPr id="8" name="Text 6"/>
-          <p:cNvSpPr/>
-          <p:nvPr/>
-        </p:nvSpPr>
-        <p:spPr>
-          <a:xfrm>
-            <a:off x="786384" y="1792224"/>
-            <a:ext cx="438912" cy="438912"/>
-          </a:xfrm>
-          <a:prstGeom prst="rect">
-            <a:avLst/>
-          </a:prstGeom>
-          <a:noFill/>
-          <a:ln/>
-        </p:spPr>
-        <p:txBody>
-          <a:bodyPr wrap="square" lIns="0" tIns="0" rIns="0" bIns="0" rtlCol="0" anchor="ctr"/>
-          <a:lstStyle/>
-          <a:p>
-            <a:pPr algn="ctr" indent="0" marL="0">
-              <a:buNone/>
-            </a:pPr>
-            <a:r>
-              <a:rPr lang="en-US" sz="1400" b="1" dirty="0">
-                <a:solidFill>
-                  <a:srgbClr val="FFFFFF"/>
+          <p:cNvPr id="6" name="Text 4"/>
+          <p:cNvSpPr/>
+          <p:nvPr/>
+        </p:nvSpPr>
+        <p:spPr>
+          <a:xfrm>
+            <a:off x="566928" y="6382512"/>
+            <a:ext cx="7315200" cy="219456"/>
+          </a:xfrm>
+          <a:prstGeom prst="rect">
+            <a:avLst/>
+          </a:prstGeom>
+          <a:noFill/>
+          <a:ln/>
+        </p:spPr>
+        <p:txBody>
+          <a:bodyPr wrap="square" lIns="0" tIns="0" rIns="0" bIns="0" rtlCol="0" anchor="ctr"/>
+          <a:lstStyle/>
+          <a:p>
+            <a:pPr indent="0" marL="0">
+              <a:buNone/>
+            </a:pPr>
+            <a:r>
+              <a:rPr lang="en-US" sz="800" dirty="0">
+                <a:solidFill>
+                  <a:srgbClr val="718096"/>
+                </a:solidFill>
+                <a:latin typeface="Pretendard" pitchFamily="34" charset="0"/>
+                <a:ea typeface="Pretendard" pitchFamily="34" charset="-122"/>
+                <a:cs typeface="Pretendard" pitchFamily="34" charset="-120"/>
+              </a:rPr>
+              <a:t>크리딜   |   </a:t>
+            </a:r>
+            <a:endParaRPr lang="en-US" sz="800" dirty="0"/>
+          </a:p>
+        </p:txBody>
+      </p:sp>
+      <p:sp>
+        <p:nvSpPr>
+          <p:cNvPr id="7" name="Text 5"/>
+          <p:cNvSpPr/>
+          <p:nvPr/>
+        </p:nvSpPr>
+        <p:spPr>
+          <a:xfrm>
+            <a:off x="10710367" y="6382512"/>
+            <a:ext cx="914400" cy="219456"/>
+          </a:xfrm>
+          <a:prstGeom prst="rect">
+            <a:avLst/>
+          </a:prstGeom>
+          <a:noFill/>
+          <a:ln/>
+        </p:spPr>
+        <p:txBody>
+          <a:bodyPr wrap="square" lIns="0" tIns="0" rIns="0" bIns="0" rtlCol="0" anchor="ctr"/>
+          <a:lstStyle/>
+          <a:p>
+            <a:pPr algn="r" indent="0" marL="0">
+              <a:buNone/>
+            </a:pPr>
+            <a:r>
+              <a:rPr lang="en-US" sz="900" b="1" dirty="0">
+                <a:solidFill>
+                  <a:srgbClr val="B98A2E"/>
                 </a:solidFill>
                 <a:latin typeface="Arial" pitchFamily="34" charset="0"/>
                 <a:ea typeface="Arial" pitchFamily="34" charset="-122"/>
                 <a:cs typeface="Arial" pitchFamily="34" charset="-120"/>
               </a:rPr>
-              <a:t>01</a:t>
-            </a:r>
-            <a:endParaRPr lang="en-US" sz="1400" dirty="0"/>
-          </a:p>
-        </p:txBody>
-      </p:sp>
-      <p:sp>
-        <p:nvSpPr>
-          <p:cNvPr id="9" name="Text 7"/>
-          <p:cNvSpPr/>
-          <p:nvPr/>
-        </p:nvSpPr>
-        <p:spPr>
-          <a:xfrm>
-            <a:off x="786384" y="2304288"/>
-            <a:ext cx="10618927" cy="365760"/>
-          </a:xfrm>
-          <a:prstGeom prst="rect">
-            <a:avLst/>
-          </a:prstGeom>
-          <a:noFill/>
-          <a:ln/>
-        </p:spPr>
-        <p:txBody>
-          <a:bodyPr wrap="square" rtlCol="0" anchor="ctr"/>
-          <a:lstStyle/>
-          <a:p>
-            <a:pPr indent="0" marL="0">
-              <a:buNone/>
-            </a:pPr>
-            <a:r>
-              <a:rPr lang="en-US" sz="1600" b="1" dirty="0">
-                <a:solidFill>
-                  <a:srgbClr val="10161F"/>
-                </a:solidFill>
-                <a:latin typeface="Pretendard" pitchFamily="34" charset="0"/>
-                <a:ea typeface="Pretendard" pitchFamily="34" charset="-122"/>
-                <a:cs typeface="Pretendard" pitchFamily="34" charset="-120"/>
-              </a:rPr>
-              <a:t>1단계</a:t>
-            </a:r>
-            <a:endParaRPr lang="en-US" sz="1600" dirty="0"/>
-          </a:p>
-        </p:txBody>
-      </p:sp>
-      <p:sp>
-        <p:nvSpPr>
-          <p:cNvPr id="10" name="Text 8"/>
-          <p:cNvSpPr/>
-          <p:nvPr/>
-        </p:nvSpPr>
-        <p:spPr>
-          <a:xfrm>
-            <a:off x="786384" y="2761488"/>
-            <a:ext cx="10618927" cy="1828800"/>
-          </a:xfrm>
-          <a:prstGeom prst="rect">
-            <a:avLst/>
-          </a:prstGeom>
-          <a:noFill/>
-          <a:ln/>
-        </p:spPr>
-        <p:txBody>
-          <a:bodyPr wrap="square" rtlCol="0" anchor="t"/>
-          <a:lstStyle/>
-          <a:p>
-            <a:pPr indent="0" marL="0">
-              <a:buNone/>
-            </a:pPr>
-            <a:r>
-              <a:rPr lang="en-US" sz="1100" dirty="0">
-                <a:solidFill>
-                  <a:srgbClr val="10161F"/>
-                </a:solidFill>
-                <a:latin typeface="Pretendard" pitchFamily="34" charset="0"/>
-                <a:ea typeface="Pretendard" pitchFamily="34" charset="-122"/>
-                <a:cs typeface="Pretendard" pitchFamily="34" charset="-120"/>
-              </a:rPr>
-              <a:t>건축 설계 발주 및 인허가 일정 협의를 권장합니다.</a:t>
-            </a:r>
-            <a:endParaRPr lang="en-US" sz="1100" dirty="0"/>
-          </a:p>
-          <a:p>
-            <a:pPr indent="0" marL="0">
-              <a:buNone/>
-            </a:pPr>
-            <a:r>
-              <a:rPr lang="en-US" sz="1100" dirty="0">
-                <a:solidFill>
-                  <a:srgbClr val="10161F"/>
-                </a:solidFill>
-                <a:latin typeface="Pretendard" pitchFamily="34" charset="0"/>
-                <a:ea typeface="Pretendard" pitchFamily="34" charset="-122"/>
-                <a:cs typeface="Pretendard" pitchFamily="34" charset="-120"/>
-              </a:rPr>
-              <a:t>건축 설계 발주 및 인허가 일정 협의를 권장합니다.</a:t>
-            </a:r>
-            <a:endParaRPr lang="en-US" sz="1100" dirty="0"/>
-          </a:p>
-        </p:txBody>
-      </p:sp>
-      <p:sp>
-        <p:nvSpPr>
-          <p:cNvPr id="11" name="Text 9"/>
-          <p:cNvSpPr/>
-          <p:nvPr/>
-        </p:nvSpPr>
-        <p:spPr>
-          <a:xfrm>
-            <a:off x="566928" y="6382512"/>
-            <a:ext cx="7315200" cy="219456"/>
-          </a:xfrm>
-          <a:prstGeom prst="rect">
-            <a:avLst/>
-          </a:prstGeom>
-          <a:noFill/>
-          <a:ln/>
-        </p:spPr>
-        <p:txBody>
-          <a:bodyPr wrap="square" lIns="0" tIns="0" rIns="0" bIns="0" rtlCol="0" anchor="ctr"/>
-          <a:lstStyle/>
-          <a:p>
-            <a:pPr indent="0" marL="0">
-              <a:buNone/>
-            </a:pPr>
-            <a:r>
-              <a:rPr lang="en-US" sz="800" dirty="0">
-                <a:solidFill>
-                  <a:srgbClr val="718096"/>
-                </a:solidFill>
-                <a:latin typeface="Pretendard" pitchFamily="34" charset="0"/>
-                <a:ea typeface="Pretendard" pitchFamily="34" charset="-122"/>
-                <a:cs typeface="Pretendard" pitchFamily="34" charset="-120"/>
-              </a:rPr>
-              <a:t>크리딜   |   </a:t>
-            </a:r>
-            <a:endParaRPr lang="en-US" sz="800" dirty="0"/>
-          </a:p>
-        </p:txBody>
-      </p:sp>
-      <p:sp>
-        <p:nvSpPr>
-          <p:cNvPr id="12" name="Text 10"/>
-          <p:cNvSpPr/>
-          <p:nvPr/>
-        </p:nvSpPr>
-        <p:spPr>
-          <a:xfrm>
-            <a:off x="10710367" y="6382512"/>
-            <a:ext cx="914400" cy="219456"/>
-          </a:xfrm>
-          <a:prstGeom prst="rect">
-            <a:avLst/>
-          </a:prstGeom>
-          <a:noFill/>
-          <a:ln/>
-        </p:spPr>
-        <p:txBody>
-          <a:bodyPr wrap="square" lIns="0" tIns="0" rIns="0" bIns="0" rtlCol="0" anchor="ctr"/>
-          <a:lstStyle/>
-          <a:p>
-            <a:pPr algn="r" indent="0" marL="0">
-              <a:buNone/>
-            </a:pPr>
-            <a:r>
-              <a:rPr lang="en-US" sz="900" b="1" dirty="0">
-                <a:solidFill>
-                  <a:srgbClr val="B98A2E"/>
-                </a:solidFill>
-                <a:latin typeface="Arial" pitchFamily="34" charset="0"/>
-                <a:ea typeface="Arial" pitchFamily="34" charset="-122"/>
-                <a:cs typeface="Arial" pitchFamily="34" charset="-120"/>
-              </a:rPr>
-              <a:t>9</a:t>
+              <a:t>8</a:t>
             </a:r>
             <a:endParaRPr lang="en-US" sz="900" dirty="0"/>
           </a:p>

--- a/docs/test/stress/e2e-outputs/development_basic_pr04.pptx
+++ b/docs/test/stress/e2e-outputs/development_basic_pr04.pptx
@@ -2381,7 +2381,7 @@
               <a:buNone/>
             </a:pPr>
             <a:r>
-              <a:rPr lang="en-US" sz="4000" b="1" dirty="0">
+              <a:rPr lang="en-US" sz="3000" b="1" dirty="0">
                 <a:solidFill>
                   <a:srgbClr val="FFFFFF"/>
                 </a:solidFill>
@@ -2391,7 +2391,7 @@
               </a:rPr>
               <a:t>development 포스처 테스트 문서</a:t>
             </a:r>
-            <a:endParaRPr lang="en-US" sz="4000" dirty="0"/>
+            <a:endParaRPr lang="en-US" sz="3000" dirty="0"/>
           </a:p>
         </p:txBody>
       </p:sp>
